--- a/M&A/カンテサンス/カンテサンス_株式譲渡価格50億円_妥当性検証.pptx
+++ b/M&A/カンテサンス/カンテサンス_株式譲渡価格50億円_妥当性検証.pptx
@@ -22,9 +22,10 @@
     <p:sldId id="270" r:id="rId16"/>
     <p:sldId id="271" r:id="rId17"/>
     <p:sldId id="272" r:id="rId18"/>
+    <p:sldId id="273" r:id="rId19"/>
   </p:sldIdLst>
   <p:notesMasterIdLst>
-    <p:notesMasterId r:id="rId19"/>
+    <p:notesMasterId r:id="rId20"/>
   </p:notesMasterIdLst>
   <p:sldSz cx="12192000" cy="6858000"/>
   <p:notesSz cx="6858000" cy="12192000"/>
@@ -2125,6 +2126,94 @@
 </p:notes>
 </file>
 
+<file path=ppt/notesSlides/notesSlide18.xml><?xml version="1.0" encoding="utf-8"?>
+<p:notes xmlns:a="http://schemas.openxmlformats.org/drawingml/2006/main" xmlns:r="http://schemas.openxmlformats.org/officeDocument/2006/relationships" xmlns:p="http://schemas.openxmlformats.org/presentationml/2006/main">
+  <p:cSld>
+    <p:spTree>
+      <p:nvGrpSpPr>
+        <p:cNvPr id="1" name=""/>
+        <p:cNvGrpSpPr/>
+        <p:nvPr/>
+      </p:nvGrpSpPr>
+      <p:grpSpPr>
+        <a:xfrm>
+          <a:off x="0" y="0"/>
+          <a:ext cx="0" cy="0"/>
+          <a:chOff x="0" y="0"/>
+          <a:chExt cx="0" cy="0"/>
+        </a:xfrm>
+      </p:grpSpPr>
+      <p:sp>
+        <p:nvSpPr>
+          <p:cNvPr id="2" name="Slide Image Placeholder 1"/>
+          <p:cNvSpPr>
+            <a:spLocks noGrp="1" noRot="1" noChangeAspect="1"/>
+          </p:cNvSpPr>
+          <p:nvPr>
+            <p:ph type="sldImg"/>
+          </p:nvPr>
+        </p:nvSpPr>
+        <p:spPr/>
+      </p:sp>
+      <p:sp>
+        <p:nvSpPr>
+          <p:cNvPr id="3" name="Notes Placeholder 2"/>
+          <p:cNvSpPr>
+            <a:spLocks noGrp="1"/>
+          </p:cNvSpPr>
+          <p:nvPr>
+            <p:ph type="body" idx="1"/>
+          </p:nvPr>
+        </p:nvSpPr>
+        <p:spPr/>
+        <p:txBody>
+          <a:bodyPr/>
+          <a:lstStyle/>
+          <a:p>
+            <a:r>
+              <a:rPr lang="en-US" dirty="0"/>
+              <a:t/>
+            </a:r>
+            <a:endParaRPr lang="en-US" dirty="0"/>
+          </a:p>
+        </p:txBody>
+      </p:sp>
+      <p:sp>
+        <p:nvSpPr>
+          <p:cNvPr id="4" name="Slide Number Placeholder 3"/>
+          <p:cNvSpPr>
+            <a:spLocks noGrp="1"/>
+          </p:cNvSpPr>
+          <p:nvPr>
+            <p:ph type="sldNum" sz="quarter" idx="10"/>
+          </p:nvPr>
+        </p:nvSpPr>
+        <p:spPr/>
+        <p:txBody>
+          <a:bodyPr/>
+          <a:lstStyle/>
+          <a:p>
+            <a:fld id="{F7021451-1387-4CA6-816F-3879F97B5CBC}" type="slidenum">
+              <a:rPr lang="en-US"/>
+              <a:t>18</a:t>
+            </a:fld>
+            <a:endParaRPr lang="en-US"/>
+          </a:p>
+        </p:txBody>
+      </p:sp>
+    </p:spTree>
+    <p:extLst>
+      <p:ext uri="{BB962C8B-B14F-4D97-AF65-F5344CB8AC3E}">
+        <p14:creationId xmlns:p14="http://schemas.microsoft.com/office/powerpoint/2010/main" val="1024086991"/>
+      </p:ext>
+    </p:extLst>
+  </p:cSld>
+  <p:clrMapOvr>
+    <a:masterClrMapping/>
+  </p:clrMapOvr>
+</p:notes>
+</file>
+
 <file path=ppt/notesSlides/notesSlide2.xml><?xml version="1.0" encoding="utf-8"?>
 <p:notes xmlns:a="http://schemas.openxmlformats.org/drawingml/2006/main" xmlns:r="http://schemas.openxmlformats.org/officeDocument/2006/relationships" xmlns:p="http://schemas.openxmlformats.org/presentationml/2006/main">
   <p:cSld>
@@ -4012,7 +4101,7 @@
                 <a:ea typeface="Cambria" pitchFamily="34" charset="-122"/>
                 <a:cs typeface="Cambria" pitchFamily="34" charset="-120"/>
               </a:rPr>
-              <a:t>営業利益5.09年分。実務慣行レンジの上限に位置する</a:t>
+              <a:t>営業利益5.09年分。実務慣行レンジ（3〜6年）の範囲内</a:t>
             </a:r>
             <a:endParaRPr lang="en-US" sz="2900" dirty="0"/>
           </a:p>
@@ -4054,7 +4143,7 @@
                 <a:ea typeface="Calibri" pitchFamily="34" charset="-122"/>
                 <a:cs typeface="Calibri" pitchFamily="34" charset="-120"/>
               </a:rPr>
-              <a:t>中小企業M&amp;Aで最も広く使われる簡便法。この手法では50億円は「やや高い」という結論になる。</a:t>
+              <a:t>中小企業M&amp;Aで最も広く使われる簡便法。実務慣行の3〜6年のレンジの中で、50億円は営業利益5.09年分にあたる。</a:t>
             </a:r>
             <a:endParaRPr lang="en-US" sz="1250" dirty="0"/>
           </a:p>
@@ -5108,7 +5197,7 @@
                           <a:ea typeface="Calibri" pitchFamily="34" charset="-122"/>
                           <a:cs typeface="Calibri" pitchFamily="34" charset="-120"/>
                         </a:rPr>
-                        <a:t>実務レンジの上限＝提示価格とほぼ一致</a:t>
+                        <a:t>実務レンジの上限側＝提示価格とほぼ一致</a:t>
                       </a:r>
                       <a:endParaRPr lang="en-US" sz="1000" dirty="0">
                         <a:latin typeface="Calibri" charset="0"/>
@@ -5373,7 +5462,7 @@
                           <a:ea typeface="Calibri" pitchFamily="34" charset="-122"/>
                           <a:cs typeface="Calibri" pitchFamily="34" charset="-120"/>
                         </a:rPr>
-                        <a:t>レンジ外</a:t>
+                        <a:t>実務レンジの上限</a:t>
                       </a:r>
                       <a:endParaRPr lang="en-US" sz="1050" dirty="0">
                         <a:latin typeface="Calibri" charset="0"/>
@@ -5928,7 +6017,7 @@
                 <a:ea typeface="Calibri" pitchFamily="34" charset="-122"/>
                 <a:cs typeface="Calibri" pitchFamily="34" charset="-120"/>
               </a:rPr>
-              <a:t>結論：年買法単独では50億円は「実務レンジの上限」。この手法だけを根拠に高い／安いは判断せず、検証③のDCFで事業価値の妥当性を確認する。</a:t>
+              <a:t>結論：年買法単独では50億円は「実務レンジの上限側」。この手法だけを根拠に高い／安いは判断せず、検証③のDCFで事業価値の妥当性を確認する。</a:t>
             </a:r>
             <a:endParaRPr lang="en-US" sz="1100" dirty="0"/>
           </a:p>
@@ -14607,7 +14696,7 @@
                 <a:ea typeface="Calibri" pitchFamily="34" charset="-122"/>
                 <a:cs typeface="Calibri" pitchFamily="34" charset="-120"/>
               </a:rPr>
-              <a:t>CHECK B 対象会社の債務許容量</a:t>
+              <a:t>CHECK B ①　20億円LBOの返済可能性</a:t>
             </a:r>
             <a:endParaRPr lang="en-US" sz="1100" dirty="0"/>
           </a:p>
@@ -14646,7 +14735,7 @@
                 <a:ea typeface="Cambria" pitchFamily="34" charset="-122"/>
                 <a:cs typeface="Cambria" pitchFamily="34" charset="-120"/>
               </a:rPr>
-              <a:t>対象会社の自力返済で支えられる有利子負債は15〜17億円</a:t>
+              <a:t>LBOローン20億円は、返済プロファイルの設計で成立する</a:t>
             </a:r>
             <a:endParaRPr lang="en-US" sz="2900" dirty="0"/>
           </a:p>
@@ -14688,9 +14777,480 @@
                 <a:ea typeface="Calibri" pitchFamily="34" charset="-122"/>
                 <a:cs typeface="Calibri" pitchFamily="34" charset="-120"/>
               </a:rPr>
-              <a:t>取得主体を特定せず、対象会社のキャッシュフローのみで返済可能な有利子負債の上限を検証した（7年・金利3%・元金均等、初年度ベース）。</a:t>
+              <a:t>20億円を7年で均等償却する前提では初年度DSCRが1.01となる。これは借入金額の問題ではなく返済設計の問題であり、タームローンAとBに分ければ初年度からDSCR 1.35を確保できる。</a:t>
             </a:r>
             <a:endParaRPr lang="en-US" sz="1250" dirty="0"/>
+          </a:p>
+        </p:txBody>
+      </p:sp>
+      <p:sp>
+        <p:nvSpPr>
+          <p:cNvPr id="5" name="Shape 3"/>
+          <p:cNvSpPr/>
+          <p:nvPr/>
+        </p:nvSpPr>
+        <p:spPr>
+          <a:xfrm>
+            <a:off x="566928" y="1783080"/>
+            <a:ext cx="3520440" cy="1024128"/>
+          </a:xfrm>
+          <a:prstGeom prst="roundRect">
+            <a:avLst>
+              <a:gd name="adj" fmla="val 4464"/>
+            </a:avLst>
+          </a:prstGeom>
+          <a:solidFill>
+            <a:srgbClr val="FFFFFF"/>
+          </a:solidFill>
+          <a:ln w="9525">
+            <a:solidFill>
+              <a:srgbClr val="E4DADD"/>
+            </a:solidFill>
+            <a:prstDash val="solid"/>
+          </a:ln>
+        </p:spPr>
+      </p:sp>
+      <p:sp>
+        <p:nvSpPr>
+          <p:cNvPr id="6" name="Text 4"/>
+          <p:cNvSpPr txBox="1"/>
+          <p:nvPr/>
+        </p:nvSpPr>
+        <p:spPr>
+          <a:xfrm>
+            <a:off x="786384" y="1892808"/>
+            <a:ext cx="3108960" cy="219456"/>
+          </a:xfrm>
+          <a:prstGeom prst="rect">
+            <a:avLst/>
+          </a:prstGeom>
+          <a:noFill/>
+          <a:ln/>
+        </p:spPr>
+        <p:txBody>
+          <a:bodyPr wrap="square" lIns="0" tIns="0" rIns="0" bIns="0" rtlCol="0" anchor="ctr"/>
+          <a:lstStyle/>
+          <a:p>
+            <a:pPr indent="0" marL="0">
+              <a:buNone/>
+            </a:pPr>
+            <a:r>
+              <a:rPr lang="en-US" sz="950" b="1" dirty="0">
+                <a:solidFill>
+                  <a:srgbClr val="B58B2A"/>
+                </a:solidFill>
+                <a:latin typeface="Calibri" pitchFamily="34" charset="0"/>
+                <a:ea typeface="Calibri" pitchFamily="34" charset="-122"/>
+                <a:cs typeface="Calibri" pitchFamily="34" charset="-120"/>
+              </a:rPr>
+              <a:t>初年度DSCR</a:t>
+            </a:r>
+            <a:endParaRPr lang="en-US" sz="950" dirty="0"/>
+          </a:p>
+        </p:txBody>
+      </p:sp>
+      <p:sp>
+        <p:nvSpPr>
+          <p:cNvPr id="7" name="Text 5"/>
+          <p:cNvSpPr txBox="1"/>
+          <p:nvPr/>
+        </p:nvSpPr>
+        <p:spPr>
+          <a:xfrm>
+            <a:off x="786384" y="2121408"/>
+            <a:ext cx="3108960" cy="402336"/>
+          </a:xfrm>
+          <a:prstGeom prst="rect">
+            <a:avLst/>
+          </a:prstGeom>
+          <a:noFill/>
+          <a:ln/>
+        </p:spPr>
+        <p:txBody>
+          <a:bodyPr wrap="square" lIns="0" tIns="0" rIns="0" bIns="0" rtlCol="0" anchor="ctr"/>
+          <a:lstStyle/>
+          <a:p>
+            <a:pPr indent="0" marL="0">
+              <a:buNone/>
+            </a:pPr>
+            <a:r>
+              <a:rPr lang="en-US" sz="2400" b="1" dirty="0">
+                <a:solidFill>
+                  <a:srgbClr val="6D2E46"/>
+                </a:solidFill>
+                <a:latin typeface="Cambria" pitchFamily="34" charset="0"/>
+                <a:ea typeface="Cambria" pitchFamily="34" charset="-122"/>
+                <a:cs typeface="Cambria" pitchFamily="34" charset="-120"/>
+              </a:rPr>
+              <a:t>1.35</a:t>
+            </a:r>
+            <a:endParaRPr lang="en-US" sz="2400" dirty="0"/>
+          </a:p>
+        </p:txBody>
+      </p:sp>
+      <p:sp>
+        <p:nvSpPr>
+          <p:cNvPr id="8" name="Text 6"/>
+          <p:cNvSpPr txBox="1"/>
+          <p:nvPr/>
+        </p:nvSpPr>
+        <p:spPr>
+          <a:xfrm>
+            <a:off x="786384" y="2523744"/>
+            <a:ext cx="3108960" cy="237744"/>
+          </a:xfrm>
+          <a:prstGeom prst="rect">
+            <a:avLst/>
+          </a:prstGeom>
+          <a:noFill/>
+          <a:ln/>
+        </p:spPr>
+        <p:txBody>
+          <a:bodyPr wrap="square" lIns="0" tIns="0" rIns="0" bIns="0" rtlCol="0" anchor="ctr"/>
+          <a:lstStyle/>
+          <a:p>
+            <a:pPr indent="0" marL="0">
+              <a:buNone/>
+            </a:pPr>
+            <a:r>
+              <a:rPr lang="en-US" sz="900" dirty="0">
+                <a:solidFill>
+                  <a:srgbClr val="6E6368"/>
+                </a:solidFill>
+                <a:latin typeface="Calibri" pitchFamily="34" charset="0"/>
+                <a:ea typeface="Calibri" pitchFamily="34" charset="-122"/>
+                <a:cs typeface="Calibri" pitchFamily="34" charset="-120"/>
+              </a:rPr>
+              <a:t>タームローンA 14億＋B 6億／7年・金利3%</a:t>
+            </a:r>
+            <a:endParaRPr lang="en-US" sz="900" dirty="0"/>
+          </a:p>
+        </p:txBody>
+      </p:sp>
+      <p:sp>
+        <p:nvSpPr>
+          <p:cNvPr id="9" name="Shape 7"/>
+          <p:cNvSpPr/>
+          <p:nvPr/>
+        </p:nvSpPr>
+        <p:spPr>
+          <a:xfrm>
+            <a:off x="4297680" y="1783080"/>
+            <a:ext cx="3520440" cy="1024128"/>
+          </a:xfrm>
+          <a:prstGeom prst="roundRect">
+            <a:avLst>
+              <a:gd name="adj" fmla="val 4464"/>
+            </a:avLst>
+          </a:prstGeom>
+          <a:solidFill>
+            <a:srgbClr val="FFFFFF"/>
+          </a:solidFill>
+          <a:ln w="9525">
+            <a:solidFill>
+              <a:srgbClr val="E4DADD"/>
+            </a:solidFill>
+            <a:prstDash val="solid"/>
+          </a:ln>
+        </p:spPr>
+      </p:sp>
+      <p:sp>
+        <p:nvSpPr>
+          <p:cNvPr id="10" name="Text 8"/>
+          <p:cNvSpPr txBox="1"/>
+          <p:nvPr/>
+        </p:nvSpPr>
+        <p:spPr>
+          <a:xfrm>
+            <a:off x="4517136" y="1892808"/>
+            <a:ext cx="3108960" cy="219456"/>
+          </a:xfrm>
+          <a:prstGeom prst="rect">
+            <a:avLst/>
+          </a:prstGeom>
+          <a:noFill/>
+          <a:ln/>
+        </p:spPr>
+        <p:txBody>
+          <a:bodyPr wrap="square" lIns="0" tIns="0" rIns="0" bIns="0" rtlCol="0" anchor="ctr"/>
+          <a:lstStyle/>
+          <a:p>
+            <a:pPr indent="0" marL="0">
+              <a:buNone/>
+            </a:pPr>
+            <a:r>
+              <a:rPr lang="en-US" sz="950" b="1" dirty="0">
+                <a:solidFill>
+                  <a:srgbClr val="B58B2A"/>
+                </a:solidFill>
+                <a:latin typeface="Calibri" pitchFamily="34" charset="0"/>
+                <a:ea typeface="Calibri" pitchFamily="34" charset="-122"/>
+                <a:cs typeface="Calibri" pitchFamily="34" charset="-120"/>
+              </a:rPr>
+              <a:t>7年間の累積余剰CF</a:t>
+            </a:r>
+            <a:endParaRPr lang="en-US" sz="950" dirty="0"/>
+          </a:p>
+        </p:txBody>
+      </p:sp>
+      <p:sp>
+        <p:nvSpPr>
+          <p:cNvPr id="11" name="Text 9"/>
+          <p:cNvSpPr txBox="1"/>
+          <p:nvPr/>
+        </p:nvSpPr>
+        <p:spPr>
+          <a:xfrm>
+            <a:off x="4517136" y="2121408"/>
+            <a:ext cx="3108960" cy="402336"/>
+          </a:xfrm>
+          <a:prstGeom prst="rect">
+            <a:avLst/>
+          </a:prstGeom>
+          <a:noFill/>
+          <a:ln/>
+        </p:spPr>
+        <p:txBody>
+          <a:bodyPr wrap="square" lIns="0" tIns="0" rIns="0" bIns="0" rtlCol="0" anchor="ctr"/>
+          <a:lstStyle/>
+          <a:p>
+            <a:pPr indent="0" marL="0">
+              <a:buNone/>
+            </a:pPr>
+            <a:r>
+              <a:rPr lang="en-US" sz="2400" b="1" dirty="0">
+                <a:solidFill>
+                  <a:srgbClr val="6D2E46"/>
+                </a:solidFill>
+                <a:latin typeface="Cambria" pitchFamily="34" charset="0"/>
+                <a:ea typeface="Cambria" pitchFamily="34" charset="-122"/>
+                <a:cs typeface="Cambria" pitchFamily="34" charset="-120"/>
+              </a:rPr>
+              <a:t>7.56億円</a:t>
+            </a:r>
+            <a:endParaRPr lang="en-US" sz="2400" dirty="0"/>
+          </a:p>
+        </p:txBody>
+      </p:sp>
+      <p:sp>
+        <p:nvSpPr>
+          <p:cNvPr id="12" name="Text 10"/>
+          <p:cNvSpPr txBox="1"/>
+          <p:nvPr/>
+        </p:nvSpPr>
+        <p:spPr>
+          <a:xfrm>
+            <a:off x="4517136" y="2523744"/>
+            <a:ext cx="3108960" cy="237744"/>
+          </a:xfrm>
+          <a:prstGeom prst="rect">
+            <a:avLst/>
+          </a:prstGeom>
+          <a:noFill/>
+          <a:ln/>
+        </p:spPr>
+        <p:txBody>
+          <a:bodyPr wrap="square" lIns="0" tIns="0" rIns="0" bIns="0" rtlCol="0" anchor="ctr"/>
+          <a:lstStyle/>
+          <a:p>
+            <a:pPr indent="0" marL="0">
+              <a:buNone/>
+            </a:pPr>
+            <a:r>
+              <a:rPr lang="en-US" sz="900" dirty="0">
+                <a:solidFill>
+                  <a:srgbClr val="6E6368"/>
+                </a:solidFill>
+                <a:latin typeface="Calibri" pitchFamily="34" charset="0"/>
+                <a:ea typeface="Calibri" pitchFamily="34" charset="-122"/>
+                <a:cs typeface="Calibri" pitchFamily="34" charset="-120"/>
+              </a:rPr>
+              <a:t>期限一括分6.00億円を上回る</a:t>
+            </a:r>
+            <a:endParaRPr lang="en-US" sz="900" dirty="0"/>
+          </a:p>
+        </p:txBody>
+      </p:sp>
+      <p:sp>
+        <p:nvSpPr>
+          <p:cNvPr id="13" name="Shape 11"/>
+          <p:cNvSpPr/>
+          <p:nvPr/>
+        </p:nvSpPr>
+        <p:spPr>
+          <a:xfrm>
+            <a:off x="8028432" y="1783080"/>
+            <a:ext cx="3520440" cy="1024128"/>
+          </a:xfrm>
+          <a:prstGeom prst="roundRect">
+            <a:avLst>
+              <a:gd name="adj" fmla="val 4464"/>
+            </a:avLst>
+          </a:prstGeom>
+          <a:solidFill>
+            <a:srgbClr val="FFFFFF"/>
+          </a:solidFill>
+          <a:ln w="9525">
+            <a:solidFill>
+              <a:srgbClr val="E4DADD"/>
+            </a:solidFill>
+            <a:prstDash val="solid"/>
+          </a:ln>
+        </p:spPr>
+      </p:sp>
+      <p:sp>
+        <p:nvSpPr>
+          <p:cNvPr id="14" name="Text 12"/>
+          <p:cNvSpPr txBox="1"/>
+          <p:nvPr/>
+        </p:nvSpPr>
+        <p:spPr>
+          <a:xfrm>
+            <a:off x="8247888" y="1892808"/>
+            <a:ext cx="3108960" cy="219456"/>
+          </a:xfrm>
+          <a:prstGeom prst="rect">
+            <a:avLst/>
+          </a:prstGeom>
+          <a:noFill/>
+          <a:ln/>
+        </p:spPr>
+        <p:txBody>
+          <a:bodyPr wrap="square" lIns="0" tIns="0" rIns="0" bIns="0" rtlCol="0" anchor="ctr"/>
+          <a:lstStyle/>
+          <a:p>
+            <a:pPr indent="0" marL="0">
+              <a:buNone/>
+            </a:pPr>
+            <a:r>
+              <a:rPr lang="en-US" sz="950" b="1" dirty="0">
+                <a:solidFill>
+                  <a:srgbClr val="B58B2A"/>
+                </a:solidFill>
+                <a:latin typeface="Calibri" pitchFamily="34" charset="0"/>
+                <a:ea typeface="Calibri" pitchFamily="34" charset="-122"/>
+                <a:cs typeface="Calibri" pitchFamily="34" charset="-120"/>
+              </a:rPr>
+              <a:t>ネット Debt/EBITDA</a:t>
+            </a:r>
+            <a:endParaRPr lang="en-US" sz="950" dirty="0"/>
+          </a:p>
+        </p:txBody>
+      </p:sp>
+      <p:sp>
+        <p:nvSpPr>
+          <p:cNvPr id="15" name="Text 13"/>
+          <p:cNvSpPr txBox="1"/>
+          <p:nvPr/>
+        </p:nvSpPr>
+        <p:spPr>
+          <a:xfrm>
+            <a:off x="8247888" y="2121408"/>
+            <a:ext cx="3108960" cy="402336"/>
+          </a:xfrm>
+          <a:prstGeom prst="rect">
+            <a:avLst/>
+          </a:prstGeom>
+          <a:noFill/>
+          <a:ln/>
+        </p:spPr>
+        <p:txBody>
+          <a:bodyPr wrap="square" lIns="0" tIns="0" rIns="0" bIns="0" rtlCol="0" anchor="ctr"/>
+          <a:lstStyle/>
+          <a:p>
+            <a:pPr indent="0" marL="0">
+              <a:buNone/>
+            </a:pPr>
+            <a:r>
+              <a:rPr lang="en-US" sz="2400" b="1" dirty="0">
+                <a:solidFill>
+                  <a:srgbClr val="6D2E46"/>
+                </a:solidFill>
+                <a:latin typeface="Cambria" pitchFamily="34" charset="0"/>
+                <a:ea typeface="Cambria" pitchFamily="34" charset="-122"/>
+                <a:cs typeface="Cambria" pitchFamily="34" charset="-120"/>
+              </a:rPr>
+              <a:t>2.6倍</a:t>
+            </a:r>
+            <a:endParaRPr lang="en-US" sz="2400" dirty="0"/>
+          </a:p>
+        </p:txBody>
+      </p:sp>
+      <p:sp>
+        <p:nvSpPr>
+          <p:cNvPr id="16" name="Text 14"/>
+          <p:cNvSpPr txBox="1"/>
+          <p:nvPr/>
+        </p:nvSpPr>
+        <p:spPr>
+          <a:xfrm>
+            <a:off x="8247888" y="2523744"/>
+            <a:ext cx="3108960" cy="237744"/>
+          </a:xfrm>
+          <a:prstGeom prst="rect">
+            <a:avLst/>
+          </a:prstGeom>
+          <a:noFill/>
+          <a:ln/>
+        </p:spPr>
+        <p:txBody>
+          <a:bodyPr wrap="square" lIns="0" tIns="0" rIns="0" bIns="0" rtlCol="0" anchor="ctr"/>
+          <a:lstStyle/>
+          <a:p>
+            <a:pPr indent="0" marL="0">
+              <a:buNone/>
+            </a:pPr>
+            <a:r>
+              <a:rPr lang="en-US" sz="900" dirty="0">
+                <a:solidFill>
+                  <a:srgbClr val="6E6368"/>
+                </a:solidFill>
+                <a:latin typeface="Calibri" pitchFamily="34" charset="0"/>
+                <a:ea typeface="Calibri" pitchFamily="34" charset="-122"/>
+                <a:cs typeface="Calibri" pitchFamily="34" charset="-120"/>
+              </a:rPr>
+              <a:t>グロス3.8倍。対象会社は無借金・現預金17.43億円</a:t>
+            </a:r>
+            <a:endParaRPr lang="en-US" sz="900" dirty="0"/>
+          </a:p>
+        </p:txBody>
+      </p:sp>
+      <p:sp>
+        <p:nvSpPr>
+          <p:cNvPr id="17" name="Text 15"/>
+          <p:cNvSpPr txBox="1"/>
+          <p:nvPr/>
+        </p:nvSpPr>
+        <p:spPr>
+          <a:xfrm>
+            <a:off x="566928" y="2944368"/>
+            <a:ext cx="5669280" cy="256032"/>
+          </a:xfrm>
+          <a:prstGeom prst="rect">
+            <a:avLst/>
+          </a:prstGeom>
+          <a:noFill/>
+          <a:ln/>
+        </p:spPr>
+        <p:txBody>
+          <a:bodyPr wrap="square" lIns="0" tIns="0" rIns="0" bIns="0" rtlCol="0" anchor="ctr"/>
+          <a:lstStyle/>
+          <a:p>
+            <a:pPr indent="0" marL="0">
+              <a:buNone/>
+            </a:pPr>
+            <a:r>
+              <a:rPr lang="en-US" sz="1300" b="1" dirty="0">
+                <a:solidFill>
+                  <a:srgbClr val="1F1A1C"/>
+                </a:solidFill>
+                <a:latin typeface="Cambria" pitchFamily="34" charset="0"/>
+                <a:ea typeface="Cambria" pitchFamily="34" charset="-122"/>
+                <a:cs typeface="Cambria" pitchFamily="34" charset="-120"/>
+              </a:rPr>
+              <a:t>返済方式別の比較（借入20.00億円・7年・金利3%）</a:t>
+            </a:r>
+            <a:endParaRPr lang="en-US" sz="1300" dirty="0"/>
           </a:p>
         </p:txBody>
       </p:sp>
@@ -14709,22 +15269,20 @@
           </p:nvPr>
         </p:nvGraphicFramePr>
         <p:xfrm>
-          <a:off x="566928" y="1975104"/>
-          <a:ext cx="11055096" cy="914400"/>
+          <a:off x="566928" y="3255264"/>
+          <a:ext cx="5669280" cy="914400"/>
         </p:xfrm>
         <a:graphic>
           <a:graphicData uri="http://schemas.openxmlformats.org/drawingml/2006/table">
             <a:tbl>
               <a:tblPr/>
               <a:tblGrid>
-                <a:gridCol w="1645920"/>
-                <a:gridCol w="1737360"/>
-                <a:gridCol w="2377440"/>
-                <a:gridCol w="2377440"/>
-                <a:gridCol w="1463040"/>
-                <a:gridCol w="1453896"/>
+                <a:gridCol w="2651760"/>
+                <a:gridCol w="914400"/>
+                <a:gridCol w="1051560"/>
+                <a:gridCol w="1051560"/>
               </a:tblGrid>
-              <a:tr h="384048">
+              <a:tr h="365760">
                 <a:tc>
                   <a:txBody>
                     <a:bodyPr/>
@@ -14742,7 +15300,7 @@
                           <a:ea typeface="Calibri" pitchFamily="34" charset="-122"/>
                           <a:cs typeface="Calibri" pitchFamily="34" charset="-120"/>
                         </a:rPr>
-                        <a:t>有利子負債</a:t>
+                        <a:t>返済方式</a:t>
                       </a:r>
                       <a:endParaRPr lang="en-US" sz="1050" dirty="0">
                         <a:latin typeface="Calibri" charset="0"/>
@@ -14810,7 +15368,7 @@
                           <a:ea typeface="Calibri" pitchFamily="34" charset="-122"/>
                           <a:cs typeface="Calibri" pitchFamily="34" charset="-120"/>
                         </a:rPr>
-                        <a:t>初年度返済額</a:t>
+                        <a:t>初年度返済</a:t>
                       </a:r>
                       <a:endParaRPr lang="en-US" sz="1050" dirty="0">
                         <a:latin typeface="Calibri" charset="0"/>
@@ -14878,7 +15436,7 @@
                           <a:ea typeface="Calibri" pitchFamily="34" charset="-122"/>
                           <a:cs typeface="Calibri" pitchFamily="34" charset="-120"/>
                         </a:rPr>
-                        <a:t>DSCR（平常時 FCF3.50億）</a:t>
+                        <a:t>初年度DSCR</a:t>
                       </a:r>
                       <a:endParaRPr lang="en-US" sz="1050" dirty="0">
                         <a:latin typeface="Calibri" charset="0"/>
@@ -14946,7 +15504,1319 @@
                           <a:ea typeface="Calibri" pitchFamily="34" charset="-122"/>
                           <a:cs typeface="Calibri" pitchFamily="34" charset="-120"/>
                         </a:rPr>
-                        <a:t>DSCR（ストレス時 FCF2.76億）</a:t>
+                        <a:t>7年後残高</a:t>
+                      </a:r>
+                      <a:endParaRPr lang="en-US" sz="1050" dirty="0">
+                        <a:latin typeface="Calibri" charset="0"/>
+                        <a:ea typeface="Calibri" charset="0"/>
+                        <a:cs typeface="Calibri" charset="0"/>
+                      </a:endParaRPr>
+                    </a:p>
+                  </a:txBody>
+                  <a:tcPr marL="91440" marR="91440" marT="45720" marB="45720" anchor="ctr">
+                    <a:lnL w="6350" cap="flat" cmpd="sng" algn="ctr">
+                      <a:solidFill>
+                        <a:srgbClr val="E4DADD"/>
+                      </a:solidFill>
+                      <a:prstDash val="solid"/>
+                      <a:round/>
+                      <a:headEnd type="none" w="med" len="med"/>
+                      <a:tailEnd type="none" w="med" len="med"/>
+                    </a:lnL>
+                    <a:lnR w="6350" cap="flat" cmpd="sng" algn="ctr">
+                      <a:solidFill>
+                        <a:srgbClr val="E4DADD"/>
+                      </a:solidFill>
+                      <a:prstDash val="solid"/>
+                      <a:round/>
+                      <a:headEnd type="none" w="med" len="med"/>
+                      <a:tailEnd type="none" w="med" len="med"/>
+                    </a:lnR>
+                    <a:lnT w="6350" cap="flat" cmpd="sng" algn="ctr">
+                      <a:solidFill>
+                        <a:srgbClr val="E4DADD"/>
+                      </a:solidFill>
+                      <a:prstDash val="solid"/>
+                      <a:round/>
+                      <a:headEnd type="none" w="med" len="med"/>
+                      <a:tailEnd type="none" w="med" len="med"/>
+                    </a:lnT>
+                    <a:lnB w="6350" cap="flat" cmpd="sng" algn="ctr">
+                      <a:solidFill>
+                        <a:srgbClr val="E4DADD"/>
+                      </a:solidFill>
+                      <a:prstDash val="solid"/>
+                      <a:round/>
+                      <a:headEnd type="none" w="med" len="med"/>
+                      <a:tailEnd type="none" w="med" len="med"/>
+                    </a:lnB>
+                    <a:solidFill>
+                      <a:srgbClr val="6D2E46"/>
+                    </a:solidFill>
+                  </a:tcPr>
+                </a:tc>
+              </a:tr>
+              <a:tr h="365760">
+                <a:tc>
+                  <a:txBody>
+                    <a:bodyPr/>
+                    <a:lstStyle/>
+                    <a:p>
+                      <a:pPr indent="0" marL="0">
+                        <a:buNone/>
+                      </a:pPr>
+                      <a:r>
+                        <a:rPr lang="en-US" sz="900" dirty="0">
+                          <a:solidFill>
+                            <a:srgbClr val="1F1A1C"/>
+                          </a:solidFill>
+                          <a:latin typeface="Calibri" pitchFamily="34" charset="0"/>
+                          <a:ea typeface="Calibri" pitchFamily="34" charset="-122"/>
+                          <a:cs typeface="Calibri" pitchFamily="34" charset="-120"/>
+                        </a:rPr>
+                        <a:t>① 元金均等（7年で全額償却）</a:t>
+                      </a:r>
+                      <a:endParaRPr lang="en-US" sz="900" dirty="0">
+                        <a:latin typeface="Calibri" charset="0"/>
+                        <a:ea typeface="Calibri" charset="0"/>
+                        <a:cs typeface="Calibri" charset="0"/>
+                      </a:endParaRPr>
+                    </a:p>
+                  </a:txBody>
+                  <a:tcPr marL="91440" marR="91440" marT="45720" marB="45720" anchor="ctr">
+                    <a:lnL w="6350" cap="flat" cmpd="sng" algn="ctr">
+                      <a:solidFill>
+                        <a:srgbClr val="E4DADD"/>
+                      </a:solidFill>
+                      <a:prstDash val="solid"/>
+                      <a:round/>
+                      <a:headEnd type="none" w="med" len="med"/>
+                      <a:tailEnd type="none" w="med" len="med"/>
+                    </a:lnL>
+                    <a:lnR w="6350" cap="flat" cmpd="sng" algn="ctr">
+                      <a:solidFill>
+                        <a:srgbClr val="E4DADD"/>
+                      </a:solidFill>
+                      <a:prstDash val="solid"/>
+                      <a:round/>
+                      <a:headEnd type="none" w="med" len="med"/>
+                      <a:tailEnd type="none" w="med" len="med"/>
+                    </a:lnR>
+                    <a:lnT w="6350" cap="flat" cmpd="sng" algn="ctr">
+                      <a:solidFill>
+                        <a:srgbClr val="E4DADD"/>
+                      </a:solidFill>
+                      <a:prstDash val="solid"/>
+                      <a:round/>
+                      <a:headEnd type="none" w="med" len="med"/>
+                      <a:tailEnd type="none" w="med" len="med"/>
+                    </a:lnT>
+                    <a:lnB w="6350" cap="flat" cmpd="sng" algn="ctr">
+                      <a:solidFill>
+                        <a:srgbClr val="E4DADD"/>
+                      </a:solidFill>
+                      <a:prstDash val="solid"/>
+                      <a:round/>
+                      <a:headEnd type="none" w="med" len="med"/>
+                      <a:tailEnd type="none" w="med" len="med"/>
+                    </a:lnB>
+                  </a:tcPr>
+                </a:tc>
+                <a:tc>
+                  <a:txBody>
+                    <a:bodyPr/>
+                    <a:lstStyle/>
+                    <a:p>
+                      <a:pPr algn="r" indent="0" marL="0">
+                        <a:buNone/>
+                      </a:pPr>
+                      <a:r>
+                        <a:rPr lang="en-US" sz="900" dirty="0">
+                          <a:solidFill>
+                            <a:srgbClr val="1F1A1C"/>
+                          </a:solidFill>
+                          <a:latin typeface="Calibri" pitchFamily="34" charset="0"/>
+                          <a:ea typeface="Calibri" pitchFamily="34" charset="-122"/>
+                          <a:cs typeface="Calibri" pitchFamily="34" charset="-120"/>
+                        </a:rPr>
+                        <a:t>3.46億</a:t>
+                      </a:r>
+                      <a:endParaRPr lang="en-US" sz="900" dirty="0">
+                        <a:latin typeface="Calibri" charset="0"/>
+                        <a:ea typeface="Calibri" charset="0"/>
+                        <a:cs typeface="Calibri" charset="0"/>
+                      </a:endParaRPr>
+                    </a:p>
+                  </a:txBody>
+                  <a:tcPr marL="91440" marR="91440" marT="45720" marB="45720" anchor="ctr">
+                    <a:lnL w="6350" cap="flat" cmpd="sng" algn="ctr">
+                      <a:solidFill>
+                        <a:srgbClr val="E4DADD"/>
+                      </a:solidFill>
+                      <a:prstDash val="solid"/>
+                      <a:round/>
+                      <a:headEnd type="none" w="med" len="med"/>
+                      <a:tailEnd type="none" w="med" len="med"/>
+                    </a:lnL>
+                    <a:lnR w="6350" cap="flat" cmpd="sng" algn="ctr">
+                      <a:solidFill>
+                        <a:srgbClr val="E4DADD"/>
+                      </a:solidFill>
+                      <a:prstDash val="solid"/>
+                      <a:round/>
+                      <a:headEnd type="none" w="med" len="med"/>
+                      <a:tailEnd type="none" w="med" len="med"/>
+                    </a:lnR>
+                    <a:lnT w="6350" cap="flat" cmpd="sng" algn="ctr">
+                      <a:solidFill>
+                        <a:srgbClr val="E4DADD"/>
+                      </a:solidFill>
+                      <a:prstDash val="solid"/>
+                      <a:round/>
+                      <a:headEnd type="none" w="med" len="med"/>
+                      <a:tailEnd type="none" w="med" len="med"/>
+                    </a:lnT>
+                    <a:lnB w="6350" cap="flat" cmpd="sng" algn="ctr">
+                      <a:solidFill>
+                        <a:srgbClr val="E4DADD"/>
+                      </a:solidFill>
+                      <a:prstDash val="solid"/>
+                      <a:round/>
+                      <a:headEnd type="none" w="med" len="med"/>
+                      <a:tailEnd type="none" w="med" len="med"/>
+                    </a:lnB>
+                  </a:tcPr>
+                </a:tc>
+                <a:tc>
+                  <a:txBody>
+                    <a:bodyPr/>
+                    <a:lstStyle/>
+                    <a:p>
+                      <a:pPr algn="r" indent="0" marL="0">
+                        <a:buNone/>
+                      </a:pPr>
+                      <a:r>
+                        <a:rPr lang="en-US" sz="900" b="1" dirty="0">
+                          <a:solidFill>
+                            <a:srgbClr val="9B2C2C"/>
+                          </a:solidFill>
+                          <a:latin typeface="Calibri" pitchFamily="34" charset="0"/>
+                          <a:ea typeface="Calibri" pitchFamily="34" charset="-122"/>
+                          <a:cs typeface="Calibri" pitchFamily="34" charset="-120"/>
+                        </a:rPr>
+                        <a:t>1.01</a:t>
+                      </a:r>
+                      <a:endParaRPr lang="en-US" sz="900" dirty="0">
+                        <a:latin typeface="Calibri" charset="0"/>
+                        <a:ea typeface="Calibri" charset="0"/>
+                        <a:cs typeface="Calibri" charset="0"/>
+                      </a:endParaRPr>
+                    </a:p>
+                  </a:txBody>
+                  <a:tcPr marL="91440" marR="91440" marT="45720" marB="45720" anchor="ctr">
+                    <a:lnL w="6350" cap="flat" cmpd="sng" algn="ctr">
+                      <a:solidFill>
+                        <a:srgbClr val="E4DADD"/>
+                      </a:solidFill>
+                      <a:prstDash val="solid"/>
+                      <a:round/>
+                      <a:headEnd type="none" w="med" len="med"/>
+                      <a:tailEnd type="none" w="med" len="med"/>
+                    </a:lnL>
+                    <a:lnR w="6350" cap="flat" cmpd="sng" algn="ctr">
+                      <a:solidFill>
+                        <a:srgbClr val="E4DADD"/>
+                      </a:solidFill>
+                      <a:prstDash val="solid"/>
+                      <a:round/>
+                      <a:headEnd type="none" w="med" len="med"/>
+                      <a:tailEnd type="none" w="med" len="med"/>
+                    </a:lnR>
+                    <a:lnT w="6350" cap="flat" cmpd="sng" algn="ctr">
+                      <a:solidFill>
+                        <a:srgbClr val="E4DADD"/>
+                      </a:solidFill>
+                      <a:prstDash val="solid"/>
+                      <a:round/>
+                      <a:headEnd type="none" w="med" len="med"/>
+                      <a:tailEnd type="none" w="med" len="med"/>
+                    </a:lnT>
+                    <a:lnB w="6350" cap="flat" cmpd="sng" algn="ctr">
+                      <a:solidFill>
+                        <a:srgbClr val="E4DADD"/>
+                      </a:solidFill>
+                      <a:prstDash val="solid"/>
+                      <a:round/>
+                      <a:headEnd type="none" w="med" len="med"/>
+                      <a:tailEnd type="none" w="med" len="med"/>
+                    </a:lnB>
+                  </a:tcPr>
+                </a:tc>
+                <a:tc>
+                  <a:txBody>
+                    <a:bodyPr/>
+                    <a:lstStyle/>
+                    <a:p>
+                      <a:pPr algn="r" indent="0" marL="0">
+                        <a:buNone/>
+                      </a:pPr>
+                      <a:r>
+                        <a:rPr lang="en-US" sz="900" dirty="0">
+                          <a:solidFill>
+                            <a:srgbClr val="1F1A1C"/>
+                          </a:solidFill>
+                          <a:latin typeface="Calibri" pitchFamily="34" charset="0"/>
+                          <a:ea typeface="Calibri" pitchFamily="34" charset="-122"/>
+                          <a:cs typeface="Calibri" pitchFamily="34" charset="-120"/>
+                        </a:rPr>
+                        <a:t>0</a:t>
+                      </a:r>
+                      <a:endParaRPr lang="en-US" sz="900" dirty="0">
+                        <a:latin typeface="Calibri" charset="0"/>
+                        <a:ea typeface="Calibri" charset="0"/>
+                        <a:cs typeface="Calibri" charset="0"/>
+                      </a:endParaRPr>
+                    </a:p>
+                  </a:txBody>
+                  <a:tcPr marL="91440" marR="91440" marT="45720" marB="45720" anchor="ctr">
+                    <a:lnL w="6350" cap="flat" cmpd="sng" algn="ctr">
+                      <a:solidFill>
+                        <a:srgbClr val="E4DADD"/>
+                      </a:solidFill>
+                      <a:prstDash val="solid"/>
+                      <a:round/>
+                      <a:headEnd type="none" w="med" len="med"/>
+                      <a:tailEnd type="none" w="med" len="med"/>
+                    </a:lnL>
+                    <a:lnR w="6350" cap="flat" cmpd="sng" algn="ctr">
+                      <a:solidFill>
+                        <a:srgbClr val="E4DADD"/>
+                      </a:solidFill>
+                      <a:prstDash val="solid"/>
+                      <a:round/>
+                      <a:headEnd type="none" w="med" len="med"/>
+                      <a:tailEnd type="none" w="med" len="med"/>
+                    </a:lnR>
+                    <a:lnT w="6350" cap="flat" cmpd="sng" algn="ctr">
+                      <a:solidFill>
+                        <a:srgbClr val="E4DADD"/>
+                      </a:solidFill>
+                      <a:prstDash val="solid"/>
+                      <a:round/>
+                      <a:headEnd type="none" w="med" len="med"/>
+                      <a:tailEnd type="none" w="med" len="med"/>
+                    </a:lnT>
+                    <a:lnB w="6350" cap="flat" cmpd="sng" algn="ctr">
+                      <a:solidFill>
+                        <a:srgbClr val="E4DADD"/>
+                      </a:solidFill>
+                      <a:prstDash val="solid"/>
+                      <a:round/>
+                      <a:headEnd type="none" w="med" len="med"/>
+                      <a:tailEnd type="none" w="med" len="med"/>
+                    </a:lnB>
+                  </a:tcPr>
+                </a:tc>
+              </a:tr>
+              <a:tr h="365760">
+                <a:tc>
+                  <a:txBody>
+                    <a:bodyPr/>
+                    <a:lstStyle/>
+                    <a:p>
+                      <a:pPr indent="0" marL="0">
+                        <a:buNone/>
+                      </a:pPr>
+                      <a:r>
+                        <a:rPr lang="en-US" sz="900" dirty="0">
+                          <a:solidFill>
+                            <a:srgbClr val="1F1A1C"/>
+                          </a:solidFill>
+                          <a:latin typeface="Calibri" pitchFamily="34" charset="0"/>
+                          <a:ea typeface="Calibri" pitchFamily="34" charset="-122"/>
+                          <a:cs typeface="Calibri" pitchFamily="34" charset="-120"/>
+                        </a:rPr>
+                        <a:t>② 元利均等（7年で全額償却）</a:t>
+                      </a:r>
+                      <a:endParaRPr lang="en-US" sz="900" dirty="0">
+                        <a:latin typeface="Calibri" charset="0"/>
+                        <a:ea typeface="Calibri" charset="0"/>
+                        <a:cs typeface="Calibri" charset="0"/>
+                      </a:endParaRPr>
+                    </a:p>
+                  </a:txBody>
+                  <a:tcPr marL="91440" marR="91440" marT="45720" marB="45720" anchor="ctr">
+                    <a:lnL w="6350" cap="flat" cmpd="sng" algn="ctr">
+                      <a:solidFill>
+                        <a:srgbClr val="E4DADD"/>
+                      </a:solidFill>
+                      <a:prstDash val="solid"/>
+                      <a:round/>
+                      <a:headEnd type="none" w="med" len="med"/>
+                      <a:tailEnd type="none" w="med" len="med"/>
+                    </a:lnL>
+                    <a:lnR w="6350" cap="flat" cmpd="sng" algn="ctr">
+                      <a:solidFill>
+                        <a:srgbClr val="E4DADD"/>
+                      </a:solidFill>
+                      <a:prstDash val="solid"/>
+                      <a:round/>
+                      <a:headEnd type="none" w="med" len="med"/>
+                      <a:tailEnd type="none" w="med" len="med"/>
+                    </a:lnR>
+                    <a:lnT w="6350" cap="flat" cmpd="sng" algn="ctr">
+                      <a:solidFill>
+                        <a:srgbClr val="E4DADD"/>
+                      </a:solidFill>
+                      <a:prstDash val="solid"/>
+                      <a:round/>
+                      <a:headEnd type="none" w="med" len="med"/>
+                      <a:tailEnd type="none" w="med" len="med"/>
+                    </a:lnT>
+                    <a:lnB w="6350" cap="flat" cmpd="sng" algn="ctr">
+                      <a:solidFill>
+                        <a:srgbClr val="E4DADD"/>
+                      </a:solidFill>
+                      <a:prstDash val="solid"/>
+                      <a:round/>
+                      <a:headEnd type="none" w="med" len="med"/>
+                      <a:tailEnd type="none" w="med" len="med"/>
+                    </a:lnB>
+                  </a:tcPr>
+                </a:tc>
+                <a:tc>
+                  <a:txBody>
+                    <a:bodyPr/>
+                    <a:lstStyle/>
+                    <a:p>
+                      <a:pPr algn="r" indent="0" marL="0">
+                        <a:buNone/>
+                      </a:pPr>
+                      <a:r>
+                        <a:rPr lang="en-US" sz="900" dirty="0">
+                          <a:solidFill>
+                            <a:srgbClr val="1F1A1C"/>
+                          </a:solidFill>
+                          <a:latin typeface="Calibri" pitchFamily="34" charset="0"/>
+                          <a:ea typeface="Calibri" pitchFamily="34" charset="-122"/>
+                          <a:cs typeface="Calibri" pitchFamily="34" charset="-120"/>
+                        </a:rPr>
+                        <a:t>3.21億</a:t>
+                      </a:r>
+                      <a:endParaRPr lang="en-US" sz="900" dirty="0">
+                        <a:latin typeface="Calibri" charset="0"/>
+                        <a:ea typeface="Calibri" charset="0"/>
+                        <a:cs typeface="Calibri" charset="0"/>
+                      </a:endParaRPr>
+                    </a:p>
+                  </a:txBody>
+                  <a:tcPr marL="91440" marR="91440" marT="45720" marB="45720" anchor="ctr">
+                    <a:lnL w="6350" cap="flat" cmpd="sng" algn="ctr">
+                      <a:solidFill>
+                        <a:srgbClr val="E4DADD"/>
+                      </a:solidFill>
+                      <a:prstDash val="solid"/>
+                      <a:round/>
+                      <a:headEnd type="none" w="med" len="med"/>
+                      <a:tailEnd type="none" w="med" len="med"/>
+                    </a:lnL>
+                    <a:lnR w="6350" cap="flat" cmpd="sng" algn="ctr">
+                      <a:solidFill>
+                        <a:srgbClr val="E4DADD"/>
+                      </a:solidFill>
+                      <a:prstDash val="solid"/>
+                      <a:round/>
+                      <a:headEnd type="none" w="med" len="med"/>
+                      <a:tailEnd type="none" w="med" len="med"/>
+                    </a:lnR>
+                    <a:lnT w="6350" cap="flat" cmpd="sng" algn="ctr">
+                      <a:solidFill>
+                        <a:srgbClr val="E4DADD"/>
+                      </a:solidFill>
+                      <a:prstDash val="solid"/>
+                      <a:round/>
+                      <a:headEnd type="none" w="med" len="med"/>
+                      <a:tailEnd type="none" w="med" len="med"/>
+                    </a:lnT>
+                    <a:lnB w="6350" cap="flat" cmpd="sng" algn="ctr">
+                      <a:solidFill>
+                        <a:srgbClr val="E4DADD"/>
+                      </a:solidFill>
+                      <a:prstDash val="solid"/>
+                      <a:round/>
+                      <a:headEnd type="none" w="med" len="med"/>
+                      <a:tailEnd type="none" w="med" len="med"/>
+                    </a:lnB>
+                  </a:tcPr>
+                </a:tc>
+                <a:tc>
+                  <a:txBody>
+                    <a:bodyPr/>
+                    <a:lstStyle/>
+                    <a:p>
+                      <a:pPr algn="r" indent="0" marL="0">
+                        <a:buNone/>
+                      </a:pPr>
+                      <a:r>
+                        <a:rPr lang="en-US" sz="900" dirty="0">
+                          <a:solidFill>
+                            <a:srgbClr val="A8741A"/>
+                          </a:solidFill>
+                          <a:latin typeface="Calibri" pitchFamily="34" charset="0"/>
+                          <a:ea typeface="Calibri" pitchFamily="34" charset="-122"/>
+                          <a:cs typeface="Calibri" pitchFamily="34" charset="-120"/>
+                        </a:rPr>
+                        <a:t>1.09</a:t>
+                      </a:r>
+                      <a:endParaRPr lang="en-US" sz="900" dirty="0">
+                        <a:latin typeface="Calibri" charset="0"/>
+                        <a:ea typeface="Calibri" charset="0"/>
+                        <a:cs typeface="Calibri" charset="0"/>
+                      </a:endParaRPr>
+                    </a:p>
+                  </a:txBody>
+                  <a:tcPr marL="91440" marR="91440" marT="45720" marB="45720" anchor="ctr">
+                    <a:lnL w="6350" cap="flat" cmpd="sng" algn="ctr">
+                      <a:solidFill>
+                        <a:srgbClr val="E4DADD"/>
+                      </a:solidFill>
+                      <a:prstDash val="solid"/>
+                      <a:round/>
+                      <a:headEnd type="none" w="med" len="med"/>
+                      <a:tailEnd type="none" w="med" len="med"/>
+                    </a:lnL>
+                    <a:lnR w="6350" cap="flat" cmpd="sng" algn="ctr">
+                      <a:solidFill>
+                        <a:srgbClr val="E4DADD"/>
+                      </a:solidFill>
+                      <a:prstDash val="solid"/>
+                      <a:round/>
+                      <a:headEnd type="none" w="med" len="med"/>
+                      <a:tailEnd type="none" w="med" len="med"/>
+                    </a:lnR>
+                    <a:lnT w="6350" cap="flat" cmpd="sng" algn="ctr">
+                      <a:solidFill>
+                        <a:srgbClr val="E4DADD"/>
+                      </a:solidFill>
+                      <a:prstDash val="solid"/>
+                      <a:round/>
+                      <a:headEnd type="none" w="med" len="med"/>
+                      <a:tailEnd type="none" w="med" len="med"/>
+                    </a:lnT>
+                    <a:lnB w="6350" cap="flat" cmpd="sng" algn="ctr">
+                      <a:solidFill>
+                        <a:srgbClr val="E4DADD"/>
+                      </a:solidFill>
+                      <a:prstDash val="solid"/>
+                      <a:round/>
+                      <a:headEnd type="none" w="med" len="med"/>
+                      <a:tailEnd type="none" w="med" len="med"/>
+                    </a:lnB>
+                  </a:tcPr>
+                </a:tc>
+                <a:tc>
+                  <a:txBody>
+                    <a:bodyPr/>
+                    <a:lstStyle/>
+                    <a:p>
+                      <a:pPr algn="r" indent="0" marL="0">
+                        <a:buNone/>
+                      </a:pPr>
+                      <a:r>
+                        <a:rPr lang="en-US" sz="900" dirty="0">
+                          <a:solidFill>
+                            <a:srgbClr val="1F1A1C"/>
+                          </a:solidFill>
+                          <a:latin typeface="Calibri" pitchFamily="34" charset="0"/>
+                          <a:ea typeface="Calibri" pitchFamily="34" charset="-122"/>
+                          <a:cs typeface="Calibri" pitchFamily="34" charset="-120"/>
+                        </a:rPr>
+                        <a:t>0</a:t>
+                      </a:r>
+                      <a:endParaRPr lang="en-US" sz="900" dirty="0">
+                        <a:latin typeface="Calibri" charset="0"/>
+                        <a:ea typeface="Calibri" charset="0"/>
+                        <a:cs typeface="Calibri" charset="0"/>
+                      </a:endParaRPr>
+                    </a:p>
+                  </a:txBody>
+                  <a:tcPr marL="91440" marR="91440" marT="45720" marB="45720" anchor="ctr">
+                    <a:lnL w="6350" cap="flat" cmpd="sng" algn="ctr">
+                      <a:solidFill>
+                        <a:srgbClr val="E4DADD"/>
+                      </a:solidFill>
+                      <a:prstDash val="solid"/>
+                      <a:round/>
+                      <a:headEnd type="none" w="med" len="med"/>
+                      <a:tailEnd type="none" w="med" len="med"/>
+                    </a:lnL>
+                    <a:lnR w="6350" cap="flat" cmpd="sng" algn="ctr">
+                      <a:solidFill>
+                        <a:srgbClr val="E4DADD"/>
+                      </a:solidFill>
+                      <a:prstDash val="solid"/>
+                      <a:round/>
+                      <a:headEnd type="none" w="med" len="med"/>
+                      <a:tailEnd type="none" w="med" len="med"/>
+                    </a:lnR>
+                    <a:lnT w="6350" cap="flat" cmpd="sng" algn="ctr">
+                      <a:solidFill>
+                        <a:srgbClr val="E4DADD"/>
+                      </a:solidFill>
+                      <a:prstDash val="solid"/>
+                      <a:round/>
+                      <a:headEnd type="none" w="med" len="med"/>
+                      <a:tailEnd type="none" w="med" len="med"/>
+                    </a:lnT>
+                    <a:lnB w="6350" cap="flat" cmpd="sng" algn="ctr">
+                      <a:solidFill>
+                        <a:srgbClr val="E4DADD"/>
+                      </a:solidFill>
+                      <a:prstDash val="solid"/>
+                      <a:round/>
+                      <a:headEnd type="none" w="med" len="med"/>
+                      <a:tailEnd type="none" w="med" len="med"/>
+                    </a:lnB>
+                  </a:tcPr>
+                </a:tc>
+              </a:tr>
+              <a:tr h="365760">
+                <a:tc>
+                  <a:txBody>
+                    <a:bodyPr/>
+                    <a:lstStyle/>
+                    <a:p>
+                      <a:pPr indent="0" marL="0">
+                        <a:buNone/>
+                      </a:pPr>
+                      <a:r>
+                        <a:rPr lang="en-US" sz="900" b="1" dirty="0">
+                          <a:solidFill>
+                            <a:srgbClr val="1F1A1C"/>
+                          </a:solidFill>
+                          <a:latin typeface="Calibri" pitchFamily="34" charset="0"/>
+                          <a:ea typeface="Calibri" pitchFamily="34" charset="-122"/>
+                          <a:cs typeface="Calibri" pitchFamily="34" charset="-120"/>
+                        </a:rPr>
+                        <a:t>③ TLA 14億＋TLB 6億（期限一括）</a:t>
+                      </a:r>
+                      <a:endParaRPr lang="en-US" sz="900" dirty="0">
+                        <a:latin typeface="Calibri" charset="0"/>
+                        <a:ea typeface="Calibri" charset="0"/>
+                        <a:cs typeface="Calibri" charset="0"/>
+                      </a:endParaRPr>
+                    </a:p>
+                  </a:txBody>
+                  <a:tcPr marL="91440" marR="91440" marT="45720" marB="45720" anchor="ctr">
+                    <a:lnL w="6350" cap="flat" cmpd="sng" algn="ctr">
+                      <a:solidFill>
+                        <a:srgbClr val="E4DADD"/>
+                      </a:solidFill>
+                      <a:prstDash val="solid"/>
+                      <a:round/>
+                      <a:headEnd type="none" w="med" len="med"/>
+                      <a:tailEnd type="none" w="med" len="med"/>
+                    </a:lnL>
+                    <a:lnR w="6350" cap="flat" cmpd="sng" algn="ctr">
+                      <a:solidFill>
+                        <a:srgbClr val="E4DADD"/>
+                      </a:solidFill>
+                      <a:prstDash val="solid"/>
+                      <a:round/>
+                      <a:headEnd type="none" w="med" len="med"/>
+                      <a:tailEnd type="none" w="med" len="med"/>
+                    </a:lnR>
+                    <a:lnT w="6350" cap="flat" cmpd="sng" algn="ctr">
+                      <a:solidFill>
+                        <a:srgbClr val="E4DADD"/>
+                      </a:solidFill>
+                      <a:prstDash val="solid"/>
+                      <a:round/>
+                      <a:headEnd type="none" w="med" len="med"/>
+                      <a:tailEnd type="none" w="med" len="med"/>
+                    </a:lnT>
+                    <a:lnB w="6350" cap="flat" cmpd="sng" algn="ctr">
+                      <a:solidFill>
+                        <a:srgbClr val="E4DADD"/>
+                      </a:solidFill>
+                      <a:prstDash val="solid"/>
+                      <a:round/>
+                      <a:headEnd type="none" w="med" len="med"/>
+                      <a:tailEnd type="none" w="med" len="med"/>
+                    </a:lnB>
+                    <a:solidFill>
+                      <a:srgbClr val="F7F3F4"/>
+                    </a:solidFill>
+                  </a:tcPr>
+                </a:tc>
+                <a:tc>
+                  <a:txBody>
+                    <a:bodyPr/>
+                    <a:lstStyle/>
+                    <a:p>
+                      <a:pPr algn="r" indent="0" marL="0">
+                        <a:buNone/>
+                      </a:pPr>
+                      <a:r>
+                        <a:rPr lang="en-US" sz="900" dirty="0">
+                          <a:solidFill>
+                            <a:srgbClr val="1F1A1C"/>
+                          </a:solidFill>
+                          <a:latin typeface="Calibri" pitchFamily="34" charset="0"/>
+                          <a:ea typeface="Calibri" pitchFamily="34" charset="-122"/>
+                          <a:cs typeface="Calibri" pitchFamily="34" charset="-120"/>
+                        </a:rPr>
+                        <a:t>2.60億</a:t>
+                      </a:r>
+                      <a:endParaRPr lang="en-US" sz="900" dirty="0">
+                        <a:latin typeface="Calibri" charset="0"/>
+                        <a:ea typeface="Calibri" charset="0"/>
+                        <a:cs typeface="Calibri" charset="0"/>
+                      </a:endParaRPr>
+                    </a:p>
+                  </a:txBody>
+                  <a:tcPr marL="91440" marR="91440" marT="45720" marB="45720" anchor="ctr">
+                    <a:lnL w="6350" cap="flat" cmpd="sng" algn="ctr">
+                      <a:solidFill>
+                        <a:srgbClr val="E4DADD"/>
+                      </a:solidFill>
+                      <a:prstDash val="solid"/>
+                      <a:round/>
+                      <a:headEnd type="none" w="med" len="med"/>
+                      <a:tailEnd type="none" w="med" len="med"/>
+                    </a:lnL>
+                    <a:lnR w="6350" cap="flat" cmpd="sng" algn="ctr">
+                      <a:solidFill>
+                        <a:srgbClr val="E4DADD"/>
+                      </a:solidFill>
+                      <a:prstDash val="solid"/>
+                      <a:round/>
+                      <a:headEnd type="none" w="med" len="med"/>
+                      <a:tailEnd type="none" w="med" len="med"/>
+                    </a:lnR>
+                    <a:lnT w="6350" cap="flat" cmpd="sng" algn="ctr">
+                      <a:solidFill>
+                        <a:srgbClr val="E4DADD"/>
+                      </a:solidFill>
+                      <a:prstDash val="solid"/>
+                      <a:round/>
+                      <a:headEnd type="none" w="med" len="med"/>
+                      <a:tailEnd type="none" w="med" len="med"/>
+                    </a:lnT>
+                    <a:lnB w="6350" cap="flat" cmpd="sng" algn="ctr">
+                      <a:solidFill>
+                        <a:srgbClr val="E4DADD"/>
+                      </a:solidFill>
+                      <a:prstDash val="solid"/>
+                      <a:round/>
+                      <a:headEnd type="none" w="med" len="med"/>
+                      <a:tailEnd type="none" w="med" len="med"/>
+                    </a:lnB>
+                    <a:solidFill>
+                      <a:srgbClr val="F7F3F4"/>
+                    </a:solidFill>
+                  </a:tcPr>
+                </a:tc>
+                <a:tc>
+                  <a:txBody>
+                    <a:bodyPr/>
+                    <a:lstStyle/>
+                    <a:p>
+                      <a:pPr algn="r" indent="0" marL="0">
+                        <a:buNone/>
+                      </a:pPr>
+                      <a:r>
+                        <a:rPr lang="en-US" sz="900" b="1" dirty="0">
+                          <a:solidFill>
+                            <a:srgbClr val="2E6F4E"/>
+                          </a:solidFill>
+                          <a:latin typeface="Calibri" pitchFamily="34" charset="0"/>
+                          <a:ea typeface="Calibri" pitchFamily="34" charset="-122"/>
+                          <a:cs typeface="Calibri" pitchFamily="34" charset="-120"/>
+                        </a:rPr>
+                        <a:t>1.35</a:t>
+                      </a:r>
+                      <a:endParaRPr lang="en-US" sz="900" dirty="0">
+                        <a:latin typeface="Calibri" charset="0"/>
+                        <a:ea typeface="Calibri" charset="0"/>
+                        <a:cs typeface="Calibri" charset="0"/>
+                      </a:endParaRPr>
+                    </a:p>
+                  </a:txBody>
+                  <a:tcPr marL="91440" marR="91440" marT="45720" marB="45720" anchor="ctr">
+                    <a:lnL w="6350" cap="flat" cmpd="sng" algn="ctr">
+                      <a:solidFill>
+                        <a:srgbClr val="E4DADD"/>
+                      </a:solidFill>
+                      <a:prstDash val="solid"/>
+                      <a:round/>
+                      <a:headEnd type="none" w="med" len="med"/>
+                      <a:tailEnd type="none" w="med" len="med"/>
+                    </a:lnL>
+                    <a:lnR w="6350" cap="flat" cmpd="sng" algn="ctr">
+                      <a:solidFill>
+                        <a:srgbClr val="E4DADD"/>
+                      </a:solidFill>
+                      <a:prstDash val="solid"/>
+                      <a:round/>
+                      <a:headEnd type="none" w="med" len="med"/>
+                      <a:tailEnd type="none" w="med" len="med"/>
+                    </a:lnR>
+                    <a:lnT w="6350" cap="flat" cmpd="sng" algn="ctr">
+                      <a:solidFill>
+                        <a:srgbClr val="E4DADD"/>
+                      </a:solidFill>
+                      <a:prstDash val="solid"/>
+                      <a:round/>
+                      <a:headEnd type="none" w="med" len="med"/>
+                      <a:tailEnd type="none" w="med" len="med"/>
+                    </a:lnT>
+                    <a:lnB w="6350" cap="flat" cmpd="sng" algn="ctr">
+                      <a:solidFill>
+                        <a:srgbClr val="E4DADD"/>
+                      </a:solidFill>
+                      <a:prstDash val="solid"/>
+                      <a:round/>
+                      <a:headEnd type="none" w="med" len="med"/>
+                      <a:tailEnd type="none" w="med" len="med"/>
+                    </a:lnB>
+                    <a:solidFill>
+                      <a:srgbClr val="F7F3F4"/>
+                    </a:solidFill>
+                  </a:tcPr>
+                </a:tc>
+                <a:tc>
+                  <a:txBody>
+                    <a:bodyPr/>
+                    <a:lstStyle/>
+                    <a:p>
+                      <a:pPr algn="r" indent="0" marL="0">
+                        <a:buNone/>
+                      </a:pPr>
+                      <a:r>
+                        <a:rPr lang="en-US" sz="900" dirty="0">
+                          <a:solidFill>
+                            <a:srgbClr val="1F1A1C"/>
+                          </a:solidFill>
+                          <a:latin typeface="Calibri" pitchFamily="34" charset="0"/>
+                          <a:ea typeface="Calibri" pitchFamily="34" charset="-122"/>
+                          <a:cs typeface="Calibri" pitchFamily="34" charset="-120"/>
+                        </a:rPr>
+                        <a:t>6.00億</a:t>
+                      </a:r>
+                      <a:endParaRPr lang="en-US" sz="900" dirty="0">
+                        <a:latin typeface="Calibri" charset="0"/>
+                        <a:ea typeface="Calibri" charset="0"/>
+                        <a:cs typeface="Calibri" charset="0"/>
+                      </a:endParaRPr>
+                    </a:p>
+                  </a:txBody>
+                  <a:tcPr marL="91440" marR="91440" marT="45720" marB="45720" anchor="ctr">
+                    <a:lnL w="6350" cap="flat" cmpd="sng" algn="ctr">
+                      <a:solidFill>
+                        <a:srgbClr val="E4DADD"/>
+                      </a:solidFill>
+                      <a:prstDash val="solid"/>
+                      <a:round/>
+                      <a:headEnd type="none" w="med" len="med"/>
+                      <a:tailEnd type="none" w="med" len="med"/>
+                    </a:lnL>
+                    <a:lnR w="6350" cap="flat" cmpd="sng" algn="ctr">
+                      <a:solidFill>
+                        <a:srgbClr val="E4DADD"/>
+                      </a:solidFill>
+                      <a:prstDash val="solid"/>
+                      <a:round/>
+                      <a:headEnd type="none" w="med" len="med"/>
+                      <a:tailEnd type="none" w="med" len="med"/>
+                    </a:lnR>
+                    <a:lnT w="6350" cap="flat" cmpd="sng" algn="ctr">
+                      <a:solidFill>
+                        <a:srgbClr val="E4DADD"/>
+                      </a:solidFill>
+                      <a:prstDash val="solid"/>
+                      <a:round/>
+                      <a:headEnd type="none" w="med" len="med"/>
+                      <a:tailEnd type="none" w="med" len="med"/>
+                    </a:lnT>
+                    <a:lnB w="6350" cap="flat" cmpd="sng" algn="ctr">
+                      <a:solidFill>
+                        <a:srgbClr val="E4DADD"/>
+                      </a:solidFill>
+                      <a:prstDash val="solid"/>
+                      <a:round/>
+                      <a:headEnd type="none" w="med" len="med"/>
+                      <a:tailEnd type="none" w="med" len="med"/>
+                    </a:lnB>
+                    <a:solidFill>
+                      <a:srgbClr val="F7F3F4"/>
+                    </a:solidFill>
+                  </a:tcPr>
+                </a:tc>
+              </a:tr>
+              <a:tr h="365760">
+                <a:tc>
+                  <a:txBody>
+                    <a:bodyPr/>
+                    <a:lstStyle/>
+                    <a:p>
+                      <a:pPr indent="0" marL="0">
+                        <a:buNone/>
+                      </a:pPr>
+                      <a:r>
+                        <a:rPr lang="en-US" sz="900" dirty="0">
+                          <a:solidFill>
+                            <a:srgbClr val="1F1A1C"/>
+                          </a:solidFill>
+                          <a:latin typeface="Calibri" pitchFamily="34" charset="0"/>
+                          <a:ea typeface="Calibri" pitchFamily="34" charset="-122"/>
+                          <a:cs typeface="Calibri" pitchFamily="34" charset="-120"/>
+                        </a:rPr>
+                        <a:t>④ TLA 12億＋TLB 8億（期限一括）</a:t>
+                      </a:r>
+                      <a:endParaRPr lang="en-US" sz="900" dirty="0">
+                        <a:latin typeface="Calibri" charset="0"/>
+                        <a:ea typeface="Calibri" charset="0"/>
+                        <a:cs typeface="Calibri" charset="0"/>
+                      </a:endParaRPr>
+                    </a:p>
+                  </a:txBody>
+                  <a:tcPr marL="91440" marR="91440" marT="45720" marB="45720" anchor="ctr">
+                    <a:lnL w="6350" cap="flat" cmpd="sng" algn="ctr">
+                      <a:solidFill>
+                        <a:srgbClr val="E4DADD"/>
+                      </a:solidFill>
+                      <a:prstDash val="solid"/>
+                      <a:round/>
+                      <a:headEnd type="none" w="med" len="med"/>
+                      <a:tailEnd type="none" w="med" len="med"/>
+                    </a:lnL>
+                    <a:lnR w="6350" cap="flat" cmpd="sng" algn="ctr">
+                      <a:solidFill>
+                        <a:srgbClr val="E4DADD"/>
+                      </a:solidFill>
+                      <a:prstDash val="solid"/>
+                      <a:round/>
+                      <a:headEnd type="none" w="med" len="med"/>
+                      <a:tailEnd type="none" w="med" len="med"/>
+                    </a:lnR>
+                    <a:lnT w="6350" cap="flat" cmpd="sng" algn="ctr">
+                      <a:solidFill>
+                        <a:srgbClr val="E4DADD"/>
+                      </a:solidFill>
+                      <a:prstDash val="solid"/>
+                      <a:round/>
+                      <a:headEnd type="none" w="med" len="med"/>
+                      <a:tailEnd type="none" w="med" len="med"/>
+                    </a:lnT>
+                    <a:lnB w="6350" cap="flat" cmpd="sng" algn="ctr">
+                      <a:solidFill>
+                        <a:srgbClr val="E4DADD"/>
+                      </a:solidFill>
+                      <a:prstDash val="solid"/>
+                      <a:round/>
+                      <a:headEnd type="none" w="med" len="med"/>
+                      <a:tailEnd type="none" w="med" len="med"/>
+                    </a:lnB>
+                  </a:tcPr>
+                </a:tc>
+                <a:tc>
+                  <a:txBody>
+                    <a:bodyPr/>
+                    <a:lstStyle/>
+                    <a:p>
+                      <a:pPr algn="r" indent="0" marL="0">
+                        <a:buNone/>
+                      </a:pPr>
+                      <a:r>
+                        <a:rPr lang="en-US" sz="900" dirty="0">
+                          <a:solidFill>
+                            <a:srgbClr val="1F1A1C"/>
+                          </a:solidFill>
+                          <a:latin typeface="Calibri" pitchFamily="34" charset="0"/>
+                          <a:ea typeface="Calibri" pitchFamily="34" charset="-122"/>
+                          <a:cs typeface="Calibri" pitchFamily="34" charset="-120"/>
+                        </a:rPr>
+                        <a:t>2.31億</a:t>
+                      </a:r>
+                      <a:endParaRPr lang="en-US" sz="900" dirty="0">
+                        <a:latin typeface="Calibri" charset="0"/>
+                        <a:ea typeface="Calibri" charset="0"/>
+                        <a:cs typeface="Calibri" charset="0"/>
+                      </a:endParaRPr>
+                    </a:p>
+                  </a:txBody>
+                  <a:tcPr marL="91440" marR="91440" marT="45720" marB="45720" anchor="ctr">
+                    <a:lnL w="6350" cap="flat" cmpd="sng" algn="ctr">
+                      <a:solidFill>
+                        <a:srgbClr val="E4DADD"/>
+                      </a:solidFill>
+                      <a:prstDash val="solid"/>
+                      <a:round/>
+                      <a:headEnd type="none" w="med" len="med"/>
+                      <a:tailEnd type="none" w="med" len="med"/>
+                    </a:lnL>
+                    <a:lnR w="6350" cap="flat" cmpd="sng" algn="ctr">
+                      <a:solidFill>
+                        <a:srgbClr val="E4DADD"/>
+                      </a:solidFill>
+                      <a:prstDash val="solid"/>
+                      <a:round/>
+                      <a:headEnd type="none" w="med" len="med"/>
+                      <a:tailEnd type="none" w="med" len="med"/>
+                    </a:lnR>
+                    <a:lnT w="6350" cap="flat" cmpd="sng" algn="ctr">
+                      <a:solidFill>
+                        <a:srgbClr val="E4DADD"/>
+                      </a:solidFill>
+                      <a:prstDash val="solid"/>
+                      <a:round/>
+                      <a:headEnd type="none" w="med" len="med"/>
+                      <a:tailEnd type="none" w="med" len="med"/>
+                    </a:lnT>
+                    <a:lnB w="6350" cap="flat" cmpd="sng" algn="ctr">
+                      <a:solidFill>
+                        <a:srgbClr val="E4DADD"/>
+                      </a:solidFill>
+                      <a:prstDash val="solid"/>
+                      <a:round/>
+                      <a:headEnd type="none" w="med" len="med"/>
+                      <a:tailEnd type="none" w="med" len="med"/>
+                    </a:lnB>
+                  </a:tcPr>
+                </a:tc>
+                <a:tc>
+                  <a:txBody>
+                    <a:bodyPr/>
+                    <a:lstStyle/>
+                    <a:p>
+                      <a:pPr algn="r" indent="0" marL="0">
+                        <a:buNone/>
+                      </a:pPr>
+                      <a:r>
+                        <a:rPr lang="en-US" sz="900" dirty="0">
+                          <a:solidFill>
+                            <a:srgbClr val="2E6F4E"/>
+                          </a:solidFill>
+                          <a:latin typeface="Calibri" pitchFamily="34" charset="0"/>
+                          <a:ea typeface="Calibri" pitchFamily="34" charset="-122"/>
+                          <a:cs typeface="Calibri" pitchFamily="34" charset="-120"/>
+                        </a:rPr>
+                        <a:t>1.51</a:t>
+                      </a:r>
+                      <a:endParaRPr lang="en-US" sz="900" dirty="0">
+                        <a:latin typeface="Calibri" charset="0"/>
+                        <a:ea typeface="Calibri" charset="0"/>
+                        <a:cs typeface="Calibri" charset="0"/>
+                      </a:endParaRPr>
+                    </a:p>
+                  </a:txBody>
+                  <a:tcPr marL="91440" marR="91440" marT="45720" marB="45720" anchor="ctr">
+                    <a:lnL w="6350" cap="flat" cmpd="sng" algn="ctr">
+                      <a:solidFill>
+                        <a:srgbClr val="E4DADD"/>
+                      </a:solidFill>
+                      <a:prstDash val="solid"/>
+                      <a:round/>
+                      <a:headEnd type="none" w="med" len="med"/>
+                      <a:tailEnd type="none" w="med" len="med"/>
+                    </a:lnL>
+                    <a:lnR w="6350" cap="flat" cmpd="sng" algn="ctr">
+                      <a:solidFill>
+                        <a:srgbClr val="E4DADD"/>
+                      </a:solidFill>
+                      <a:prstDash val="solid"/>
+                      <a:round/>
+                      <a:headEnd type="none" w="med" len="med"/>
+                      <a:tailEnd type="none" w="med" len="med"/>
+                    </a:lnR>
+                    <a:lnT w="6350" cap="flat" cmpd="sng" algn="ctr">
+                      <a:solidFill>
+                        <a:srgbClr val="E4DADD"/>
+                      </a:solidFill>
+                      <a:prstDash val="solid"/>
+                      <a:round/>
+                      <a:headEnd type="none" w="med" len="med"/>
+                      <a:tailEnd type="none" w="med" len="med"/>
+                    </a:lnT>
+                    <a:lnB w="6350" cap="flat" cmpd="sng" algn="ctr">
+                      <a:solidFill>
+                        <a:srgbClr val="E4DADD"/>
+                      </a:solidFill>
+                      <a:prstDash val="solid"/>
+                      <a:round/>
+                      <a:headEnd type="none" w="med" len="med"/>
+                      <a:tailEnd type="none" w="med" len="med"/>
+                    </a:lnB>
+                  </a:tcPr>
+                </a:tc>
+                <a:tc>
+                  <a:txBody>
+                    <a:bodyPr/>
+                    <a:lstStyle/>
+                    <a:p>
+                      <a:pPr algn="r" indent="0" marL="0">
+                        <a:buNone/>
+                      </a:pPr>
+                      <a:r>
+                        <a:rPr lang="en-US" sz="900" dirty="0">
+                          <a:solidFill>
+                            <a:srgbClr val="1F1A1C"/>
+                          </a:solidFill>
+                          <a:latin typeface="Calibri" pitchFamily="34" charset="0"/>
+                          <a:ea typeface="Calibri" pitchFamily="34" charset="-122"/>
+                          <a:cs typeface="Calibri" pitchFamily="34" charset="-120"/>
+                        </a:rPr>
+                        <a:t>8.00億</a:t>
+                      </a:r>
+                      <a:endParaRPr lang="en-US" sz="900" dirty="0">
+                        <a:latin typeface="Calibri" charset="0"/>
+                        <a:ea typeface="Calibri" charset="0"/>
+                        <a:cs typeface="Calibri" charset="0"/>
+                      </a:endParaRPr>
+                    </a:p>
+                  </a:txBody>
+                  <a:tcPr marL="91440" marR="91440" marT="45720" marB="45720" anchor="ctr">
+                    <a:lnL w="6350" cap="flat" cmpd="sng" algn="ctr">
+                      <a:solidFill>
+                        <a:srgbClr val="E4DADD"/>
+                      </a:solidFill>
+                      <a:prstDash val="solid"/>
+                      <a:round/>
+                      <a:headEnd type="none" w="med" len="med"/>
+                      <a:tailEnd type="none" w="med" len="med"/>
+                    </a:lnL>
+                    <a:lnR w="6350" cap="flat" cmpd="sng" algn="ctr">
+                      <a:solidFill>
+                        <a:srgbClr val="E4DADD"/>
+                      </a:solidFill>
+                      <a:prstDash val="solid"/>
+                      <a:round/>
+                      <a:headEnd type="none" w="med" len="med"/>
+                      <a:tailEnd type="none" w="med" len="med"/>
+                    </a:lnR>
+                    <a:lnT w="6350" cap="flat" cmpd="sng" algn="ctr">
+                      <a:solidFill>
+                        <a:srgbClr val="E4DADD"/>
+                      </a:solidFill>
+                      <a:prstDash val="solid"/>
+                      <a:round/>
+                      <a:headEnd type="none" w="med" len="med"/>
+                      <a:tailEnd type="none" w="med" len="med"/>
+                    </a:lnT>
+                    <a:lnB w="6350" cap="flat" cmpd="sng" algn="ctr">
+                      <a:solidFill>
+                        <a:srgbClr val="E4DADD"/>
+                      </a:solidFill>
+                      <a:prstDash val="solid"/>
+                      <a:round/>
+                      <a:headEnd type="none" w="med" len="med"/>
+                      <a:tailEnd type="none" w="med" len="med"/>
+                    </a:lnB>
+                  </a:tcPr>
+                </a:tc>
+              </a:tr>
+            </a:tbl>
+          </a:graphicData>
+        </a:graphic>
+      </p:graphicFrame>
+      <p:sp>
+        <p:nvSpPr>
+          <p:cNvPr id="19" name="Shape 16"/>
+          <p:cNvSpPr/>
+          <p:nvPr/>
+        </p:nvSpPr>
+        <p:spPr>
+          <a:xfrm>
+            <a:off x="566928" y="5212080"/>
+            <a:ext cx="5669280" cy="868680"/>
+          </a:xfrm>
+          <a:prstGeom prst="roundRect">
+            <a:avLst>
+              <a:gd name="adj" fmla="val 5263"/>
+            </a:avLst>
+          </a:prstGeom>
+          <a:solidFill>
+            <a:srgbClr val="F7F3F4"/>
+          </a:solidFill>
+          <a:ln w="9525">
+            <a:solidFill>
+              <a:srgbClr val="E4DADD"/>
+            </a:solidFill>
+            <a:prstDash val="solid"/>
+          </a:ln>
+        </p:spPr>
+      </p:sp>
+      <p:sp>
+        <p:nvSpPr>
+          <p:cNvPr id="20" name="Text 17"/>
+          <p:cNvSpPr txBox="1"/>
+          <p:nvPr/>
+        </p:nvSpPr>
+        <p:spPr>
+          <a:xfrm>
+            <a:off x="768096" y="5321808"/>
+            <a:ext cx="2743200" cy="219456"/>
+          </a:xfrm>
+          <a:prstGeom prst="rect">
+            <a:avLst/>
+          </a:prstGeom>
+          <a:noFill/>
+          <a:ln/>
+        </p:spPr>
+        <p:txBody>
+          <a:bodyPr wrap="square" lIns="0" tIns="0" rIns="0" bIns="0" rtlCol="0" anchor="ctr"/>
+          <a:lstStyle/>
+          <a:p>
+            <a:pPr indent="0" marL="0">
+              <a:buNone/>
+            </a:pPr>
+            <a:r>
+              <a:rPr lang="en-US" sz="950" b="1" dirty="0">
+                <a:solidFill>
+                  <a:srgbClr val="B58B2A"/>
+                </a:solidFill>
+                <a:latin typeface="Calibri" pitchFamily="34" charset="0"/>
+                <a:ea typeface="Calibri" pitchFamily="34" charset="-122"/>
+                <a:cs typeface="Calibri" pitchFamily="34" charset="-120"/>
+              </a:rPr>
+              <a:t>③を推奨する理由</a:t>
+            </a:r>
+            <a:endParaRPr lang="en-US" sz="950" dirty="0"/>
+          </a:p>
+        </p:txBody>
+      </p:sp>
+      <p:sp>
+        <p:nvSpPr>
+          <p:cNvPr id="21" name="Text 18"/>
+          <p:cNvSpPr txBox="1"/>
+          <p:nvPr/>
+        </p:nvSpPr>
+        <p:spPr>
+          <a:xfrm>
+            <a:off x="768096" y="5541264"/>
+            <a:ext cx="5303520" cy="502920"/>
+          </a:xfrm>
+          <a:prstGeom prst="rect">
+            <a:avLst/>
+          </a:prstGeom>
+          <a:noFill/>
+          <a:ln/>
+        </p:spPr>
+        <p:txBody>
+          <a:bodyPr wrap="square" lIns="0" tIns="0" rIns="0" bIns="0" rtlCol="0" anchor="ctr"/>
+          <a:lstStyle/>
+          <a:p>
+            <a:pPr indent="0" marL="0">
+              <a:lnSpc>
+                <a:spcPts val="1350"/>
+              </a:lnSpc>
+              <a:buNone/>
+            </a:pPr>
+            <a:r>
+              <a:rPr lang="en-US" sz="950" dirty="0">
+                <a:solidFill>
+                  <a:srgbClr val="1F1A1C"/>
+                </a:solidFill>
+                <a:latin typeface="Calibri" pitchFamily="34" charset="0"/>
+                <a:ea typeface="Calibri" pitchFamily="34" charset="-122"/>
+                <a:cs typeface="Calibri" pitchFamily="34" charset="-120"/>
+              </a:rPr>
+              <a:t>元本を14億円に絞ることで年間元本負担が2.00億円に下がり、平常時DSCRが1.35〜1.56で推移する。残る6.00億円は7年間の余剰キャッシュフローで返済でき、リファイナンスを前提としない。</a:t>
+            </a:r>
+            <a:endParaRPr lang="en-US" sz="950" dirty="0"/>
+          </a:p>
+        </p:txBody>
+      </p:sp>
+      <p:sp>
+        <p:nvSpPr>
+          <p:cNvPr id="22" name="Text 19"/>
+          <p:cNvSpPr txBox="1"/>
+          <p:nvPr/>
+        </p:nvSpPr>
+        <p:spPr>
+          <a:xfrm>
+            <a:off x="6419088" y="2944368"/>
+            <a:ext cx="5212080" cy="256032"/>
+          </a:xfrm>
+          <a:prstGeom prst="rect">
+            <a:avLst/>
+          </a:prstGeom>
+          <a:noFill/>
+          <a:ln/>
+        </p:spPr>
+        <p:txBody>
+          <a:bodyPr wrap="square" lIns="0" tIns="0" rIns="0" bIns="0" rtlCol="0" anchor="ctr"/>
+          <a:lstStyle/>
+          <a:p>
+            <a:pPr indent="0" marL="0">
+              <a:buNone/>
+            </a:pPr>
+            <a:r>
+              <a:rPr lang="en-US" sz="1300" b="1" dirty="0">
+                <a:solidFill>
+                  <a:srgbClr val="1F1A1C"/>
+                </a:solidFill>
+                <a:latin typeface="Cambria" pitchFamily="34" charset="0"/>
+                <a:ea typeface="Cambria" pitchFamily="34" charset="-122"/>
+                <a:cs typeface="Cambria" pitchFamily="34" charset="-120"/>
+              </a:rPr>
+              <a:t>推奨ストラクチャー③の7年返済計画（億円）</a:t>
+            </a:r>
+            <a:endParaRPr lang="en-US" sz="1300" dirty="0"/>
+          </a:p>
+        </p:txBody>
+      </p:sp>
+      <p:graphicFrame>
+        <p:nvGraphicFramePr>
+          <p:cNvPr id="31" name="Table 1"/>
+          <p:cNvGraphicFramePr>
+            <a:graphicFrameLocks noGrp="1"/>
+          </p:cNvGraphicFramePr>
+          <p:nvPr>
+            <p:extLst>
+              <p:ext uri="{D42A27DB-BD31-4B8C-83A1-F6EECF244321}">
+                <p14:modId xmlns:p14="http://schemas.microsoft.com/office/powerpoint/2010/main" val="1579011935"/>
+              </p:ext>
+            </p:extLst>
+          </p:nvPr>
+        </p:nvGraphicFramePr>
+        <p:xfrm>
+          <a:off x="6419088" y="3255264"/>
+          <a:ext cx="5212080" cy="914400"/>
+        </p:xfrm>
+        <a:graphic>
+          <a:graphicData uri="http://schemas.openxmlformats.org/drawingml/2006/table">
+            <a:tbl>
+              <a:tblPr/>
+              <a:tblGrid>
+                <a:gridCol w="713232"/>
+                <a:gridCol w="786384"/>
+                <a:gridCol w="658368"/>
+                <a:gridCol w="658368"/>
+                <a:gridCol w="749808"/>
+                <a:gridCol w="640080"/>
+                <a:gridCol w="1005840"/>
+              </a:tblGrid>
+              <a:tr h="301752">
+                <a:tc>
+                  <a:txBody>
+                    <a:bodyPr/>
+                    <a:lstStyle/>
+                    <a:p>
+                      <a:pPr indent="0" marL="0">
+                        <a:buNone/>
+                      </a:pPr>
+                      <a:r>
+                        <a:rPr lang="en-US" sz="1050" b="1" dirty="0">
+                          <a:solidFill>
+                            <a:srgbClr val="FFFFFF"/>
+                          </a:solidFill>
+                          <a:latin typeface="Calibri" pitchFamily="34" charset="0"/>
+                          <a:ea typeface="Calibri" pitchFamily="34" charset="-122"/>
+                          <a:cs typeface="Calibri" pitchFamily="34" charset="-120"/>
+                        </a:rPr>
+                        <a:t>年度</a:t>
                       </a:r>
                       <a:endParaRPr lang="en-US" sz="1050" dirty="0">
                         <a:latin typeface="Calibri" charset="0"/>
@@ -15014,7 +16884,7 @@
                           <a:ea typeface="Calibri" pitchFamily="34" charset="-122"/>
                           <a:cs typeface="Calibri" pitchFamily="34" charset="-120"/>
                         </a:rPr>
-                        <a:t>Debt/EBITDA</a:t>
+                        <a:t>期首残高</a:t>
                       </a:r>
                       <a:endParaRPr lang="en-US" sz="1050" dirty="0">
                         <a:latin typeface="Calibri" charset="0"/>
@@ -15082,7 +16952,7 @@
                           <a:ea typeface="Calibri" pitchFamily="34" charset="-122"/>
                           <a:cs typeface="Calibri" pitchFamily="34" charset="-120"/>
                         </a:rPr>
-                        <a:t>判定</a:t>
+                        <a:t>元本</a:t>
                       </a:r>
                       <a:endParaRPr lang="en-US" sz="1050" dirty="0">
                         <a:latin typeface="Calibri" charset="0"/>
@@ -15133,8 +17003,6 @@
                     </a:solidFill>
                   </a:tcPr>
                 </a:tc>
-              </a:tr>
-              <a:tr h="384048">
                 <a:tc>
                   <a:txBody>
                     <a:bodyPr/>
@@ -15144,7 +17012,281 @@
                         <a:buNone/>
                       </a:pPr>
                       <a:r>
-                        <a:rPr lang="en-US" sz="1050" dirty="0">
+                        <a:rPr lang="en-US" sz="1050" b="1" dirty="0">
+                          <a:solidFill>
+                            <a:srgbClr val="FFFFFF"/>
+                          </a:solidFill>
+                          <a:latin typeface="Calibri" pitchFamily="34" charset="0"/>
+                          <a:ea typeface="Calibri" pitchFamily="34" charset="-122"/>
+                          <a:cs typeface="Calibri" pitchFamily="34" charset="-120"/>
+                        </a:rPr>
+                        <a:t>利息</a:t>
+                      </a:r>
+                      <a:endParaRPr lang="en-US" sz="1050" dirty="0">
+                        <a:latin typeface="Calibri" charset="0"/>
+                        <a:ea typeface="Calibri" charset="0"/>
+                        <a:cs typeface="Calibri" charset="0"/>
+                      </a:endParaRPr>
+                    </a:p>
+                  </a:txBody>
+                  <a:tcPr marL="91440" marR="91440" marT="45720" marB="45720" anchor="ctr">
+                    <a:lnL w="6350" cap="flat" cmpd="sng" algn="ctr">
+                      <a:solidFill>
+                        <a:srgbClr val="E4DADD"/>
+                      </a:solidFill>
+                      <a:prstDash val="solid"/>
+                      <a:round/>
+                      <a:headEnd type="none" w="med" len="med"/>
+                      <a:tailEnd type="none" w="med" len="med"/>
+                    </a:lnL>
+                    <a:lnR w="6350" cap="flat" cmpd="sng" algn="ctr">
+                      <a:solidFill>
+                        <a:srgbClr val="E4DADD"/>
+                      </a:solidFill>
+                      <a:prstDash val="solid"/>
+                      <a:round/>
+                      <a:headEnd type="none" w="med" len="med"/>
+                      <a:tailEnd type="none" w="med" len="med"/>
+                    </a:lnR>
+                    <a:lnT w="6350" cap="flat" cmpd="sng" algn="ctr">
+                      <a:solidFill>
+                        <a:srgbClr val="E4DADD"/>
+                      </a:solidFill>
+                      <a:prstDash val="solid"/>
+                      <a:round/>
+                      <a:headEnd type="none" w="med" len="med"/>
+                      <a:tailEnd type="none" w="med" len="med"/>
+                    </a:lnT>
+                    <a:lnB w="6350" cap="flat" cmpd="sng" algn="ctr">
+                      <a:solidFill>
+                        <a:srgbClr val="E4DADD"/>
+                      </a:solidFill>
+                      <a:prstDash val="solid"/>
+                      <a:round/>
+                      <a:headEnd type="none" w="med" len="med"/>
+                      <a:tailEnd type="none" w="med" len="med"/>
+                    </a:lnB>
+                    <a:solidFill>
+                      <a:srgbClr val="6D2E46"/>
+                    </a:solidFill>
+                  </a:tcPr>
+                </a:tc>
+                <a:tc>
+                  <a:txBody>
+                    <a:bodyPr/>
+                    <a:lstStyle/>
+                    <a:p>
+                      <a:pPr indent="0" marL="0">
+                        <a:buNone/>
+                      </a:pPr>
+                      <a:r>
+                        <a:rPr lang="en-US" sz="1050" b="1" dirty="0">
+                          <a:solidFill>
+                            <a:srgbClr val="FFFFFF"/>
+                          </a:solidFill>
+                          <a:latin typeface="Calibri" pitchFamily="34" charset="0"/>
+                          <a:ea typeface="Calibri" pitchFamily="34" charset="-122"/>
+                          <a:cs typeface="Calibri" pitchFamily="34" charset="-120"/>
+                        </a:rPr>
+                        <a:t>返済計</a:t>
+                      </a:r>
+                      <a:endParaRPr lang="en-US" sz="1050" dirty="0">
+                        <a:latin typeface="Calibri" charset="0"/>
+                        <a:ea typeface="Calibri" charset="0"/>
+                        <a:cs typeface="Calibri" charset="0"/>
+                      </a:endParaRPr>
+                    </a:p>
+                  </a:txBody>
+                  <a:tcPr marL="91440" marR="91440" marT="45720" marB="45720" anchor="ctr">
+                    <a:lnL w="6350" cap="flat" cmpd="sng" algn="ctr">
+                      <a:solidFill>
+                        <a:srgbClr val="E4DADD"/>
+                      </a:solidFill>
+                      <a:prstDash val="solid"/>
+                      <a:round/>
+                      <a:headEnd type="none" w="med" len="med"/>
+                      <a:tailEnd type="none" w="med" len="med"/>
+                    </a:lnL>
+                    <a:lnR w="6350" cap="flat" cmpd="sng" algn="ctr">
+                      <a:solidFill>
+                        <a:srgbClr val="E4DADD"/>
+                      </a:solidFill>
+                      <a:prstDash val="solid"/>
+                      <a:round/>
+                      <a:headEnd type="none" w="med" len="med"/>
+                      <a:tailEnd type="none" w="med" len="med"/>
+                    </a:lnR>
+                    <a:lnT w="6350" cap="flat" cmpd="sng" algn="ctr">
+                      <a:solidFill>
+                        <a:srgbClr val="E4DADD"/>
+                      </a:solidFill>
+                      <a:prstDash val="solid"/>
+                      <a:round/>
+                      <a:headEnd type="none" w="med" len="med"/>
+                      <a:tailEnd type="none" w="med" len="med"/>
+                    </a:lnT>
+                    <a:lnB w="6350" cap="flat" cmpd="sng" algn="ctr">
+                      <a:solidFill>
+                        <a:srgbClr val="E4DADD"/>
+                      </a:solidFill>
+                      <a:prstDash val="solid"/>
+                      <a:round/>
+                      <a:headEnd type="none" w="med" len="med"/>
+                      <a:tailEnd type="none" w="med" len="med"/>
+                    </a:lnB>
+                    <a:solidFill>
+                      <a:srgbClr val="6D2E46"/>
+                    </a:solidFill>
+                  </a:tcPr>
+                </a:tc>
+                <a:tc>
+                  <a:txBody>
+                    <a:bodyPr/>
+                    <a:lstStyle/>
+                    <a:p>
+                      <a:pPr indent="0" marL="0">
+                        <a:buNone/>
+                      </a:pPr>
+                      <a:r>
+                        <a:rPr lang="en-US" sz="1050" b="1" dirty="0">
+                          <a:solidFill>
+                            <a:srgbClr val="FFFFFF"/>
+                          </a:solidFill>
+                          <a:latin typeface="Calibri" pitchFamily="34" charset="0"/>
+                          <a:ea typeface="Calibri" pitchFamily="34" charset="-122"/>
+                          <a:cs typeface="Calibri" pitchFamily="34" charset="-120"/>
+                        </a:rPr>
+                        <a:t>DSCR</a:t>
+                      </a:r>
+                      <a:endParaRPr lang="en-US" sz="1050" dirty="0">
+                        <a:latin typeface="Calibri" charset="0"/>
+                        <a:ea typeface="Calibri" charset="0"/>
+                        <a:cs typeface="Calibri" charset="0"/>
+                      </a:endParaRPr>
+                    </a:p>
+                  </a:txBody>
+                  <a:tcPr marL="91440" marR="91440" marT="45720" marB="45720" anchor="ctr">
+                    <a:lnL w="6350" cap="flat" cmpd="sng" algn="ctr">
+                      <a:solidFill>
+                        <a:srgbClr val="E4DADD"/>
+                      </a:solidFill>
+                      <a:prstDash val="solid"/>
+                      <a:round/>
+                      <a:headEnd type="none" w="med" len="med"/>
+                      <a:tailEnd type="none" w="med" len="med"/>
+                    </a:lnL>
+                    <a:lnR w="6350" cap="flat" cmpd="sng" algn="ctr">
+                      <a:solidFill>
+                        <a:srgbClr val="E4DADD"/>
+                      </a:solidFill>
+                      <a:prstDash val="solid"/>
+                      <a:round/>
+                      <a:headEnd type="none" w="med" len="med"/>
+                      <a:tailEnd type="none" w="med" len="med"/>
+                    </a:lnR>
+                    <a:lnT w="6350" cap="flat" cmpd="sng" algn="ctr">
+                      <a:solidFill>
+                        <a:srgbClr val="E4DADD"/>
+                      </a:solidFill>
+                      <a:prstDash val="solid"/>
+                      <a:round/>
+                      <a:headEnd type="none" w="med" len="med"/>
+                      <a:tailEnd type="none" w="med" len="med"/>
+                    </a:lnT>
+                    <a:lnB w="6350" cap="flat" cmpd="sng" algn="ctr">
+                      <a:solidFill>
+                        <a:srgbClr val="E4DADD"/>
+                      </a:solidFill>
+                      <a:prstDash val="solid"/>
+                      <a:round/>
+                      <a:headEnd type="none" w="med" len="med"/>
+                      <a:tailEnd type="none" w="med" len="med"/>
+                    </a:lnB>
+                    <a:solidFill>
+                      <a:srgbClr val="6D2E46"/>
+                    </a:solidFill>
+                  </a:tcPr>
+                </a:tc>
+                <a:tc>
+                  <a:txBody>
+                    <a:bodyPr/>
+                    <a:lstStyle/>
+                    <a:p>
+                      <a:pPr indent="0" marL="0">
+                        <a:buNone/>
+                      </a:pPr>
+                      <a:r>
+                        <a:rPr lang="en-US" sz="1050" b="1" dirty="0">
+                          <a:solidFill>
+                            <a:srgbClr val="FFFFFF"/>
+                          </a:solidFill>
+                          <a:latin typeface="Calibri" pitchFamily="34" charset="0"/>
+                          <a:ea typeface="Calibri" pitchFamily="34" charset="-122"/>
+                          <a:cs typeface="Calibri" pitchFamily="34" charset="-120"/>
+                        </a:rPr>
+                        <a:t>累積余剰CF</a:t>
+                      </a:r>
+                      <a:endParaRPr lang="en-US" sz="1050" dirty="0">
+                        <a:latin typeface="Calibri" charset="0"/>
+                        <a:ea typeface="Calibri" charset="0"/>
+                        <a:cs typeface="Calibri" charset="0"/>
+                      </a:endParaRPr>
+                    </a:p>
+                  </a:txBody>
+                  <a:tcPr marL="91440" marR="91440" marT="45720" marB="45720" anchor="ctr">
+                    <a:lnL w="6350" cap="flat" cmpd="sng" algn="ctr">
+                      <a:solidFill>
+                        <a:srgbClr val="E4DADD"/>
+                      </a:solidFill>
+                      <a:prstDash val="solid"/>
+                      <a:round/>
+                      <a:headEnd type="none" w="med" len="med"/>
+                      <a:tailEnd type="none" w="med" len="med"/>
+                    </a:lnL>
+                    <a:lnR w="6350" cap="flat" cmpd="sng" algn="ctr">
+                      <a:solidFill>
+                        <a:srgbClr val="E4DADD"/>
+                      </a:solidFill>
+                      <a:prstDash val="solid"/>
+                      <a:round/>
+                      <a:headEnd type="none" w="med" len="med"/>
+                      <a:tailEnd type="none" w="med" len="med"/>
+                    </a:lnR>
+                    <a:lnT w="6350" cap="flat" cmpd="sng" algn="ctr">
+                      <a:solidFill>
+                        <a:srgbClr val="E4DADD"/>
+                      </a:solidFill>
+                      <a:prstDash val="solid"/>
+                      <a:round/>
+                      <a:headEnd type="none" w="med" len="med"/>
+                      <a:tailEnd type="none" w="med" len="med"/>
+                    </a:lnT>
+                    <a:lnB w="6350" cap="flat" cmpd="sng" algn="ctr">
+                      <a:solidFill>
+                        <a:srgbClr val="E4DADD"/>
+                      </a:solidFill>
+                      <a:prstDash val="solid"/>
+                      <a:round/>
+                      <a:headEnd type="none" w="med" len="med"/>
+                      <a:tailEnd type="none" w="med" len="med"/>
+                    </a:lnB>
+                    <a:solidFill>
+                      <a:srgbClr val="6D2E46"/>
+                    </a:solidFill>
+                  </a:tcPr>
+                </a:tc>
+              </a:tr>
+              <a:tr h="301752">
+                <a:tc>
+                  <a:txBody>
+                    <a:bodyPr/>
+                    <a:lstStyle/>
+                    <a:p>
+                      <a:pPr indent="0" marL="0">
+                        <a:buNone/>
+                      </a:pPr>
+                      <a:r>
+                        <a:rPr lang="en-US" sz="900" dirty="0">
                           <a:solidFill>
                             <a:srgbClr val="1F1A1C"/>
                           </a:solidFill>
@@ -15152,9 +17294,9 @@
                           <a:ea typeface="Calibri" pitchFamily="34" charset="-122"/>
                           <a:cs typeface="Calibri" pitchFamily="34" charset="-120"/>
                         </a:rPr>
-                        <a:t>12.00億円</a:t>
+                        <a:t>1年目</a:t>
                       </a:r>
-                      <a:endParaRPr lang="en-US" sz="1050" dirty="0">
+                      <a:endParaRPr lang="en-US" sz="900" dirty="0">
                         <a:latin typeface="Calibri" charset="0"/>
                         <a:ea typeface="Calibri" charset="0"/>
                         <a:cs typeface="Calibri" charset="0"/>
@@ -15209,7 +17351,7 @@
                         <a:buNone/>
                       </a:pPr>
                       <a:r>
-                        <a:rPr lang="en-US" sz="1050" dirty="0">
+                        <a:rPr lang="en-US" sz="900" dirty="0">
                           <a:solidFill>
                             <a:srgbClr val="1F1A1C"/>
                           </a:solidFill>
@@ -15217,9 +17359,9 @@
                           <a:ea typeface="Calibri" pitchFamily="34" charset="-122"/>
                           <a:cs typeface="Calibri" pitchFamily="34" charset="-120"/>
                         </a:rPr>
-                        <a:t>2.07億円</a:t>
+                        <a:t>20.00</a:t>
                       </a:r>
-                      <a:endParaRPr lang="en-US" sz="1050" dirty="0">
+                      <a:endParaRPr lang="en-US" sz="900" dirty="0">
                         <a:latin typeface="Calibri" charset="0"/>
                         <a:ea typeface="Calibri" charset="0"/>
                         <a:cs typeface="Calibri" charset="0"/>
@@ -15274,7 +17416,7 @@
                         <a:buNone/>
                       </a:pPr>
                       <a:r>
-                        <a:rPr lang="en-US" sz="1050" dirty="0">
+                        <a:rPr lang="en-US" sz="900" dirty="0">
                           <a:solidFill>
                             <a:srgbClr val="1F1A1C"/>
                           </a:solidFill>
@@ -15282,9 +17424,9 @@
                           <a:ea typeface="Calibri" pitchFamily="34" charset="-122"/>
                           <a:cs typeface="Calibri" pitchFamily="34" charset="-120"/>
                         </a:rPr>
-                        <a:t>1.69</a:t>
+                        <a:t>2.00</a:t>
                       </a:r>
-                      <a:endParaRPr lang="en-US" sz="1050" dirty="0">
+                      <a:endParaRPr lang="en-US" sz="900" dirty="0">
                         <a:latin typeface="Calibri" charset="0"/>
                         <a:ea typeface="Calibri" charset="0"/>
                         <a:cs typeface="Calibri" charset="0"/>
@@ -15339,7 +17481,7 @@
                         <a:buNone/>
                       </a:pPr>
                       <a:r>
-                        <a:rPr lang="en-US" sz="1050" dirty="0">
+                        <a:rPr lang="en-US" sz="900" dirty="0">
                           <a:solidFill>
                             <a:srgbClr val="1F1A1C"/>
                           </a:solidFill>
@@ -15347,9 +17489,9 @@
                           <a:ea typeface="Calibri" pitchFamily="34" charset="-122"/>
                           <a:cs typeface="Calibri" pitchFamily="34" charset="-120"/>
                         </a:rPr>
-                        <a:t>1.33</a:t>
+                        <a:t>0.60</a:t>
                       </a:r>
-                      <a:endParaRPr lang="en-US" sz="1050" dirty="0">
+                      <a:endParaRPr lang="en-US" sz="900" dirty="0">
                         <a:latin typeface="Calibri" charset="0"/>
                         <a:ea typeface="Calibri" charset="0"/>
                         <a:cs typeface="Calibri" charset="0"/>
@@ -15404,7 +17546,7 @@
                         <a:buNone/>
                       </a:pPr>
                       <a:r>
-                        <a:rPr lang="en-US" sz="1050" dirty="0">
+                        <a:rPr lang="en-US" sz="900" dirty="0">
                           <a:solidFill>
                             <a:srgbClr val="1F1A1C"/>
                           </a:solidFill>
@@ -15412,9 +17554,9 @@
                           <a:ea typeface="Calibri" pitchFamily="34" charset="-122"/>
                           <a:cs typeface="Calibri" pitchFamily="34" charset="-120"/>
                         </a:rPr>
-                        <a:t>2.3倍</a:t>
+                        <a:t>2.60</a:t>
                       </a:r>
-                      <a:endParaRPr lang="en-US" sz="1050" dirty="0">
+                      <a:endParaRPr lang="en-US" sz="900" dirty="0">
                         <a:latin typeface="Calibri" charset="0"/>
                         <a:ea typeface="Calibri" charset="0"/>
                         <a:cs typeface="Calibri" charset="0"/>
@@ -15460,6 +17602,138 @@
                     </a:lnB>
                   </a:tcPr>
                 </a:tc>
+                <a:tc>
+                  <a:txBody>
+                    <a:bodyPr/>
+                    <a:lstStyle/>
+                    <a:p>
+                      <a:pPr algn="r" indent="0" marL="0">
+                        <a:buNone/>
+                      </a:pPr>
+                      <a:r>
+                        <a:rPr lang="en-US" sz="900" b="1" dirty="0">
+                          <a:solidFill>
+                            <a:srgbClr val="2E6F4E"/>
+                          </a:solidFill>
+                          <a:latin typeface="Calibri" pitchFamily="34" charset="0"/>
+                          <a:ea typeface="Calibri" pitchFamily="34" charset="-122"/>
+                          <a:cs typeface="Calibri" pitchFamily="34" charset="-120"/>
+                        </a:rPr>
+                        <a:t>1.35</a:t>
+                      </a:r>
+                      <a:endParaRPr lang="en-US" sz="900" dirty="0">
+                        <a:latin typeface="Calibri" charset="0"/>
+                        <a:ea typeface="Calibri" charset="0"/>
+                        <a:cs typeface="Calibri" charset="0"/>
+                      </a:endParaRPr>
+                    </a:p>
+                  </a:txBody>
+                  <a:tcPr marL="91440" marR="91440" marT="45720" marB="45720" anchor="ctr">
+                    <a:lnL w="6350" cap="flat" cmpd="sng" algn="ctr">
+                      <a:solidFill>
+                        <a:srgbClr val="E4DADD"/>
+                      </a:solidFill>
+                      <a:prstDash val="solid"/>
+                      <a:round/>
+                      <a:headEnd type="none" w="med" len="med"/>
+                      <a:tailEnd type="none" w="med" len="med"/>
+                    </a:lnL>
+                    <a:lnR w="6350" cap="flat" cmpd="sng" algn="ctr">
+                      <a:solidFill>
+                        <a:srgbClr val="E4DADD"/>
+                      </a:solidFill>
+                      <a:prstDash val="solid"/>
+                      <a:round/>
+                      <a:headEnd type="none" w="med" len="med"/>
+                      <a:tailEnd type="none" w="med" len="med"/>
+                    </a:lnR>
+                    <a:lnT w="6350" cap="flat" cmpd="sng" algn="ctr">
+                      <a:solidFill>
+                        <a:srgbClr val="E4DADD"/>
+                      </a:solidFill>
+                      <a:prstDash val="solid"/>
+                      <a:round/>
+                      <a:headEnd type="none" w="med" len="med"/>
+                      <a:tailEnd type="none" w="med" len="med"/>
+                    </a:lnT>
+                    <a:lnB w="6350" cap="flat" cmpd="sng" algn="ctr">
+                      <a:solidFill>
+                        <a:srgbClr val="E4DADD"/>
+                      </a:solidFill>
+                      <a:prstDash val="solid"/>
+                      <a:round/>
+                      <a:headEnd type="none" w="med" len="med"/>
+                      <a:tailEnd type="none" w="med" len="med"/>
+                    </a:lnB>
+                  </a:tcPr>
+                </a:tc>
+                <a:tc>
+                  <a:txBody>
+                    <a:bodyPr/>
+                    <a:lstStyle/>
+                    <a:p>
+                      <a:pPr algn="r" indent="0" marL="0">
+                        <a:buNone/>
+                      </a:pPr>
+                      <a:r>
+                        <a:rPr lang="en-US" sz="900" dirty="0">
+                          <a:solidFill>
+                            <a:srgbClr val="1F1A1C"/>
+                          </a:solidFill>
+                          <a:latin typeface="Calibri" pitchFamily="34" charset="0"/>
+                          <a:ea typeface="Calibri" pitchFamily="34" charset="-122"/>
+                          <a:cs typeface="Calibri" pitchFamily="34" charset="-120"/>
+                        </a:rPr>
+                        <a:t>+0.90</a:t>
+                      </a:r>
+                      <a:endParaRPr lang="en-US" sz="900" dirty="0">
+                        <a:latin typeface="Calibri" charset="0"/>
+                        <a:ea typeface="Calibri" charset="0"/>
+                        <a:cs typeface="Calibri" charset="0"/>
+                      </a:endParaRPr>
+                    </a:p>
+                  </a:txBody>
+                  <a:tcPr marL="91440" marR="91440" marT="45720" marB="45720" anchor="ctr">
+                    <a:lnL w="6350" cap="flat" cmpd="sng" algn="ctr">
+                      <a:solidFill>
+                        <a:srgbClr val="E4DADD"/>
+                      </a:solidFill>
+                      <a:prstDash val="solid"/>
+                      <a:round/>
+                      <a:headEnd type="none" w="med" len="med"/>
+                      <a:tailEnd type="none" w="med" len="med"/>
+                    </a:lnL>
+                    <a:lnR w="6350" cap="flat" cmpd="sng" algn="ctr">
+                      <a:solidFill>
+                        <a:srgbClr val="E4DADD"/>
+                      </a:solidFill>
+                      <a:prstDash val="solid"/>
+                      <a:round/>
+                      <a:headEnd type="none" w="med" len="med"/>
+                      <a:tailEnd type="none" w="med" len="med"/>
+                    </a:lnR>
+                    <a:lnT w="6350" cap="flat" cmpd="sng" algn="ctr">
+                      <a:solidFill>
+                        <a:srgbClr val="E4DADD"/>
+                      </a:solidFill>
+                      <a:prstDash val="solid"/>
+                      <a:round/>
+                      <a:headEnd type="none" w="med" len="med"/>
+                      <a:tailEnd type="none" w="med" len="med"/>
+                    </a:lnT>
+                    <a:lnB w="6350" cap="flat" cmpd="sng" algn="ctr">
+                      <a:solidFill>
+                        <a:srgbClr val="E4DADD"/>
+                      </a:solidFill>
+                      <a:prstDash val="solid"/>
+                      <a:round/>
+                      <a:headEnd type="none" w="med" len="med"/>
+                      <a:tailEnd type="none" w="med" len="med"/>
+                    </a:lnB>
+                  </a:tcPr>
+                </a:tc>
+              </a:tr>
+              <a:tr h="301752">
                 <a:tc>
                   <a:txBody>
                     <a:bodyPr/>
@@ -15469,17 +17743,17 @@
                         <a:buNone/>
                       </a:pPr>
                       <a:r>
-                        <a:rPr lang="en-US" sz="1050" dirty="0">
+                        <a:rPr lang="en-US" sz="900" dirty="0">
                           <a:solidFill>
-                            <a:srgbClr val="2E6F4E"/>
+                            <a:srgbClr val="1F1A1C"/>
                           </a:solidFill>
                           <a:latin typeface="Calibri" pitchFamily="34" charset="0"/>
                           <a:ea typeface="Calibri" pitchFamily="34" charset="-122"/>
                           <a:cs typeface="Calibri" pitchFamily="34" charset="-120"/>
                         </a:rPr>
-                        <a:t>○ 余裕あり</a:t>
+                        <a:t>2年目</a:t>
                       </a:r>
-                      <a:endParaRPr lang="en-US" sz="1050" dirty="0">
+                      <a:endParaRPr lang="en-US" sz="900" dirty="0">
                         <a:latin typeface="Calibri" charset="0"/>
                         <a:ea typeface="Calibri" charset="0"/>
                         <a:cs typeface="Calibri" charset="0"/>
@@ -15525,8 +17799,398 @@
                     </a:lnB>
                   </a:tcPr>
                 </a:tc>
+                <a:tc>
+                  <a:txBody>
+                    <a:bodyPr/>
+                    <a:lstStyle/>
+                    <a:p>
+                      <a:pPr algn="r" indent="0" marL="0">
+                        <a:buNone/>
+                      </a:pPr>
+                      <a:r>
+                        <a:rPr lang="en-US" sz="900" dirty="0">
+                          <a:solidFill>
+                            <a:srgbClr val="1F1A1C"/>
+                          </a:solidFill>
+                          <a:latin typeface="Calibri" pitchFamily="34" charset="0"/>
+                          <a:ea typeface="Calibri" pitchFamily="34" charset="-122"/>
+                          <a:cs typeface="Calibri" pitchFamily="34" charset="-120"/>
+                        </a:rPr>
+                        <a:t>18.00</a:t>
+                      </a:r>
+                      <a:endParaRPr lang="en-US" sz="900" dirty="0">
+                        <a:latin typeface="Calibri" charset="0"/>
+                        <a:ea typeface="Calibri" charset="0"/>
+                        <a:cs typeface="Calibri" charset="0"/>
+                      </a:endParaRPr>
+                    </a:p>
+                  </a:txBody>
+                  <a:tcPr marL="91440" marR="91440" marT="45720" marB="45720" anchor="ctr">
+                    <a:lnL w="6350" cap="flat" cmpd="sng" algn="ctr">
+                      <a:solidFill>
+                        <a:srgbClr val="E4DADD"/>
+                      </a:solidFill>
+                      <a:prstDash val="solid"/>
+                      <a:round/>
+                      <a:headEnd type="none" w="med" len="med"/>
+                      <a:tailEnd type="none" w="med" len="med"/>
+                    </a:lnL>
+                    <a:lnR w="6350" cap="flat" cmpd="sng" algn="ctr">
+                      <a:solidFill>
+                        <a:srgbClr val="E4DADD"/>
+                      </a:solidFill>
+                      <a:prstDash val="solid"/>
+                      <a:round/>
+                      <a:headEnd type="none" w="med" len="med"/>
+                      <a:tailEnd type="none" w="med" len="med"/>
+                    </a:lnR>
+                    <a:lnT w="6350" cap="flat" cmpd="sng" algn="ctr">
+                      <a:solidFill>
+                        <a:srgbClr val="E4DADD"/>
+                      </a:solidFill>
+                      <a:prstDash val="solid"/>
+                      <a:round/>
+                      <a:headEnd type="none" w="med" len="med"/>
+                      <a:tailEnd type="none" w="med" len="med"/>
+                    </a:lnT>
+                    <a:lnB w="6350" cap="flat" cmpd="sng" algn="ctr">
+                      <a:solidFill>
+                        <a:srgbClr val="E4DADD"/>
+                      </a:solidFill>
+                      <a:prstDash val="solid"/>
+                      <a:round/>
+                      <a:headEnd type="none" w="med" len="med"/>
+                      <a:tailEnd type="none" w="med" len="med"/>
+                    </a:lnB>
+                  </a:tcPr>
+                </a:tc>
+                <a:tc>
+                  <a:txBody>
+                    <a:bodyPr/>
+                    <a:lstStyle/>
+                    <a:p>
+                      <a:pPr algn="r" indent="0" marL="0">
+                        <a:buNone/>
+                      </a:pPr>
+                      <a:r>
+                        <a:rPr lang="en-US" sz="900" dirty="0">
+                          <a:solidFill>
+                            <a:srgbClr val="1F1A1C"/>
+                          </a:solidFill>
+                          <a:latin typeface="Calibri" pitchFamily="34" charset="0"/>
+                          <a:ea typeface="Calibri" pitchFamily="34" charset="-122"/>
+                          <a:cs typeface="Calibri" pitchFamily="34" charset="-120"/>
+                        </a:rPr>
+                        <a:t>2.00</a:t>
+                      </a:r>
+                      <a:endParaRPr lang="en-US" sz="900" dirty="0">
+                        <a:latin typeface="Calibri" charset="0"/>
+                        <a:ea typeface="Calibri" charset="0"/>
+                        <a:cs typeface="Calibri" charset="0"/>
+                      </a:endParaRPr>
+                    </a:p>
+                  </a:txBody>
+                  <a:tcPr marL="91440" marR="91440" marT="45720" marB="45720" anchor="ctr">
+                    <a:lnL w="6350" cap="flat" cmpd="sng" algn="ctr">
+                      <a:solidFill>
+                        <a:srgbClr val="E4DADD"/>
+                      </a:solidFill>
+                      <a:prstDash val="solid"/>
+                      <a:round/>
+                      <a:headEnd type="none" w="med" len="med"/>
+                      <a:tailEnd type="none" w="med" len="med"/>
+                    </a:lnL>
+                    <a:lnR w="6350" cap="flat" cmpd="sng" algn="ctr">
+                      <a:solidFill>
+                        <a:srgbClr val="E4DADD"/>
+                      </a:solidFill>
+                      <a:prstDash val="solid"/>
+                      <a:round/>
+                      <a:headEnd type="none" w="med" len="med"/>
+                      <a:tailEnd type="none" w="med" len="med"/>
+                    </a:lnR>
+                    <a:lnT w="6350" cap="flat" cmpd="sng" algn="ctr">
+                      <a:solidFill>
+                        <a:srgbClr val="E4DADD"/>
+                      </a:solidFill>
+                      <a:prstDash val="solid"/>
+                      <a:round/>
+                      <a:headEnd type="none" w="med" len="med"/>
+                      <a:tailEnd type="none" w="med" len="med"/>
+                    </a:lnT>
+                    <a:lnB w="6350" cap="flat" cmpd="sng" algn="ctr">
+                      <a:solidFill>
+                        <a:srgbClr val="E4DADD"/>
+                      </a:solidFill>
+                      <a:prstDash val="solid"/>
+                      <a:round/>
+                      <a:headEnd type="none" w="med" len="med"/>
+                      <a:tailEnd type="none" w="med" len="med"/>
+                    </a:lnB>
+                  </a:tcPr>
+                </a:tc>
+                <a:tc>
+                  <a:txBody>
+                    <a:bodyPr/>
+                    <a:lstStyle/>
+                    <a:p>
+                      <a:pPr algn="r" indent="0" marL="0">
+                        <a:buNone/>
+                      </a:pPr>
+                      <a:r>
+                        <a:rPr lang="en-US" sz="900" dirty="0">
+                          <a:solidFill>
+                            <a:srgbClr val="1F1A1C"/>
+                          </a:solidFill>
+                          <a:latin typeface="Calibri" pitchFamily="34" charset="0"/>
+                          <a:ea typeface="Calibri" pitchFamily="34" charset="-122"/>
+                          <a:cs typeface="Calibri" pitchFamily="34" charset="-120"/>
+                        </a:rPr>
+                        <a:t>0.54</a:t>
+                      </a:r>
+                      <a:endParaRPr lang="en-US" sz="900" dirty="0">
+                        <a:latin typeface="Calibri" charset="0"/>
+                        <a:ea typeface="Calibri" charset="0"/>
+                        <a:cs typeface="Calibri" charset="0"/>
+                      </a:endParaRPr>
+                    </a:p>
+                  </a:txBody>
+                  <a:tcPr marL="91440" marR="91440" marT="45720" marB="45720" anchor="ctr">
+                    <a:lnL w="6350" cap="flat" cmpd="sng" algn="ctr">
+                      <a:solidFill>
+                        <a:srgbClr val="E4DADD"/>
+                      </a:solidFill>
+                      <a:prstDash val="solid"/>
+                      <a:round/>
+                      <a:headEnd type="none" w="med" len="med"/>
+                      <a:tailEnd type="none" w="med" len="med"/>
+                    </a:lnL>
+                    <a:lnR w="6350" cap="flat" cmpd="sng" algn="ctr">
+                      <a:solidFill>
+                        <a:srgbClr val="E4DADD"/>
+                      </a:solidFill>
+                      <a:prstDash val="solid"/>
+                      <a:round/>
+                      <a:headEnd type="none" w="med" len="med"/>
+                      <a:tailEnd type="none" w="med" len="med"/>
+                    </a:lnR>
+                    <a:lnT w="6350" cap="flat" cmpd="sng" algn="ctr">
+                      <a:solidFill>
+                        <a:srgbClr val="E4DADD"/>
+                      </a:solidFill>
+                      <a:prstDash val="solid"/>
+                      <a:round/>
+                      <a:headEnd type="none" w="med" len="med"/>
+                      <a:tailEnd type="none" w="med" len="med"/>
+                    </a:lnT>
+                    <a:lnB w="6350" cap="flat" cmpd="sng" algn="ctr">
+                      <a:solidFill>
+                        <a:srgbClr val="E4DADD"/>
+                      </a:solidFill>
+                      <a:prstDash val="solid"/>
+                      <a:round/>
+                      <a:headEnd type="none" w="med" len="med"/>
+                      <a:tailEnd type="none" w="med" len="med"/>
+                    </a:lnB>
+                  </a:tcPr>
+                </a:tc>
+                <a:tc>
+                  <a:txBody>
+                    <a:bodyPr/>
+                    <a:lstStyle/>
+                    <a:p>
+                      <a:pPr algn="r" indent="0" marL="0">
+                        <a:buNone/>
+                      </a:pPr>
+                      <a:r>
+                        <a:rPr lang="en-US" sz="900" dirty="0">
+                          <a:solidFill>
+                            <a:srgbClr val="1F1A1C"/>
+                          </a:solidFill>
+                          <a:latin typeface="Calibri" pitchFamily="34" charset="0"/>
+                          <a:ea typeface="Calibri" pitchFamily="34" charset="-122"/>
+                          <a:cs typeface="Calibri" pitchFamily="34" charset="-120"/>
+                        </a:rPr>
+                        <a:t>2.54</a:t>
+                      </a:r>
+                      <a:endParaRPr lang="en-US" sz="900" dirty="0">
+                        <a:latin typeface="Calibri" charset="0"/>
+                        <a:ea typeface="Calibri" charset="0"/>
+                        <a:cs typeface="Calibri" charset="0"/>
+                      </a:endParaRPr>
+                    </a:p>
+                  </a:txBody>
+                  <a:tcPr marL="91440" marR="91440" marT="45720" marB="45720" anchor="ctr">
+                    <a:lnL w="6350" cap="flat" cmpd="sng" algn="ctr">
+                      <a:solidFill>
+                        <a:srgbClr val="E4DADD"/>
+                      </a:solidFill>
+                      <a:prstDash val="solid"/>
+                      <a:round/>
+                      <a:headEnd type="none" w="med" len="med"/>
+                      <a:tailEnd type="none" w="med" len="med"/>
+                    </a:lnL>
+                    <a:lnR w="6350" cap="flat" cmpd="sng" algn="ctr">
+                      <a:solidFill>
+                        <a:srgbClr val="E4DADD"/>
+                      </a:solidFill>
+                      <a:prstDash val="solid"/>
+                      <a:round/>
+                      <a:headEnd type="none" w="med" len="med"/>
+                      <a:tailEnd type="none" w="med" len="med"/>
+                    </a:lnR>
+                    <a:lnT w="6350" cap="flat" cmpd="sng" algn="ctr">
+                      <a:solidFill>
+                        <a:srgbClr val="E4DADD"/>
+                      </a:solidFill>
+                      <a:prstDash val="solid"/>
+                      <a:round/>
+                      <a:headEnd type="none" w="med" len="med"/>
+                      <a:tailEnd type="none" w="med" len="med"/>
+                    </a:lnT>
+                    <a:lnB w="6350" cap="flat" cmpd="sng" algn="ctr">
+                      <a:solidFill>
+                        <a:srgbClr val="E4DADD"/>
+                      </a:solidFill>
+                      <a:prstDash val="solid"/>
+                      <a:round/>
+                      <a:headEnd type="none" w="med" len="med"/>
+                      <a:tailEnd type="none" w="med" len="med"/>
+                    </a:lnB>
+                  </a:tcPr>
+                </a:tc>
+                <a:tc>
+                  <a:txBody>
+                    <a:bodyPr/>
+                    <a:lstStyle/>
+                    <a:p>
+                      <a:pPr algn="r" indent="0" marL="0">
+                        <a:buNone/>
+                      </a:pPr>
+                      <a:r>
+                        <a:rPr lang="en-US" sz="900" b="1" dirty="0">
+                          <a:solidFill>
+                            <a:srgbClr val="2E6F4E"/>
+                          </a:solidFill>
+                          <a:latin typeface="Calibri" pitchFamily="34" charset="0"/>
+                          <a:ea typeface="Calibri" pitchFamily="34" charset="-122"/>
+                          <a:cs typeface="Calibri" pitchFamily="34" charset="-120"/>
+                        </a:rPr>
+                        <a:t>1.38</a:t>
+                      </a:r>
+                      <a:endParaRPr lang="en-US" sz="900" dirty="0">
+                        <a:latin typeface="Calibri" charset="0"/>
+                        <a:ea typeface="Calibri" charset="0"/>
+                        <a:cs typeface="Calibri" charset="0"/>
+                      </a:endParaRPr>
+                    </a:p>
+                  </a:txBody>
+                  <a:tcPr marL="91440" marR="91440" marT="45720" marB="45720" anchor="ctr">
+                    <a:lnL w="6350" cap="flat" cmpd="sng" algn="ctr">
+                      <a:solidFill>
+                        <a:srgbClr val="E4DADD"/>
+                      </a:solidFill>
+                      <a:prstDash val="solid"/>
+                      <a:round/>
+                      <a:headEnd type="none" w="med" len="med"/>
+                      <a:tailEnd type="none" w="med" len="med"/>
+                    </a:lnL>
+                    <a:lnR w="6350" cap="flat" cmpd="sng" algn="ctr">
+                      <a:solidFill>
+                        <a:srgbClr val="E4DADD"/>
+                      </a:solidFill>
+                      <a:prstDash val="solid"/>
+                      <a:round/>
+                      <a:headEnd type="none" w="med" len="med"/>
+                      <a:tailEnd type="none" w="med" len="med"/>
+                    </a:lnR>
+                    <a:lnT w="6350" cap="flat" cmpd="sng" algn="ctr">
+                      <a:solidFill>
+                        <a:srgbClr val="E4DADD"/>
+                      </a:solidFill>
+                      <a:prstDash val="solid"/>
+                      <a:round/>
+                      <a:headEnd type="none" w="med" len="med"/>
+                      <a:tailEnd type="none" w="med" len="med"/>
+                    </a:lnT>
+                    <a:lnB w="6350" cap="flat" cmpd="sng" algn="ctr">
+                      <a:solidFill>
+                        <a:srgbClr val="E4DADD"/>
+                      </a:solidFill>
+                      <a:prstDash val="solid"/>
+                      <a:round/>
+                      <a:headEnd type="none" w="med" len="med"/>
+                      <a:tailEnd type="none" w="med" len="med"/>
+                    </a:lnB>
+                  </a:tcPr>
+                </a:tc>
+                <a:tc>
+                  <a:txBody>
+                    <a:bodyPr/>
+                    <a:lstStyle/>
+                    <a:p>
+                      <a:pPr algn="r" indent="0" marL="0">
+                        <a:buNone/>
+                      </a:pPr>
+                      <a:r>
+                        <a:rPr lang="en-US" sz="900" dirty="0">
+                          <a:solidFill>
+                            <a:srgbClr val="1F1A1C"/>
+                          </a:solidFill>
+                          <a:latin typeface="Calibri" pitchFamily="34" charset="0"/>
+                          <a:ea typeface="Calibri" pitchFamily="34" charset="-122"/>
+                          <a:cs typeface="Calibri" pitchFamily="34" charset="-120"/>
+                        </a:rPr>
+                        <a:t>+1.86</a:t>
+                      </a:r>
+                      <a:endParaRPr lang="en-US" sz="900" dirty="0">
+                        <a:latin typeface="Calibri" charset="0"/>
+                        <a:ea typeface="Calibri" charset="0"/>
+                        <a:cs typeface="Calibri" charset="0"/>
+                      </a:endParaRPr>
+                    </a:p>
+                  </a:txBody>
+                  <a:tcPr marL="91440" marR="91440" marT="45720" marB="45720" anchor="ctr">
+                    <a:lnL w="6350" cap="flat" cmpd="sng" algn="ctr">
+                      <a:solidFill>
+                        <a:srgbClr val="E4DADD"/>
+                      </a:solidFill>
+                      <a:prstDash val="solid"/>
+                      <a:round/>
+                      <a:headEnd type="none" w="med" len="med"/>
+                      <a:tailEnd type="none" w="med" len="med"/>
+                    </a:lnL>
+                    <a:lnR w="6350" cap="flat" cmpd="sng" algn="ctr">
+                      <a:solidFill>
+                        <a:srgbClr val="E4DADD"/>
+                      </a:solidFill>
+                      <a:prstDash val="solid"/>
+                      <a:round/>
+                      <a:headEnd type="none" w="med" len="med"/>
+                      <a:tailEnd type="none" w="med" len="med"/>
+                    </a:lnR>
+                    <a:lnT w="6350" cap="flat" cmpd="sng" algn="ctr">
+                      <a:solidFill>
+                        <a:srgbClr val="E4DADD"/>
+                      </a:solidFill>
+                      <a:prstDash val="solid"/>
+                      <a:round/>
+                      <a:headEnd type="none" w="med" len="med"/>
+                      <a:tailEnd type="none" w="med" len="med"/>
+                    </a:lnT>
+                    <a:lnB w="6350" cap="flat" cmpd="sng" algn="ctr">
+                      <a:solidFill>
+                        <a:srgbClr val="E4DADD"/>
+                      </a:solidFill>
+                      <a:prstDash val="solid"/>
+                      <a:round/>
+                      <a:headEnd type="none" w="med" len="med"/>
+                      <a:tailEnd type="none" w="med" len="med"/>
+                    </a:lnB>
+                  </a:tcPr>
+                </a:tc>
               </a:tr>
-              <a:tr h="384048">
+              <a:tr h="301752">
                 <a:tc>
                   <a:txBody>
                     <a:bodyPr/>
@@ -15536,7 +18200,7 @@
                         <a:buNone/>
                       </a:pPr>
                       <a:r>
-                        <a:rPr lang="en-US" sz="1050" b="1" dirty="0">
+                        <a:rPr lang="en-US" sz="900" dirty="0">
                           <a:solidFill>
                             <a:srgbClr val="1F1A1C"/>
                           </a:solidFill>
@@ -15544,9 +18208,2294 @@
                           <a:ea typeface="Calibri" pitchFamily="34" charset="-122"/>
                           <a:cs typeface="Calibri" pitchFamily="34" charset="-120"/>
                         </a:rPr>
-                        <a:t>15.00億円</a:t>
+                        <a:t>3年目</a:t>
                       </a:r>
-                      <a:endParaRPr lang="en-US" sz="1050" dirty="0">
+                      <a:endParaRPr lang="en-US" sz="900" dirty="0">
+                        <a:latin typeface="Calibri" charset="0"/>
+                        <a:ea typeface="Calibri" charset="0"/>
+                        <a:cs typeface="Calibri" charset="0"/>
+                      </a:endParaRPr>
+                    </a:p>
+                  </a:txBody>
+                  <a:tcPr marL="91440" marR="91440" marT="45720" marB="45720" anchor="ctr">
+                    <a:lnL w="6350" cap="flat" cmpd="sng" algn="ctr">
+                      <a:solidFill>
+                        <a:srgbClr val="E4DADD"/>
+                      </a:solidFill>
+                      <a:prstDash val="solid"/>
+                      <a:round/>
+                      <a:headEnd type="none" w="med" len="med"/>
+                      <a:tailEnd type="none" w="med" len="med"/>
+                    </a:lnL>
+                    <a:lnR w="6350" cap="flat" cmpd="sng" algn="ctr">
+                      <a:solidFill>
+                        <a:srgbClr val="E4DADD"/>
+                      </a:solidFill>
+                      <a:prstDash val="solid"/>
+                      <a:round/>
+                      <a:headEnd type="none" w="med" len="med"/>
+                      <a:tailEnd type="none" w="med" len="med"/>
+                    </a:lnR>
+                    <a:lnT w="6350" cap="flat" cmpd="sng" algn="ctr">
+                      <a:solidFill>
+                        <a:srgbClr val="E4DADD"/>
+                      </a:solidFill>
+                      <a:prstDash val="solid"/>
+                      <a:round/>
+                      <a:headEnd type="none" w="med" len="med"/>
+                      <a:tailEnd type="none" w="med" len="med"/>
+                    </a:lnT>
+                    <a:lnB w="6350" cap="flat" cmpd="sng" algn="ctr">
+                      <a:solidFill>
+                        <a:srgbClr val="E4DADD"/>
+                      </a:solidFill>
+                      <a:prstDash val="solid"/>
+                      <a:round/>
+                      <a:headEnd type="none" w="med" len="med"/>
+                      <a:tailEnd type="none" w="med" len="med"/>
+                    </a:lnB>
+                  </a:tcPr>
+                </a:tc>
+                <a:tc>
+                  <a:txBody>
+                    <a:bodyPr/>
+                    <a:lstStyle/>
+                    <a:p>
+                      <a:pPr algn="r" indent="0" marL="0">
+                        <a:buNone/>
+                      </a:pPr>
+                      <a:r>
+                        <a:rPr lang="en-US" sz="900" dirty="0">
+                          <a:solidFill>
+                            <a:srgbClr val="1F1A1C"/>
+                          </a:solidFill>
+                          <a:latin typeface="Calibri" pitchFamily="34" charset="0"/>
+                          <a:ea typeface="Calibri" pitchFamily="34" charset="-122"/>
+                          <a:cs typeface="Calibri" pitchFamily="34" charset="-120"/>
+                        </a:rPr>
+                        <a:t>16.00</a:t>
+                      </a:r>
+                      <a:endParaRPr lang="en-US" sz="900" dirty="0">
+                        <a:latin typeface="Calibri" charset="0"/>
+                        <a:ea typeface="Calibri" charset="0"/>
+                        <a:cs typeface="Calibri" charset="0"/>
+                      </a:endParaRPr>
+                    </a:p>
+                  </a:txBody>
+                  <a:tcPr marL="91440" marR="91440" marT="45720" marB="45720" anchor="ctr">
+                    <a:lnL w="6350" cap="flat" cmpd="sng" algn="ctr">
+                      <a:solidFill>
+                        <a:srgbClr val="E4DADD"/>
+                      </a:solidFill>
+                      <a:prstDash val="solid"/>
+                      <a:round/>
+                      <a:headEnd type="none" w="med" len="med"/>
+                      <a:tailEnd type="none" w="med" len="med"/>
+                    </a:lnL>
+                    <a:lnR w="6350" cap="flat" cmpd="sng" algn="ctr">
+                      <a:solidFill>
+                        <a:srgbClr val="E4DADD"/>
+                      </a:solidFill>
+                      <a:prstDash val="solid"/>
+                      <a:round/>
+                      <a:headEnd type="none" w="med" len="med"/>
+                      <a:tailEnd type="none" w="med" len="med"/>
+                    </a:lnR>
+                    <a:lnT w="6350" cap="flat" cmpd="sng" algn="ctr">
+                      <a:solidFill>
+                        <a:srgbClr val="E4DADD"/>
+                      </a:solidFill>
+                      <a:prstDash val="solid"/>
+                      <a:round/>
+                      <a:headEnd type="none" w="med" len="med"/>
+                      <a:tailEnd type="none" w="med" len="med"/>
+                    </a:lnT>
+                    <a:lnB w="6350" cap="flat" cmpd="sng" algn="ctr">
+                      <a:solidFill>
+                        <a:srgbClr val="E4DADD"/>
+                      </a:solidFill>
+                      <a:prstDash val="solid"/>
+                      <a:round/>
+                      <a:headEnd type="none" w="med" len="med"/>
+                      <a:tailEnd type="none" w="med" len="med"/>
+                    </a:lnB>
+                  </a:tcPr>
+                </a:tc>
+                <a:tc>
+                  <a:txBody>
+                    <a:bodyPr/>
+                    <a:lstStyle/>
+                    <a:p>
+                      <a:pPr algn="r" indent="0" marL="0">
+                        <a:buNone/>
+                      </a:pPr>
+                      <a:r>
+                        <a:rPr lang="en-US" sz="900" dirty="0">
+                          <a:solidFill>
+                            <a:srgbClr val="1F1A1C"/>
+                          </a:solidFill>
+                          <a:latin typeface="Calibri" pitchFamily="34" charset="0"/>
+                          <a:ea typeface="Calibri" pitchFamily="34" charset="-122"/>
+                          <a:cs typeface="Calibri" pitchFamily="34" charset="-120"/>
+                        </a:rPr>
+                        <a:t>2.00</a:t>
+                      </a:r>
+                      <a:endParaRPr lang="en-US" sz="900" dirty="0">
+                        <a:latin typeface="Calibri" charset="0"/>
+                        <a:ea typeface="Calibri" charset="0"/>
+                        <a:cs typeface="Calibri" charset="0"/>
+                      </a:endParaRPr>
+                    </a:p>
+                  </a:txBody>
+                  <a:tcPr marL="91440" marR="91440" marT="45720" marB="45720" anchor="ctr">
+                    <a:lnL w="6350" cap="flat" cmpd="sng" algn="ctr">
+                      <a:solidFill>
+                        <a:srgbClr val="E4DADD"/>
+                      </a:solidFill>
+                      <a:prstDash val="solid"/>
+                      <a:round/>
+                      <a:headEnd type="none" w="med" len="med"/>
+                      <a:tailEnd type="none" w="med" len="med"/>
+                    </a:lnL>
+                    <a:lnR w="6350" cap="flat" cmpd="sng" algn="ctr">
+                      <a:solidFill>
+                        <a:srgbClr val="E4DADD"/>
+                      </a:solidFill>
+                      <a:prstDash val="solid"/>
+                      <a:round/>
+                      <a:headEnd type="none" w="med" len="med"/>
+                      <a:tailEnd type="none" w="med" len="med"/>
+                    </a:lnR>
+                    <a:lnT w="6350" cap="flat" cmpd="sng" algn="ctr">
+                      <a:solidFill>
+                        <a:srgbClr val="E4DADD"/>
+                      </a:solidFill>
+                      <a:prstDash val="solid"/>
+                      <a:round/>
+                      <a:headEnd type="none" w="med" len="med"/>
+                      <a:tailEnd type="none" w="med" len="med"/>
+                    </a:lnT>
+                    <a:lnB w="6350" cap="flat" cmpd="sng" algn="ctr">
+                      <a:solidFill>
+                        <a:srgbClr val="E4DADD"/>
+                      </a:solidFill>
+                      <a:prstDash val="solid"/>
+                      <a:round/>
+                      <a:headEnd type="none" w="med" len="med"/>
+                      <a:tailEnd type="none" w="med" len="med"/>
+                    </a:lnB>
+                  </a:tcPr>
+                </a:tc>
+                <a:tc>
+                  <a:txBody>
+                    <a:bodyPr/>
+                    <a:lstStyle/>
+                    <a:p>
+                      <a:pPr algn="r" indent="0" marL="0">
+                        <a:buNone/>
+                      </a:pPr>
+                      <a:r>
+                        <a:rPr lang="en-US" sz="900" dirty="0">
+                          <a:solidFill>
+                            <a:srgbClr val="1F1A1C"/>
+                          </a:solidFill>
+                          <a:latin typeface="Calibri" pitchFamily="34" charset="0"/>
+                          <a:ea typeface="Calibri" pitchFamily="34" charset="-122"/>
+                          <a:cs typeface="Calibri" pitchFamily="34" charset="-120"/>
+                        </a:rPr>
+                        <a:t>0.48</a:t>
+                      </a:r>
+                      <a:endParaRPr lang="en-US" sz="900" dirty="0">
+                        <a:latin typeface="Calibri" charset="0"/>
+                        <a:ea typeface="Calibri" charset="0"/>
+                        <a:cs typeface="Calibri" charset="0"/>
+                      </a:endParaRPr>
+                    </a:p>
+                  </a:txBody>
+                  <a:tcPr marL="91440" marR="91440" marT="45720" marB="45720" anchor="ctr">
+                    <a:lnL w="6350" cap="flat" cmpd="sng" algn="ctr">
+                      <a:solidFill>
+                        <a:srgbClr val="E4DADD"/>
+                      </a:solidFill>
+                      <a:prstDash val="solid"/>
+                      <a:round/>
+                      <a:headEnd type="none" w="med" len="med"/>
+                      <a:tailEnd type="none" w="med" len="med"/>
+                    </a:lnL>
+                    <a:lnR w="6350" cap="flat" cmpd="sng" algn="ctr">
+                      <a:solidFill>
+                        <a:srgbClr val="E4DADD"/>
+                      </a:solidFill>
+                      <a:prstDash val="solid"/>
+                      <a:round/>
+                      <a:headEnd type="none" w="med" len="med"/>
+                      <a:tailEnd type="none" w="med" len="med"/>
+                    </a:lnR>
+                    <a:lnT w="6350" cap="flat" cmpd="sng" algn="ctr">
+                      <a:solidFill>
+                        <a:srgbClr val="E4DADD"/>
+                      </a:solidFill>
+                      <a:prstDash val="solid"/>
+                      <a:round/>
+                      <a:headEnd type="none" w="med" len="med"/>
+                      <a:tailEnd type="none" w="med" len="med"/>
+                    </a:lnT>
+                    <a:lnB w="6350" cap="flat" cmpd="sng" algn="ctr">
+                      <a:solidFill>
+                        <a:srgbClr val="E4DADD"/>
+                      </a:solidFill>
+                      <a:prstDash val="solid"/>
+                      <a:round/>
+                      <a:headEnd type="none" w="med" len="med"/>
+                      <a:tailEnd type="none" w="med" len="med"/>
+                    </a:lnB>
+                  </a:tcPr>
+                </a:tc>
+                <a:tc>
+                  <a:txBody>
+                    <a:bodyPr/>
+                    <a:lstStyle/>
+                    <a:p>
+                      <a:pPr algn="r" indent="0" marL="0">
+                        <a:buNone/>
+                      </a:pPr>
+                      <a:r>
+                        <a:rPr lang="en-US" sz="900" dirty="0">
+                          <a:solidFill>
+                            <a:srgbClr val="1F1A1C"/>
+                          </a:solidFill>
+                          <a:latin typeface="Calibri" pitchFamily="34" charset="0"/>
+                          <a:ea typeface="Calibri" pitchFamily="34" charset="-122"/>
+                          <a:cs typeface="Calibri" pitchFamily="34" charset="-120"/>
+                        </a:rPr>
+                        <a:t>2.48</a:t>
+                      </a:r>
+                      <a:endParaRPr lang="en-US" sz="900" dirty="0">
+                        <a:latin typeface="Calibri" charset="0"/>
+                        <a:ea typeface="Calibri" charset="0"/>
+                        <a:cs typeface="Calibri" charset="0"/>
+                      </a:endParaRPr>
+                    </a:p>
+                  </a:txBody>
+                  <a:tcPr marL="91440" marR="91440" marT="45720" marB="45720" anchor="ctr">
+                    <a:lnL w="6350" cap="flat" cmpd="sng" algn="ctr">
+                      <a:solidFill>
+                        <a:srgbClr val="E4DADD"/>
+                      </a:solidFill>
+                      <a:prstDash val="solid"/>
+                      <a:round/>
+                      <a:headEnd type="none" w="med" len="med"/>
+                      <a:tailEnd type="none" w="med" len="med"/>
+                    </a:lnL>
+                    <a:lnR w="6350" cap="flat" cmpd="sng" algn="ctr">
+                      <a:solidFill>
+                        <a:srgbClr val="E4DADD"/>
+                      </a:solidFill>
+                      <a:prstDash val="solid"/>
+                      <a:round/>
+                      <a:headEnd type="none" w="med" len="med"/>
+                      <a:tailEnd type="none" w="med" len="med"/>
+                    </a:lnR>
+                    <a:lnT w="6350" cap="flat" cmpd="sng" algn="ctr">
+                      <a:solidFill>
+                        <a:srgbClr val="E4DADD"/>
+                      </a:solidFill>
+                      <a:prstDash val="solid"/>
+                      <a:round/>
+                      <a:headEnd type="none" w="med" len="med"/>
+                      <a:tailEnd type="none" w="med" len="med"/>
+                    </a:lnT>
+                    <a:lnB w="6350" cap="flat" cmpd="sng" algn="ctr">
+                      <a:solidFill>
+                        <a:srgbClr val="E4DADD"/>
+                      </a:solidFill>
+                      <a:prstDash val="solid"/>
+                      <a:round/>
+                      <a:headEnd type="none" w="med" len="med"/>
+                      <a:tailEnd type="none" w="med" len="med"/>
+                    </a:lnB>
+                  </a:tcPr>
+                </a:tc>
+                <a:tc>
+                  <a:txBody>
+                    <a:bodyPr/>
+                    <a:lstStyle/>
+                    <a:p>
+                      <a:pPr algn="r" indent="0" marL="0">
+                        <a:buNone/>
+                      </a:pPr>
+                      <a:r>
+                        <a:rPr lang="en-US" sz="900" b="1" dirty="0">
+                          <a:solidFill>
+                            <a:srgbClr val="2E6F4E"/>
+                          </a:solidFill>
+                          <a:latin typeface="Calibri" pitchFamily="34" charset="0"/>
+                          <a:ea typeface="Calibri" pitchFamily="34" charset="-122"/>
+                          <a:cs typeface="Calibri" pitchFamily="34" charset="-120"/>
+                        </a:rPr>
+                        <a:t>1.41</a:t>
+                      </a:r>
+                      <a:endParaRPr lang="en-US" sz="900" dirty="0">
+                        <a:latin typeface="Calibri" charset="0"/>
+                        <a:ea typeface="Calibri" charset="0"/>
+                        <a:cs typeface="Calibri" charset="0"/>
+                      </a:endParaRPr>
+                    </a:p>
+                  </a:txBody>
+                  <a:tcPr marL="91440" marR="91440" marT="45720" marB="45720" anchor="ctr">
+                    <a:lnL w="6350" cap="flat" cmpd="sng" algn="ctr">
+                      <a:solidFill>
+                        <a:srgbClr val="E4DADD"/>
+                      </a:solidFill>
+                      <a:prstDash val="solid"/>
+                      <a:round/>
+                      <a:headEnd type="none" w="med" len="med"/>
+                      <a:tailEnd type="none" w="med" len="med"/>
+                    </a:lnL>
+                    <a:lnR w="6350" cap="flat" cmpd="sng" algn="ctr">
+                      <a:solidFill>
+                        <a:srgbClr val="E4DADD"/>
+                      </a:solidFill>
+                      <a:prstDash val="solid"/>
+                      <a:round/>
+                      <a:headEnd type="none" w="med" len="med"/>
+                      <a:tailEnd type="none" w="med" len="med"/>
+                    </a:lnR>
+                    <a:lnT w="6350" cap="flat" cmpd="sng" algn="ctr">
+                      <a:solidFill>
+                        <a:srgbClr val="E4DADD"/>
+                      </a:solidFill>
+                      <a:prstDash val="solid"/>
+                      <a:round/>
+                      <a:headEnd type="none" w="med" len="med"/>
+                      <a:tailEnd type="none" w="med" len="med"/>
+                    </a:lnT>
+                    <a:lnB w="6350" cap="flat" cmpd="sng" algn="ctr">
+                      <a:solidFill>
+                        <a:srgbClr val="E4DADD"/>
+                      </a:solidFill>
+                      <a:prstDash val="solid"/>
+                      <a:round/>
+                      <a:headEnd type="none" w="med" len="med"/>
+                      <a:tailEnd type="none" w="med" len="med"/>
+                    </a:lnB>
+                  </a:tcPr>
+                </a:tc>
+                <a:tc>
+                  <a:txBody>
+                    <a:bodyPr/>
+                    <a:lstStyle/>
+                    <a:p>
+                      <a:pPr algn="r" indent="0" marL="0">
+                        <a:buNone/>
+                      </a:pPr>
+                      <a:r>
+                        <a:rPr lang="en-US" sz="900" dirty="0">
+                          <a:solidFill>
+                            <a:srgbClr val="1F1A1C"/>
+                          </a:solidFill>
+                          <a:latin typeface="Calibri" pitchFamily="34" charset="0"/>
+                          <a:ea typeface="Calibri" pitchFamily="34" charset="-122"/>
+                          <a:cs typeface="Calibri" pitchFamily="34" charset="-120"/>
+                        </a:rPr>
+                        <a:t>+2.88</a:t>
+                      </a:r>
+                      <a:endParaRPr lang="en-US" sz="900" dirty="0">
+                        <a:latin typeface="Calibri" charset="0"/>
+                        <a:ea typeface="Calibri" charset="0"/>
+                        <a:cs typeface="Calibri" charset="0"/>
+                      </a:endParaRPr>
+                    </a:p>
+                  </a:txBody>
+                  <a:tcPr marL="91440" marR="91440" marT="45720" marB="45720" anchor="ctr">
+                    <a:lnL w="6350" cap="flat" cmpd="sng" algn="ctr">
+                      <a:solidFill>
+                        <a:srgbClr val="E4DADD"/>
+                      </a:solidFill>
+                      <a:prstDash val="solid"/>
+                      <a:round/>
+                      <a:headEnd type="none" w="med" len="med"/>
+                      <a:tailEnd type="none" w="med" len="med"/>
+                    </a:lnL>
+                    <a:lnR w="6350" cap="flat" cmpd="sng" algn="ctr">
+                      <a:solidFill>
+                        <a:srgbClr val="E4DADD"/>
+                      </a:solidFill>
+                      <a:prstDash val="solid"/>
+                      <a:round/>
+                      <a:headEnd type="none" w="med" len="med"/>
+                      <a:tailEnd type="none" w="med" len="med"/>
+                    </a:lnR>
+                    <a:lnT w="6350" cap="flat" cmpd="sng" algn="ctr">
+                      <a:solidFill>
+                        <a:srgbClr val="E4DADD"/>
+                      </a:solidFill>
+                      <a:prstDash val="solid"/>
+                      <a:round/>
+                      <a:headEnd type="none" w="med" len="med"/>
+                      <a:tailEnd type="none" w="med" len="med"/>
+                    </a:lnT>
+                    <a:lnB w="6350" cap="flat" cmpd="sng" algn="ctr">
+                      <a:solidFill>
+                        <a:srgbClr val="E4DADD"/>
+                      </a:solidFill>
+                      <a:prstDash val="solid"/>
+                      <a:round/>
+                      <a:headEnd type="none" w="med" len="med"/>
+                      <a:tailEnd type="none" w="med" len="med"/>
+                    </a:lnB>
+                  </a:tcPr>
+                </a:tc>
+              </a:tr>
+              <a:tr h="301752">
+                <a:tc>
+                  <a:txBody>
+                    <a:bodyPr/>
+                    <a:lstStyle/>
+                    <a:p>
+                      <a:pPr indent="0" marL="0">
+                        <a:buNone/>
+                      </a:pPr>
+                      <a:r>
+                        <a:rPr lang="en-US" sz="900" dirty="0">
+                          <a:solidFill>
+                            <a:srgbClr val="1F1A1C"/>
+                          </a:solidFill>
+                          <a:latin typeface="Calibri" pitchFamily="34" charset="0"/>
+                          <a:ea typeface="Calibri" pitchFamily="34" charset="-122"/>
+                          <a:cs typeface="Calibri" pitchFamily="34" charset="-120"/>
+                        </a:rPr>
+                        <a:t>4年目</a:t>
+                      </a:r>
+                      <a:endParaRPr lang="en-US" sz="900" dirty="0">
+                        <a:latin typeface="Calibri" charset="0"/>
+                        <a:ea typeface="Calibri" charset="0"/>
+                        <a:cs typeface="Calibri" charset="0"/>
+                      </a:endParaRPr>
+                    </a:p>
+                  </a:txBody>
+                  <a:tcPr marL="91440" marR="91440" marT="45720" marB="45720" anchor="ctr">
+                    <a:lnL w="6350" cap="flat" cmpd="sng" algn="ctr">
+                      <a:solidFill>
+                        <a:srgbClr val="E4DADD"/>
+                      </a:solidFill>
+                      <a:prstDash val="solid"/>
+                      <a:round/>
+                      <a:headEnd type="none" w="med" len="med"/>
+                      <a:tailEnd type="none" w="med" len="med"/>
+                    </a:lnL>
+                    <a:lnR w="6350" cap="flat" cmpd="sng" algn="ctr">
+                      <a:solidFill>
+                        <a:srgbClr val="E4DADD"/>
+                      </a:solidFill>
+                      <a:prstDash val="solid"/>
+                      <a:round/>
+                      <a:headEnd type="none" w="med" len="med"/>
+                      <a:tailEnd type="none" w="med" len="med"/>
+                    </a:lnR>
+                    <a:lnT w="6350" cap="flat" cmpd="sng" algn="ctr">
+                      <a:solidFill>
+                        <a:srgbClr val="E4DADD"/>
+                      </a:solidFill>
+                      <a:prstDash val="solid"/>
+                      <a:round/>
+                      <a:headEnd type="none" w="med" len="med"/>
+                      <a:tailEnd type="none" w="med" len="med"/>
+                    </a:lnT>
+                    <a:lnB w="6350" cap="flat" cmpd="sng" algn="ctr">
+                      <a:solidFill>
+                        <a:srgbClr val="E4DADD"/>
+                      </a:solidFill>
+                      <a:prstDash val="solid"/>
+                      <a:round/>
+                      <a:headEnd type="none" w="med" len="med"/>
+                      <a:tailEnd type="none" w="med" len="med"/>
+                    </a:lnB>
+                  </a:tcPr>
+                </a:tc>
+                <a:tc>
+                  <a:txBody>
+                    <a:bodyPr/>
+                    <a:lstStyle/>
+                    <a:p>
+                      <a:pPr algn="r" indent="0" marL="0">
+                        <a:buNone/>
+                      </a:pPr>
+                      <a:r>
+                        <a:rPr lang="en-US" sz="900" dirty="0">
+                          <a:solidFill>
+                            <a:srgbClr val="1F1A1C"/>
+                          </a:solidFill>
+                          <a:latin typeface="Calibri" pitchFamily="34" charset="0"/>
+                          <a:ea typeface="Calibri" pitchFamily="34" charset="-122"/>
+                          <a:cs typeface="Calibri" pitchFamily="34" charset="-120"/>
+                        </a:rPr>
+                        <a:t>14.00</a:t>
+                      </a:r>
+                      <a:endParaRPr lang="en-US" sz="900" dirty="0">
+                        <a:latin typeface="Calibri" charset="0"/>
+                        <a:ea typeface="Calibri" charset="0"/>
+                        <a:cs typeface="Calibri" charset="0"/>
+                      </a:endParaRPr>
+                    </a:p>
+                  </a:txBody>
+                  <a:tcPr marL="91440" marR="91440" marT="45720" marB="45720" anchor="ctr">
+                    <a:lnL w="6350" cap="flat" cmpd="sng" algn="ctr">
+                      <a:solidFill>
+                        <a:srgbClr val="E4DADD"/>
+                      </a:solidFill>
+                      <a:prstDash val="solid"/>
+                      <a:round/>
+                      <a:headEnd type="none" w="med" len="med"/>
+                      <a:tailEnd type="none" w="med" len="med"/>
+                    </a:lnL>
+                    <a:lnR w="6350" cap="flat" cmpd="sng" algn="ctr">
+                      <a:solidFill>
+                        <a:srgbClr val="E4DADD"/>
+                      </a:solidFill>
+                      <a:prstDash val="solid"/>
+                      <a:round/>
+                      <a:headEnd type="none" w="med" len="med"/>
+                      <a:tailEnd type="none" w="med" len="med"/>
+                    </a:lnR>
+                    <a:lnT w="6350" cap="flat" cmpd="sng" algn="ctr">
+                      <a:solidFill>
+                        <a:srgbClr val="E4DADD"/>
+                      </a:solidFill>
+                      <a:prstDash val="solid"/>
+                      <a:round/>
+                      <a:headEnd type="none" w="med" len="med"/>
+                      <a:tailEnd type="none" w="med" len="med"/>
+                    </a:lnT>
+                    <a:lnB w="6350" cap="flat" cmpd="sng" algn="ctr">
+                      <a:solidFill>
+                        <a:srgbClr val="E4DADD"/>
+                      </a:solidFill>
+                      <a:prstDash val="solid"/>
+                      <a:round/>
+                      <a:headEnd type="none" w="med" len="med"/>
+                      <a:tailEnd type="none" w="med" len="med"/>
+                    </a:lnB>
+                  </a:tcPr>
+                </a:tc>
+                <a:tc>
+                  <a:txBody>
+                    <a:bodyPr/>
+                    <a:lstStyle/>
+                    <a:p>
+                      <a:pPr algn="r" indent="0" marL="0">
+                        <a:buNone/>
+                      </a:pPr>
+                      <a:r>
+                        <a:rPr lang="en-US" sz="900" dirty="0">
+                          <a:solidFill>
+                            <a:srgbClr val="1F1A1C"/>
+                          </a:solidFill>
+                          <a:latin typeface="Calibri" pitchFamily="34" charset="0"/>
+                          <a:ea typeface="Calibri" pitchFamily="34" charset="-122"/>
+                          <a:cs typeface="Calibri" pitchFamily="34" charset="-120"/>
+                        </a:rPr>
+                        <a:t>2.00</a:t>
+                      </a:r>
+                      <a:endParaRPr lang="en-US" sz="900" dirty="0">
+                        <a:latin typeface="Calibri" charset="0"/>
+                        <a:ea typeface="Calibri" charset="0"/>
+                        <a:cs typeface="Calibri" charset="0"/>
+                      </a:endParaRPr>
+                    </a:p>
+                  </a:txBody>
+                  <a:tcPr marL="91440" marR="91440" marT="45720" marB="45720" anchor="ctr">
+                    <a:lnL w="6350" cap="flat" cmpd="sng" algn="ctr">
+                      <a:solidFill>
+                        <a:srgbClr val="E4DADD"/>
+                      </a:solidFill>
+                      <a:prstDash val="solid"/>
+                      <a:round/>
+                      <a:headEnd type="none" w="med" len="med"/>
+                      <a:tailEnd type="none" w="med" len="med"/>
+                    </a:lnL>
+                    <a:lnR w="6350" cap="flat" cmpd="sng" algn="ctr">
+                      <a:solidFill>
+                        <a:srgbClr val="E4DADD"/>
+                      </a:solidFill>
+                      <a:prstDash val="solid"/>
+                      <a:round/>
+                      <a:headEnd type="none" w="med" len="med"/>
+                      <a:tailEnd type="none" w="med" len="med"/>
+                    </a:lnR>
+                    <a:lnT w="6350" cap="flat" cmpd="sng" algn="ctr">
+                      <a:solidFill>
+                        <a:srgbClr val="E4DADD"/>
+                      </a:solidFill>
+                      <a:prstDash val="solid"/>
+                      <a:round/>
+                      <a:headEnd type="none" w="med" len="med"/>
+                      <a:tailEnd type="none" w="med" len="med"/>
+                    </a:lnT>
+                    <a:lnB w="6350" cap="flat" cmpd="sng" algn="ctr">
+                      <a:solidFill>
+                        <a:srgbClr val="E4DADD"/>
+                      </a:solidFill>
+                      <a:prstDash val="solid"/>
+                      <a:round/>
+                      <a:headEnd type="none" w="med" len="med"/>
+                      <a:tailEnd type="none" w="med" len="med"/>
+                    </a:lnB>
+                  </a:tcPr>
+                </a:tc>
+                <a:tc>
+                  <a:txBody>
+                    <a:bodyPr/>
+                    <a:lstStyle/>
+                    <a:p>
+                      <a:pPr algn="r" indent="0" marL="0">
+                        <a:buNone/>
+                      </a:pPr>
+                      <a:r>
+                        <a:rPr lang="en-US" sz="900" dirty="0">
+                          <a:solidFill>
+                            <a:srgbClr val="1F1A1C"/>
+                          </a:solidFill>
+                          <a:latin typeface="Calibri" pitchFamily="34" charset="0"/>
+                          <a:ea typeface="Calibri" pitchFamily="34" charset="-122"/>
+                          <a:cs typeface="Calibri" pitchFamily="34" charset="-120"/>
+                        </a:rPr>
+                        <a:t>0.42</a:t>
+                      </a:r>
+                      <a:endParaRPr lang="en-US" sz="900" dirty="0">
+                        <a:latin typeface="Calibri" charset="0"/>
+                        <a:ea typeface="Calibri" charset="0"/>
+                        <a:cs typeface="Calibri" charset="0"/>
+                      </a:endParaRPr>
+                    </a:p>
+                  </a:txBody>
+                  <a:tcPr marL="91440" marR="91440" marT="45720" marB="45720" anchor="ctr">
+                    <a:lnL w="6350" cap="flat" cmpd="sng" algn="ctr">
+                      <a:solidFill>
+                        <a:srgbClr val="E4DADD"/>
+                      </a:solidFill>
+                      <a:prstDash val="solid"/>
+                      <a:round/>
+                      <a:headEnd type="none" w="med" len="med"/>
+                      <a:tailEnd type="none" w="med" len="med"/>
+                    </a:lnL>
+                    <a:lnR w="6350" cap="flat" cmpd="sng" algn="ctr">
+                      <a:solidFill>
+                        <a:srgbClr val="E4DADD"/>
+                      </a:solidFill>
+                      <a:prstDash val="solid"/>
+                      <a:round/>
+                      <a:headEnd type="none" w="med" len="med"/>
+                      <a:tailEnd type="none" w="med" len="med"/>
+                    </a:lnR>
+                    <a:lnT w="6350" cap="flat" cmpd="sng" algn="ctr">
+                      <a:solidFill>
+                        <a:srgbClr val="E4DADD"/>
+                      </a:solidFill>
+                      <a:prstDash val="solid"/>
+                      <a:round/>
+                      <a:headEnd type="none" w="med" len="med"/>
+                      <a:tailEnd type="none" w="med" len="med"/>
+                    </a:lnT>
+                    <a:lnB w="6350" cap="flat" cmpd="sng" algn="ctr">
+                      <a:solidFill>
+                        <a:srgbClr val="E4DADD"/>
+                      </a:solidFill>
+                      <a:prstDash val="solid"/>
+                      <a:round/>
+                      <a:headEnd type="none" w="med" len="med"/>
+                      <a:tailEnd type="none" w="med" len="med"/>
+                    </a:lnB>
+                  </a:tcPr>
+                </a:tc>
+                <a:tc>
+                  <a:txBody>
+                    <a:bodyPr/>
+                    <a:lstStyle/>
+                    <a:p>
+                      <a:pPr algn="r" indent="0" marL="0">
+                        <a:buNone/>
+                      </a:pPr>
+                      <a:r>
+                        <a:rPr lang="en-US" sz="900" dirty="0">
+                          <a:solidFill>
+                            <a:srgbClr val="1F1A1C"/>
+                          </a:solidFill>
+                          <a:latin typeface="Calibri" pitchFamily="34" charset="0"/>
+                          <a:ea typeface="Calibri" pitchFamily="34" charset="-122"/>
+                          <a:cs typeface="Calibri" pitchFamily="34" charset="-120"/>
+                        </a:rPr>
+                        <a:t>2.42</a:t>
+                      </a:r>
+                      <a:endParaRPr lang="en-US" sz="900" dirty="0">
+                        <a:latin typeface="Calibri" charset="0"/>
+                        <a:ea typeface="Calibri" charset="0"/>
+                        <a:cs typeface="Calibri" charset="0"/>
+                      </a:endParaRPr>
+                    </a:p>
+                  </a:txBody>
+                  <a:tcPr marL="91440" marR="91440" marT="45720" marB="45720" anchor="ctr">
+                    <a:lnL w="6350" cap="flat" cmpd="sng" algn="ctr">
+                      <a:solidFill>
+                        <a:srgbClr val="E4DADD"/>
+                      </a:solidFill>
+                      <a:prstDash val="solid"/>
+                      <a:round/>
+                      <a:headEnd type="none" w="med" len="med"/>
+                      <a:tailEnd type="none" w="med" len="med"/>
+                    </a:lnL>
+                    <a:lnR w="6350" cap="flat" cmpd="sng" algn="ctr">
+                      <a:solidFill>
+                        <a:srgbClr val="E4DADD"/>
+                      </a:solidFill>
+                      <a:prstDash val="solid"/>
+                      <a:round/>
+                      <a:headEnd type="none" w="med" len="med"/>
+                      <a:tailEnd type="none" w="med" len="med"/>
+                    </a:lnR>
+                    <a:lnT w="6350" cap="flat" cmpd="sng" algn="ctr">
+                      <a:solidFill>
+                        <a:srgbClr val="E4DADD"/>
+                      </a:solidFill>
+                      <a:prstDash val="solid"/>
+                      <a:round/>
+                      <a:headEnd type="none" w="med" len="med"/>
+                      <a:tailEnd type="none" w="med" len="med"/>
+                    </a:lnT>
+                    <a:lnB w="6350" cap="flat" cmpd="sng" algn="ctr">
+                      <a:solidFill>
+                        <a:srgbClr val="E4DADD"/>
+                      </a:solidFill>
+                      <a:prstDash val="solid"/>
+                      <a:round/>
+                      <a:headEnd type="none" w="med" len="med"/>
+                      <a:tailEnd type="none" w="med" len="med"/>
+                    </a:lnB>
+                  </a:tcPr>
+                </a:tc>
+                <a:tc>
+                  <a:txBody>
+                    <a:bodyPr/>
+                    <a:lstStyle/>
+                    <a:p>
+                      <a:pPr algn="r" indent="0" marL="0">
+                        <a:buNone/>
+                      </a:pPr>
+                      <a:r>
+                        <a:rPr lang="en-US" sz="900" b="1" dirty="0">
+                          <a:solidFill>
+                            <a:srgbClr val="2E6F4E"/>
+                          </a:solidFill>
+                          <a:latin typeface="Calibri" pitchFamily="34" charset="0"/>
+                          <a:ea typeface="Calibri" pitchFamily="34" charset="-122"/>
+                          <a:cs typeface="Calibri" pitchFamily="34" charset="-120"/>
+                        </a:rPr>
+                        <a:t>1.45</a:t>
+                      </a:r>
+                      <a:endParaRPr lang="en-US" sz="900" dirty="0">
+                        <a:latin typeface="Calibri" charset="0"/>
+                        <a:ea typeface="Calibri" charset="0"/>
+                        <a:cs typeface="Calibri" charset="0"/>
+                      </a:endParaRPr>
+                    </a:p>
+                  </a:txBody>
+                  <a:tcPr marL="91440" marR="91440" marT="45720" marB="45720" anchor="ctr">
+                    <a:lnL w="6350" cap="flat" cmpd="sng" algn="ctr">
+                      <a:solidFill>
+                        <a:srgbClr val="E4DADD"/>
+                      </a:solidFill>
+                      <a:prstDash val="solid"/>
+                      <a:round/>
+                      <a:headEnd type="none" w="med" len="med"/>
+                      <a:tailEnd type="none" w="med" len="med"/>
+                    </a:lnL>
+                    <a:lnR w="6350" cap="flat" cmpd="sng" algn="ctr">
+                      <a:solidFill>
+                        <a:srgbClr val="E4DADD"/>
+                      </a:solidFill>
+                      <a:prstDash val="solid"/>
+                      <a:round/>
+                      <a:headEnd type="none" w="med" len="med"/>
+                      <a:tailEnd type="none" w="med" len="med"/>
+                    </a:lnR>
+                    <a:lnT w="6350" cap="flat" cmpd="sng" algn="ctr">
+                      <a:solidFill>
+                        <a:srgbClr val="E4DADD"/>
+                      </a:solidFill>
+                      <a:prstDash val="solid"/>
+                      <a:round/>
+                      <a:headEnd type="none" w="med" len="med"/>
+                      <a:tailEnd type="none" w="med" len="med"/>
+                    </a:lnT>
+                    <a:lnB w="6350" cap="flat" cmpd="sng" algn="ctr">
+                      <a:solidFill>
+                        <a:srgbClr val="E4DADD"/>
+                      </a:solidFill>
+                      <a:prstDash val="solid"/>
+                      <a:round/>
+                      <a:headEnd type="none" w="med" len="med"/>
+                      <a:tailEnd type="none" w="med" len="med"/>
+                    </a:lnB>
+                  </a:tcPr>
+                </a:tc>
+                <a:tc>
+                  <a:txBody>
+                    <a:bodyPr/>
+                    <a:lstStyle/>
+                    <a:p>
+                      <a:pPr algn="r" indent="0" marL="0">
+                        <a:buNone/>
+                      </a:pPr>
+                      <a:r>
+                        <a:rPr lang="en-US" sz="900" dirty="0">
+                          <a:solidFill>
+                            <a:srgbClr val="1F1A1C"/>
+                          </a:solidFill>
+                          <a:latin typeface="Calibri" pitchFamily="34" charset="0"/>
+                          <a:ea typeface="Calibri" pitchFamily="34" charset="-122"/>
+                          <a:cs typeface="Calibri" pitchFamily="34" charset="-120"/>
+                        </a:rPr>
+                        <a:t>+3.96</a:t>
+                      </a:r>
+                      <a:endParaRPr lang="en-US" sz="900" dirty="0">
+                        <a:latin typeface="Calibri" charset="0"/>
+                        <a:ea typeface="Calibri" charset="0"/>
+                        <a:cs typeface="Calibri" charset="0"/>
+                      </a:endParaRPr>
+                    </a:p>
+                  </a:txBody>
+                  <a:tcPr marL="91440" marR="91440" marT="45720" marB="45720" anchor="ctr">
+                    <a:lnL w="6350" cap="flat" cmpd="sng" algn="ctr">
+                      <a:solidFill>
+                        <a:srgbClr val="E4DADD"/>
+                      </a:solidFill>
+                      <a:prstDash val="solid"/>
+                      <a:round/>
+                      <a:headEnd type="none" w="med" len="med"/>
+                      <a:tailEnd type="none" w="med" len="med"/>
+                    </a:lnL>
+                    <a:lnR w="6350" cap="flat" cmpd="sng" algn="ctr">
+                      <a:solidFill>
+                        <a:srgbClr val="E4DADD"/>
+                      </a:solidFill>
+                      <a:prstDash val="solid"/>
+                      <a:round/>
+                      <a:headEnd type="none" w="med" len="med"/>
+                      <a:tailEnd type="none" w="med" len="med"/>
+                    </a:lnR>
+                    <a:lnT w="6350" cap="flat" cmpd="sng" algn="ctr">
+                      <a:solidFill>
+                        <a:srgbClr val="E4DADD"/>
+                      </a:solidFill>
+                      <a:prstDash val="solid"/>
+                      <a:round/>
+                      <a:headEnd type="none" w="med" len="med"/>
+                      <a:tailEnd type="none" w="med" len="med"/>
+                    </a:lnT>
+                    <a:lnB w="6350" cap="flat" cmpd="sng" algn="ctr">
+                      <a:solidFill>
+                        <a:srgbClr val="E4DADD"/>
+                      </a:solidFill>
+                      <a:prstDash val="solid"/>
+                      <a:round/>
+                      <a:headEnd type="none" w="med" len="med"/>
+                      <a:tailEnd type="none" w="med" len="med"/>
+                    </a:lnB>
+                  </a:tcPr>
+                </a:tc>
+              </a:tr>
+              <a:tr h="301752">
+                <a:tc>
+                  <a:txBody>
+                    <a:bodyPr/>
+                    <a:lstStyle/>
+                    <a:p>
+                      <a:pPr indent="0" marL="0">
+                        <a:buNone/>
+                      </a:pPr>
+                      <a:r>
+                        <a:rPr lang="en-US" sz="900" dirty="0">
+                          <a:solidFill>
+                            <a:srgbClr val="1F1A1C"/>
+                          </a:solidFill>
+                          <a:latin typeface="Calibri" pitchFamily="34" charset="0"/>
+                          <a:ea typeface="Calibri" pitchFamily="34" charset="-122"/>
+                          <a:cs typeface="Calibri" pitchFamily="34" charset="-120"/>
+                        </a:rPr>
+                        <a:t>5年目</a:t>
+                      </a:r>
+                      <a:endParaRPr lang="en-US" sz="900" dirty="0">
+                        <a:latin typeface="Calibri" charset="0"/>
+                        <a:ea typeface="Calibri" charset="0"/>
+                        <a:cs typeface="Calibri" charset="0"/>
+                      </a:endParaRPr>
+                    </a:p>
+                  </a:txBody>
+                  <a:tcPr marL="91440" marR="91440" marT="45720" marB="45720" anchor="ctr">
+                    <a:lnL w="6350" cap="flat" cmpd="sng" algn="ctr">
+                      <a:solidFill>
+                        <a:srgbClr val="E4DADD"/>
+                      </a:solidFill>
+                      <a:prstDash val="solid"/>
+                      <a:round/>
+                      <a:headEnd type="none" w="med" len="med"/>
+                      <a:tailEnd type="none" w="med" len="med"/>
+                    </a:lnL>
+                    <a:lnR w="6350" cap="flat" cmpd="sng" algn="ctr">
+                      <a:solidFill>
+                        <a:srgbClr val="E4DADD"/>
+                      </a:solidFill>
+                      <a:prstDash val="solid"/>
+                      <a:round/>
+                      <a:headEnd type="none" w="med" len="med"/>
+                      <a:tailEnd type="none" w="med" len="med"/>
+                    </a:lnR>
+                    <a:lnT w="6350" cap="flat" cmpd="sng" algn="ctr">
+                      <a:solidFill>
+                        <a:srgbClr val="E4DADD"/>
+                      </a:solidFill>
+                      <a:prstDash val="solid"/>
+                      <a:round/>
+                      <a:headEnd type="none" w="med" len="med"/>
+                      <a:tailEnd type="none" w="med" len="med"/>
+                    </a:lnT>
+                    <a:lnB w="6350" cap="flat" cmpd="sng" algn="ctr">
+                      <a:solidFill>
+                        <a:srgbClr val="E4DADD"/>
+                      </a:solidFill>
+                      <a:prstDash val="solid"/>
+                      <a:round/>
+                      <a:headEnd type="none" w="med" len="med"/>
+                      <a:tailEnd type="none" w="med" len="med"/>
+                    </a:lnB>
+                  </a:tcPr>
+                </a:tc>
+                <a:tc>
+                  <a:txBody>
+                    <a:bodyPr/>
+                    <a:lstStyle/>
+                    <a:p>
+                      <a:pPr algn="r" indent="0" marL="0">
+                        <a:buNone/>
+                      </a:pPr>
+                      <a:r>
+                        <a:rPr lang="en-US" sz="900" dirty="0">
+                          <a:solidFill>
+                            <a:srgbClr val="1F1A1C"/>
+                          </a:solidFill>
+                          <a:latin typeface="Calibri" pitchFamily="34" charset="0"/>
+                          <a:ea typeface="Calibri" pitchFamily="34" charset="-122"/>
+                          <a:cs typeface="Calibri" pitchFamily="34" charset="-120"/>
+                        </a:rPr>
+                        <a:t>12.00</a:t>
+                      </a:r>
+                      <a:endParaRPr lang="en-US" sz="900" dirty="0">
+                        <a:latin typeface="Calibri" charset="0"/>
+                        <a:ea typeface="Calibri" charset="0"/>
+                        <a:cs typeface="Calibri" charset="0"/>
+                      </a:endParaRPr>
+                    </a:p>
+                  </a:txBody>
+                  <a:tcPr marL="91440" marR="91440" marT="45720" marB="45720" anchor="ctr">
+                    <a:lnL w="6350" cap="flat" cmpd="sng" algn="ctr">
+                      <a:solidFill>
+                        <a:srgbClr val="E4DADD"/>
+                      </a:solidFill>
+                      <a:prstDash val="solid"/>
+                      <a:round/>
+                      <a:headEnd type="none" w="med" len="med"/>
+                      <a:tailEnd type="none" w="med" len="med"/>
+                    </a:lnL>
+                    <a:lnR w="6350" cap="flat" cmpd="sng" algn="ctr">
+                      <a:solidFill>
+                        <a:srgbClr val="E4DADD"/>
+                      </a:solidFill>
+                      <a:prstDash val="solid"/>
+                      <a:round/>
+                      <a:headEnd type="none" w="med" len="med"/>
+                      <a:tailEnd type="none" w="med" len="med"/>
+                    </a:lnR>
+                    <a:lnT w="6350" cap="flat" cmpd="sng" algn="ctr">
+                      <a:solidFill>
+                        <a:srgbClr val="E4DADD"/>
+                      </a:solidFill>
+                      <a:prstDash val="solid"/>
+                      <a:round/>
+                      <a:headEnd type="none" w="med" len="med"/>
+                      <a:tailEnd type="none" w="med" len="med"/>
+                    </a:lnT>
+                    <a:lnB w="6350" cap="flat" cmpd="sng" algn="ctr">
+                      <a:solidFill>
+                        <a:srgbClr val="E4DADD"/>
+                      </a:solidFill>
+                      <a:prstDash val="solid"/>
+                      <a:round/>
+                      <a:headEnd type="none" w="med" len="med"/>
+                      <a:tailEnd type="none" w="med" len="med"/>
+                    </a:lnB>
+                  </a:tcPr>
+                </a:tc>
+                <a:tc>
+                  <a:txBody>
+                    <a:bodyPr/>
+                    <a:lstStyle/>
+                    <a:p>
+                      <a:pPr algn="r" indent="0" marL="0">
+                        <a:buNone/>
+                      </a:pPr>
+                      <a:r>
+                        <a:rPr lang="en-US" sz="900" dirty="0">
+                          <a:solidFill>
+                            <a:srgbClr val="1F1A1C"/>
+                          </a:solidFill>
+                          <a:latin typeface="Calibri" pitchFamily="34" charset="0"/>
+                          <a:ea typeface="Calibri" pitchFamily="34" charset="-122"/>
+                          <a:cs typeface="Calibri" pitchFamily="34" charset="-120"/>
+                        </a:rPr>
+                        <a:t>2.00</a:t>
+                      </a:r>
+                      <a:endParaRPr lang="en-US" sz="900" dirty="0">
+                        <a:latin typeface="Calibri" charset="0"/>
+                        <a:ea typeface="Calibri" charset="0"/>
+                        <a:cs typeface="Calibri" charset="0"/>
+                      </a:endParaRPr>
+                    </a:p>
+                  </a:txBody>
+                  <a:tcPr marL="91440" marR="91440" marT="45720" marB="45720" anchor="ctr">
+                    <a:lnL w="6350" cap="flat" cmpd="sng" algn="ctr">
+                      <a:solidFill>
+                        <a:srgbClr val="E4DADD"/>
+                      </a:solidFill>
+                      <a:prstDash val="solid"/>
+                      <a:round/>
+                      <a:headEnd type="none" w="med" len="med"/>
+                      <a:tailEnd type="none" w="med" len="med"/>
+                    </a:lnL>
+                    <a:lnR w="6350" cap="flat" cmpd="sng" algn="ctr">
+                      <a:solidFill>
+                        <a:srgbClr val="E4DADD"/>
+                      </a:solidFill>
+                      <a:prstDash val="solid"/>
+                      <a:round/>
+                      <a:headEnd type="none" w="med" len="med"/>
+                      <a:tailEnd type="none" w="med" len="med"/>
+                    </a:lnR>
+                    <a:lnT w="6350" cap="flat" cmpd="sng" algn="ctr">
+                      <a:solidFill>
+                        <a:srgbClr val="E4DADD"/>
+                      </a:solidFill>
+                      <a:prstDash val="solid"/>
+                      <a:round/>
+                      <a:headEnd type="none" w="med" len="med"/>
+                      <a:tailEnd type="none" w="med" len="med"/>
+                    </a:lnT>
+                    <a:lnB w="6350" cap="flat" cmpd="sng" algn="ctr">
+                      <a:solidFill>
+                        <a:srgbClr val="E4DADD"/>
+                      </a:solidFill>
+                      <a:prstDash val="solid"/>
+                      <a:round/>
+                      <a:headEnd type="none" w="med" len="med"/>
+                      <a:tailEnd type="none" w="med" len="med"/>
+                    </a:lnB>
+                  </a:tcPr>
+                </a:tc>
+                <a:tc>
+                  <a:txBody>
+                    <a:bodyPr/>
+                    <a:lstStyle/>
+                    <a:p>
+                      <a:pPr algn="r" indent="0" marL="0">
+                        <a:buNone/>
+                      </a:pPr>
+                      <a:r>
+                        <a:rPr lang="en-US" sz="900" dirty="0">
+                          <a:solidFill>
+                            <a:srgbClr val="1F1A1C"/>
+                          </a:solidFill>
+                          <a:latin typeface="Calibri" pitchFamily="34" charset="0"/>
+                          <a:ea typeface="Calibri" pitchFamily="34" charset="-122"/>
+                          <a:cs typeface="Calibri" pitchFamily="34" charset="-120"/>
+                        </a:rPr>
+                        <a:t>0.36</a:t>
+                      </a:r>
+                      <a:endParaRPr lang="en-US" sz="900" dirty="0">
+                        <a:latin typeface="Calibri" charset="0"/>
+                        <a:ea typeface="Calibri" charset="0"/>
+                        <a:cs typeface="Calibri" charset="0"/>
+                      </a:endParaRPr>
+                    </a:p>
+                  </a:txBody>
+                  <a:tcPr marL="91440" marR="91440" marT="45720" marB="45720" anchor="ctr">
+                    <a:lnL w="6350" cap="flat" cmpd="sng" algn="ctr">
+                      <a:solidFill>
+                        <a:srgbClr val="E4DADD"/>
+                      </a:solidFill>
+                      <a:prstDash val="solid"/>
+                      <a:round/>
+                      <a:headEnd type="none" w="med" len="med"/>
+                      <a:tailEnd type="none" w="med" len="med"/>
+                    </a:lnL>
+                    <a:lnR w="6350" cap="flat" cmpd="sng" algn="ctr">
+                      <a:solidFill>
+                        <a:srgbClr val="E4DADD"/>
+                      </a:solidFill>
+                      <a:prstDash val="solid"/>
+                      <a:round/>
+                      <a:headEnd type="none" w="med" len="med"/>
+                      <a:tailEnd type="none" w="med" len="med"/>
+                    </a:lnR>
+                    <a:lnT w="6350" cap="flat" cmpd="sng" algn="ctr">
+                      <a:solidFill>
+                        <a:srgbClr val="E4DADD"/>
+                      </a:solidFill>
+                      <a:prstDash val="solid"/>
+                      <a:round/>
+                      <a:headEnd type="none" w="med" len="med"/>
+                      <a:tailEnd type="none" w="med" len="med"/>
+                    </a:lnT>
+                    <a:lnB w="6350" cap="flat" cmpd="sng" algn="ctr">
+                      <a:solidFill>
+                        <a:srgbClr val="E4DADD"/>
+                      </a:solidFill>
+                      <a:prstDash val="solid"/>
+                      <a:round/>
+                      <a:headEnd type="none" w="med" len="med"/>
+                      <a:tailEnd type="none" w="med" len="med"/>
+                    </a:lnB>
+                  </a:tcPr>
+                </a:tc>
+                <a:tc>
+                  <a:txBody>
+                    <a:bodyPr/>
+                    <a:lstStyle/>
+                    <a:p>
+                      <a:pPr algn="r" indent="0" marL="0">
+                        <a:buNone/>
+                      </a:pPr>
+                      <a:r>
+                        <a:rPr lang="en-US" sz="900" dirty="0">
+                          <a:solidFill>
+                            <a:srgbClr val="1F1A1C"/>
+                          </a:solidFill>
+                          <a:latin typeface="Calibri" pitchFamily="34" charset="0"/>
+                          <a:ea typeface="Calibri" pitchFamily="34" charset="-122"/>
+                          <a:cs typeface="Calibri" pitchFamily="34" charset="-120"/>
+                        </a:rPr>
+                        <a:t>2.36</a:t>
+                      </a:r>
+                      <a:endParaRPr lang="en-US" sz="900" dirty="0">
+                        <a:latin typeface="Calibri" charset="0"/>
+                        <a:ea typeface="Calibri" charset="0"/>
+                        <a:cs typeface="Calibri" charset="0"/>
+                      </a:endParaRPr>
+                    </a:p>
+                  </a:txBody>
+                  <a:tcPr marL="91440" marR="91440" marT="45720" marB="45720" anchor="ctr">
+                    <a:lnL w="6350" cap="flat" cmpd="sng" algn="ctr">
+                      <a:solidFill>
+                        <a:srgbClr val="E4DADD"/>
+                      </a:solidFill>
+                      <a:prstDash val="solid"/>
+                      <a:round/>
+                      <a:headEnd type="none" w="med" len="med"/>
+                      <a:tailEnd type="none" w="med" len="med"/>
+                    </a:lnL>
+                    <a:lnR w="6350" cap="flat" cmpd="sng" algn="ctr">
+                      <a:solidFill>
+                        <a:srgbClr val="E4DADD"/>
+                      </a:solidFill>
+                      <a:prstDash val="solid"/>
+                      <a:round/>
+                      <a:headEnd type="none" w="med" len="med"/>
+                      <a:tailEnd type="none" w="med" len="med"/>
+                    </a:lnR>
+                    <a:lnT w="6350" cap="flat" cmpd="sng" algn="ctr">
+                      <a:solidFill>
+                        <a:srgbClr val="E4DADD"/>
+                      </a:solidFill>
+                      <a:prstDash val="solid"/>
+                      <a:round/>
+                      <a:headEnd type="none" w="med" len="med"/>
+                      <a:tailEnd type="none" w="med" len="med"/>
+                    </a:lnT>
+                    <a:lnB w="6350" cap="flat" cmpd="sng" algn="ctr">
+                      <a:solidFill>
+                        <a:srgbClr val="E4DADD"/>
+                      </a:solidFill>
+                      <a:prstDash val="solid"/>
+                      <a:round/>
+                      <a:headEnd type="none" w="med" len="med"/>
+                      <a:tailEnd type="none" w="med" len="med"/>
+                    </a:lnB>
+                  </a:tcPr>
+                </a:tc>
+                <a:tc>
+                  <a:txBody>
+                    <a:bodyPr/>
+                    <a:lstStyle/>
+                    <a:p>
+                      <a:pPr algn="r" indent="0" marL="0">
+                        <a:buNone/>
+                      </a:pPr>
+                      <a:r>
+                        <a:rPr lang="en-US" sz="900" b="1" dirty="0">
+                          <a:solidFill>
+                            <a:srgbClr val="2E6F4E"/>
+                          </a:solidFill>
+                          <a:latin typeface="Calibri" pitchFamily="34" charset="0"/>
+                          <a:ea typeface="Calibri" pitchFamily="34" charset="-122"/>
+                          <a:cs typeface="Calibri" pitchFamily="34" charset="-120"/>
+                        </a:rPr>
+                        <a:t>1.48</a:t>
+                      </a:r>
+                      <a:endParaRPr lang="en-US" sz="900" dirty="0">
+                        <a:latin typeface="Calibri" charset="0"/>
+                        <a:ea typeface="Calibri" charset="0"/>
+                        <a:cs typeface="Calibri" charset="0"/>
+                      </a:endParaRPr>
+                    </a:p>
+                  </a:txBody>
+                  <a:tcPr marL="91440" marR="91440" marT="45720" marB="45720" anchor="ctr">
+                    <a:lnL w="6350" cap="flat" cmpd="sng" algn="ctr">
+                      <a:solidFill>
+                        <a:srgbClr val="E4DADD"/>
+                      </a:solidFill>
+                      <a:prstDash val="solid"/>
+                      <a:round/>
+                      <a:headEnd type="none" w="med" len="med"/>
+                      <a:tailEnd type="none" w="med" len="med"/>
+                    </a:lnL>
+                    <a:lnR w="6350" cap="flat" cmpd="sng" algn="ctr">
+                      <a:solidFill>
+                        <a:srgbClr val="E4DADD"/>
+                      </a:solidFill>
+                      <a:prstDash val="solid"/>
+                      <a:round/>
+                      <a:headEnd type="none" w="med" len="med"/>
+                      <a:tailEnd type="none" w="med" len="med"/>
+                    </a:lnR>
+                    <a:lnT w="6350" cap="flat" cmpd="sng" algn="ctr">
+                      <a:solidFill>
+                        <a:srgbClr val="E4DADD"/>
+                      </a:solidFill>
+                      <a:prstDash val="solid"/>
+                      <a:round/>
+                      <a:headEnd type="none" w="med" len="med"/>
+                      <a:tailEnd type="none" w="med" len="med"/>
+                    </a:lnT>
+                    <a:lnB w="6350" cap="flat" cmpd="sng" algn="ctr">
+                      <a:solidFill>
+                        <a:srgbClr val="E4DADD"/>
+                      </a:solidFill>
+                      <a:prstDash val="solid"/>
+                      <a:round/>
+                      <a:headEnd type="none" w="med" len="med"/>
+                      <a:tailEnd type="none" w="med" len="med"/>
+                    </a:lnB>
+                  </a:tcPr>
+                </a:tc>
+                <a:tc>
+                  <a:txBody>
+                    <a:bodyPr/>
+                    <a:lstStyle/>
+                    <a:p>
+                      <a:pPr algn="r" indent="0" marL="0">
+                        <a:buNone/>
+                      </a:pPr>
+                      <a:r>
+                        <a:rPr lang="en-US" sz="900" dirty="0">
+                          <a:solidFill>
+                            <a:srgbClr val="1F1A1C"/>
+                          </a:solidFill>
+                          <a:latin typeface="Calibri" pitchFamily="34" charset="0"/>
+                          <a:ea typeface="Calibri" pitchFamily="34" charset="-122"/>
+                          <a:cs typeface="Calibri" pitchFamily="34" charset="-120"/>
+                        </a:rPr>
+                        <a:t>+5.10</a:t>
+                      </a:r>
+                      <a:endParaRPr lang="en-US" sz="900" dirty="0">
+                        <a:latin typeface="Calibri" charset="0"/>
+                        <a:ea typeface="Calibri" charset="0"/>
+                        <a:cs typeface="Calibri" charset="0"/>
+                      </a:endParaRPr>
+                    </a:p>
+                  </a:txBody>
+                  <a:tcPr marL="91440" marR="91440" marT="45720" marB="45720" anchor="ctr">
+                    <a:lnL w="6350" cap="flat" cmpd="sng" algn="ctr">
+                      <a:solidFill>
+                        <a:srgbClr val="E4DADD"/>
+                      </a:solidFill>
+                      <a:prstDash val="solid"/>
+                      <a:round/>
+                      <a:headEnd type="none" w="med" len="med"/>
+                      <a:tailEnd type="none" w="med" len="med"/>
+                    </a:lnL>
+                    <a:lnR w="6350" cap="flat" cmpd="sng" algn="ctr">
+                      <a:solidFill>
+                        <a:srgbClr val="E4DADD"/>
+                      </a:solidFill>
+                      <a:prstDash val="solid"/>
+                      <a:round/>
+                      <a:headEnd type="none" w="med" len="med"/>
+                      <a:tailEnd type="none" w="med" len="med"/>
+                    </a:lnR>
+                    <a:lnT w="6350" cap="flat" cmpd="sng" algn="ctr">
+                      <a:solidFill>
+                        <a:srgbClr val="E4DADD"/>
+                      </a:solidFill>
+                      <a:prstDash val="solid"/>
+                      <a:round/>
+                      <a:headEnd type="none" w="med" len="med"/>
+                      <a:tailEnd type="none" w="med" len="med"/>
+                    </a:lnT>
+                    <a:lnB w="6350" cap="flat" cmpd="sng" algn="ctr">
+                      <a:solidFill>
+                        <a:srgbClr val="E4DADD"/>
+                      </a:solidFill>
+                      <a:prstDash val="solid"/>
+                      <a:round/>
+                      <a:headEnd type="none" w="med" len="med"/>
+                      <a:tailEnd type="none" w="med" len="med"/>
+                    </a:lnB>
+                  </a:tcPr>
+                </a:tc>
+              </a:tr>
+              <a:tr h="301752">
+                <a:tc>
+                  <a:txBody>
+                    <a:bodyPr/>
+                    <a:lstStyle/>
+                    <a:p>
+                      <a:pPr indent="0" marL="0">
+                        <a:buNone/>
+                      </a:pPr>
+                      <a:r>
+                        <a:rPr lang="en-US" sz="900" dirty="0">
+                          <a:solidFill>
+                            <a:srgbClr val="1F1A1C"/>
+                          </a:solidFill>
+                          <a:latin typeface="Calibri" pitchFamily="34" charset="0"/>
+                          <a:ea typeface="Calibri" pitchFamily="34" charset="-122"/>
+                          <a:cs typeface="Calibri" pitchFamily="34" charset="-120"/>
+                        </a:rPr>
+                        <a:t>6年目</a:t>
+                      </a:r>
+                      <a:endParaRPr lang="en-US" sz="900" dirty="0">
+                        <a:latin typeface="Calibri" charset="0"/>
+                        <a:ea typeface="Calibri" charset="0"/>
+                        <a:cs typeface="Calibri" charset="0"/>
+                      </a:endParaRPr>
+                    </a:p>
+                  </a:txBody>
+                  <a:tcPr marL="91440" marR="91440" marT="45720" marB="45720" anchor="ctr">
+                    <a:lnL w="6350" cap="flat" cmpd="sng" algn="ctr">
+                      <a:solidFill>
+                        <a:srgbClr val="E4DADD"/>
+                      </a:solidFill>
+                      <a:prstDash val="solid"/>
+                      <a:round/>
+                      <a:headEnd type="none" w="med" len="med"/>
+                      <a:tailEnd type="none" w="med" len="med"/>
+                    </a:lnL>
+                    <a:lnR w="6350" cap="flat" cmpd="sng" algn="ctr">
+                      <a:solidFill>
+                        <a:srgbClr val="E4DADD"/>
+                      </a:solidFill>
+                      <a:prstDash val="solid"/>
+                      <a:round/>
+                      <a:headEnd type="none" w="med" len="med"/>
+                      <a:tailEnd type="none" w="med" len="med"/>
+                    </a:lnR>
+                    <a:lnT w="6350" cap="flat" cmpd="sng" algn="ctr">
+                      <a:solidFill>
+                        <a:srgbClr val="E4DADD"/>
+                      </a:solidFill>
+                      <a:prstDash val="solid"/>
+                      <a:round/>
+                      <a:headEnd type="none" w="med" len="med"/>
+                      <a:tailEnd type="none" w="med" len="med"/>
+                    </a:lnT>
+                    <a:lnB w="6350" cap="flat" cmpd="sng" algn="ctr">
+                      <a:solidFill>
+                        <a:srgbClr val="E4DADD"/>
+                      </a:solidFill>
+                      <a:prstDash val="solid"/>
+                      <a:round/>
+                      <a:headEnd type="none" w="med" len="med"/>
+                      <a:tailEnd type="none" w="med" len="med"/>
+                    </a:lnB>
+                  </a:tcPr>
+                </a:tc>
+                <a:tc>
+                  <a:txBody>
+                    <a:bodyPr/>
+                    <a:lstStyle/>
+                    <a:p>
+                      <a:pPr algn="r" indent="0" marL="0">
+                        <a:buNone/>
+                      </a:pPr>
+                      <a:r>
+                        <a:rPr lang="en-US" sz="900" dirty="0">
+                          <a:solidFill>
+                            <a:srgbClr val="1F1A1C"/>
+                          </a:solidFill>
+                          <a:latin typeface="Calibri" pitchFamily="34" charset="0"/>
+                          <a:ea typeface="Calibri" pitchFamily="34" charset="-122"/>
+                          <a:cs typeface="Calibri" pitchFamily="34" charset="-120"/>
+                        </a:rPr>
+                        <a:t>10.00</a:t>
+                      </a:r>
+                      <a:endParaRPr lang="en-US" sz="900" dirty="0">
+                        <a:latin typeface="Calibri" charset="0"/>
+                        <a:ea typeface="Calibri" charset="0"/>
+                        <a:cs typeface="Calibri" charset="0"/>
+                      </a:endParaRPr>
+                    </a:p>
+                  </a:txBody>
+                  <a:tcPr marL="91440" marR="91440" marT="45720" marB="45720" anchor="ctr">
+                    <a:lnL w="6350" cap="flat" cmpd="sng" algn="ctr">
+                      <a:solidFill>
+                        <a:srgbClr val="E4DADD"/>
+                      </a:solidFill>
+                      <a:prstDash val="solid"/>
+                      <a:round/>
+                      <a:headEnd type="none" w="med" len="med"/>
+                      <a:tailEnd type="none" w="med" len="med"/>
+                    </a:lnL>
+                    <a:lnR w="6350" cap="flat" cmpd="sng" algn="ctr">
+                      <a:solidFill>
+                        <a:srgbClr val="E4DADD"/>
+                      </a:solidFill>
+                      <a:prstDash val="solid"/>
+                      <a:round/>
+                      <a:headEnd type="none" w="med" len="med"/>
+                      <a:tailEnd type="none" w="med" len="med"/>
+                    </a:lnR>
+                    <a:lnT w="6350" cap="flat" cmpd="sng" algn="ctr">
+                      <a:solidFill>
+                        <a:srgbClr val="E4DADD"/>
+                      </a:solidFill>
+                      <a:prstDash val="solid"/>
+                      <a:round/>
+                      <a:headEnd type="none" w="med" len="med"/>
+                      <a:tailEnd type="none" w="med" len="med"/>
+                    </a:lnT>
+                    <a:lnB w="6350" cap="flat" cmpd="sng" algn="ctr">
+                      <a:solidFill>
+                        <a:srgbClr val="E4DADD"/>
+                      </a:solidFill>
+                      <a:prstDash val="solid"/>
+                      <a:round/>
+                      <a:headEnd type="none" w="med" len="med"/>
+                      <a:tailEnd type="none" w="med" len="med"/>
+                    </a:lnB>
+                  </a:tcPr>
+                </a:tc>
+                <a:tc>
+                  <a:txBody>
+                    <a:bodyPr/>
+                    <a:lstStyle/>
+                    <a:p>
+                      <a:pPr algn="r" indent="0" marL="0">
+                        <a:buNone/>
+                      </a:pPr>
+                      <a:r>
+                        <a:rPr lang="en-US" sz="900" dirty="0">
+                          <a:solidFill>
+                            <a:srgbClr val="1F1A1C"/>
+                          </a:solidFill>
+                          <a:latin typeface="Calibri" pitchFamily="34" charset="0"/>
+                          <a:ea typeface="Calibri" pitchFamily="34" charset="-122"/>
+                          <a:cs typeface="Calibri" pitchFamily="34" charset="-120"/>
+                        </a:rPr>
+                        <a:t>2.00</a:t>
+                      </a:r>
+                      <a:endParaRPr lang="en-US" sz="900" dirty="0">
+                        <a:latin typeface="Calibri" charset="0"/>
+                        <a:ea typeface="Calibri" charset="0"/>
+                        <a:cs typeface="Calibri" charset="0"/>
+                      </a:endParaRPr>
+                    </a:p>
+                  </a:txBody>
+                  <a:tcPr marL="91440" marR="91440" marT="45720" marB="45720" anchor="ctr">
+                    <a:lnL w="6350" cap="flat" cmpd="sng" algn="ctr">
+                      <a:solidFill>
+                        <a:srgbClr val="E4DADD"/>
+                      </a:solidFill>
+                      <a:prstDash val="solid"/>
+                      <a:round/>
+                      <a:headEnd type="none" w="med" len="med"/>
+                      <a:tailEnd type="none" w="med" len="med"/>
+                    </a:lnL>
+                    <a:lnR w="6350" cap="flat" cmpd="sng" algn="ctr">
+                      <a:solidFill>
+                        <a:srgbClr val="E4DADD"/>
+                      </a:solidFill>
+                      <a:prstDash val="solid"/>
+                      <a:round/>
+                      <a:headEnd type="none" w="med" len="med"/>
+                      <a:tailEnd type="none" w="med" len="med"/>
+                    </a:lnR>
+                    <a:lnT w="6350" cap="flat" cmpd="sng" algn="ctr">
+                      <a:solidFill>
+                        <a:srgbClr val="E4DADD"/>
+                      </a:solidFill>
+                      <a:prstDash val="solid"/>
+                      <a:round/>
+                      <a:headEnd type="none" w="med" len="med"/>
+                      <a:tailEnd type="none" w="med" len="med"/>
+                    </a:lnT>
+                    <a:lnB w="6350" cap="flat" cmpd="sng" algn="ctr">
+                      <a:solidFill>
+                        <a:srgbClr val="E4DADD"/>
+                      </a:solidFill>
+                      <a:prstDash val="solid"/>
+                      <a:round/>
+                      <a:headEnd type="none" w="med" len="med"/>
+                      <a:tailEnd type="none" w="med" len="med"/>
+                    </a:lnB>
+                  </a:tcPr>
+                </a:tc>
+                <a:tc>
+                  <a:txBody>
+                    <a:bodyPr/>
+                    <a:lstStyle/>
+                    <a:p>
+                      <a:pPr algn="r" indent="0" marL="0">
+                        <a:buNone/>
+                      </a:pPr>
+                      <a:r>
+                        <a:rPr lang="en-US" sz="900" dirty="0">
+                          <a:solidFill>
+                            <a:srgbClr val="1F1A1C"/>
+                          </a:solidFill>
+                          <a:latin typeface="Calibri" pitchFamily="34" charset="0"/>
+                          <a:ea typeface="Calibri" pitchFamily="34" charset="-122"/>
+                          <a:cs typeface="Calibri" pitchFamily="34" charset="-120"/>
+                        </a:rPr>
+                        <a:t>0.30</a:t>
+                      </a:r>
+                      <a:endParaRPr lang="en-US" sz="900" dirty="0">
+                        <a:latin typeface="Calibri" charset="0"/>
+                        <a:ea typeface="Calibri" charset="0"/>
+                        <a:cs typeface="Calibri" charset="0"/>
+                      </a:endParaRPr>
+                    </a:p>
+                  </a:txBody>
+                  <a:tcPr marL="91440" marR="91440" marT="45720" marB="45720" anchor="ctr">
+                    <a:lnL w="6350" cap="flat" cmpd="sng" algn="ctr">
+                      <a:solidFill>
+                        <a:srgbClr val="E4DADD"/>
+                      </a:solidFill>
+                      <a:prstDash val="solid"/>
+                      <a:round/>
+                      <a:headEnd type="none" w="med" len="med"/>
+                      <a:tailEnd type="none" w="med" len="med"/>
+                    </a:lnL>
+                    <a:lnR w="6350" cap="flat" cmpd="sng" algn="ctr">
+                      <a:solidFill>
+                        <a:srgbClr val="E4DADD"/>
+                      </a:solidFill>
+                      <a:prstDash val="solid"/>
+                      <a:round/>
+                      <a:headEnd type="none" w="med" len="med"/>
+                      <a:tailEnd type="none" w="med" len="med"/>
+                    </a:lnR>
+                    <a:lnT w="6350" cap="flat" cmpd="sng" algn="ctr">
+                      <a:solidFill>
+                        <a:srgbClr val="E4DADD"/>
+                      </a:solidFill>
+                      <a:prstDash val="solid"/>
+                      <a:round/>
+                      <a:headEnd type="none" w="med" len="med"/>
+                      <a:tailEnd type="none" w="med" len="med"/>
+                    </a:lnT>
+                    <a:lnB w="6350" cap="flat" cmpd="sng" algn="ctr">
+                      <a:solidFill>
+                        <a:srgbClr val="E4DADD"/>
+                      </a:solidFill>
+                      <a:prstDash val="solid"/>
+                      <a:round/>
+                      <a:headEnd type="none" w="med" len="med"/>
+                      <a:tailEnd type="none" w="med" len="med"/>
+                    </a:lnB>
+                  </a:tcPr>
+                </a:tc>
+                <a:tc>
+                  <a:txBody>
+                    <a:bodyPr/>
+                    <a:lstStyle/>
+                    <a:p>
+                      <a:pPr algn="r" indent="0" marL="0">
+                        <a:buNone/>
+                      </a:pPr>
+                      <a:r>
+                        <a:rPr lang="en-US" sz="900" dirty="0">
+                          <a:solidFill>
+                            <a:srgbClr val="1F1A1C"/>
+                          </a:solidFill>
+                          <a:latin typeface="Calibri" pitchFamily="34" charset="0"/>
+                          <a:ea typeface="Calibri" pitchFamily="34" charset="-122"/>
+                          <a:cs typeface="Calibri" pitchFamily="34" charset="-120"/>
+                        </a:rPr>
+                        <a:t>2.30</a:t>
+                      </a:r>
+                      <a:endParaRPr lang="en-US" sz="900" dirty="0">
+                        <a:latin typeface="Calibri" charset="0"/>
+                        <a:ea typeface="Calibri" charset="0"/>
+                        <a:cs typeface="Calibri" charset="0"/>
+                      </a:endParaRPr>
+                    </a:p>
+                  </a:txBody>
+                  <a:tcPr marL="91440" marR="91440" marT="45720" marB="45720" anchor="ctr">
+                    <a:lnL w="6350" cap="flat" cmpd="sng" algn="ctr">
+                      <a:solidFill>
+                        <a:srgbClr val="E4DADD"/>
+                      </a:solidFill>
+                      <a:prstDash val="solid"/>
+                      <a:round/>
+                      <a:headEnd type="none" w="med" len="med"/>
+                      <a:tailEnd type="none" w="med" len="med"/>
+                    </a:lnL>
+                    <a:lnR w="6350" cap="flat" cmpd="sng" algn="ctr">
+                      <a:solidFill>
+                        <a:srgbClr val="E4DADD"/>
+                      </a:solidFill>
+                      <a:prstDash val="solid"/>
+                      <a:round/>
+                      <a:headEnd type="none" w="med" len="med"/>
+                      <a:tailEnd type="none" w="med" len="med"/>
+                    </a:lnR>
+                    <a:lnT w="6350" cap="flat" cmpd="sng" algn="ctr">
+                      <a:solidFill>
+                        <a:srgbClr val="E4DADD"/>
+                      </a:solidFill>
+                      <a:prstDash val="solid"/>
+                      <a:round/>
+                      <a:headEnd type="none" w="med" len="med"/>
+                      <a:tailEnd type="none" w="med" len="med"/>
+                    </a:lnT>
+                    <a:lnB w="6350" cap="flat" cmpd="sng" algn="ctr">
+                      <a:solidFill>
+                        <a:srgbClr val="E4DADD"/>
+                      </a:solidFill>
+                      <a:prstDash val="solid"/>
+                      <a:round/>
+                      <a:headEnd type="none" w="med" len="med"/>
+                      <a:tailEnd type="none" w="med" len="med"/>
+                    </a:lnB>
+                  </a:tcPr>
+                </a:tc>
+                <a:tc>
+                  <a:txBody>
+                    <a:bodyPr/>
+                    <a:lstStyle/>
+                    <a:p>
+                      <a:pPr algn="r" indent="0" marL="0">
+                        <a:buNone/>
+                      </a:pPr>
+                      <a:r>
+                        <a:rPr lang="en-US" sz="900" b="1" dirty="0">
+                          <a:solidFill>
+                            <a:srgbClr val="2E6F4E"/>
+                          </a:solidFill>
+                          <a:latin typeface="Calibri" pitchFamily="34" charset="0"/>
+                          <a:ea typeface="Calibri" pitchFamily="34" charset="-122"/>
+                          <a:cs typeface="Calibri" pitchFamily="34" charset="-120"/>
+                        </a:rPr>
+                        <a:t>1.52</a:t>
+                      </a:r>
+                      <a:endParaRPr lang="en-US" sz="900" dirty="0">
+                        <a:latin typeface="Calibri" charset="0"/>
+                        <a:ea typeface="Calibri" charset="0"/>
+                        <a:cs typeface="Calibri" charset="0"/>
+                      </a:endParaRPr>
+                    </a:p>
+                  </a:txBody>
+                  <a:tcPr marL="91440" marR="91440" marT="45720" marB="45720" anchor="ctr">
+                    <a:lnL w="6350" cap="flat" cmpd="sng" algn="ctr">
+                      <a:solidFill>
+                        <a:srgbClr val="E4DADD"/>
+                      </a:solidFill>
+                      <a:prstDash val="solid"/>
+                      <a:round/>
+                      <a:headEnd type="none" w="med" len="med"/>
+                      <a:tailEnd type="none" w="med" len="med"/>
+                    </a:lnL>
+                    <a:lnR w="6350" cap="flat" cmpd="sng" algn="ctr">
+                      <a:solidFill>
+                        <a:srgbClr val="E4DADD"/>
+                      </a:solidFill>
+                      <a:prstDash val="solid"/>
+                      <a:round/>
+                      <a:headEnd type="none" w="med" len="med"/>
+                      <a:tailEnd type="none" w="med" len="med"/>
+                    </a:lnR>
+                    <a:lnT w="6350" cap="flat" cmpd="sng" algn="ctr">
+                      <a:solidFill>
+                        <a:srgbClr val="E4DADD"/>
+                      </a:solidFill>
+                      <a:prstDash val="solid"/>
+                      <a:round/>
+                      <a:headEnd type="none" w="med" len="med"/>
+                      <a:tailEnd type="none" w="med" len="med"/>
+                    </a:lnT>
+                    <a:lnB w="6350" cap="flat" cmpd="sng" algn="ctr">
+                      <a:solidFill>
+                        <a:srgbClr val="E4DADD"/>
+                      </a:solidFill>
+                      <a:prstDash val="solid"/>
+                      <a:round/>
+                      <a:headEnd type="none" w="med" len="med"/>
+                      <a:tailEnd type="none" w="med" len="med"/>
+                    </a:lnB>
+                  </a:tcPr>
+                </a:tc>
+                <a:tc>
+                  <a:txBody>
+                    <a:bodyPr/>
+                    <a:lstStyle/>
+                    <a:p>
+                      <a:pPr algn="r" indent="0" marL="0">
+                        <a:buNone/>
+                      </a:pPr>
+                      <a:r>
+                        <a:rPr lang="en-US" sz="900" dirty="0">
+                          <a:solidFill>
+                            <a:srgbClr val="1F1A1C"/>
+                          </a:solidFill>
+                          <a:latin typeface="Calibri" pitchFamily="34" charset="0"/>
+                          <a:ea typeface="Calibri" pitchFamily="34" charset="-122"/>
+                          <a:cs typeface="Calibri" pitchFamily="34" charset="-120"/>
+                        </a:rPr>
+                        <a:t>+6.30</a:t>
+                      </a:r>
+                      <a:endParaRPr lang="en-US" sz="900" dirty="0">
+                        <a:latin typeface="Calibri" charset="0"/>
+                        <a:ea typeface="Calibri" charset="0"/>
+                        <a:cs typeface="Calibri" charset="0"/>
+                      </a:endParaRPr>
+                    </a:p>
+                  </a:txBody>
+                  <a:tcPr marL="91440" marR="91440" marT="45720" marB="45720" anchor="ctr">
+                    <a:lnL w="6350" cap="flat" cmpd="sng" algn="ctr">
+                      <a:solidFill>
+                        <a:srgbClr val="E4DADD"/>
+                      </a:solidFill>
+                      <a:prstDash val="solid"/>
+                      <a:round/>
+                      <a:headEnd type="none" w="med" len="med"/>
+                      <a:tailEnd type="none" w="med" len="med"/>
+                    </a:lnL>
+                    <a:lnR w="6350" cap="flat" cmpd="sng" algn="ctr">
+                      <a:solidFill>
+                        <a:srgbClr val="E4DADD"/>
+                      </a:solidFill>
+                      <a:prstDash val="solid"/>
+                      <a:round/>
+                      <a:headEnd type="none" w="med" len="med"/>
+                      <a:tailEnd type="none" w="med" len="med"/>
+                    </a:lnR>
+                    <a:lnT w="6350" cap="flat" cmpd="sng" algn="ctr">
+                      <a:solidFill>
+                        <a:srgbClr val="E4DADD"/>
+                      </a:solidFill>
+                      <a:prstDash val="solid"/>
+                      <a:round/>
+                      <a:headEnd type="none" w="med" len="med"/>
+                      <a:tailEnd type="none" w="med" len="med"/>
+                    </a:lnT>
+                    <a:lnB w="6350" cap="flat" cmpd="sng" algn="ctr">
+                      <a:solidFill>
+                        <a:srgbClr val="E4DADD"/>
+                      </a:solidFill>
+                      <a:prstDash val="solid"/>
+                      <a:round/>
+                      <a:headEnd type="none" w="med" len="med"/>
+                      <a:tailEnd type="none" w="med" len="med"/>
+                    </a:lnB>
+                  </a:tcPr>
+                </a:tc>
+              </a:tr>
+              <a:tr h="301752">
+                <a:tc>
+                  <a:txBody>
+                    <a:bodyPr/>
+                    <a:lstStyle/>
+                    <a:p>
+                      <a:pPr indent="0" marL="0">
+                        <a:buNone/>
+                      </a:pPr>
+                      <a:r>
+                        <a:rPr lang="en-US" sz="900" dirty="0">
+                          <a:solidFill>
+                            <a:srgbClr val="1F1A1C"/>
+                          </a:solidFill>
+                          <a:latin typeface="Calibri" pitchFamily="34" charset="0"/>
+                          <a:ea typeface="Calibri" pitchFamily="34" charset="-122"/>
+                          <a:cs typeface="Calibri" pitchFamily="34" charset="-120"/>
+                        </a:rPr>
+                        <a:t>7年目</a:t>
+                      </a:r>
+                      <a:endParaRPr lang="en-US" sz="900" dirty="0">
+                        <a:latin typeface="Calibri" charset="0"/>
+                        <a:ea typeface="Calibri" charset="0"/>
+                        <a:cs typeface="Calibri" charset="0"/>
+                      </a:endParaRPr>
+                    </a:p>
+                  </a:txBody>
+                  <a:tcPr marL="91440" marR="91440" marT="45720" marB="45720" anchor="ctr">
+                    <a:lnL w="6350" cap="flat" cmpd="sng" algn="ctr">
+                      <a:solidFill>
+                        <a:srgbClr val="E4DADD"/>
+                      </a:solidFill>
+                      <a:prstDash val="solid"/>
+                      <a:round/>
+                      <a:headEnd type="none" w="med" len="med"/>
+                      <a:tailEnd type="none" w="med" len="med"/>
+                    </a:lnL>
+                    <a:lnR w="6350" cap="flat" cmpd="sng" algn="ctr">
+                      <a:solidFill>
+                        <a:srgbClr val="E4DADD"/>
+                      </a:solidFill>
+                      <a:prstDash val="solid"/>
+                      <a:round/>
+                      <a:headEnd type="none" w="med" len="med"/>
+                      <a:tailEnd type="none" w="med" len="med"/>
+                    </a:lnR>
+                    <a:lnT w="6350" cap="flat" cmpd="sng" algn="ctr">
+                      <a:solidFill>
+                        <a:srgbClr val="E4DADD"/>
+                      </a:solidFill>
+                      <a:prstDash val="solid"/>
+                      <a:round/>
+                      <a:headEnd type="none" w="med" len="med"/>
+                      <a:tailEnd type="none" w="med" len="med"/>
+                    </a:lnT>
+                    <a:lnB w="6350" cap="flat" cmpd="sng" algn="ctr">
+                      <a:solidFill>
+                        <a:srgbClr val="E4DADD"/>
+                      </a:solidFill>
+                      <a:prstDash val="solid"/>
+                      <a:round/>
+                      <a:headEnd type="none" w="med" len="med"/>
+                      <a:tailEnd type="none" w="med" len="med"/>
+                    </a:lnB>
+                  </a:tcPr>
+                </a:tc>
+                <a:tc>
+                  <a:txBody>
+                    <a:bodyPr/>
+                    <a:lstStyle/>
+                    <a:p>
+                      <a:pPr algn="r" indent="0" marL="0">
+                        <a:buNone/>
+                      </a:pPr>
+                      <a:r>
+                        <a:rPr lang="en-US" sz="900" dirty="0">
+                          <a:solidFill>
+                            <a:srgbClr val="1F1A1C"/>
+                          </a:solidFill>
+                          <a:latin typeface="Calibri" pitchFamily="34" charset="0"/>
+                          <a:ea typeface="Calibri" pitchFamily="34" charset="-122"/>
+                          <a:cs typeface="Calibri" pitchFamily="34" charset="-120"/>
+                        </a:rPr>
+                        <a:t>8.00</a:t>
+                      </a:r>
+                      <a:endParaRPr lang="en-US" sz="900" dirty="0">
+                        <a:latin typeface="Calibri" charset="0"/>
+                        <a:ea typeface="Calibri" charset="0"/>
+                        <a:cs typeface="Calibri" charset="0"/>
+                      </a:endParaRPr>
+                    </a:p>
+                  </a:txBody>
+                  <a:tcPr marL="91440" marR="91440" marT="45720" marB="45720" anchor="ctr">
+                    <a:lnL w="6350" cap="flat" cmpd="sng" algn="ctr">
+                      <a:solidFill>
+                        <a:srgbClr val="E4DADD"/>
+                      </a:solidFill>
+                      <a:prstDash val="solid"/>
+                      <a:round/>
+                      <a:headEnd type="none" w="med" len="med"/>
+                      <a:tailEnd type="none" w="med" len="med"/>
+                    </a:lnL>
+                    <a:lnR w="6350" cap="flat" cmpd="sng" algn="ctr">
+                      <a:solidFill>
+                        <a:srgbClr val="E4DADD"/>
+                      </a:solidFill>
+                      <a:prstDash val="solid"/>
+                      <a:round/>
+                      <a:headEnd type="none" w="med" len="med"/>
+                      <a:tailEnd type="none" w="med" len="med"/>
+                    </a:lnR>
+                    <a:lnT w="6350" cap="flat" cmpd="sng" algn="ctr">
+                      <a:solidFill>
+                        <a:srgbClr val="E4DADD"/>
+                      </a:solidFill>
+                      <a:prstDash val="solid"/>
+                      <a:round/>
+                      <a:headEnd type="none" w="med" len="med"/>
+                      <a:tailEnd type="none" w="med" len="med"/>
+                    </a:lnT>
+                    <a:lnB w="6350" cap="flat" cmpd="sng" algn="ctr">
+                      <a:solidFill>
+                        <a:srgbClr val="E4DADD"/>
+                      </a:solidFill>
+                      <a:prstDash val="solid"/>
+                      <a:round/>
+                      <a:headEnd type="none" w="med" len="med"/>
+                      <a:tailEnd type="none" w="med" len="med"/>
+                    </a:lnB>
+                  </a:tcPr>
+                </a:tc>
+                <a:tc>
+                  <a:txBody>
+                    <a:bodyPr/>
+                    <a:lstStyle/>
+                    <a:p>
+                      <a:pPr algn="r" indent="0" marL="0">
+                        <a:buNone/>
+                      </a:pPr>
+                      <a:r>
+                        <a:rPr lang="en-US" sz="900" dirty="0">
+                          <a:solidFill>
+                            <a:srgbClr val="1F1A1C"/>
+                          </a:solidFill>
+                          <a:latin typeface="Calibri" pitchFamily="34" charset="0"/>
+                          <a:ea typeface="Calibri" pitchFamily="34" charset="-122"/>
+                          <a:cs typeface="Calibri" pitchFamily="34" charset="-120"/>
+                        </a:rPr>
+                        <a:t>2.00</a:t>
+                      </a:r>
+                      <a:endParaRPr lang="en-US" sz="900" dirty="0">
+                        <a:latin typeface="Calibri" charset="0"/>
+                        <a:ea typeface="Calibri" charset="0"/>
+                        <a:cs typeface="Calibri" charset="0"/>
+                      </a:endParaRPr>
+                    </a:p>
+                  </a:txBody>
+                  <a:tcPr marL="91440" marR="91440" marT="45720" marB="45720" anchor="ctr">
+                    <a:lnL w="6350" cap="flat" cmpd="sng" algn="ctr">
+                      <a:solidFill>
+                        <a:srgbClr val="E4DADD"/>
+                      </a:solidFill>
+                      <a:prstDash val="solid"/>
+                      <a:round/>
+                      <a:headEnd type="none" w="med" len="med"/>
+                      <a:tailEnd type="none" w="med" len="med"/>
+                    </a:lnL>
+                    <a:lnR w="6350" cap="flat" cmpd="sng" algn="ctr">
+                      <a:solidFill>
+                        <a:srgbClr val="E4DADD"/>
+                      </a:solidFill>
+                      <a:prstDash val="solid"/>
+                      <a:round/>
+                      <a:headEnd type="none" w="med" len="med"/>
+                      <a:tailEnd type="none" w="med" len="med"/>
+                    </a:lnR>
+                    <a:lnT w="6350" cap="flat" cmpd="sng" algn="ctr">
+                      <a:solidFill>
+                        <a:srgbClr val="E4DADD"/>
+                      </a:solidFill>
+                      <a:prstDash val="solid"/>
+                      <a:round/>
+                      <a:headEnd type="none" w="med" len="med"/>
+                      <a:tailEnd type="none" w="med" len="med"/>
+                    </a:lnT>
+                    <a:lnB w="6350" cap="flat" cmpd="sng" algn="ctr">
+                      <a:solidFill>
+                        <a:srgbClr val="E4DADD"/>
+                      </a:solidFill>
+                      <a:prstDash val="solid"/>
+                      <a:round/>
+                      <a:headEnd type="none" w="med" len="med"/>
+                      <a:tailEnd type="none" w="med" len="med"/>
+                    </a:lnB>
+                  </a:tcPr>
+                </a:tc>
+                <a:tc>
+                  <a:txBody>
+                    <a:bodyPr/>
+                    <a:lstStyle/>
+                    <a:p>
+                      <a:pPr algn="r" indent="0" marL="0">
+                        <a:buNone/>
+                      </a:pPr>
+                      <a:r>
+                        <a:rPr lang="en-US" sz="900" dirty="0">
+                          <a:solidFill>
+                            <a:srgbClr val="1F1A1C"/>
+                          </a:solidFill>
+                          <a:latin typeface="Calibri" pitchFamily="34" charset="0"/>
+                          <a:ea typeface="Calibri" pitchFamily="34" charset="-122"/>
+                          <a:cs typeface="Calibri" pitchFamily="34" charset="-120"/>
+                        </a:rPr>
+                        <a:t>0.24</a:t>
+                      </a:r>
+                      <a:endParaRPr lang="en-US" sz="900" dirty="0">
+                        <a:latin typeface="Calibri" charset="0"/>
+                        <a:ea typeface="Calibri" charset="0"/>
+                        <a:cs typeface="Calibri" charset="0"/>
+                      </a:endParaRPr>
+                    </a:p>
+                  </a:txBody>
+                  <a:tcPr marL="91440" marR="91440" marT="45720" marB="45720" anchor="ctr">
+                    <a:lnL w="6350" cap="flat" cmpd="sng" algn="ctr">
+                      <a:solidFill>
+                        <a:srgbClr val="E4DADD"/>
+                      </a:solidFill>
+                      <a:prstDash val="solid"/>
+                      <a:round/>
+                      <a:headEnd type="none" w="med" len="med"/>
+                      <a:tailEnd type="none" w="med" len="med"/>
+                    </a:lnL>
+                    <a:lnR w="6350" cap="flat" cmpd="sng" algn="ctr">
+                      <a:solidFill>
+                        <a:srgbClr val="E4DADD"/>
+                      </a:solidFill>
+                      <a:prstDash val="solid"/>
+                      <a:round/>
+                      <a:headEnd type="none" w="med" len="med"/>
+                      <a:tailEnd type="none" w="med" len="med"/>
+                    </a:lnR>
+                    <a:lnT w="6350" cap="flat" cmpd="sng" algn="ctr">
+                      <a:solidFill>
+                        <a:srgbClr val="E4DADD"/>
+                      </a:solidFill>
+                      <a:prstDash val="solid"/>
+                      <a:round/>
+                      <a:headEnd type="none" w="med" len="med"/>
+                      <a:tailEnd type="none" w="med" len="med"/>
+                    </a:lnT>
+                    <a:lnB w="6350" cap="flat" cmpd="sng" algn="ctr">
+                      <a:solidFill>
+                        <a:srgbClr val="E4DADD"/>
+                      </a:solidFill>
+                      <a:prstDash val="solid"/>
+                      <a:round/>
+                      <a:headEnd type="none" w="med" len="med"/>
+                      <a:tailEnd type="none" w="med" len="med"/>
+                    </a:lnB>
+                  </a:tcPr>
+                </a:tc>
+                <a:tc>
+                  <a:txBody>
+                    <a:bodyPr/>
+                    <a:lstStyle/>
+                    <a:p>
+                      <a:pPr algn="r" indent="0" marL="0">
+                        <a:buNone/>
+                      </a:pPr>
+                      <a:r>
+                        <a:rPr lang="en-US" sz="900" dirty="0">
+                          <a:solidFill>
+                            <a:srgbClr val="1F1A1C"/>
+                          </a:solidFill>
+                          <a:latin typeface="Calibri" pitchFamily="34" charset="0"/>
+                          <a:ea typeface="Calibri" pitchFamily="34" charset="-122"/>
+                          <a:cs typeface="Calibri" pitchFamily="34" charset="-120"/>
+                        </a:rPr>
+                        <a:t>2.24</a:t>
+                      </a:r>
+                      <a:endParaRPr lang="en-US" sz="900" dirty="0">
+                        <a:latin typeface="Calibri" charset="0"/>
+                        <a:ea typeface="Calibri" charset="0"/>
+                        <a:cs typeface="Calibri" charset="0"/>
+                      </a:endParaRPr>
+                    </a:p>
+                  </a:txBody>
+                  <a:tcPr marL="91440" marR="91440" marT="45720" marB="45720" anchor="ctr">
+                    <a:lnL w="6350" cap="flat" cmpd="sng" algn="ctr">
+                      <a:solidFill>
+                        <a:srgbClr val="E4DADD"/>
+                      </a:solidFill>
+                      <a:prstDash val="solid"/>
+                      <a:round/>
+                      <a:headEnd type="none" w="med" len="med"/>
+                      <a:tailEnd type="none" w="med" len="med"/>
+                    </a:lnL>
+                    <a:lnR w="6350" cap="flat" cmpd="sng" algn="ctr">
+                      <a:solidFill>
+                        <a:srgbClr val="E4DADD"/>
+                      </a:solidFill>
+                      <a:prstDash val="solid"/>
+                      <a:round/>
+                      <a:headEnd type="none" w="med" len="med"/>
+                      <a:tailEnd type="none" w="med" len="med"/>
+                    </a:lnR>
+                    <a:lnT w="6350" cap="flat" cmpd="sng" algn="ctr">
+                      <a:solidFill>
+                        <a:srgbClr val="E4DADD"/>
+                      </a:solidFill>
+                      <a:prstDash val="solid"/>
+                      <a:round/>
+                      <a:headEnd type="none" w="med" len="med"/>
+                      <a:tailEnd type="none" w="med" len="med"/>
+                    </a:lnT>
+                    <a:lnB w="6350" cap="flat" cmpd="sng" algn="ctr">
+                      <a:solidFill>
+                        <a:srgbClr val="E4DADD"/>
+                      </a:solidFill>
+                      <a:prstDash val="solid"/>
+                      <a:round/>
+                      <a:headEnd type="none" w="med" len="med"/>
+                      <a:tailEnd type="none" w="med" len="med"/>
+                    </a:lnB>
+                  </a:tcPr>
+                </a:tc>
+                <a:tc>
+                  <a:txBody>
+                    <a:bodyPr/>
+                    <a:lstStyle/>
+                    <a:p>
+                      <a:pPr algn="r" indent="0" marL="0">
+                        <a:buNone/>
+                      </a:pPr>
+                      <a:r>
+                        <a:rPr lang="en-US" sz="900" b="1" dirty="0">
+                          <a:solidFill>
+                            <a:srgbClr val="2E6F4E"/>
+                          </a:solidFill>
+                          <a:latin typeface="Calibri" pitchFamily="34" charset="0"/>
+                          <a:ea typeface="Calibri" pitchFamily="34" charset="-122"/>
+                          <a:cs typeface="Calibri" pitchFamily="34" charset="-120"/>
+                        </a:rPr>
+                        <a:t>1.56</a:t>
+                      </a:r>
+                      <a:endParaRPr lang="en-US" sz="900" dirty="0">
+                        <a:latin typeface="Calibri" charset="0"/>
+                        <a:ea typeface="Calibri" charset="0"/>
+                        <a:cs typeface="Calibri" charset="0"/>
+                      </a:endParaRPr>
+                    </a:p>
+                  </a:txBody>
+                  <a:tcPr marL="91440" marR="91440" marT="45720" marB="45720" anchor="ctr">
+                    <a:lnL w="6350" cap="flat" cmpd="sng" algn="ctr">
+                      <a:solidFill>
+                        <a:srgbClr val="E4DADD"/>
+                      </a:solidFill>
+                      <a:prstDash val="solid"/>
+                      <a:round/>
+                      <a:headEnd type="none" w="med" len="med"/>
+                      <a:tailEnd type="none" w="med" len="med"/>
+                    </a:lnL>
+                    <a:lnR w="6350" cap="flat" cmpd="sng" algn="ctr">
+                      <a:solidFill>
+                        <a:srgbClr val="E4DADD"/>
+                      </a:solidFill>
+                      <a:prstDash val="solid"/>
+                      <a:round/>
+                      <a:headEnd type="none" w="med" len="med"/>
+                      <a:tailEnd type="none" w="med" len="med"/>
+                    </a:lnR>
+                    <a:lnT w="6350" cap="flat" cmpd="sng" algn="ctr">
+                      <a:solidFill>
+                        <a:srgbClr val="E4DADD"/>
+                      </a:solidFill>
+                      <a:prstDash val="solid"/>
+                      <a:round/>
+                      <a:headEnd type="none" w="med" len="med"/>
+                      <a:tailEnd type="none" w="med" len="med"/>
+                    </a:lnT>
+                    <a:lnB w="6350" cap="flat" cmpd="sng" algn="ctr">
+                      <a:solidFill>
+                        <a:srgbClr val="E4DADD"/>
+                      </a:solidFill>
+                      <a:prstDash val="solid"/>
+                      <a:round/>
+                      <a:headEnd type="none" w="med" len="med"/>
+                      <a:tailEnd type="none" w="med" len="med"/>
+                    </a:lnB>
+                  </a:tcPr>
+                </a:tc>
+                <a:tc>
+                  <a:txBody>
+                    <a:bodyPr/>
+                    <a:lstStyle/>
+                    <a:p>
+                      <a:pPr algn="r" indent="0" marL="0">
+                        <a:buNone/>
+                      </a:pPr>
+                      <a:r>
+                        <a:rPr lang="en-US" sz="900" dirty="0">
+                          <a:solidFill>
+                            <a:srgbClr val="1F1A1C"/>
+                          </a:solidFill>
+                          <a:latin typeface="Calibri" pitchFamily="34" charset="0"/>
+                          <a:ea typeface="Calibri" pitchFamily="34" charset="-122"/>
+                          <a:cs typeface="Calibri" pitchFamily="34" charset="-120"/>
+                        </a:rPr>
+                        <a:t>+7.56</a:t>
+                      </a:r>
+                      <a:endParaRPr lang="en-US" sz="900" dirty="0">
+                        <a:latin typeface="Calibri" charset="0"/>
+                        <a:ea typeface="Calibri" charset="0"/>
+                        <a:cs typeface="Calibri" charset="0"/>
+                      </a:endParaRPr>
+                    </a:p>
+                  </a:txBody>
+                  <a:tcPr marL="91440" marR="91440" marT="45720" marB="45720" anchor="ctr">
+                    <a:lnL w="6350" cap="flat" cmpd="sng" algn="ctr">
+                      <a:solidFill>
+                        <a:srgbClr val="E4DADD"/>
+                      </a:solidFill>
+                      <a:prstDash val="solid"/>
+                      <a:round/>
+                      <a:headEnd type="none" w="med" len="med"/>
+                      <a:tailEnd type="none" w="med" len="med"/>
+                    </a:lnL>
+                    <a:lnR w="6350" cap="flat" cmpd="sng" algn="ctr">
+                      <a:solidFill>
+                        <a:srgbClr val="E4DADD"/>
+                      </a:solidFill>
+                      <a:prstDash val="solid"/>
+                      <a:round/>
+                      <a:headEnd type="none" w="med" len="med"/>
+                      <a:tailEnd type="none" w="med" len="med"/>
+                    </a:lnR>
+                    <a:lnT w="6350" cap="flat" cmpd="sng" algn="ctr">
+                      <a:solidFill>
+                        <a:srgbClr val="E4DADD"/>
+                      </a:solidFill>
+                      <a:prstDash val="solid"/>
+                      <a:round/>
+                      <a:headEnd type="none" w="med" len="med"/>
+                      <a:tailEnd type="none" w="med" len="med"/>
+                    </a:lnT>
+                    <a:lnB w="6350" cap="flat" cmpd="sng" algn="ctr">
+                      <a:solidFill>
+                        <a:srgbClr val="E4DADD"/>
+                      </a:solidFill>
+                      <a:prstDash val="solid"/>
+                      <a:round/>
+                      <a:headEnd type="none" w="med" len="med"/>
+                      <a:tailEnd type="none" w="med" len="med"/>
+                    </a:lnB>
+                  </a:tcPr>
+                </a:tc>
+              </a:tr>
+              <a:tr h="301752">
+                <a:tc>
+                  <a:txBody>
+                    <a:bodyPr/>
+                    <a:lstStyle/>
+                    <a:p>
+                      <a:pPr indent="0" marL="0">
+                        <a:buNone/>
+                      </a:pPr>
+                      <a:r>
+                        <a:rPr lang="en-US" sz="900" b="1" dirty="0">
+                          <a:solidFill>
+                            <a:srgbClr val="1F1A1C"/>
+                          </a:solidFill>
+                          <a:latin typeface="Calibri" pitchFamily="34" charset="0"/>
+                          <a:ea typeface="Calibri" pitchFamily="34" charset="-122"/>
+                          <a:cs typeface="Calibri" pitchFamily="34" charset="-120"/>
+                        </a:rPr>
+                        <a:t>累計</a:t>
+                      </a:r>
+                      <a:endParaRPr lang="en-US" sz="900" dirty="0">
                         <a:latin typeface="Calibri" charset="0"/>
                         <a:ea typeface="Calibri" charset="0"/>
                         <a:cs typeface="Calibri" charset="0"/>
@@ -15604,7 +20553,7 @@
                         <a:buNone/>
                       </a:pPr>
                       <a:r>
-                        <a:rPr lang="en-US" sz="1050" dirty="0">
+                        <a:rPr lang="en-US" sz="900" dirty="0">
                           <a:solidFill>
                             <a:srgbClr val="1F1A1C"/>
                           </a:solidFill>
@@ -15612,9 +20561,9 @@
                           <a:ea typeface="Calibri" pitchFamily="34" charset="-122"/>
                           <a:cs typeface="Calibri" pitchFamily="34" charset="-120"/>
                         </a:rPr>
-                        <a:t>2.59億円</a:t>
+                        <a:t>—</a:t>
                       </a:r>
-                      <a:endParaRPr lang="en-US" sz="1050" dirty="0">
+                      <a:endParaRPr lang="en-US" sz="900" dirty="0">
                         <a:latin typeface="Calibri" charset="0"/>
                         <a:ea typeface="Calibri" charset="0"/>
                         <a:cs typeface="Calibri" charset="0"/>
@@ -15672,17 +20621,17 @@
                         <a:buNone/>
                       </a:pPr>
                       <a:r>
-                        <a:rPr lang="en-US" sz="1050" b="1" dirty="0">
+                        <a:rPr lang="en-US" sz="900" b="1" dirty="0">
                           <a:solidFill>
-                            <a:srgbClr val="2E6F4E"/>
+                            <a:srgbClr val="1F1A1C"/>
                           </a:solidFill>
                           <a:latin typeface="Calibri" pitchFamily="34" charset="0"/>
                           <a:ea typeface="Calibri" pitchFamily="34" charset="-122"/>
                           <a:cs typeface="Calibri" pitchFamily="34" charset="-120"/>
                         </a:rPr>
-                        <a:t>1.35</a:t>
+                        <a:t>14.00</a:t>
                       </a:r>
-                      <a:endParaRPr lang="en-US" sz="1050" dirty="0">
+                      <a:endParaRPr lang="en-US" sz="900" dirty="0">
                         <a:latin typeface="Calibri" charset="0"/>
                         <a:ea typeface="Calibri" charset="0"/>
                         <a:cs typeface="Calibri" charset="0"/>
@@ -15740,17 +20689,17 @@
                         <a:buNone/>
                       </a:pPr>
                       <a:r>
-                        <a:rPr lang="en-US" sz="1050" b="1" dirty="0">
+                        <a:rPr lang="en-US" sz="900" dirty="0">
                           <a:solidFill>
-                            <a:srgbClr val="2E6F4E"/>
+                            <a:srgbClr val="1F1A1C"/>
                           </a:solidFill>
                           <a:latin typeface="Calibri" pitchFamily="34" charset="0"/>
                           <a:ea typeface="Calibri" pitchFamily="34" charset="-122"/>
                           <a:cs typeface="Calibri" pitchFamily="34" charset="-120"/>
                         </a:rPr>
-                        <a:t>1.07</a:t>
+                        <a:t>2.94</a:t>
                       </a:r>
-                      <a:endParaRPr lang="en-US" sz="1050" dirty="0">
+                      <a:endParaRPr lang="en-US" sz="900" dirty="0">
                         <a:latin typeface="Calibri" charset="0"/>
                         <a:ea typeface="Calibri" charset="0"/>
                         <a:cs typeface="Calibri" charset="0"/>
@@ -15808,7 +20757,7 @@
                         <a:buNone/>
                       </a:pPr>
                       <a:r>
-                        <a:rPr lang="en-US" sz="1050" dirty="0">
+                        <a:rPr lang="en-US" sz="900" b="1" dirty="0">
                           <a:solidFill>
                             <a:srgbClr val="1F1A1C"/>
                           </a:solidFill>
@@ -15816,9 +20765,9 @@
                           <a:ea typeface="Calibri" pitchFamily="34" charset="-122"/>
                           <a:cs typeface="Calibri" pitchFamily="34" charset="-120"/>
                         </a:rPr>
-                        <a:t>2.8倍</a:t>
+                        <a:t>16.94</a:t>
                       </a:r>
-                      <a:endParaRPr lang="en-US" sz="1050" dirty="0">
+                      <a:endParaRPr lang="en-US" sz="900" dirty="0">
                         <a:latin typeface="Calibri" charset="0"/>
                         <a:ea typeface="Calibri" charset="0"/>
                         <a:cs typeface="Calibri" charset="0"/>
@@ -15872,21 +20821,21 @@
                     <a:bodyPr/>
                     <a:lstStyle/>
                     <a:p>
-                      <a:pPr indent="0" marL="0">
+                      <a:pPr algn="r" indent="0" marL="0">
                         <a:buNone/>
                       </a:pPr>
                       <a:r>
-                        <a:rPr lang="en-US" sz="1050" b="1" dirty="0">
+                        <a:rPr lang="en-US" sz="900" dirty="0">
                           <a:solidFill>
-                            <a:srgbClr val="2E6F4E"/>
+                            <a:srgbClr val="1F1A1C"/>
                           </a:solidFill>
                           <a:latin typeface="Calibri" pitchFamily="34" charset="0"/>
                           <a:ea typeface="Calibri" pitchFamily="34" charset="-122"/>
                           <a:cs typeface="Calibri" pitchFamily="34" charset="-120"/>
                         </a:rPr>
-                        <a:t>◎ 推奨水準</a:t>
+                        <a:t>—</a:t>
                       </a:r>
-                      <a:endParaRPr lang="en-US" sz="1050" dirty="0">
+                      <a:endParaRPr lang="en-US" sz="900" dirty="0">
                         <a:latin typeface="Calibri" charset="0"/>
                         <a:ea typeface="Calibri" charset="0"/>
                         <a:cs typeface="Calibri" charset="0"/>
@@ -15933,73 +20882,6 @@
                     <a:solidFill>
                       <a:srgbClr val="F7F3F4"/>
                     </a:solidFill>
-                  </a:tcPr>
-                </a:tc>
-              </a:tr>
-              <a:tr h="384048">
-                <a:tc>
-                  <a:txBody>
-                    <a:bodyPr/>
-                    <a:lstStyle/>
-                    <a:p>
-                      <a:pPr indent="0" marL="0">
-                        <a:buNone/>
-                      </a:pPr>
-                      <a:r>
-                        <a:rPr lang="en-US" sz="1050" dirty="0">
-                          <a:solidFill>
-                            <a:srgbClr val="1F1A1C"/>
-                          </a:solidFill>
-                          <a:latin typeface="Calibri" pitchFamily="34" charset="0"/>
-                          <a:ea typeface="Calibri" pitchFamily="34" charset="-122"/>
-                          <a:cs typeface="Calibri" pitchFamily="34" charset="-120"/>
-                        </a:rPr>
-                        <a:t>17.00億円</a:t>
-                      </a:r>
-                      <a:endParaRPr lang="en-US" sz="1050" dirty="0">
-                        <a:latin typeface="Calibri" charset="0"/>
-                        <a:ea typeface="Calibri" charset="0"/>
-                        <a:cs typeface="Calibri" charset="0"/>
-                      </a:endParaRPr>
-                    </a:p>
-                  </a:txBody>
-                  <a:tcPr marL="91440" marR="91440" marT="45720" marB="45720" anchor="ctr">
-                    <a:lnL w="6350" cap="flat" cmpd="sng" algn="ctr">
-                      <a:solidFill>
-                        <a:srgbClr val="E4DADD"/>
-                      </a:solidFill>
-                      <a:prstDash val="solid"/>
-                      <a:round/>
-                      <a:headEnd type="none" w="med" len="med"/>
-                      <a:tailEnd type="none" w="med" len="med"/>
-                    </a:lnL>
-                    <a:lnR w="6350" cap="flat" cmpd="sng" algn="ctr">
-                      <a:solidFill>
-                        <a:srgbClr val="E4DADD"/>
-                      </a:solidFill>
-                      <a:prstDash val="solid"/>
-                      <a:round/>
-                      <a:headEnd type="none" w="med" len="med"/>
-                      <a:tailEnd type="none" w="med" len="med"/>
-                    </a:lnR>
-                    <a:lnT w="6350" cap="flat" cmpd="sng" algn="ctr">
-                      <a:solidFill>
-                        <a:srgbClr val="E4DADD"/>
-                      </a:solidFill>
-                      <a:prstDash val="solid"/>
-                      <a:round/>
-                      <a:headEnd type="none" w="med" len="med"/>
-                      <a:tailEnd type="none" w="med" len="med"/>
-                    </a:lnT>
-                    <a:lnB w="6350" cap="flat" cmpd="sng" algn="ctr">
-                      <a:solidFill>
-                        <a:srgbClr val="E4DADD"/>
-                      </a:solidFill>
-                      <a:prstDash val="solid"/>
-                      <a:round/>
-                      <a:headEnd type="none" w="med" len="med"/>
-                      <a:tailEnd type="none" w="med" len="med"/>
-                    </a:lnB>
                   </a:tcPr>
                 </a:tc>
                 <a:tc>
@@ -16011,17 +20893,17 @@
                         <a:buNone/>
                       </a:pPr>
                       <a:r>
-                        <a:rPr lang="en-US" sz="1050" dirty="0">
+                        <a:rPr lang="en-US" sz="900" b="1" dirty="0">
                           <a:solidFill>
-                            <a:srgbClr val="1F1A1C"/>
+                            <a:srgbClr val="2E6F4E"/>
                           </a:solidFill>
                           <a:latin typeface="Calibri" pitchFamily="34" charset="0"/>
                           <a:ea typeface="Calibri" pitchFamily="34" charset="-122"/>
                           <a:cs typeface="Calibri" pitchFamily="34" charset="-120"/>
                         </a:rPr>
-                        <a:t>2.94億円</a:t>
+                        <a:t>+7.56</a:t>
                       </a:r>
-                      <a:endParaRPr lang="en-US" sz="1050" dirty="0">
+                      <a:endParaRPr lang="en-US" sz="900" dirty="0">
                         <a:latin typeface="Calibri" charset="0"/>
                         <a:ea typeface="Calibri" charset="0"/>
                         <a:cs typeface="Calibri" charset="0"/>
@@ -16065,1050 +20947,9 @@
                       <a:headEnd type="none" w="med" len="med"/>
                       <a:tailEnd type="none" w="med" len="med"/>
                     </a:lnB>
-                  </a:tcPr>
-                </a:tc>
-                <a:tc>
-                  <a:txBody>
-                    <a:bodyPr/>
-                    <a:lstStyle/>
-                    <a:p>
-                      <a:pPr algn="r" indent="0" marL="0">
-                        <a:buNone/>
-                      </a:pPr>
-                      <a:r>
-                        <a:rPr lang="en-US" sz="1050" dirty="0">
-                          <a:solidFill>
-                            <a:srgbClr val="1F1A1C"/>
-                          </a:solidFill>
-                          <a:latin typeface="Calibri" pitchFamily="34" charset="0"/>
-                          <a:ea typeface="Calibri" pitchFamily="34" charset="-122"/>
-                          <a:cs typeface="Calibri" pitchFamily="34" charset="-120"/>
-                        </a:rPr>
-                        <a:t>1.19</a:t>
-                      </a:r>
-                      <a:endParaRPr lang="en-US" sz="1050" dirty="0">
-                        <a:latin typeface="Calibri" charset="0"/>
-                        <a:ea typeface="Calibri" charset="0"/>
-                        <a:cs typeface="Calibri" charset="0"/>
-                      </a:endParaRPr>
-                    </a:p>
-                  </a:txBody>
-                  <a:tcPr marL="91440" marR="91440" marT="45720" marB="45720" anchor="ctr">
-                    <a:lnL w="6350" cap="flat" cmpd="sng" algn="ctr">
-                      <a:solidFill>
-                        <a:srgbClr val="E4DADD"/>
-                      </a:solidFill>
-                      <a:prstDash val="solid"/>
-                      <a:round/>
-                      <a:headEnd type="none" w="med" len="med"/>
-                      <a:tailEnd type="none" w="med" len="med"/>
-                    </a:lnL>
-                    <a:lnR w="6350" cap="flat" cmpd="sng" algn="ctr">
-                      <a:solidFill>
-                        <a:srgbClr val="E4DADD"/>
-                      </a:solidFill>
-                      <a:prstDash val="solid"/>
-                      <a:round/>
-                      <a:headEnd type="none" w="med" len="med"/>
-                      <a:tailEnd type="none" w="med" len="med"/>
-                    </a:lnR>
-                    <a:lnT w="6350" cap="flat" cmpd="sng" algn="ctr">
-                      <a:solidFill>
-                        <a:srgbClr val="E4DADD"/>
-                      </a:solidFill>
-                      <a:prstDash val="solid"/>
-                      <a:round/>
-                      <a:headEnd type="none" w="med" len="med"/>
-                      <a:tailEnd type="none" w="med" len="med"/>
-                    </a:lnT>
-                    <a:lnB w="6350" cap="flat" cmpd="sng" algn="ctr">
-                      <a:solidFill>
-                        <a:srgbClr val="E4DADD"/>
-                      </a:solidFill>
-                      <a:prstDash val="solid"/>
-                      <a:round/>
-                      <a:headEnd type="none" w="med" len="med"/>
-                      <a:tailEnd type="none" w="med" len="med"/>
-                    </a:lnB>
-                  </a:tcPr>
-                </a:tc>
-                <a:tc>
-                  <a:txBody>
-                    <a:bodyPr/>
-                    <a:lstStyle/>
-                    <a:p>
-                      <a:pPr algn="r" indent="0" marL="0">
-                        <a:buNone/>
-                      </a:pPr>
-                      <a:r>
-                        <a:rPr lang="en-US" sz="1050" dirty="0">
-                          <a:solidFill>
-                            <a:srgbClr val="9B2C2C"/>
-                          </a:solidFill>
-                          <a:latin typeface="Calibri" pitchFamily="34" charset="0"/>
-                          <a:ea typeface="Calibri" pitchFamily="34" charset="-122"/>
-                          <a:cs typeface="Calibri" pitchFamily="34" charset="-120"/>
-                        </a:rPr>
-                        <a:t>0.94</a:t>
-                      </a:r>
-                      <a:endParaRPr lang="en-US" sz="1050" dirty="0">
-                        <a:latin typeface="Calibri" charset="0"/>
-                        <a:ea typeface="Calibri" charset="0"/>
-                        <a:cs typeface="Calibri" charset="0"/>
-                      </a:endParaRPr>
-                    </a:p>
-                  </a:txBody>
-                  <a:tcPr marL="91440" marR="91440" marT="45720" marB="45720" anchor="ctr">
-                    <a:lnL w="6350" cap="flat" cmpd="sng" algn="ctr">
-                      <a:solidFill>
-                        <a:srgbClr val="E4DADD"/>
-                      </a:solidFill>
-                      <a:prstDash val="solid"/>
-                      <a:round/>
-                      <a:headEnd type="none" w="med" len="med"/>
-                      <a:tailEnd type="none" w="med" len="med"/>
-                    </a:lnL>
-                    <a:lnR w="6350" cap="flat" cmpd="sng" algn="ctr">
-                      <a:solidFill>
-                        <a:srgbClr val="E4DADD"/>
-                      </a:solidFill>
-                      <a:prstDash val="solid"/>
-                      <a:round/>
-                      <a:headEnd type="none" w="med" len="med"/>
-                      <a:tailEnd type="none" w="med" len="med"/>
-                    </a:lnR>
-                    <a:lnT w="6350" cap="flat" cmpd="sng" algn="ctr">
-                      <a:solidFill>
-                        <a:srgbClr val="E4DADD"/>
-                      </a:solidFill>
-                      <a:prstDash val="solid"/>
-                      <a:round/>
-                      <a:headEnd type="none" w="med" len="med"/>
-                      <a:tailEnd type="none" w="med" len="med"/>
-                    </a:lnT>
-                    <a:lnB w="6350" cap="flat" cmpd="sng" algn="ctr">
-                      <a:solidFill>
-                        <a:srgbClr val="E4DADD"/>
-                      </a:solidFill>
-                      <a:prstDash val="solid"/>
-                      <a:round/>
-                      <a:headEnd type="none" w="med" len="med"/>
-                      <a:tailEnd type="none" w="med" len="med"/>
-                    </a:lnB>
-                  </a:tcPr>
-                </a:tc>
-                <a:tc>
-                  <a:txBody>
-                    <a:bodyPr/>
-                    <a:lstStyle/>
-                    <a:p>
-                      <a:pPr algn="r" indent="0" marL="0">
-                        <a:buNone/>
-                      </a:pPr>
-                      <a:r>
-                        <a:rPr lang="en-US" sz="1050" dirty="0">
-                          <a:solidFill>
-                            <a:srgbClr val="1F1A1C"/>
-                          </a:solidFill>
-                          <a:latin typeface="Calibri" pitchFamily="34" charset="0"/>
-                          <a:ea typeface="Calibri" pitchFamily="34" charset="-122"/>
-                          <a:cs typeface="Calibri" pitchFamily="34" charset="-120"/>
-                        </a:rPr>
-                        <a:t>3.2倍</a:t>
-                      </a:r>
-                      <a:endParaRPr lang="en-US" sz="1050" dirty="0">
-                        <a:latin typeface="Calibri" charset="0"/>
-                        <a:ea typeface="Calibri" charset="0"/>
-                        <a:cs typeface="Calibri" charset="0"/>
-                      </a:endParaRPr>
-                    </a:p>
-                  </a:txBody>
-                  <a:tcPr marL="91440" marR="91440" marT="45720" marB="45720" anchor="ctr">
-                    <a:lnL w="6350" cap="flat" cmpd="sng" algn="ctr">
-                      <a:solidFill>
-                        <a:srgbClr val="E4DADD"/>
-                      </a:solidFill>
-                      <a:prstDash val="solid"/>
-                      <a:round/>
-                      <a:headEnd type="none" w="med" len="med"/>
-                      <a:tailEnd type="none" w="med" len="med"/>
-                    </a:lnL>
-                    <a:lnR w="6350" cap="flat" cmpd="sng" algn="ctr">
-                      <a:solidFill>
-                        <a:srgbClr val="E4DADD"/>
-                      </a:solidFill>
-                      <a:prstDash val="solid"/>
-                      <a:round/>
-                      <a:headEnd type="none" w="med" len="med"/>
-                      <a:tailEnd type="none" w="med" len="med"/>
-                    </a:lnR>
-                    <a:lnT w="6350" cap="flat" cmpd="sng" algn="ctr">
-                      <a:solidFill>
-                        <a:srgbClr val="E4DADD"/>
-                      </a:solidFill>
-                      <a:prstDash val="solid"/>
-                      <a:round/>
-                      <a:headEnd type="none" w="med" len="med"/>
-                      <a:tailEnd type="none" w="med" len="med"/>
-                    </a:lnT>
-                    <a:lnB w="6350" cap="flat" cmpd="sng" algn="ctr">
-                      <a:solidFill>
-                        <a:srgbClr val="E4DADD"/>
-                      </a:solidFill>
-                      <a:prstDash val="solid"/>
-                      <a:round/>
-                      <a:headEnd type="none" w="med" len="med"/>
-                      <a:tailEnd type="none" w="med" len="med"/>
-                    </a:lnB>
-                  </a:tcPr>
-                </a:tc>
-                <a:tc>
-                  <a:txBody>
-                    <a:bodyPr/>
-                    <a:lstStyle/>
-                    <a:p>
-                      <a:pPr indent="0" marL="0">
-                        <a:buNone/>
-                      </a:pPr>
-                      <a:r>
-                        <a:rPr lang="en-US" sz="1050" dirty="0">
-                          <a:solidFill>
-                            <a:srgbClr val="A8741A"/>
-                          </a:solidFill>
-                          <a:latin typeface="Calibri" pitchFamily="34" charset="0"/>
-                          <a:ea typeface="Calibri" pitchFamily="34" charset="-122"/>
-                          <a:cs typeface="Calibri" pitchFamily="34" charset="-120"/>
-                        </a:rPr>
-                        <a:t>△ ストレス下で1.0割れ</a:t>
-                      </a:r>
-                      <a:endParaRPr lang="en-US" sz="1050" dirty="0">
-                        <a:latin typeface="Calibri" charset="0"/>
-                        <a:ea typeface="Calibri" charset="0"/>
-                        <a:cs typeface="Calibri" charset="0"/>
-                      </a:endParaRPr>
-                    </a:p>
-                  </a:txBody>
-                  <a:tcPr marL="91440" marR="91440" marT="45720" marB="45720" anchor="ctr">
-                    <a:lnL w="6350" cap="flat" cmpd="sng" algn="ctr">
-                      <a:solidFill>
-                        <a:srgbClr val="E4DADD"/>
-                      </a:solidFill>
-                      <a:prstDash val="solid"/>
-                      <a:round/>
-                      <a:headEnd type="none" w="med" len="med"/>
-                      <a:tailEnd type="none" w="med" len="med"/>
-                    </a:lnL>
-                    <a:lnR w="6350" cap="flat" cmpd="sng" algn="ctr">
-                      <a:solidFill>
-                        <a:srgbClr val="E4DADD"/>
-                      </a:solidFill>
-                      <a:prstDash val="solid"/>
-                      <a:round/>
-                      <a:headEnd type="none" w="med" len="med"/>
-                      <a:tailEnd type="none" w="med" len="med"/>
-                    </a:lnR>
-                    <a:lnT w="6350" cap="flat" cmpd="sng" algn="ctr">
-                      <a:solidFill>
-                        <a:srgbClr val="E4DADD"/>
-                      </a:solidFill>
-                      <a:prstDash val="solid"/>
-                      <a:round/>
-                      <a:headEnd type="none" w="med" len="med"/>
-                      <a:tailEnd type="none" w="med" len="med"/>
-                    </a:lnT>
-                    <a:lnB w="6350" cap="flat" cmpd="sng" algn="ctr">
-                      <a:solidFill>
-                        <a:srgbClr val="E4DADD"/>
-                      </a:solidFill>
-                      <a:prstDash val="solid"/>
-                      <a:round/>
-                      <a:headEnd type="none" w="med" len="med"/>
-                      <a:tailEnd type="none" w="med" len="med"/>
-                    </a:lnB>
-                  </a:tcPr>
-                </a:tc>
-              </a:tr>
-              <a:tr h="384048">
-                <a:tc>
-                  <a:txBody>
-                    <a:bodyPr/>
-                    <a:lstStyle/>
-                    <a:p>
-                      <a:pPr indent="0" marL="0">
-                        <a:buNone/>
-                      </a:pPr>
-                      <a:r>
-                        <a:rPr lang="en-US" sz="1050" dirty="0">
-                          <a:solidFill>
-                            <a:srgbClr val="1F1A1C"/>
-                          </a:solidFill>
-                          <a:latin typeface="Calibri" pitchFamily="34" charset="0"/>
-                          <a:ea typeface="Calibri" pitchFamily="34" charset="-122"/>
-                          <a:cs typeface="Calibri" pitchFamily="34" charset="-120"/>
-                        </a:rPr>
-                        <a:t>18.00億円</a:t>
-                      </a:r>
-                      <a:endParaRPr lang="en-US" sz="1050" dirty="0">
-                        <a:latin typeface="Calibri" charset="0"/>
-                        <a:ea typeface="Calibri" charset="0"/>
-                        <a:cs typeface="Calibri" charset="0"/>
-                      </a:endParaRPr>
-                    </a:p>
-                  </a:txBody>
-                  <a:tcPr marL="91440" marR="91440" marT="45720" marB="45720" anchor="ctr">
-                    <a:lnL w="6350" cap="flat" cmpd="sng" algn="ctr">
-                      <a:solidFill>
-                        <a:srgbClr val="E4DADD"/>
-                      </a:solidFill>
-                      <a:prstDash val="solid"/>
-                      <a:round/>
-                      <a:headEnd type="none" w="med" len="med"/>
-                      <a:tailEnd type="none" w="med" len="med"/>
-                    </a:lnL>
-                    <a:lnR w="6350" cap="flat" cmpd="sng" algn="ctr">
-                      <a:solidFill>
-                        <a:srgbClr val="E4DADD"/>
-                      </a:solidFill>
-                      <a:prstDash val="solid"/>
-                      <a:round/>
-                      <a:headEnd type="none" w="med" len="med"/>
-                      <a:tailEnd type="none" w="med" len="med"/>
-                    </a:lnR>
-                    <a:lnT w="6350" cap="flat" cmpd="sng" algn="ctr">
-                      <a:solidFill>
-                        <a:srgbClr val="E4DADD"/>
-                      </a:solidFill>
-                      <a:prstDash val="solid"/>
-                      <a:round/>
-                      <a:headEnd type="none" w="med" len="med"/>
-                      <a:tailEnd type="none" w="med" len="med"/>
-                    </a:lnT>
-                    <a:lnB w="6350" cap="flat" cmpd="sng" algn="ctr">
-                      <a:solidFill>
-                        <a:srgbClr val="E4DADD"/>
-                      </a:solidFill>
-                      <a:prstDash val="solid"/>
-                      <a:round/>
-                      <a:headEnd type="none" w="med" len="med"/>
-                      <a:tailEnd type="none" w="med" len="med"/>
-                    </a:lnB>
-                  </a:tcPr>
-                </a:tc>
-                <a:tc>
-                  <a:txBody>
-                    <a:bodyPr/>
-                    <a:lstStyle/>
-                    <a:p>
-                      <a:pPr algn="r" indent="0" marL="0">
-                        <a:buNone/>
-                      </a:pPr>
-                      <a:r>
-                        <a:rPr lang="en-US" sz="1050" dirty="0">
-                          <a:solidFill>
-                            <a:srgbClr val="1F1A1C"/>
-                          </a:solidFill>
-                          <a:latin typeface="Calibri" pitchFamily="34" charset="0"/>
-                          <a:ea typeface="Calibri" pitchFamily="34" charset="-122"/>
-                          <a:cs typeface="Calibri" pitchFamily="34" charset="-120"/>
-                        </a:rPr>
-                        <a:t>3.11億円</a:t>
-                      </a:r>
-                      <a:endParaRPr lang="en-US" sz="1050" dirty="0">
-                        <a:latin typeface="Calibri" charset="0"/>
-                        <a:ea typeface="Calibri" charset="0"/>
-                        <a:cs typeface="Calibri" charset="0"/>
-                      </a:endParaRPr>
-                    </a:p>
-                  </a:txBody>
-                  <a:tcPr marL="91440" marR="91440" marT="45720" marB="45720" anchor="ctr">
-                    <a:lnL w="6350" cap="flat" cmpd="sng" algn="ctr">
-                      <a:solidFill>
-                        <a:srgbClr val="E4DADD"/>
-                      </a:solidFill>
-                      <a:prstDash val="solid"/>
-                      <a:round/>
-                      <a:headEnd type="none" w="med" len="med"/>
-                      <a:tailEnd type="none" w="med" len="med"/>
-                    </a:lnL>
-                    <a:lnR w="6350" cap="flat" cmpd="sng" algn="ctr">
-                      <a:solidFill>
-                        <a:srgbClr val="E4DADD"/>
-                      </a:solidFill>
-                      <a:prstDash val="solid"/>
-                      <a:round/>
-                      <a:headEnd type="none" w="med" len="med"/>
-                      <a:tailEnd type="none" w="med" len="med"/>
-                    </a:lnR>
-                    <a:lnT w="6350" cap="flat" cmpd="sng" algn="ctr">
-                      <a:solidFill>
-                        <a:srgbClr val="E4DADD"/>
-                      </a:solidFill>
-                      <a:prstDash val="solid"/>
-                      <a:round/>
-                      <a:headEnd type="none" w="med" len="med"/>
-                      <a:tailEnd type="none" w="med" len="med"/>
-                    </a:lnT>
-                    <a:lnB w="6350" cap="flat" cmpd="sng" algn="ctr">
-                      <a:solidFill>
-                        <a:srgbClr val="E4DADD"/>
-                      </a:solidFill>
-                      <a:prstDash val="solid"/>
-                      <a:round/>
-                      <a:headEnd type="none" w="med" len="med"/>
-                      <a:tailEnd type="none" w="med" len="med"/>
-                    </a:lnB>
-                  </a:tcPr>
-                </a:tc>
-                <a:tc>
-                  <a:txBody>
-                    <a:bodyPr/>
-                    <a:lstStyle/>
-                    <a:p>
-                      <a:pPr algn="r" indent="0" marL="0">
-                        <a:buNone/>
-                      </a:pPr>
-                      <a:r>
-                        <a:rPr lang="en-US" sz="1050" dirty="0">
-                          <a:solidFill>
-                            <a:srgbClr val="1F1A1C"/>
-                          </a:solidFill>
-                          <a:latin typeface="Calibri" pitchFamily="34" charset="0"/>
-                          <a:ea typeface="Calibri" pitchFamily="34" charset="-122"/>
-                          <a:cs typeface="Calibri" pitchFamily="34" charset="-120"/>
-                        </a:rPr>
-                        <a:t>1.13</a:t>
-                      </a:r>
-                      <a:endParaRPr lang="en-US" sz="1050" dirty="0">
-                        <a:latin typeface="Calibri" charset="0"/>
-                        <a:ea typeface="Calibri" charset="0"/>
-                        <a:cs typeface="Calibri" charset="0"/>
-                      </a:endParaRPr>
-                    </a:p>
-                  </a:txBody>
-                  <a:tcPr marL="91440" marR="91440" marT="45720" marB="45720" anchor="ctr">
-                    <a:lnL w="6350" cap="flat" cmpd="sng" algn="ctr">
-                      <a:solidFill>
-                        <a:srgbClr val="E4DADD"/>
-                      </a:solidFill>
-                      <a:prstDash val="solid"/>
-                      <a:round/>
-                      <a:headEnd type="none" w="med" len="med"/>
-                      <a:tailEnd type="none" w="med" len="med"/>
-                    </a:lnL>
-                    <a:lnR w="6350" cap="flat" cmpd="sng" algn="ctr">
-                      <a:solidFill>
-                        <a:srgbClr val="E4DADD"/>
-                      </a:solidFill>
-                      <a:prstDash val="solid"/>
-                      <a:round/>
-                      <a:headEnd type="none" w="med" len="med"/>
-                      <a:tailEnd type="none" w="med" len="med"/>
-                    </a:lnR>
-                    <a:lnT w="6350" cap="flat" cmpd="sng" algn="ctr">
-                      <a:solidFill>
-                        <a:srgbClr val="E4DADD"/>
-                      </a:solidFill>
-                      <a:prstDash val="solid"/>
-                      <a:round/>
-                      <a:headEnd type="none" w="med" len="med"/>
-                      <a:tailEnd type="none" w="med" len="med"/>
-                    </a:lnT>
-                    <a:lnB w="6350" cap="flat" cmpd="sng" algn="ctr">
-                      <a:solidFill>
-                        <a:srgbClr val="E4DADD"/>
-                      </a:solidFill>
-                      <a:prstDash val="solid"/>
-                      <a:round/>
-                      <a:headEnd type="none" w="med" len="med"/>
-                      <a:tailEnd type="none" w="med" len="med"/>
-                    </a:lnB>
-                  </a:tcPr>
-                </a:tc>
-                <a:tc>
-                  <a:txBody>
-                    <a:bodyPr/>
-                    <a:lstStyle/>
-                    <a:p>
-                      <a:pPr algn="r" indent="0" marL="0">
-                        <a:buNone/>
-                      </a:pPr>
-                      <a:r>
-                        <a:rPr lang="en-US" sz="1050" dirty="0">
-                          <a:solidFill>
-                            <a:srgbClr val="9B2C2C"/>
-                          </a:solidFill>
-                          <a:latin typeface="Calibri" pitchFamily="34" charset="0"/>
-                          <a:ea typeface="Calibri" pitchFamily="34" charset="-122"/>
-                          <a:cs typeface="Calibri" pitchFamily="34" charset="-120"/>
-                        </a:rPr>
-                        <a:t>0.89</a:t>
-                      </a:r>
-                      <a:endParaRPr lang="en-US" sz="1050" dirty="0">
-                        <a:latin typeface="Calibri" charset="0"/>
-                        <a:ea typeface="Calibri" charset="0"/>
-                        <a:cs typeface="Calibri" charset="0"/>
-                      </a:endParaRPr>
-                    </a:p>
-                  </a:txBody>
-                  <a:tcPr marL="91440" marR="91440" marT="45720" marB="45720" anchor="ctr">
-                    <a:lnL w="6350" cap="flat" cmpd="sng" algn="ctr">
-                      <a:solidFill>
-                        <a:srgbClr val="E4DADD"/>
-                      </a:solidFill>
-                      <a:prstDash val="solid"/>
-                      <a:round/>
-                      <a:headEnd type="none" w="med" len="med"/>
-                      <a:tailEnd type="none" w="med" len="med"/>
-                    </a:lnL>
-                    <a:lnR w="6350" cap="flat" cmpd="sng" algn="ctr">
-                      <a:solidFill>
-                        <a:srgbClr val="E4DADD"/>
-                      </a:solidFill>
-                      <a:prstDash val="solid"/>
-                      <a:round/>
-                      <a:headEnd type="none" w="med" len="med"/>
-                      <a:tailEnd type="none" w="med" len="med"/>
-                    </a:lnR>
-                    <a:lnT w="6350" cap="flat" cmpd="sng" algn="ctr">
-                      <a:solidFill>
-                        <a:srgbClr val="E4DADD"/>
-                      </a:solidFill>
-                      <a:prstDash val="solid"/>
-                      <a:round/>
-                      <a:headEnd type="none" w="med" len="med"/>
-                      <a:tailEnd type="none" w="med" len="med"/>
-                    </a:lnT>
-                    <a:lnB w="6350" cap="flat" cmpd="sng" algn="ctr">
-                      <a:solidFill>
-                        <a:srgbClr val="E4DADD"/>
-                      </a:solidFill>
-                      <a:prstDash val="solid"/>
-                      <a:round/>
-                      <a:headEnd type="none" w="med" len="med"/>
-                      <a:tailEnd type="none" w="med" len="med"/>
-                    </a:lnB>
-                  </a:tcPr>
-                </a:tc>
-                <a:tc>
-                  <a:txBody>
-                    <a:bodyPr/>
-                    <a:lstStyle/>
-                    <a:p>
-                      <a:pPr algn="r" indent="0" marL="0">
-                        <a:buNone/>
-                      </a:pPr>
-                      <a:r>
-                        <a:rPr lang="en-US" sz="1050" dirty="0">
-                          <a:solidFill>
-                            <a:srgbClr val="1F1A1C"/>
-                          </a:solidFill>
-                          <a:latin typeface="Calibri" pitchFamily="34" charset="0"/>
-                          <a:ea typeface="Calibri" pitchFamily="34" charset="-122"/>
-                          <a:cs typeface="Calibri" pitchFamily="34" charset="-120"/>
-                        </a:rPr>
-                        <a:t>3.4倍</a:t>
-                      </a:r>
-                      <a:endParaRPr lang="en-US" sz="1050" dirty="0">
-                        <a:latin typeface="Calibri" charset="0"/>
-                        <a:ea typeface="Calibri" charset="0"/>
-                        <a:cs typeface="Calibri" charset="0"/>
-                      </a:endParaRPr>
-                    </a:p>
-                  </a:txBody>
-                  <a:tcPr marL="91440" marR="91440" marT="45720" marB="45720" anchor="ctr">
-                    <a:lnL w="6350" cap="flat" cmpd="sng" algn="ctr">
-                      <a:solidFill>
-                        <a:srgbClr val="E4DADD"/>
-                      </a:solidFill>
-                      <a:prstDash val="solid"/>
-                      <a:round/>
-                      <a:headEnd type="none" w="med" len="med"/>
-                      <a:tailEnd type="none" w="med" len="med"/>
-                    </a:lnL>
-                    <a:lnR w="6350" cap="flat" cmpd="sng" algn="ctr">
-                      <a:solidFill>
-                        <a:srgbClr val="E4DADD"/>
-                      </a:solidFill>
-                      <a:prstDash val="solid"/>
-                      <a:round/>
-                      <a:headEnd type="none" w="med" len="med"/>
-                      <a:tailEnd type="none" w="med" len="med"/>
-                    </a:lnR>
-                    <a:lnT w="6350" cap="flat" cmpd="sng" algn="ctr">
-                      <a:solidFill>
-                        <a:srgbClr val="E4DADD"/>
-                      </a:solidFill>
-                      <a:prstDash val="solid"/>
-                      <a:round/>
-                      <a:headEnd type="none" w="med" len="med"/>
-                      <a:tailEnd type="none" w="med" len="med"/>
-                    </a:lnT>
-                    <a:lnB w="6350" cap="flat" cmpd="sng" algn="ctr">
-                      <a:solidFill>
-                        <a:srgbClr val="E4DADD"/>
-                      </a:solidFill>
-                      <a:prstDash val="solid"/>
-                      <a:round/>
-                      <a:headEnd type="none" w="med" len="med"/>
-                      <a:tailEnd type="none" w="med" len="med"/>
-                    </a:lnB>
-                  </a:tcPr>
-                </a:tc>
-                <a:tc>
-                  <a:txBody>
-                    <a:bodyPr/>
-                    <a:lstStyle/>
-                    <a:p>
-                      <a:pPr indent="0" marL="0">
-                        <a:buNone/>
-                      </a:pPr>
-                      <a:r>
-                        <a:rPr lang="en-US" sz="1050" dirty="0">
-                          <a:solidFill>
-                            <a:srgbClr val="A8741A"/>
-                          </a:solidFill>
-                          <a:latin typeface="Calibri" pitchFamily="34" charset="0"/>
-                          <a:ea typeface="Calibri" pitchFamily="34" charset="-122"/>
-                          <a:cs typeface="Calibri" pitchFamily="34" charset="-120"/>
-                        </a:rPr>
-                        <a:t>△ 厳しい</a:t>
-                      </a:r>
-                      <a:endParaRPr lang="en-US" sz="1050" dirty="0">
-                        <a:latin typeface="Calibri" charset="0"/>
-                        <a:ea typeface="Calibri" charset="0"/>
-                        <a:cs typeface="Calibri" charset="0"/>
-                      </a:endParaRPr>
-                    </a:p>
-                  </a:txBody>
-                  <a:tcPr marL="91440" marR="91440" marT="45720" marB="45720" anchor="ctr">
-                    <a:lnL w="6350" cap="flat" cmpd="sng" algn="ctr">
-                      <a:solidFill>
-                        <a:srgbClr val="E4DADD"/>
-                      </a:solidFill>
-                      <a:prstDash val="solid"/>
-                      <a:round/>
-                      <a:headEnd type="none" w="med" len="med"/>
-                      <a:tailEnd type="none" w="med" len="med"/>
-                    </a:lnL>
-                    <a:lnR w="6350" cap="flat" cmpd="sng" algn="ctr">
-                      <a:solidFill>
-                        <a:srgbClr val="E4DADD"/>
-                      </a:solidFill>
-                      <a:prstDash val="solid"/>
-                      <a:round/>
-                      <a:headEnd type="none" w="med" len="med"/>
-                      <a:tailEnd type="none" w="med" len="med"/>
-                    </a:lnR>
-                    <a:lnT w="6350" cap="flat" cmpd="sng" algn="ctr">
-                      <a:solidFill>
-                        <a:srgbClr val="E4DADD"/>
-                      </a:solidFill>
-                      <a:prstDash val="solid"/>
-                      <a:round/>
-                      <a:headEnd type="none" w="med" len="med"/>
-                      <a:tailEnd type="none" w="med" len="med"/>
-                    </a:lnT>
-                    <a:lnB w="6350" cap="flat" cmpd="sng" algn="ctr">
-                      <a:solidFill>
-                        <a:srgbClr val="E4DADD"/>
-                      </a:solidFill>
-                      <a:prstDash val="solid"/>
-                      <a:round/>
-                      <a:headEnd type="none" w="med" len="med"/>
-                      <a:tailEnd type="none" w="med" len="med"/>
-                    </a:lnB>
-                  </a:tcPr>
-                </a:tc>
-              </a:tr>
-              <a:tr h="384048">
-                <a:tc>
-                  <a:txBody>
-                    <a:bodyPr/>
-                    <a:lstStyle/>
-                    <a:p>
-                      <a:pPr indent="0" marL="0">
-                        <a:buNone/>
-                      </a:pPr>
-                      <a:r>
-                        <a:rPr lang="en-US" sz="1050" dirty="0">
-                          <a:solidFill>
-                            <a:srgbClr val="1F1A1C"/>
-                          </a:solidFill>
-                          <a:latin typeface="Calibri" pitchFamily="34" charset="0"/>
-                          <a:ea typeface="Calibri" pitchFamily="34" charset="-122"/>
-                          <a:cs typeface="Calibri" pitchFamily="34" charset="-120"/>
-                        </a:rPr>
-                        <a:t>20.00億円</a:t>
-                      </a:r>
-                      <a:endParaRPr lang="en-US" sz="1050" dirty="0">
-                        <a:latin typeface="Calibri" charset="0"/>
-                        <a:ea typeface="Calibri" charset="0"/>
-                        <a:cs typeface="Calibri" charset="0"/>
-                      </a:endParaRPr>
-                    </a:p>
-                  </a:txBody>
-                  <a:tcPr marL="91440" marR="91440" marT="45720" marB="45720" anchor="ctr">
-                    <a:lnL w="6350" cap="flat" cmpd="sng" algn="ctr">
-                      <a:solidFill>
-                        <a:srgbClr val="E4DADD"/>
-                      </a:solidFill>
-                      <a:prstDash val="solid"/>
-                      <a:round/>
-                      <a:headEnd type="none" w="med" len="med"/>
-                      <a:tailEnd type="none" w="med" len="med"/>
-                    </a:lnL>
-                    <a:lnR w="6350" cap="flat" cmpd="sng" algn="ctr">
-                      <a:solidFill>
-                        <a:srgbClr val="E4DADD"/>
-                      </a:solidFill>
-                      <a:prstDash val="solid"/>
-                      <a:round/>
-                      <a:headEnd type="none" w="med" len="med"/>
-                      <a:tailEnd type="none" w="med" len="med"/>
-                    </a:lnR>
-                    <a:lnT w="6350" cap="flat" cmpd="sng" algn="ctr">
-                      <a:solidFill>
-                        <a:srgbClr val="E4DADD"/>
-                      </a:solidFill>
-                      <a:prstDash val="solid"/>
-                      <a:round/>
-                      <a:headEnd type="none" w="med" len="med"/>
-                      <a:tailEnd type="none" w="med" len="med"/>
-                    </a:lnT>
-                    <a:lnB w="6350" cap="flat" cmpd="sng" algn="ctr">
-                      <a:solidFill>
-                        <a:srgbClr val="E4DADD"/>
-                      </a:solidFill>
-                      <a:prstDash val="solid"/>
-                      <a:round/>
-                      <a:headEnd type="none" w="med" len="med"/>
-                      <a:tailEnd type="none" w="med" len="med"/>
-                    </a:lnB>
-                  </a:tcPr>
-                </a:tc>
-                <a:tc>
-                  <a:txBody>
-                    <a:bodyPr/>
-                    <a:lstStyle/>
-                    <a:p>
-                      <a:pPr algn="r" indent="0" marL="0">
-                        <a:buNone/>
-                      </a:pPr>
-                      <a:r>
-                        <a:rPr lang="en-US" sz="1050" dirty="0">
-                          <a:solidFill>
-                            <a:srgbClr val="1F1A1C"/>
-                          </a:solidFill>
-                          <a:latin typeface="Calibri" pitchFamily="34" charset="0"/>
-                          <a:ea typeface="Calibri" pitchFamily="34" charset="-122"/>
-                          <a:cs typeface="Calibri" pitchFamily="34" charset="-120"/>
-                        </a:rPr>
-                        <a:t>3.46億円</a:t>
-                      </a:r>
-                      <a:endParaRPr lang="en-US" sz="1050" dirty="0">
-                        <a:latin typeface="Calibri" charset="0"/>
-                        <a:ea typeface="Calibri" charset="0"/>
-                        <a:cs typeface="Calibri" charset="0"/>
-                      </a:endParaRPr>
-                    </a:p>
-                  </a:txBody>
-                  <a:tcPr marL="91440" marR="91440" marT="45720" marB="45720" anchor="ctr">
-                    <a:lnL w="6350" cap="flat" cmpd="sng" algn="ctr">
-                      <a:solidFill>
-                        <a:srgbClr val="E4DADD"/>
-                      </a:solidFill>
-                      <a:prstDash val="solid"/>
-                      <a:round/>
-                      <a:headEnd type="none" w="med" len="med"/>
-                      <a:tailEnd type="none" w="med" len="med"/>
-                    </a:lnL>
-                    <a:lnR w="6350" cap="flat" cmpd="sng" algn="ctr">
-                      <a:solidFill>
-                        <a:srgbClr val="E4DADD"/>
-                      </a:solidFill>
-                      <a:prstDash val="solid"/>
-                      <a:round/>
-                      <a:headEnd type="none" w="med" len="med"/>
-                      <a:tailEnd type="none" w="med" len="med"/>
-                    </a:lnR>
-                    <a:lnT w="6350" cap="flat" cmpd="sng" algn="ctr">
-                      <a:solidFill>
-                        <a:srgbClr val="E4DADD"/>
-                      </a:solidFill>
-                      <a:prstDash val="solid"/>
-                      <a:round/>
-                      <a:headEnd type="none" w="med" len="med"/>
-                      <a:tailEnd type="none" w="med" len="med"/>
-                    </a:lnT>
-                    <a:lnB w="6350" cap="flat" cmpd="sng" algn="ctr">
-                      <a:solidFill>
-                        <a:srgbClr val="E4DADD"/>
-                      </a:solidFill>
-                      <a:prstDash val="solid"/>
-                      <a:round/>
-                      <a:headEnd type="none" w="med" len="med"/>
-                      <a:tailEnd type="none" w="med" len="med"/>
-                    </a:lnB>
-                  </a:tcPr>
-                </a:tc>
-                <a:tc>
-                  <a:txBody>
-                    <a:bodyPr/>
-                    <a:lstStyle/>
-                    <a:p>
-                      <a:pPr algn="r" indent="0" marL="0">
-                        <a:buNone/>
-                      </a:pPr>
-                      <a:r>
-                        <a:rPr lang="en-US" sz="1050" dirty="0">
-                          <a:solidFill>
-                            <a:srgbClr val="9B2C2C"/>
-                          </a:solidFill>
-                          <a:latin typeface="Calibri" pitchFamily="34" charset="0"/>
-                          <a:ea typeface="Calibri" pitchFamily="34" charset="-122"/>
-                          <a:cs typeface="Calibri" pitchFamily="34" charset="-120"/>
-                        </a:rPr>
-                        <a:t>1.01</a:t>
-                      </a:r>
-                      <a:endParaRPr lang="en-US" sz="1050" dirty="0">
-                        <a:latin typeface="Calibri" charset="0"/>
-                        <a:ea typeface="Calibri" charset="0"/>
-                        <a:cs typeface="Calibri" charset="0"/>
-                      </a:endParaRPr>
-                    </a:p>
-                  </a:txBody>
-                  <a:tcPr marL="91440" marR="91440" marT="45720" marB="45720" anchor="ctr">
-                    <a:lnL w="6350" cap="flat" cmpd="sng" algn="ctr">
-                      <a:solidFill>
-                        <a:srgbClr val="E4DADD"/>
-                      </a:solidFill>
-                      <a:prstDash val="solid"/>
-                      <a:round/>
-                      <a:headEnd type="none" w="med" len="med"/>
-                      <a:tailEnd type="none" w="med" len="med"/>
-                    </a:lnL>
-                    <a:lnR w="6350" cap="flat" cmpd="sng" algn="ctr">
-                      <a:solidFill>
-                        <a:srgbClr val="E4DADD"/>
-                      </a:solidFill>
-                      <a:prstDash val="solid"/>
-                      <a:round/>
-                      <a:headEnd type="none" w="med" len="med"/>
-                      <a:tailEnd type="none" w="med" len="med"/>
-                    </a:lnR>
-                    <a:lnT w="6350" cap="flat" cmpd="sng" algn="ctr">
-                      <a:solidFill>
-                        <a:srgbClr val="E4DADD"/>
-                      </a:solidFill>
-                      <a:prstDash val="solid"/>
-                      <a:round/>
-                      <a:headEnd type="none" w="med" len="med"/>
-                      <a:tailEnd type="none" w="med" len="med"/>
-                    </a:lnT>
-                    <a:lnB w="6350" cap="flat" cmpd="sng" algn="ctr">
-                      <a:solidFill>
-                        <a:srgbClr val="E4DADD"/>
-                      </a:solidFill>
-                      <a:prstDash val="solid"/>
-                      <a:round/>
-                      <a:headEnd type="none" w="med" len="med"/>
-                      <a:tailEnd type="none" w="med" len="med"/>
-                    </a:lnB>
-                  </a:tcPr>
-                </a:tc>
-                <a:tc>
-                  <a:txBody>
-                    <a:bodyPr/>
-                    <a:lstStyle/>
-                    <a:p>
-                      <a:pPr algn="r" indent="0" marL="0">
-                        <a:buNone/>
-                      </a:pPr>
-                      <a:r>
-                        <a:rPr lang="en-US" sz="1050" dirty="0">
-                          <a:solidFill>
-                            <a:srgbClr val="9B2C2C"/>
-                          </a:solidFill>
-                          <a:latin typeface="Calibri" pitchFamily="34" charset="0"/>
-                          <a:ea typeface="Calibri" pitchFamily="34" charset="-122"/>
-                          <a:cs typeface="Calibri" pitchFamily="34" charset="-120"/>
-                        </a:rPr>
-                        <a:t>0.80</a:t>
-                      </a:r>
-                      <a:endParaRPr lang="en-US" sz="1050" dirty="0">
-                        <a:latin typeface="Calibri" charset="0"/>
-                        <a:ea typeface="Calibri" charset="0"/>
-                        <a:cs typeface="Calibri" charset="0"/>
-                      </a:endParaRPr>
-                    </a:p>
-                  </a:txBody>
-                  <a:tcPr marL="91440" marR="91440" marT="45720" marB="45720" anchor="ctr">
-                    <a:lnL w="6350" cap="flat" cmpd="sng" algn="ctr">
-                      <a:solidFill>
-                        <a:srgbClr val="E4DADD"/>
-                      </a:solidFill>
-                      <a:prstDash val="solid"/>
-                      <a:round/>
-                      <a:headEnd type="none" w="med" len="med"/>
-                      <a:tailEnd type="none" w="med" len="med"/>
-                    </a:lnL>
-                    <a:lnR w="6350" cap="flat" cmpd="sng" algn="ctr">
-                      <a:solidFill>
-                        <a:srgbClr val="E4DADD"/>
-                      </a:solidFill>
-                      <a:prstDash val="solid"/>
-                      <a:round/>
-                      <a:headEnd type="none" w="med" len="med"/>
-                      <a:tailEnd type="none" w="med" len="med"/>
-                    </a:lnR>
-                    <a:lnT w="6350" cap="flat" cmpd="sng" algn="ctr">
-                      <a:solidFill>
-                        <a:srgbClr val="E4DADD"/>
-                      </a:solidFill>
-                      <a:prstDash val="solid"/>
-                      <a:round/>
-                      <a:headEnd type="none" w="med" len="med"/>
-                      <a:tailEnd type="none" w="med" len="med"/>
-                    </a:lnT>
-                    <a:lnB w="6350" cap="flat" cmpd="sng" algn="ctr">
-                      <a:solidFill>
-                        <a:srgbClr val="E4DADD"/>
-                      </a:solidFill>
-                      <a:prstDash val="solid"/>
-                      <a:round/>
-                      <a:headEnd type="none" w="med" len="med"/>
-                      <a:tailEnd type="none" w="med" len="med"/>
-                    </a:lnB>
-                  </a:tcPr>
-                </a:tc>
-                <a:tc>
-                  <a:txBody>
-                    <a:bodyPr/>
-                    <a:lstStyle/>
-                    <a:p>
-                      <a:pPr algn="r" indent="0" marL="0">
-                        <a:buNone/>
-                      </a:pPr>
-                      <a:r>
-                        <a:rPr lang="en-US" sz="1050" dirty="0">
-                          <a:solidFill>
-                            <a:srgbClr val="1F1A1C"/>
-                          </a:solidFill>
-                          <a:latin typeface="Calibri" pitchFamily="34" charset="0"/>
-                          <a:ea typeface="Calibri" pitchFamily="34" charset="-122"/>
-                          <a:cs typeface="Calibri" pitchFamily="34" charset="-120"/>
-                        </a:rPr>
-                        <a:t>3.8倍</a:t>
-                      </a:r>
-                      <a:endParaRPr lang="en-US" sz="1050" dirty="0">
-                        <a:latin typeface="Calibri" charset="0"/>
-                        <a:ea typeface="Calibri" charset="0"/>
-                        <a:cs typeface="Calibri" charset="0"/>
-                      </a:endParaRPr>
-                    </a:p>
-                  </a:txBody>
-                  <a:tcPr marL="91440" marR="91440" marT="45720" marB="45720" anchor="ctr">
-                    <a:lnL w="6350" cap="flat" cmpd="sng" algn="ctr">
-                      <a:solidFill>
-                        <a:srgbClr val="E4DADD"/>
-                      </a:solidFill>
-                      <a:prstDash val="solid"/>
-                      <a:round/>
-                      <a:headEnd type="none" w="med" len="med"/>
-                      <a:tailEnd type="none" w="med" len="med"/>
-                    </a:lnL>
-                    <a:lnR w="6350" cap="flat" cmpd="sng" algn="ctr">
-                      <a:solidFill>
-                        <a:srgbClr val="E4DADD"/>
-                      </a:solidFill>
-                      <a:prstDash val="solid"/>
-                      <a:round/>
-                      <a:headEnd type="none" w="med" len="med"/>
-                      <a:tailEnd type="none" w="med" len="med"/>
-                    </a:lnR>
-                    <a:lnT w="6350" cap="flat" cmpd="sng" algn="ctr">
-                      <a:solidFill>
-                        <a:srgbClr val="E4DADD"/>
-                      </a:solidFill>
-                      <a:prstDash val="solid"/>
-                      <a:round/>
-                      <a:headEnd type="none" w="med" len="med"/>
-                      <a:tailEnd type="none" w="med" len="med"/>
-                    </a:lnT>
-                    <a:lnB w="6350" cap="flat" cmpd="sng" algn="ctr">
-                      <a:solidFill>
-                        <a:srgbClr val="E4DADD"/>
-                      </a:solidFill>
-                      <a:prstDash val="solid"/>
-                      <a:round/>
-                      <a:headEnd type="none" w="med" len="med"/>
-                      <a:tailEnd type="none" w="med" len="med"/>
-                    </a:lnB>
-                  </a:tcPr>
-                </a:tc>
-                <a:tc>
-                  <a:txBody>
-                    <a:bodyPr/>
-                    <a:lstStyle/>
-                    <a:p>
-                      <a:pPr indent="0" marL="0">
-                        <a:buNone/>
-                      </a:pPr>
-                      <a:r>
-                        <a:rPr lang="en-US" sz="1050" b="1" dirty="0">
-                          <a:solidFill>
-                            <a:srgbClr val="9B2C2C"/>
-                          </a:solidFill>
-                          <a:latin typeface="Calibri" pitchFamily="34" charset="0"/>
-                          <a:ea typeface="Calibri" pitchFamily="34" charset="-122"/>
-                          <a:cs typeface="Calibri" pitchFamily="34" charset="-120"/>
-                        </a:rPr>
-                        <a:t>× 平常時でも返済不能</a:t>
-                      </a:r>
-                      <a:endParaRPr lang="en-US" sz="1050" dirty="0">
-                        <a:latin typeface="Calibri" charset="0"/>
-                        <a:ea typeface="Calibri" charset="0"/>
-                        <a:cs typeface="Calibri" charset="0"/>
-                      </a:endParaRPr>
-                    </a:p>
-                  </a:txBody>
-                  <a:tcPr marL="91440" marR="91440" marT="45720" marB="45720" anchor="ctr">
-                    <a:lnL w="6350" cap="flat" cmpd="sng" algn="ctr">
-                      <a:solidFill>
-                        <a:srgbClr val="E4DADD"/>
-                      </a:solidFill>
-                      <a:prstDash val="solid"/>
-                      <a:round/>
-                      <a:headEnd type="none" w="med" len="med"/>
-                      <a:tailEnd type="none" w="med" len="med"/>
-                    </a:lnL>
-                    <a:lnR w="6350" cap="flat" cmpd="sng" algn="ctr">
-                      <a:solidFill>
-                        <a:srgbClr val="E4DADD"/>
-                      </a:solidFill>
-                      <a:prstDash val="solid"/>
-                      <a:round/>
-                      <a:headEnd type="none" w="med" len="med"/>
-                      <a:tailEnd type="none" w="med" len="med"/>
-                    </a:lnR>
-                    <a:lnT w="6350" cap="flat" cmpd="sng" algn="ctr">
-                      <a:solidFill>
-                        <a:srgbClr val="E4DADD"/>
-                      </a:solidFill>
-                      <a:prstDash val="solid"/>
-                      <a:round/>
-                      <a:headEnd type="none" w="med" len="med"/>
-                      <a:tailEnd type="none" w="med" len="med"/>
-                    </a:lnT>
-                    <a:lnB w="6350" cap="flat" cmpd="sng" algn="ctr">
-                      <a:solidFill>
-                        <a:srgbClr val="E4DADD"/>
-                      </a:solidFill>
-                      <a:prstDash val="solid"/>
-                      <a:round/>
-                      <a:headEnd type="none" w="med" len="med"/>
-                      <a:tailEnd type="none" w="med" len="med"/>
-                    </a:lnB>
+                    <a:solidFill>
+                      <a:srgbClr val="F7F3F4"/>
+                    </a:solidFill>
                   </a:tcPr>
                 </a:tc>
               </a:tr>
@@ -17118,80 +20959,14 @@
       </p:graphicFrame>
       <p:sp>
         <p:nvSpPr>
-          <p:cNvPr id="6" name="Shape 3"/>
-          <p:cNvSpPr/>
-          <p:nvPr/>
-        </p:nvSpPr>
-        <p:spPr>
-          <a:xfrm>
-            <a:off x="566928" y="4434840"/>
-            <a:ext cx="5440680" cy="1371600"/>
-          </a:xfrm>
-          <a:prstGeom prst="roundRect">
-            <a:avLst>
-              <a:gd name="adj" fmla="val 3333"/>
-            </a:avLst>
-          </a:prstGeom>
-          <a:solidFill>
-            <a:srgbClr val="F7F3F4"/>
-          </a:solidFill>
-          <a:ln w="9525">
-            <a:solidFill>
-              <a:srgbClr val="E4DADD"/>
-            </a:solidFill>
-            <a:prstDash val="solid"/>
-          </a:ln>
-        </p:spPr>
-      </p:sp>
-      <p:sp>
-        <p:nvSpPr>
-          <p:cNvPr id="7" name="Text 4"/>
+          <p:cNvPr id="24" name="Text 20"/>
           <p:cNvSpPr txBox="1"/>
           <p:nvPr/>
         </p:nvSpPr>
         <p:spPr>
           <a:xfrm>
-            <a:off x="786384" y="4562856"/>
-            <a:ext cx="4937760" cy="237744"/>
-          </a:xfrm>
-          <a:prstGeom prst="rect">
-            <a:avLst/>
-          </a:prstGeom>
-          <a:noFill/>
-          <a:ln/>
-        </p:spPr>
-        <p:txBody>
-          <a:bodyPr wrap="square" lIns="0" tIns="0" rIns="0" bIns="0" rtlCol="0" anchor="ctr"/>
-          <a:lstStyle/>
-          <a:p>
-            <a:pPr indent="0" marL="0">
-              <a:buNone/>
-            </a:pPr>
-            <a:r>
-              <a:rPr lang="en-US" sz="1000" b="1" dirty="0">
-                <a:solidFill>
-                  <a:srgbClr val="B58B2A"/>
-                </a:solidFill>
-                <a:latin typeface="Calibri" pitchFamily="34" charset="0"/>
-                <a:ea typeface="Calibri" pitchFamily="34" charset="-122"/>
-                <a:cs typeface="Calibri" pitchFamily="34" charset="-120"/>
-              </a:rPr>
-              <a:t>この会社の借入余力が限られる理由</a:t>
-            </a:r>
-            <a:endParaRPr lang="en-US" sz="1000" dirty="0"/>
-          </a:p>
-        </p:txBody>
-      </p:sp>
-      <p:sp>
-        <p:nvSpPr>
-          <p:cNvPr id="8" name="Text 5"/>
-          <p:cNvSpPr txBox="1"/>
-          <p:nvPr/>
-        </p:nvSpPr>
-        <p:spPr>
-          <a:xfrm>
-            <a:off x="786384" y="4828032"/>
-            <a:ext cx="4983480" cy="914400"/>
+            <a:off x="6419088" y="5998464"/>
+            <a:ext cx="5212080" cy="365760"/>
           </a:xfrm>
           <a:prstGeom prst="rect">
             <a:avLst/>
@@ -17205,159 +20980,12 @@
           <a:p>
             <a:pPr indent="0" marL="0">
               <a:lnSpc>
-                <a:spcPts val="1500"/>
+                <a:spcPts val="1250"/>
               </a:lnSpc>
               <a:buNone/>
             </a:pPr>
             <a:r>
-              <a:rPr lang="en-US" sz="1050" dirty="0">
-                <a:solidFill>
-                  <a:srgbClr val="1F1A1C"/>
-                </a:solidFill>
-                <a:latin typeface="Calibri" pitchFamily="34" charset="0"/>
-                <a:ea typeface="Calibri" pitchFamily="34" charset="-122"/>
-                <a:cs typeface="Calibri" pitchFamily="34" charset="-120"/>
-              </a:rPr>
-              <a:t>営業利益率は52%だが、絶対額は5.28億円。7年返済では元本だけで年2.1〜2.9億円が必要になる。さらに物的担保は事実上ワイン在庫（簿価1.19億円）のみで、店舗は賃借、有形固定資産は146万円しかない。</a:t>
-            </a:r>
-            <a:endParaRPr lang="en-US" sz="1050" dirty="0"/>
-          </a:p>
-        </p:txBody>
-      </p:sp>
-      <p:sp>
-        <p:nvSpPr>
-          <p:cNvPr id="9" name="Shape 6"/>
-          <p:cNvSpPr/>
-          <p:nvPr/>
-        </p:nvSpPr>
-        <p:spPr>
-          <a:xfrm>
-            <a:off x="6199632" y="4434840"/>
-            <a:ext cx="5422392" cy="1371600"/>
-          </a:xfrm>
-          <a:prstGeom prst="roundRect">
-            <a:avLst>
-              <a:gd name="adj" fmla="val 3333"/>
-            </a:avLst>
-          </a:prstGeom>
-          <a:solidFill>
-            <a:srgbClr val="FFFFFF"/>
-          </a:solidFill>
-          <a:ln w="9525">
-            <a:solidFill>
-              <a:srgbClr val="E4DADD"/>
-            </a:solidFill>
-            <a:prstDash val="solid"/>
-          </a:ln>
-        </p:spPr>
-      </p:sp>
-      <p:sp>
-        <p:nvSpPr>
-          <p:cNvPr id="10" name="Text 7"/>
-          <p:cNvSpPr txBox="1"/>
-          <p:nvPr/>
-        </p:nvSpPr>
-        <p:spPr>
-          <a:xfrm>
-            <a:off x="6419088" y="4562856"/>
-            <a:ext cx="4937760" cy="237744"/>
-          </a:xfrm>
-          <a:prstGeom prst="rect">
-            <a:avLst/>
-          </a:prstGeom>
-          <a:noFill/>
-          <a:ln/>
-        </p:spPr>
-        <p:txBody>
-          <a:bodyPr wrap="square" lIns="0" tIns="0" rIns="0" bIns="0" rtlCol="0" anchor="ctr"/>
-          <a:lstStyle/>
-          <a:p>
-            <a:pPr indent="0" marL="0">
-              <a:buNone/>
-            </a:pPr>
-            <a:r>
-              <a:rPr lang="en-US" sz="1000" b="1" dirty="0">
-                <a:solidFill>
-                  <a:srgbClr val="B58B2A"/>
-                </a:solidFill>
-                <a:latin typeface="Calibri" pitchFamily="34" charset="0"/>
-                <a:ea typeface="Calibri" pitchFamily="34" charset="-122"/>
-                <a:cs typeface="Calibri" pitchFamily="34" charset="-120"/>
-              </a:rPr>
-              <a:t>コベナンツ案（ご提案）</a:t>
-            </a:r>
-            <a:endParaRPr lang="en-US" sz="1000" dirty="0"/>
-          </a:p>
-        </p:txBody>
-      </p:sp>
-      <p:sp>
-        <p:nvSpPr>
-          <p:cNvPr id="11" name="Text 8"/>
-          <p:cNvSpPr txBox="1"/>
-          <p:nvPr/>
-        </p:nvSpPr>
-        <p:spPr>
-          <a:xfrm>
-            <a:off x="6419088" y="4809744"/>
-            <a:ext cx="4983480" cy="960120"/>
-          </a:xfrm>
-          <a:prstGeom prst="rect">
-            <a:avLst/>
-          </a:prstGeom>
-          <a:noFill/>
-          <a:ln/>
-        </p:spPr>
-        <p:txBody>
-          <a:bodyPr wrap="square" lIns="0" tIns="0" rIns="0" bIns="0" rtlCol="0" anchor="ctr"/>
-          <a:lstStyle/>
-          <a:p>
-            <a:pPr indent="0" marL="0">
-              <a:lnSpc>
-                <a:spcPts val="1450"/>
-              </a:lnSpc>
-              <a:buNone/>
-            </a:pPr>
-            <a:r>
-              <a:rPr lang="en-US" sz="1000" dirty="0">
-                <a:solidFill>
-                  <a:srgbClr val="1F1A1C"/>
-                </a:solidFill>
-                <a:latin typeface="Calibri" pitchFamily="34" charset="0"/>
-                <a:ea typeface="Calibri" pitchFamily="34" charset="-122"/>
-                <a:cs typeface="Calibri" pitchFamily="34" charset="-120"/>
-              </a:rPr>
-              <a:t>① DSCR 1.1倍以上の維持　② 対象会社に現預金6億円以上を留保（買収後の配当・自己株による過度な現金流出の制限）　③ 設備投資上限の設定　④ 岸田氏の退任・料理長交代・ミシュラン評価変動の報告義務　⑤ サントリー・ファインズとの取引条件変更時の報告義務</a:t>
-            </a:r>
-            <a:endParaRPr lang="en-US" sz="1000" dirty="0"/>
-          </a:p>
-        </p:txBody>
-      </p:sp>
-      <p:sp>
-        <p:nvSpPr>
-          <p:cNvPr id="12" name="Text 9"/>
-          <p:cNvSpPr txBox="1"/>
-          <p:nvPr/>
-        </p:nvSpPr>
-        <p:spPr>
-          <a:xfrm>
-            <a:off x="566928" y="5943600"/>
-            <a:ext cx="11055096" cy="237744"/>
-          </a:xfrm>
-          <a:prstGeom prst="rect">
-            <a:avLst/>
-          </a:prstGeom>
-          <a:noFill/>
-          <a:ln/>
-        </p:spPr>
-        <p:txBody>
-          <a:bodyPr wrap="square" lIns="0" tIns="0" rIns="0" bIns="0" rtlCol="0" anchor="ctr"/>
-          <a:lstStyle/>
-          <a:p>
-            <a:pPr indent="0" marL="0">
-              <a:buNone/>
-            </a:pPr>
-            <a:r>
-              <a:rPr lang="en-US" sz="950" dirty="0">
+              <a:rPr lang="en-US" sz="900" dirty="0">
                 <a:solidFill>
                   <a:srgbClr val="6E6368"/>
                 </a:solidFill>
@@ -17365,15 +20993,15 @@
                 <a:ea typeface="Calibri" pitchFamily="34" charset="-122"/>
                 <a:cs typeface="Calibri" pitchFamily="34" charset="-120"/>
               </a:rPr>
-              <a:t>ストレス時FCF 2.76億円は、p.14のブレークイーブン水準（営業利益▲21%）を採用。</a:t>
+              <a:t>7年間の累積余剰キャッシュフロー7.56億円が、期限一括のタームローンB 6.00億円を上回る。リファイナンスを前提とせず、7年で20.00億円を完済できる。</a:t>
             </a:r>
-            <a:endParaRPr lang="en-US" sz="950" dirty="0"/>
+            <a:endParaRPr lang="en-US" sz="900" dirty="0"/>
           </a:p>
         </p:txBody>
       </p:sp>
       <p:sp>
         <p:nvSpPr>
-          <p:cNvPr id="13" name="Text 10"/>
+          <p:cNvPr id="25" name="Text 21"/>
           <p:cNvSpPr txBox="1"/>
           <p:nvPr/>
         </p:nvSpPr>
@@ -17412,7 +21040,7 @@
       </p:sp>
       <p:sp>
         <p:nvSpPr>
-          <p:cNvPr id="14" name="Text 11"/>
+          <p:cNvPr id="26" name="Text 22"/>
           <p:cNvSpPr txBox="1"/>
           <p:nvPr/>
         </p:nvSpPr>
@@ -17507,6 +21135,2105 @@
                 <a:ea typeface="Calibri" pitchFamily="34" charset="-122"/>
                 <a:cs typeface="Calibri" pitchFamily="34" charset="-120"/>
               </a:rPr>
+              <a:t>CHECK B ②　ストレス耐性と保全</a:t>
+            </a:r>
+            <a:endParaRPr lang="en-US" sz="1100" dirty="0"/>
+          </a:p>
+        </p:txBody>
+      </p:sp>
+      <p:sp>
+        <p:nvSpPr>
+          <p:cNvPr id="3" name="Text 1"/>
+          <p:cNvSpPr txBox="1"/>
+          <p:nvPr/>
+        </p:nvSpPr>
+        <p:spPr>
+          <a:xfrm>
+            <a:off x="566928" y="566928"/>
+            <a:ext cx="11055096" cy="475488"/>
+          </a:xfrm>
+          <a:prstGeom prst="rect">
+            <a:avLst/>
+          </a:prstGeom>
+          <a:noFill/>
+          <a:ln/>
+        </p:spPr>
+        <p:txBody>
+          <a:bodyPr wrap="square" lIns="0" tIns="0" rIns="0" bIns="0" rtlCol="0" anchor="ctr"/>
+          <a:lstStyle/>
+          <a:p>
+            <a:pPr indent="0" marL="0">
+              <a:buNone/>
+            </a:pPr>
+            <a:r>
+              <a:rPr lang="en-US" sz="2900" b="1" dirty="0">
+                <a:solidFill>
+                  <a:srgbClr val="1F1A1C"/>
+                </a:solidFill>
+                <a:latin typeface="Cambria" pitchFamily="34" charset="0"/>
+                <a:ea typeface="Cambria" pitchFamily="34" charset="-122"/>
+                <a:cs typeface="Cambria" pitchFamily="34" charset="-120"/>
+              </a:rPr>
+              <a:t>20億円のストレス耐性と、銀行にご提案できる保全</a:t>
+            </a:r>
+            <a:endParaRPr lang="en-US" sz="2900" dirty="0"/>
+          </a:p>
+        </p:txBody>
+      </p:sp>
+      <p:sp>
+        <p:nvSpPr>
+          <p:cNvPr id="4" name="Text 2"/>
+          <p:cNvSpPr txBox="1"/>
+          <p:nvPr/>
+        </p:nvSpPr>
+        <p:spPr>
+          <a:xfrm>
+            <a:off x="566928" y="1088136"/>
+            <a:ext cx="11055096" cy="329184"/>
+          </a:xfrm>
+          <a:prstGeom prst="rect">
+            <a:avLst/>
+          </a:prstGeom>
+          <a:noFill/>
+          <a:ln/>
+        </p:spPr>
+        <p:txBody>
+          <a:bodyPr wrap="square" lIns="0" tIns="0" rIns="0" bIns="0" rtlCol="0" anchor="ctr"/>
+          <a:lstStyle/>
+          <a:p>
+            <a:pPr indent="0" marL="0">
+              <a:lnSpc>
+                <a:spcPts val="1700"/>
+              </a:lnSpc>
+              <a:buNone/>
+            </a:pPr>
+            <a:r>
+              <a:rPr lang="en-US" sz="1250" dirty="0">
+                <a:solidFill>
+                  <a:srgbClr val="6E6368"/>
+                </a:solidFill>
+                <a:latin typeface="Calibri" pitchFamily="34" charset="0"/>
+                <a:ea typeface="Calibri" pitchFamily="34" charset="-122"/>
+                <a:cs typeface="Calibri" pitchFamily="34" charset="-120"/>
+              </a:rPr>
+              <a:t>推奨ストラクチャー③（TLA 14億＋TLB 6億／7年・金利3%）に対し、収益が悪化した場合の返済可能性を検証した。</a:t>
+            </a:r>
+            <a:endParaRPr lang="en-US" sz="1250" dirty="0"/>
+          </a:p>
+        </p:txBody>
+      </p:sp>
+      <p:graphicFrame>
+        <p:nvGraphicFramePr>
+          <p:cNvPr id="17" name="Table 0"/>
+          <p:cNvGraphicFramePr>
+            <a:graphicFrameLocks noGrp="1"/>
+          </p:cNvGraphicFramePr>
+          <p:nvPr>
+            <p:extLst>
+              <p:ext uri="{D42A27DB-BD31-4B8C-83A1-F6EECF244321}">
+                <p14:modId xmlns:p14="http://schemas.microsoft.com/office/powerpoint/2010/main" val="1579011935"/>
+              </p:ext>
+            </p:extLst>
+          </p:nvPr>
+        </p:nvGraphicFramePr>
+        <p:xfrm>
+          <a:off x="566928" y="1783080"/>
+          <a:ext cx="11055096" cy="914400"/>
+        </p:xfrm>
+        <a:graphic>
+          <a:graphicData uri="http://schemas.openxmlformats.org/drawingml/2006/table">
+            <a:tbl>
+              <a:tblPr/>
+              <a:tblGrid>
+                <a:gridCol w="2834640"/>
+                <a:gridCol w="1097280"/>
+                <a:gridCol w="1371600"/>
+                <a:gridCol w="5751576"/>
+              </a:tblGrid>
+              <a:tr h="402336">
+                <a:tc>
+                  <a:txBody>
+                    <a:bodyPr/>
+                    <a:lstStyle/>
+                    <a:p>
+                      <a:pPr indent="0" marL="0">
+                        <a:buNone/>
+                      </a:pPr>
+                      <a:r>
+                        <a:rPr lang="en-US" sz="1050" b="1" dirty="0">
+                          <a:solidFill>
+                            <a:srgbClr val="FFFFFF"/>
+                          </a:solidFill>
+                          <a:latin typeface="Calibri" pitchFamily="34" charset="0"/>
+                          <a:ea typeface="Calibri" pitchFamily="34" charset="-122"/>
+                          <a:cs typeface="Calibri" pitchFamily="34" charset="-120"/>
+                        </a:rPr>
+                        <a:t>シナリオ</a:t>
+                      </a:r>
+                      <a:endParaRPr lang="en-US" sz="1050" dirty="0">
+                        <a:latin typeface="Calibri" charset="0"/>
+                        <a:ea typeface="Calibri" charset="0"/>
+                        <a:cs typeface="Calibri" charset="0"/>
+                      </a:endParaRPr>
+                    </a:p>
+                  </a:txBody>
+                  <a:tcPr marL="91440" marR="91440" marT="45720" marB="45720" anchor="ctr">
+                    <a:lnL w="6350" cap="flat" cmpd="sng" algn="ctr">
+                      <a:solidFill>
+                        <a:srgbClr val="E4DADD"/>
+                      </a:solidFill>
+                      <a:prstDash val="solid"/>
+                      <a:round/>
+                      <a:headEnd type="none" w="med" len="med"/>
+                      <a:tailEnd type="none" w="med" len="med"/>
+                    </a:lnL>
+                    <a:lnR w="6350" cap="flat" cmpd="sng" algn="ctr">
+                      <a:solidFill>
+                        <a:srgbClr val="E4DADD"/>
+                      </a:solidFill>
+                      <a:prstDash val="solid"/>
+                      <a:round/>
+                      <a:headEnd type="none" w="med" len="med"/>
+                      <a:tailEnd type="none" w="med" len="med"/>
+                    </a:lnR>
+                    <a:lnT w="6350" cap="flat" cmpd="sng" algn="ctr">
+                      <a:solidFill>
+                        <a:srgbClr val="E4DADD"/>
+                      </a:solidFill>
+                      <a:prstDash val="solid"/>
+                      <a:round/>
+                      <a:headEnd type="none" w="med" len="med"/>
+                      <a:tailEnd type="none" w="med" len="med"/>
+                    </a:lnT>
+                    <a:lnB w="6350" cap="flat" cmpd="sng" algn="ctr">
+                      <a:solidFill>
+                        <a:srgbClr val="E4DADD"/>
+                      </a:solidFill>
+                      <a:prstDash val="solid"/>
+                      <a:round/>
+                      <a:headEnd type="none" w="med" len="med"/>
+                      <a:tailEnd type="none" w="med" len="med"/>
+                    </a:lnB>
+                    <a:solidFill>
+                      <a:srgbClr val="6D2E46"/>
+                    </a:solidFill>
+                  </a:tcPr>
+                </a:tc>
+                <a:tc>
+                  <a:txBody>
+                    <a:bodyPr/>
+                    <a:lstStyle/>
+                    <a:p>
+                      <a:pPr indent="0" marL="0">
+                        <a:buNone/>
+                      </a:pPr>
+                      <a:r>
+                        <a:rPr lang="en-US" sz="1050" b="1" dirty="0">
+                          <a:solidFill>
+                            <a:srgbClr val="FFFFFF"/>
+                          </a:solidFill>
+                          <a:latin typeface="Calibri" pitchFamily="34" charset="0"/>
+                          <a:ea typeface="Calibri" pitchFamily="34" charset="-122"/>
+                          <a:cs typeface="Calibri" pitchFamily="34" charset="-120"/>
+                        </a:rPr>
+                        <a:t>FCF</a:t>
+                      </a:r>
+                      <a:endParaRPr lang="en-US" sz="1050" dirty="0">
+                        <a:latin typeface="Calibri" charset="0"/>
+                        <a:ea typeface="Calibri" charset="0"/>
+                        <a:cs typeface="Calibri" charset="0"/>
+                      </a:endParaRPr>
+                    </a:p>
+                  </a:txBody>
+                  <a:tcPr marL="91440" marR="91440" marT="45720" marB="45720" anchor="ctr">
+                    <a:lnL w="6350" cap="flat" cmpd="sng" algn="ctr">
+                      <a:solidFill>
+                        <a:srgbClr val="E4DADD"/>
+                      </a:solidFill>
+                      <a:prstDash val="solid"/>
+                      <a:round/>
+                      <a:headEnd type="none" w="med" len="med"/>
+                      <a:tailEnd type="none" w="med" len="med"/>
+                    </a:lnL>
+                    <a:lnR w="6350" cap="flat" cmpd="sng" algn="ctr">
+                      <a:solidFill>
+                        <a:srgbClr val="E4DADD"/>
+                      </a:solidFill>
+                      <a:prstDash val="solid"/>
+                      <a:round/>
+                      <a:headEnd type="none" w="med" len="med"/>
+                      <a:tailEnd type="none" w="med" len="med"/>
+                    </a:lnR>
+                    <a:lnT w="6350" cap="flat" cmpd="sng" algn="ctr">
+                      <a:solidFill>
+                        <a:srgbClr val="E4DADD"/>
+                      </a:solidFill>
+                      <a:prstDash val="solid"/>
+                      <a:round/>
+                      <a:headEnd type="none" w="med" len="med"/>
+                      <a:tailEnd type="none" w="med" len="med"/>
+                    </a:lnT>
+                    <a:lnB w="6350" cap="flat" cmpd="sng" algn="ctr">
+                      <a:solidFill>
+                        <a:srgbClr val="E4DADD"/>
+                      </a:solidFill>
+                      <a:prstDash val="solid"/>
+                      <a:round/>
+                      <a:headEnd type="none" w="med" len="med"/>
+                      <a:tailEnd type="none" w="med" len="med"/>
+                    </a:lnB>
+                    <a:solidFill>
+                      <a:srgbClr val="6D2E46"/>
+                    </a:solidFill>
+                  </a:tcPr>
+                </a:tc>
+                <a:tc>
+                  <a:txBody>
+                    <a:bodyPr/>
+                    <a:lstStyle/>
+                    <a:p>
+                      <a:pPr indent="0" marL="0">
+                        <a:buNone/>
+                      </a:pPr>
+                      <a:r>
+                        <a:rPr lang="en-US" sz="1050" b="1" dirty="0">
+                          <a:solidFill>
+                            <a:srgbClr val="FFFFFF"/>
+                          </a:solidFill>
+                          <a:latin typeface="Calibri" pitchFamily="34" charset="0"/>
+                          <a:ea typeface="Calibri" pitchFamily="34" charset="-122"/>
+                          <a:cs typeface="Calibri" pitchFamily="34" charset="-120"/>
+                        </a:rPr>
+                        <a:t>DSCR</a:t>
+                      </a:r>
+                      <a:endParaRPr lang="en-US" sz="1050" dirty="0">
+                        <a:latin typeface="Calibri" charset="0"/>
+                        <a:ea typeface="Calibri" charset="0"/>
+                        <a:cs typeface="Calibri" charset="0"/>
+                      </a:endParaRPr>
+                    </a:p>
+                  </a:txBody>
+                  <a:tcPr marL="91440" marR="91440" marT="45720" marB="45720" anchor="ctr">
+                    <a:lnL w="6350" cap="flat" cmpd="sng" algn="ctr">
+                      <a:solidFill>
+                        <a:srgbClr val="E4DADD"/>
+                      </a:solidFill>
+                      <a:prstDash val="solid"/>
+                      <a:round/>
+                      <a:headEnd type="none" w="med" len="med"/>
+                      <a:tailEnd type="none" w="med" len="med"/>
+                    </a:lnL>
+                    <a:lnR w="6350" cap="flat" cmpd="sng" algn="ctr">
+                      <a:solidFill>
+                        <a:srgbClr val="E4DADD"/>
+                      </a:solidFill>
+                      <a:prstDash val="solid"/>
+                      <a:round/>
+                      <a:headEnd type="none" w="med" len="med"/>
+                      <a:tailEnd type="none" w="med" len="med"/>
+                    </a:lnR>
+                    <a:lnT w="6350" cap="flat" cmpd="sng" algn="ctr">
+                      <a:solidFill>
+                        <a:srgbClr val="E4DADD"/>
+                      </a:solidFill>
+                      <a:prstDash val="solid"/>
+                      <a:round/>
+                      <a:headEnd type="none" w="med" len="med"/>
+                      <a:tailEnd type="none" w="med" len="med"/>
+                    </a:lnT>
+                    <a:lnB w="6350" cap="flat" cmpd="sng" algn="ctr">
+                      <a:solidFill>
+                        <a:srgbClr val="E4DADD"/>
+                      </a:solidFill>
+                      <a:prstDash val="solid"/>
+                      <a:round/>
+                      <a:headEnd type="none" w="med" len="med"/>
+                      <a:tailEnd type="none" w="med" len="med"/>
+                    </a:lnB>
+                    <a:solidFill>
+                      <a:srgbClr val="6D2E46"/>
+                    </a:solidFill>
+                  </a:tcPr>
+                </a:tc>
+                <a:tc>
+                  <a:txBody>
+                    <a:bodyPr/>
+                    <a:lstStyle/>
+                    <a:p>
+                      <a:pPr indent="0" marL="0">
+                        <a:buNone/>
+                      </a:pPr>
+                      <a:r>
+                        <a:rPr lang="en-US" sz="1050" b="1" dirty="0">
+                          <a:solidFill>
+                            <a:srgbClr val="FFFFFF"/>
+                          </a:solidFill>
+                          <a:latin typeface="Calibri" pitchFamily="34" charset="0"/>
+                          <a:ea typeface="Calibri" pitchFamily="34" charset="-122"/>
+                          <a:cs typeface="Calibri" pitchFamily="34" charset="-120"/>
+                        </a:rPr>
+                        <a:t>7年間の返済可能性</a:t>
+                      </a:r>
+                      <a:endParaRPr lang="en-US" sz="1050" dirty="0">
+                        <a:latin typeface="Calibri" charset="0"/>
+                        <a:ea typeface="Calibri" charset="0"/>
+                        <a:cs typeface="Calibri" charset="0"/>
+                      </a:endParaRPr>
+                    </a:p>
+                  </a:txBody>
+                  <a:tcPr marL="91440" marR="91440" marT="45720" marB="45720" anchor="ctr">
+                    <a:lnL w="6350" cap="flat" cmpd="sng" algn="ctr">
+                      <a:solidFill>
+                        <a:srgbClr val="E4DADD"/>
+                      </a:solidFill>
+                      <a:prstDash val="solid"/>
+                      <a:round/>
+                      <a:headEnd type="none" w="med" len="med"/>
+                      <a:tailEnd type="none" w="med" len="med"/>
+                    </a:lnL>
+                    <a:lnR w="6350" cap="flat" cmpd="sng" algn="ctr">
+                      <a:solidFill>
+                        <a:srgbClr val="E4DADD"/>
+                      </a:solidFill>
+                      <a:prstDash val="solid"/>
+                      <a:round/>
+                      <a:headEnd type="none" w="med" len="med"/>
+                      <a:tailEnd type="none" w="med" len="med"/>
+                    </a:lnR>
+                    <a:lnT w="6350" cap="flat" cmpd="sng" algn="ctr">
+                      <a:solidFill>
+                        <a:srgbClr val="E4DADD"/>
+                      </a:solidFill>
+                      <a:prstDash val="solid"/>
+                      <a:round/>
+                      <a:headEnd type="none" w="med" len="med"/>
+                      <a:tailEnd type="none" w="med" len="med"/>
+                    </a:lnT>
+                    <a:lnB w="6350" cap="flat" cmpd="sng" algn="ctr">
+                      <a:solidFill>
+                        <a:srgbClr val="E4DADD"/>
+                      </a:solidFill>
+                      <a:prstDash val="solid"/>
+                      <a:round/>
+                      <a:headEnd type="none" w="med" len="med"/>
+                      <a:tailEnd type="none" w="med" len="med"/>
+                    </a:lnB>
+                    <a:solidFill>
+                      <a:srgbClr val="6D2E46"/>
+                    </a:solidFill>
+                  </a:tcPr>
+                </a:tc>
+              </a:tr>
+              <a:tr h="402336">
+                <a:tc>
+                  <a:txBody>
+                    <a:bodyPr/>
+                    <a:lstStyle/>
+                    <a:p>
+                      <a:pPr indent="0" marL="0">
+                        <a:buNone/>
+                      </a:pPr>
+                      <a:r>
+                        <a:rPr lang="en-US" sz="1000" b="1" dirty="0">
+                          <a:solidFill>
+                            <a:srgbClr val="1F1A1C"/>
+                          </a:solidFill>
+                          <a:latin typeface="Calibri" pitchFamily="34" charset="0"/>
+                          <a:ea typeface="Calibri" pitchFamily="34" charset="-122"/>
+                          <a:cs typeface="Calibri" pitchFamily="34" charset="-120"/>
+                        </a:rPr>
+                        <a:t>平常時</a:t>
+                      </a:r>
+                      <a:endParaRPr lang="en-US" sz="1000" dirty="0">
+                        <a:latin typeface="Calibri" charset="0"/>
+                        <a:ea typeface="Calibri" charset="0"/>
+                        <a:cs typeface="Calibri" charset="0"/>
+                      </a:endParaRPr>
+                    </a:p>
+                  </a:txBody>
+                  <a:tcPr marL="91440" marR="91440" marT="45720" marB="45720" anchor="ctr">
+                    <a:lnL w="6350" cap="flat" cmpd="sng" algn="ctr">
+                      <a:solidFill>
+                        <a:srgbClr val="E4DADD"/>
+                      </a:solidFill>
+                      <a:prstDash val="solid"/>
+                      <a:round/>
+                      <a:headEnd type="none" w="med" len="med"/>
+                      <a:tailEnd type="none" w="med" len="med"/>
+                    </a:lnL>
+                    <a:lnR w="6350" cap="flat" cmpd="sng" algn="ctr">
+                      <a:solidFill>
+                        <a:srgbClr val="E4DADD"/>
+                      </a:solidFill>
+                      <a:prstDash val="solid"/>
+                      <a:round/>
+                      <a:headEnd type="none" w="med" len="med"/>
+                      <a:tailEnd type="none" w="med" len="med"/>
+                    </a:lnR>
+                    <a:lnT w="6350" cap="flat" cmpd="sng" algn="ctr">
+                      <a:solidFill>
+                        <a:srgbClr val="E4DADD"/>
+                      </a:solidFill>
+                      <a:prstDash val="solid"/>
+                      <a:round/>
+                      <a:headEnd type="none" w="med" len="med"/>
+                      <a:tailEnd type="none" w="med" len="med"/>
+                    </a:lnT>
+                    <a:lnB w="6350" cap="flat" cmpd="sng" algn="ctr">
+                      <a:solidFill>
+                        <a:srgbClr val="E4DADD"/>
+                      </a:solidFill>
+                      <a:prstDash val="solid"/>
+                      <a:round/>
+                      <a:headEnd type="none" w="med" len="med"/>
+                      <a:tailEnd type="none" w="med" len="med"/>
+                    </a:lnB>
+                  </a:tcPr>
+                </a:tc>
+                <a:tc>
+                  <a:txBody>
+                    <a:bodyPr/>
+                    <a:lstStyle/>
+                    <a:p>
+                      <a:pPr algn="r" indent="0" marL="0">
+                        <a:buNone/>
+                      </a:pPr>
+                      <a:r>
+                        <a:rPr lang="en-US" sz="1000" dirty="0">
+                          <a:solidFill>
+                            <a:srgbClr val="1F1A1C"/>
+                          </a:solidFill>
+                          <a:latin typeface="Calibri" pitchFamily="34" charset="0"/>
+                          <a:ea typeface="Calibri" pitchFamily="34" charset="-122"/>
+                          <a:cs typeface="Calibri" pitchFamily="34" charset="-120"/>
+                        </a:rPr>
+                        <a:t>3.50億</a:t>
+                      </a:r>
+                      <a:endParaRPr lang="en-US" sz="1000" dirty="0">
+                        <a:latin typeface="Calibri" charset="0"/>
+                        <a:ea typeface="Calibri" charset="0"/>
+                        <a:cs typeface="Calibri" charset="0"/>
+                      </a:endParaRPr>
+                    </a:p>
+                  </a:txBody>
+                  <a:tcPr marL="91440" marR="91440" marT="45720" marB="45720" anchor="ctr">
+                    <a:lnL w="6350" cap="flat" cmpd="sng" algn="ctr">
+                      <a:solidFill>
+                        <a:srgbClr val="E4DADD"/>
+                      </a:solidFill>
+                      <a:prstDash val="solid"/>
+                      <a:round/>
+                      <a:headEnd type="none" w="med" len="med"/>
+                      <a:tailEnd type="none" w="med" len="med"/>
+                    </a:lnL>
+                    <a:lnR w="6350" cap="flat" cmpd="sng" algn="ctr">
+                      <a:solidFill>
+                        <a:srgbClr val="E4DADD"/>
+                      </a:solidFill>
+                      <a:prstDash val="solid"/>
+                      <a:round/>
+                      <a:headEnd type="none" w="med" len="med"/>
+                      <a:tailEnd type="none" w="med" len="med"/>
+                    </a:lnR>
+                    <a:lnT w="6350" cap="flat" cmpd="sng" algn="ctr">
+                      <a:solidFill>
+                        <a:srgbClr val="E4DADD"/>
+                      </a:solidFill>
+                      <a:prstDash val="solid"/>
+                      <a:round/>
+                      <a:headEnd type="none" w="med" len="med"/>
+                      <a:tailEnd type="none" w="med" len="med"/>
+                    </a:lnT>
+                    <a:lnB w="6350" cap="flat" cmpd="sng" algn="ctr">
+                      <a:solidFill>
+                        <a:srgbClr val="E4DADD"/>
+                      </a:solidFill>
+                      <a:prstDash val="solid"/>
+                      <a:round/>
+                      <a:headEnd type="none" w="med" len="med"/>
+                      <a:tailEnd type="none" w="med" len="med"/>
+                    </a:lnB>
+                  </a:tcPr>
+                </a:tc>
+                <a:tc>
+                  <a:txBody>
+                    <a:bodyPr/>
+                    <a:lstStyle/>
+                    <a:p>
+                      <a:pPr algn="r" indent="0" marL="0">
+                        <a:buNone/>
+                      </a:pPr>
+                      <a:r>
+                        <a:rPr lang="en-US" sz="1000" b="1" dirty="0">
+                          <a:solidFill>
+                            <a:srgbClr val="2E6F4E"/>
+                          </a:solidFill>
+                          <a:latin typeface="Calibri" pitchFamily="34" charset="0"/>
+                          <a:ea typeface="Calibri" pitchFamily="34" charset="-122"/>
+                          <a:cs typeface="Calibri" pitchFamily="34" charset="-120"/>
+                        </a:rPr>
+                        <a:t>1.35〜1.56</a:t>
+                      </a:r>
+                      <a:endParaRPr lang="en-US" sz="1000" dirty="0">
+                        <a:latin typeface="Calibri" charset="0"/>
+                        <a:ea typeface="Calibri" charset="0"/>
+                        <a:cs typeface="Calibri" charset="0"/>
+                      </a:endParaRPr>
+                    </a:p>
+                  </a:txBody>
+                  <a:tcPr marL="91440" marR="91440" marT="45720" marB="45720" anchor="ctr">
+                    <a:lnL w="6350" cap="flat" cmpd="sng" algn="ctr">
+                      <a:solidFill>
+                        <a:srgbClr val="E4DADD"/>
+                      </a:solidFill>
+                      <a:prstDash val="solid"/>
+                      <a:round/>
+                      <a:headEnd type="none" w="med" len="med"/>
+                      <a:tailEnd type="none" w="med" len="med"/>
+                    </a:lnL>
+                    <a:lnR w="6350" cap="flat" cmpd="sng" algn="ctr">
+                      <a:solidFill>
+                        <a:srgbClr val="E4DADD"/>
+                      </a:solidFill>
+                      <a:prstDash val="solid"/>
+                      <a:round/>
+                      <a:headEnd type="none" w="med" len="med"/>
+                      <a:tailEnd type="none" w="med" len="med"/>
+                    </a:lnR>
+                    <a:lnT w="6350" cap="flat" cmpd="sng" algn="ctr">
+                      <a:solidFill>
+                        <a:srgbClr val="E4DADD"/>
+                      </a:solidFill>
+                      <a:prstDash val="solid"/>
+                      <a:round/>
+                      <a:headEnd type="none" w="med" len="med"/>
+                      <a:tailEnd type="none" w="med" len="med"/>
+                    </a:lnT>
+                    <a:lnB w="6350" cap="flat" cmpd="sng" algn="ctr">
+                      <a:solidFill>
+                        <a:srgbClr val="E4DADD"/>
+                      </a:solidFill>
+                      <a:prstDash val="solid"/>
+                      <a:round/>
+                      <a:headEnd type="none" w="med" len="med"/>
+                      <a:tailEnd type="none" w="med" len="med"/>
+                    </a:lnB>
+                  </a:tcPr>
+                </a:tc>
+                <a:tc>
+                  <a:txBody>
+                    <a:bodyPr/>
+                    <a:lstStyle/>
+                    <a:p>
+                      <a:pPr indent="0" marL="0">
+                        <a:buNone/>
+                      </a:pPr>
+                      <a:r>
+                        <a:rPr lang="en-US" sz="1000" dirty="0">
+                          <a:solidFill>
+                            <a:srgbClr val="1F1A1C"/>
+                          </a:solidFill>
+                          <a:latin typeface="Calibri" pitchFamily="34" charset="0"/>
+                          <a:ea typeface="Calibri" pitchFamily="34" charset="-122"/>
+                          <a:cs typeface="Calibri" pitchFamily="34" charset="-120"/>
+                        </a:rPr>
+                        <a:t>全期間で1.35以上。累積余剰7.56億円でTLBも完済</a:t>
+                      </a:r>
+                      <a:endParaRPr lang="en-US" sz="1000" dirty="0">
+                        <a:latin typeface="Calibri" charset="0"/>
+                        <a:ea typeface="Calibri" charset="0"/>
+                        <a:cs typeface="Calibri" charset="0"/>
+                      </a:endParaRPr>
+                    </a:p>
+                  </a:txBody>
+                  <a:tcPr marL="91440" marR="91440" marT="45720" marB="45720" anchor="ctr">
+                    <a:lnL w="6350" cap="flat" cmpd="sng" algn="ctr">
+                      <a:solidFill>
+                        <a:srgbClr val="E4DADD"/>
+                      </a:solidFill>
+                      <a:prstDash val="solid"/>
+                      <a:round/>
+                      <a:headEnd type="none" w="med" len="med"/>
+                      <a:tailEnd type="none" w="med" len="med"/>
+                    </a:lnL>
+                    <a:lnR w="6350" cap="flat" cmpd="sng" algn="ctr">
+                      <a:solidFill>
+                        <a:srgbClr val="E4DADD"/>
+                      </a:solidFill>
+                      <a:prstDash val="solid"/>
+                      <a:round/>
+                      <a:headEnd type="none" w="med" len="med"/>
+                      <a:tailEnd type="none" w="med" len="med"/>
+                    </a:lnR>
+                    <a:lnT w="6350" cap="flat" cmpd="sng" algn="ctr">
+                      <a:solidFill>
+                        <a:srgbClr val="E4DADD"/>
+                      </a:solidFill>
+                      <a:prstDash val="solid"/>
+                      <a:round/>
+                      <a:headEnd type="none" w="med" len="med"/>
+                      <a:tailEnd type="none" w="med" len="med"/>
+                    </a:lnT>
+                    <a:lnB w="6350" cap="flat" cmpd="sng" algn="ctr">
+                      <a:solidFill>
+                        <a:srgbClr val="E4DADD"/>
+                      </a:solidFill>
+                      <a:prstDash val="solid"/>
+                      <a:round/>
+                      <a:headEnd type="none" w="med" len="med"/>
+                      <a:tailEnd type="none" w="med" len="med"/>
+                    </a:lnB>
+                  </a:tcPr>
+                </a:tc>
+              </a:tr>
+              <a:tr h="402336">
+                <a:tc>
+                  <a:txBody>
+                    <a:bodyPr/>
+                    <a:lstStyle/>
+                    <a:p>
+                      <a:pPr indent="0" marL="0">
+                        <a:buNone/>
+                      </a:pPr>
+                      <a:r>
+                        <a:rPr lang="en-US" sz="1000" b="1" dirty="0">
+                          <a:solidFill>
+                            <a:srgbClr val="1F1A1C"/>
+                          </a:solidFill>
+                          <a:latin typeface="Calibri" pitchFamily="34" charset="0"/>
+                          <a:ea typeface="Calibri" pitchFamily="34" charset="-122"/>
+                          <a:cs typeface="Calibri" pitchFamily="34" charset="-120"/>
+                        </a:rPr>
+                        <a:t>営業利益▲21%（p.14 ブレークイーブン）</a:t>
+                      </a:r>
+                      <a:endParaRPr lang="en-US" sz="1000" dirty="0">
+                        <a:latin typeface="Calibri" charset="0"/>
+                        <a:ea typeface="Calibri" charset="0"/>
+                        <a:cs typeface="Calibri" charset="0"/>
+                      </a:endParaRPr>
+                    </a:p>
+                  </a:txBody>
+                  <a:tcPr marL="91440" marR="91440" marT="45720" marB="45720" anchor="ctr">
+                    <a:lnL w="6350" cap="flat" cmpd="sng" algn="ctr">
+                      <a:solidFill>
+                        <a:srgbClr val="E4DADD"/>
+                      </a:solidFill>
+                      <a:prstDash val="solid"/>
+                      <a:round/>
+                      <a:headEnd type="none" w="med" len="med"/>
+                      <a:tailEnd type="none" w="med" len="med"/>
+                    </a:lnL>
+                    <a:lnR w="6350" cap="flat" cmpd="sng" algn="ctr">
+                      <a:solidFill>
+                        <a:srgbClr val="E4DADD"/>
+                      </a:solidFill>
+                      <a:prstDash val="solid"/>
+                      <a:round/>
+                      <a:headEnd type="none" w="med" len="med"/>
+                      <a:tailEnd type="none" w="med" len="med"/>
+                    </a:lnR>
+                    <a:lnT w="6350" cap="flat" cmpd="sng" algn="ctr">
+                      <a:solidFill>
+                        <a:srgbClr val="E4DADD"/>
+                      </a:solidFill>
+                      <a:prstDash val="solid"/>
+                      <a:round/>
+                      <a:headEnd type="none" w="med" len="med"/>
+                      <a:tailEnd type="none" w="med" len="med"/>
+                    </a:lnT>
+                    <a:lnB w="6350" cap="flat" cmpd="sng" algn="ctr">
+                      <a:solidFill>
+                        <a:srgbClr val="E4DADD"/>
+                      </a:solidFill>
+                      <a:prstDash val="solid"/>
+                      <a:round/>
+                      <a:headEnd type="none" w="med" len="med"/>
+                      <a:tailEnd type="none" w="med" len="med"/>
+                    </a:lnB>
+                  </a:tcPr>
+                </a:tc>
+                <a:tc>
+                  <a:txBody>
+                    <a:bodyPr/>
+                    <a:lstStyle/>
+                    <a:p>
+                      <a:pPr algn="r" indent="0" marL="0">
+                        <a:buNone/>
+                      </a:pPr>
+                      <a:r>
+                        <a:rPr lang="en-US" sz="1000" dirty="0">
+                          <a:solidFill>
+                            <a:srgbClr val="1F1A1C"/>
+                          </a:solidFill>
+                          <a:latin typeface="Calibri" pitchFamily="34" charset="0"/>
+                          <a:ea typeface="Calibri" pitchFamily="34" charset="-122"/>
+                          <a:cs typeface="Calibri" pitchFamily="34" charset="-120"/>
+                        </a:rPr>
+                        <a:t>2.76億</a:t>
+                      </a:r>
+                      <a:endParaRPr lang="en-US" sz="1000" dirty="0">
+                        <a:latin typeface="Calibri" charset="0"/>
+                        <a:ea typeface="Calibri" charset="0"/>
+                        <a:cs typeface="Calibri" charset="0"/>
+                      </a:endParaRPr>
+                    </a:p>
+                  </a:txBody>
+                  <a:tcPr marL="91440" marR="91440" marT="45720" marB="45720" anchor="ctr">
+                    <a:lnL w="6350" cap="flat" cmpd="sng" algn="ctr">
+                      <a:solidFill>
+                        <a:srgbClr val="E4DADD"/>
+                      </a:solidFill>
+                      <a:prstDash val="solid"/>
+                      <a:round/>
+                      <a:headEnd type="none" w="med" len="med"/>
+                      <a:tailEnd type="none" w="med" len="med"/>
+                    </a:lnL>
+                    <a:lnR w="6350" cap="flat" cmpd="sng" algn="ctr">
+                      <a:solidFill>
+                        <a:srgbClr val="E4DADD"/>
+                      </a:solidFill>
+                      <a:prstDash val="solid"/>
+                      <a:round/>
+                      <a:headEnd type="none" w="med" len="med"/>
+                      <a:tailEnd type="none" w="med" len="med"/>
+                    </a:lnR>
+                    <a:lnT w="6350" cap="flat" cmpd="sng" algn="ctr">
+                      <a:solidFill>
+                        <a:srgbClr val="E4DADD"/>
+                      </a:solidFill>
+                      <a:prstDash val="solid"/>
+                      <a:round/>
+                      <a:headEnd type="none" w="med" len="med"/>
+                      <a:tailEnd type="none" w="med" len="med"/>
+                    </a:lnT>
+                    <a:lnB w="6350" cap="flat" cmpd="sng" algn="ctr">
+                      <a:solidFill>
+                        <a:srgbClr val="E4DADD"/>
+                      </a:solidFill>
+                      <a:prstDash val="solid"/>
+                      <a:round/>
+                      <a:headEnd type="none" w="med" len="med"/>
+                      <a:tailEnd type="none" w="med" len="med"/>
+                    </a:lnB>
+                  </a:tcPr>
+                </a:tc>
+                <a:tc>
+                  <a:txBody>
+                    <a:bodyPr/>
+                    <a:lstStyle/>
+                    <a:p>
+                      <a:pPr algn="r" indent="0" marL="0">
+                        <a:buNone/>
+                      </a:pPr>
+                      <a:r>
+                        <a:rPr lang="en-US" sz="1000" b="1" dirty="0">
+                          <a:solidFill>
+                            <a:srgbClr val="2E6F4E"/>
+                          </a:solidFill>
+                          <a:latin typeface="Calibri" pitchFamily="34" charset="0"/>
+                          <a:ea typeface="Calibri" pitchFamily="34" charset="-122"/>
+                          <a:cs typeface="Calibri" pitchFamily="34" charset="-120"/>
+                        </a:rPr>
+                        <a:t>1.06</a:t>
+                      </a:r>
+                      <a:endParaRPr lang="en-US" sz="1000" dirty="0">
+                        <a:latin typeface="Calibri" charset="0"/>
+                        <a:ea typeface="Calibri" charset="0"/>
+                        <a:cs typeface="Calibri" charset="0"/>
+                      </a:endParaRPr>
+                    </a:p>
+                  </a:txBody>
+                  <a:tcPr marL="91440" marR="91440" marT="45720" marB="45720" anchor="ctr">
+                    <a:lnL w="6350" cap="flat" cmpd="sng" algn="ctr">
+                      <a:solidFill>
+                        <a:srgbClr val="E4DADD"/>
+                      </a:solidFill>
+                      <a:prstDash val="solid"/>
+                      <a:round/>
+                      <a:headEnd type="none" w="med" len="med"/>
+                      <a:tailEnd type="none" w="med" len="med"/>
+                    </a:lnL>
+                    <a:lnR w="6350" cap="flat" cmpd="sng" algn="ctr">
+                      <a:solidFill>
+                        <a:srgbClr val="E4DADD"/>
+                      </a:solidFill>
+                      <a:prstDash val="solid"/>
+                      <a:round/>
+                      <a:headEnd type="none" w="med" len="med"/>
+                      <a:tailEnd type="none" w="med" len="med"/>
+                    </a:lnR>
+                    <a:lnT w="6350" cap="flat" cmpd="sng" algn="ctr">
+                      <a:solidFill>
+                        <a:srgbClr val="E4DADD"/>
+                      </a:solidFill>
+                      <a:prstDash val="solid"/>
+                      <a:round/>
+                      <a:headEnd type="none" w="med" len="med"/>
+                      <a:tailEnd type="none" w="med" len="med"/>
+                    </a:lnT>
+                    <a:lnB w="6350" cap="flat" cmpd="sng" algn="ctr">
+                      <a:solidFill>
+                        <a:srgbClr val="E4DADD"/>
+                      </a:solidFill>
+                      <a:prstDash val="solid"/>
+                      <a:round/>
+                      <a:headEnd type="none" w="med" len="med"/>
+                      <a:tailEnd type="none" w="med" len="med"/>
+                    </a:lnB>
+                  </a:tcPr>
+                </a:tc>
+                <a:tc>
+                  <a:txBody>
+                    <a:bodyPr/>
+                    <a:lstStyle/>
+                    <a:p>
+                      <a:pPr indent="0" marL="0">
+                        <a:buNone/>
+                      </a:pPr>
+                      <a:r>
+                        <a:rPr lang="en-US" sz="1000" dirty="0">
+                          <a:solidFill>
+                            <a:srgbClr val="1F1A1C"/>
+                          </a:solidFill>
+                          <a:latin typeface="Calibri" pitchFamily="34" charset="0"/>
+                          <a:ea typeface="Calibri" pitchFamily="34" charset="-122"/>
+                          <a:cs typeface="Calibri" pitchFamily="34" charset="-120"/>
+                        </a:rPr>
+                        <a:t>初年度から1.0を維持。元利返済に支障なし</a:t>
+                      </a:r>
+                      <a:endParaRPr lang="en-US" sz="1000" dirty="0">
+                        <a:latin typeface="Calibri" charset="0"/>
+                        <a:ea typeface="Calibri" charset="0"/>
+                        <a:cs typeface="Calibri" charset="0"/>
+                      </a:endParaRPr>
+                    </a:p>
+                  </a:txBody>
+                  <a:tcPr marL="91440" marR="91440" marT="45720" marB="45720" anchor="ctr">
+                    <a:lnL w="6350" cap="flat" cmpd="sng" algn="ctr">
+                      <a:solidFill>
+                        <a:srgbClr val="E4DADD"/>
+                      </a:solidFill>
+                      <a:prstDash val="solid"/>
+                      <a:round/>
+                      <a:headEnd type="none" w="med" len="med"/>
+                      <a:tailEnd type="none" w="med" len="med"/>
+                    </a:lnL>
+                    <a:lnR w="6350" cap="flat" cmpd="sng" algn="ctr">
+                      <a:solidFill>
+                        <a:srgbClr val="E4DADD"/>
+                      </a:solidFill>
+                      <a:prstDash val="solid"/>
+                      <a:round/>
+                      <a:headEnd type="none" w="med" len="med"/>
+                      <a:tailEnd type="none" w="med" len="med"/>
+                    </a:lnR>
+                    <a:lnT w="6350" cap="flat" cmpd="sng" algn="ctr">
+                      <a:solidFill>
+                        <a:srgbClr val="E4DADD"/>
+                      </a:solidFill>
+                      <a:prstDash val="solid"/>
+                      <a:round/>
+                      <a:headEnd type="none" w="med" len="med"/>
+                      <a:tailEnd type="none" w="med" len="med"/>
+                    </a:lnT>
+                    <a:lnB w="6350" cap="flat" cmpd="sng" algn="ctr">
+                      <a:solidFill>
+                        <a:srgbClr val="E4DADD"/>
+                      </a:solidFill>
+                      <a:prstDash val="solid"/>
+                      <a:round/>
+                      <a:headEnd type="none" w="med" len="med"/>
+                      <a:tailEnd type="none" w="med" len="med"/>
+                    </a:lnB>
+                  </a:tcPr>
+                </a:tc>
+              </a:tr>
+              <a:tr h="402336">
+                <a:tc>
+                  <a:txBody>
+                    <a:bodyPr/>
+                    <a:lstStyle/>
+                    <a:p>
+                      <a:pPr indent="0" marL="0">
+                        <a:buNone/>
+                      </a:pPr>
+                      <a:r>
+                        <a:rPr lang="en-US" sz="1000" b="1" dirty="0">
+                          <a:solidFill>
+                            <a:srgbClr val="1F1A1C"/>
+                          </a:solidFill>
+                          <a:latin typeface="Calibri" pitchFamily="34" charset="0"/>
+                          <a:ea typeface="Calibri" pitchFamily="34" charset="-122"/>
+                          <a:cs typeface="Calibri" pitchFamily="34" charset="-120"/>
+                        </a:rPr>
+                        <a:t>二つ星降格（4年目以降）</a:t>
+                      </a:r>
+                      <a:endParaRPr lang="en-US" sz="1000" dirty="0">
+                        <a:latin typeface="Calibri" charset="0"/>
+                        <a:ea typeface="Calibri" charset="0"/>
+                        <a:cs typeface="Calibri" charset="0"/>
+                      </a:endParaRPr>
+                    </a:p>
+                  </a:txBody>
+                  <a:tcPr marL="91440" marR="91440" marT="45720" marB="45720" anchor="ctr">
+                    <a:lnL w="6350" cap="flat" cmpd="sng" algn="ctr">
+                      <a:solidFill>
+                        <a:srgbClr val="E4DADD"/>
+                      </a:solidFill>
+                      <a:prstDash val="solid"/>
+                      <a:round/>
+                      <a:headEnd type="none" w="med" len="med"/>
+                      <a:tailEnd type="none" w="med" len="med"/>
+                    </a:lnL>
+                    <a:lnR w="6350" cap="flat" cmpd="sng" algn="ctr">
+                      <a:solidFill>
+                        <a:srgbClr val="E4DADD"/>
+                      </a:solidFill>
+                      <a:prstDash val="solid"/>
+                      <a:round/>
+                      <a:headEnd type="none" w="med" len="med"/>
+                      <a:tailEnd type="none" w="med" len="med"/>
+                    </a:lnR>
+                    <a:lnT w="6350" cap="flat" cmpd="sng" algn="ctr">
+                      <a:solidFill>
+                        <a:srgbClr val="E4DADD"/>
+                      </a:solidFill>
+                      <a:prstDash val="solid"/>
+                      <a:round/>
+                      <a:headEnd type="none" w="med" len="med"/>
+                      <a:tailEnd type="none" w="med" len="med"/>
+                    </a:lnT>
+                    <a:lnB w="6350" cap="flat" cmpd="sng" algn="ctr">
+                      <a:solidFill>
+                        <a:srgbClr val="E4DADD"/>
+                      </a:solidFill>
+                      <a:prstDash val="solid"/>
+                      <a:round/>
+                      <a:headEnd type="none" w="med" len="med"/>
+                      <a:tailEnd type="none" w="med" len="med"/>
+                    </a:lnB>
+                  </a:tcPr>
+                </a:tc>
+                <a:tc>
+                  <a:txBody>
+                    <a:bodyPr/>
+                    <a:lstStyle/>
+                    <a:p>
+                      <a:pPr algn="r" indent="0" marL="0">
+                        <a:buNone/>
+                      </a:pPr>
+                      <a:r>
+                        <a:rPr lang="en-US" sz="1000" dirty="0">
+                          <a:solidFill>
+                            <a:srgbClr val="1F1A1C"/>
+                          </a:solidFill>
+                          <a:latin typeface="Calibri" pitchFamily="34" charset="0"/>
+                          <a:ea typeface="Calibri" pitchFamily="34" charset="-122"/>
+                          <a:cs typeface="Calibri" pitchFamily="34" charset="-120"/>
+                        </a:rPr>
+                        <a:t>2.00億</a:t>
+                      </a:r>
+                      <a:endParaRPr lang="en-US" sz="1000" dirty="0">
+                        <a:latin typeface="Calibri" charset="0"/>
+                        <a:ea typeface="Calibri" charset="0"/>
+                        <a:cs typeface="Calibri" charset="0"/>
+                      </a:endParaRPr>
+                    </a:p>
+                  </a:txBody>
+                  <a:tcPr marL="91440" marR="91440" marT="45720" marB="45720" anchor="ctr">
+                    <a:lnL w="6350" cap="flat" cmpd="sng" algn="ctr">
+                      <a:solidFill>
+                        <a:srgbClr val="E4DADD"/>
+                      </a:solidFill>
+                      <a:prstDash val="solid"/>
+                      <a:round/>
+                      <a:headEnd type="none" w="med" len="med"/>
+                      <a:tailEnd type="none" w="med" len="med"/>
+                    </a:lnL>
+                    <a:lnR w="6350" cap="flat" cmpd="sng" algn="ctr">
+                      <a:solidFill>
+                        <a:srgbClr val="E4DADD"/>
+                      </a:solidFill>
+                      <a:prstDash val="solid"/>
+                      <a:round/>
+                      <a:headEnd type="none" w="med" len="med"/>
+                      <a:tailEnd type="none" w="med" len="med"/>
+                    </a:lnR>
+                    <a:lnT w="6350" cap="flat" cmpd="sng" algn="ctr">
+                      <a:solidFill>
+                        <a:srgbClr val="E4DADD"/>
+                      </a:solidFill>
+                      <a:prstDash val="solid"/>
+                      <a:round/>
+                      <a:headEnd type="none" w="med" len="med"/>
+                      <a:tailEnd type="none" w="med" len="med"/>
+                    </a:lnT>
+                    <a:lnB w="6350" cap="flat" cmpd="sng" algn="ctr">
+                      <a:solidFill>
+                        <a:srgbClr val="E4DADD"/>
+                      </a:solidFill>
+                      <a:prstDash val="solid"/>
+                      <a:round/>
+                      <a:headEnd type="none" w="med" len="med"/>
+                      <a:tailEnd type="none" w="med" len="med"/>
+                    </a:lnB>
+                  </a:tcPr>
+                </a:tc>
+                <a:tc>
+                  <a:txBody>
+                    <a:bodyPr/>
+                    <a:lstStyle/>
+                    <a:p>
+                      <a:pPr algn="r" indent="0" marL="0">
+                        <a:buNone/>
+                      </a:pPr>
+                      <a:r>
+                        <a:rPr lang="en-US" sz="1000" b="1" dirty="0">
+                          <a:solidFill>
+                            <a:srgbClr val="A8741A"/>
+                          </a:solidFill>
+                          <a:latin typeface="Calibri" pitchFamily="34" charset="0"/>
+                          <a:ea typeface="Calibri" pitchFamily="34" charset="-122"/>
+                          <a:cs typeface="Calibri" pitchFamily="34" charset="-120"/>
+                        </a:rPr>
+                        <a:t>0.83〜0.89</a:t>
+                      </a:r>
+                      <a:endParaRPr lang="en-US" sz="1000" dirty="0">
+                        <a:latin typeface="Calibri" charset="0"/>
+                        <a:ea typeface="Calibri" charset="0"/>
+                        <a:cs typeface="Calibri" charset="0"/>
+                      </a:endParaRPr>
+                    </a:p>
+                  </a:txBody>
+                  <a:tcPr marL="91440" marR="91440" marT="45720" marB="45720" anchor="ctr">
+                    <a:lnL w="6350" cap="flat" cmpd="sng" algn="ctr">
+                      <a:solidFill>
+                        <a:srgbClr val="E4DADD"/>
+                      </a:solidFill>
+                      <a:prstDash val="solid"/>
+                      <a:round/>
+                      <a:headEnd type="none" w="med" len="med"/>
+                      <a:tailEnd type="none" w="med" len="med"/>
+                    </a:lnL>
+                    <a:lnR w="6350" cap="flat" cmpd="sng" algn="ctr">
+                      <a:solidFill>
+                        <a:srgbClr val="E4DADD"/>
+                      </a:solidFill>
+                      <a:prstDash val="solid"/>
+                      <a:round/>
+                      <a:headEnd type="none" w="med" len="med"/>
+                      <a:tailEnd type="none" w="med" len="med"/>
+                    </a:lnR>
+                    <a:lnT w="6350" cap="flat" cmpd="sng" algn="ctr">
+                      <a:solidFill>
+                        <a:srgbClr val="E4DADD"/>
+                      </a:solidFill>
+                      <a:prstDash val="solid"/>
+                      <a:round/>
+                      <a:headEnd type="none" w="med" len="med"/>
+                      <a:tailEnd type="none" w="med" len="med"/>
+                    </a:lnT>
+                    <a:lnB w="6350" cap="flat" cmpd="sng" algn="ctr">
+                      <a:solidFill>
+                        <a:srgbClr val="E4DADD"/>
+                      </a:solidFill>
+                      <a:prstDash val="solid"/>
+                      <a:round/>
+                      <a:headEnd type="none" w="med" len="med"/>
+                      <a:tailEnd type="none" w="med" len="med"/>
+                    </a:lnB>
+                  </a:tcPr>
+                </a:tc>
+                <a:tc>
+                  <a:txBody>
+                    <a:bodyPr/>
+                    <a:lstStyle/>
+                    <a:p>
+                      <a:pPr indent="0" marL="0">
+                        <a:buNone/>
+                      </a:pPr>
+                      <a:r>
+                        <a:rPr lang="en-US" sz="1000" dirty="0">
+                          <a:solidFill>
+                            <a:srgbClr val="1F1A1C"/>
+                          </a:solidFill>
+                          <a:latin typeface="Calibri" pitchFamily="34" charset="0"/>
+                          <a:ea typeface="Calibri" pitchFamily="34" charset="-122"/>
+                          <a:cs typeface="Calibri" pitchFamily="34" charset="-120"/>
+                        </a:rPr>
+                        <a:t>4〜7年の累積不足1.32億円。3年目末の累積余剰2.88億円で全額吸収可能。ただしTLB 6.00億円は留保現金またはリファイナンスによる返済となる</a:t>
+                      </a:r>
+                      <a:endParaRPr lang="en-US" sz="1000" dirty="0">
+                        <a:latin typeface="Calibri" charset="0"/>
+                        <a:ea typeface="Calibri" charset="0"/>
+                        <a:cs typeface="Calibri" charset="0"/>
+                      </a:endParaRPr>
+                    </a:p>
+                  </a:txBody>
+                  <a:tcPr marL="91440" marR="91440" marT="45720" marB="45720" anchor="ctr">
+                    <a:lnL w="6350" cap="flat" cmpd="sng" algn="ctr">
+                      <a:solidFill>
+                        <a:srgbClr val="E4DADD"/>
+                      </a:solidFill>
+                      <a:prstDash val="solid"/>
+                      <a:round/>
+                      <a:headEnd type="none" w="med" len="med"/>
+                      <a:tailEnd type="none" w="med" len="med"/>
+                    </a:lnL>
+                    <a:lnR w="6350" cap="flat" cmpd="sng" algn="ctr">
+                      <a:solidFill>
+                        <a:srgbClr val="E4DADD"/>
+                      </a:solidFill>
+                      <a:prstDash val="solid"/>
+                      <a:round/>
+                      <a:headEnd type="none" w="med" len="med"/>
+                      <a:tailEnd type="none" w="med" len="med"/>
+                    </a:lnR>
+                    <a:lnT w="6350" cap="flat" cmpd="sng" algn="ctr">
+                      <a:solidFill>
+                        <a:srgbClr val="E4DADD"/>
+                      </a:solidFill>
+                      <a:prstDash val="solid"/>
+                      <a:round/>
+                      <a:headEnd type="none" w="med" len="med"/>
+                      <a:tailEnd type="none" w="med" len="med"/>
+                    </a:lnT>
+                    <a:lnB w="6350" cap="flat" cmpd="sng" algn="ctr">
+                      <a:solidFill>
+                        <a:srgbClr val="E4DADD"/>
+                      </a:solidFill>
+                      <a:prstDash val="solid"/>
+                      <a:round/>
+                      <a:headEnd type="none" w="med" len="med"/>
+                      <a:tailEnd type="none" w="med" len="med"/>
+                    </a:lnB>
+                  </a:tcPr>
+                </a:tc>
+              </a:tr>
+              <a:tr h="402336">
+                <a:tc>
+                  <a:txBody>
+                    <a:bodyPr/>
+                    <a:lstStyle/>
+                    <a:p>
+                      <a:pPr indent="0" marL="0">
+                        <a:buNone/>
+                      </a:pPr>
+                      <a:r>
+                        <a:rPr lang="en-US" sz="1000" b="1" dirty="0">
+                          <a:solidFill>
+                            <a:srgbClr val="1F1A1C"/>
+                          </a:solidFill>
+                          <a:latin typeface="Calibri" pitchFamily="34" charset="0"/>
+                          <a:ea typeface="Calibri" pitchFamily="34" charset="-122"/>
+                          <a:cs typeface="Calibri" pitchFamily="34" charset="-120"/>
+                        </a:rPr>
+                        <a:t>星喪失（4年目以降）</a:t>
+                      </a:r>
+                      <a:endParaRPr lang="en-US" sz="1000" dirty="0">
+                        <a:latin typeface="Calibri" charset="0"/>
+                        <a:ea typeface="Calibri" charset="0"/>
+                        <a:cs typeface="Calibri" charset="0"/>
+                      </a:endParaRPr>
+                    </a:p>
+                  </a:txBody>
+                  <a:tcPr marL="91440" marR="91440" marT="45720" marB="45720" anchor="ctr">
+                    <a:lnL w="6350" cap="flat" cmpd="sng" algn="ctr">
+                      <a:solidFill>
+                        <a:srgbClr val="E4DADD"/>
+                      </a:solidFill>
+                      <a:prstDash val="solid"/>
+                      <a:round/>
+                      <a:headEnd type="none" w="med" len="med"/>
+                      <a:tailEnd type="none" w="med" len="med"/>
+                    </a:lnL>
+                    <a:lnR w="6350" cap="flat" cmpd="sng" algn="ctr">
+                      <a:solidFill>
+                        <a:srgbClr val="E4DADD"/>
+                      </a:solidFill>
+                      <a:prstDash val="solid"/>
+                      <a:round/>
+                      <a:headEnd type="none" w="med" len="med"/>
+                      <a:tailEnd type="none" w="med" len="med"/>
+                    </a:lnR>
+                    <a:lnT w="6350" cap="flat" cmpd="sng" algn="ctr">
+                      <a:solidFill>
+                        <a:srgbClr val="E4DADD"/>
+                      </a:solidFill>
+                      <a:prstDash val="solid"/>
+                      <a:round/>
+                      <a:headEnd type="none" w="med" len="med"/>
+                      <a:tailEnd type="none" w="med" len="med"/>
+                    </a:lnT>
+                    <a:lnB w="6350" cap="flat" cmpd="sng" algn="ctr">
+                      <a:solidFill>
+                        <a:srgbClr val="E4DADD"/>
+                      </a:solidFill>
+                      <a:prstDash val="solid"/>
+                      <a:round/>
+                      <a:headEnd type="none" w="med" len="med"/>
+                      <a:tailEnd type="none" w="med" len="med"/>
+                    </a:lnB>
+                  </a:tcPr>
+                </a:tc>
+                <a:tc>
+                  <a:txBody>
+                    <a:bodyPr/>
+                    <a:lstStyle/>
+                    <a:p>
+                      <a:pPr algn="r" indent="0" marL="0">
+                        <a:buNone/>
+                      </a:pPr>
+                      <a:r>
+                        <a:rPr lang="en-US" sz="1000" dirty="0">
+                          <a:solidFill>
+                            <a:srgbClr val="1F1A1C"/>
+                          </a:solidFill>
+                          <a:latin typeface="Calibri" pitchFamily="34" charset="0"/>
+                          <a:ea typeface="Calibri" pitchFamily="34" charset="-122"/>
+                          <a:cs typeface="Calibri" pitchFamily="34" charset="-120"/>
+                        </a:rPr>
+                        <a:t>1.00億</a:t>
+                      </a:r>
+                      <a:endParaRPr lang="en-US" sz="1000" dirty="0">
+                        <a:latin typeface="Calibri" charset="0"/>
+                        <a:ea typeface="Calibri" charset="0"/>
+                        <a:cs typeface="Calibri" charset="0"/>
+                      </a:endParaRPr>
+                    </a:p>
+                  </a:txBody>
+                  <a:tcPr marL="91440" marR="91440" marT="45720" marB="45720" anchor="ctr">
+                    <a:lnL w="6350" cap="flat" cmpd="sng" algn="ctr">
+                      <a:solidFill>
+                        <a:srgbClr val="E4DADD"/>
+                      </a:solidFill>
+                      <a:prstDash val="solid"/>
+                      <a:round/>
+                      <a:headEnd type="none" w="med" len="med"/>
+                      <a:tailEnd type="none" w="med" len="med"/>
+                    </a:lnL>
+                    <a:lnR w="6350" cap="flat" cmpd="sng" algn="ctr">
+                      <a:solidFill>
+                        <a:srgbClr val="E4DADD"/>
+                      </a:solidFill>
+                      <a:prstDash val="solid"/>
+                      <a:round/>
+                      <a:headEnd type="none" w="med" len="med"/>
+                      <a:tailEnd type="none" w="med" len="med"/>
+                    </a:lnR>
+                    <a:lnT w="6350" cap="flat" cmpd="sng" algn="ctr">
+                      <a:solidFill>
+                        <a:srgbClr val="E4DADD"/>
+                      </a:solidFill>
+                      <a:prstDash val="solid"/>
+                      <a:round/>
+                      <a:headEnd type="none" w="med" len="med"/>
+                      <a:tailEnd type="none" w="med" len="med"/>
+                    </a:lnT>
+                    <a:lnB w="6350" cap="flat" cmpd="sng" algn="ctr">
+                      <a:solidFill>
+                        <a:srgbClr val="E4DADD"/>
+                      </a:solidFill>
+                      <a:prstDash val="solid"/>
+                      <a:round/>
+                      <a:headEnd type="none" w="med" len="med"/>
+                      <a:tailEnd type="none" w="med" len="med"/>
+                    </a:lnB>
+                  </a:tcPr>
+                </a:tc>
+                <a:tc>
+                  <a:txBody>
+                    <a:bodyPr/>
+                    <a:lstStyle/>
+                    <a:p>
+                      <a:pPr algn="r" indent="0" marL="0">
+                        <a:buNone/>
+                      </a:pPr>
+                      <a:r>
+                        <a:rPr lang="en-US" sz="1000" b="1" dirty="0">
+                          <a:solidFill>
+                            <a:srgbClr val="9B2C2C"/>
+                          </a:solidFill>
+                          <a:latin typeface="Calibri" pitchFamily="34" charset="0"/>
+                          <a:ea typeface="Calibri" pitchFamily="34" charset="-122"/>
+                          <a:cs typeface="Calibri" pitchFamily="34" charset="-120"/>
+                        </a:rPr>
+                        <a:t>0.41〜0.45</a:t>
+                      </a:r>
+                      <a:endParaRPr lang="en-US" sz="1000" dirty="0">
+                        <a:latin typeface="Calibri" charset="0"/>
+                        <a:ea typeface="Calibri" charset="0"/>
+                        <a:cs typeface="Calibri" charset="0"/>
+                      </a:endParaRPr>
+                    </a:p>
+                  </a:txBody>
+                  <a:tcPr marL="91440" marR="91440" marT="45720" marB="45720" anchor="ctr">
+                    <a:lnL w="6350" cap="flat" cmpd="sng" algn="ctr">
+                      <a:solidFill>
+                        <a:srgbClr val="E4DADD"/>
+                      </a:solidFill>
+                      <a:prstDash val="solid"/>
+                      <a:round/>
+                      <a:headEnd type="none" w="med" len="med"/>
+                      <a:tailEnd type="none" w="med" len="med"/>
+                    </a:lnL>
+                    <a:lnR w="6350" cap="flat" cmpd="sng" algn="ctr">
+                      <a:solidFill>
+                        <a:srgbClr val="E4DADD"/>
+                      </a:solidFill>
+                      <a:prstDash val="solid"/>
+                      <a:round/>
+                      <a:headEnd type="none" w="med" len="med"/>
+                      <a:tailEnd type="none" w="med" len="med"/>
+                    </a:lnR>
+                    <a:lnT w="6350" cap="flat" cmpd="sng" algn="ctr">
+                      <a:solidFill>
+                        <a:srgbClr val="E4DADD"/>
+                      </a:solidFill>
+                      <a:prstDash val="solid"/>
+                      <a:round/>
+                      <a:headEnd type="none" w="med" len="med"/>
+                      <a:tailEnd type="none" w="med" len="med"/>
+                    </a:lnT>
+                    <a:lnB w="6350" cap="flat" cmpd="sng" algn="ctr">
+                      <a:solidFill>
+                        <a:srgbClr val="E4DADD"/>
+                      </a:solidFill>
+                      <a:prstDash val="solid"/>
+                      <a:round/>
+                      <a:headEnd type="none" w="med" len="med"/>
+                      <a:tailEnd type="none" w="med" len="med"/>
+                    </a:lnB>
+                  </a:tcPr>
+                </a:tc>
+                <a:tc>
+                  <a:txBody>
+                    <a:bodyPr/>
+                    <a:lstStyle/>
+                    <a:p>
+                      <a:pPr indent="0" marL="0">
+                        <a:buNone/>
+                      </a:pPr>
+                      <a:r>
+                        <a:rPr lang="en-US" sz="1000" dirty="0">
+                          <a:solidFill>
+                            <a:srgbClr val="1F1A1C"/>
+                          </a:solidFill>
+                          <a:latin typeface="Calibri" pitchFamily="34" charset="0"/>
+                          <a:ea typeface="Calibri" pitchFamily="34" charset="-122"/>
+                          <a:cs typeface="Calibri" pitchFamily="34" charset="-120"/>
+                        </a:rPr>
+                        <a:t>累積不足5.32億円。累積余剰2.88億円＋留保現金6.00億円で元利返済は継続できるが、TLB 6.00億円は返済不能</a:t>
+                      </a:r>
+                      <a:endParaRPr lang="en-US" sz="1000" dirty="0">
+                        <a:latin typeface="Calibri" charset="0"/>
+                        <a:ea typeface="Calibri" charset="0"/>
+                        <a:cs typeface="Calibri" charset="0"/>
+                      </a:endParaRPr>
+                    </a:p>
+                  </a:txBody>
+                  <a:tcPr marL="91440" marR="91440" marT="45720" marB="45720" anchor="ctr">
+                    <a:lnL w="6350" cap="flat" cmpd="sng" algn="ctr">
+                      <a:solidFill>
+                        <a:srgbClr val="E4DADD"/>
+                      </a:solidFill>
+                      <a:prstDash val="solid"/>
+                      <a:round/>
+                      <a:headEnd type="none" w="med" len="med"/>
+                      <a:tailEnd type="none" w="med" len="med"/>
+                    </a:lnL>
+                    <a:lnR w="6350" cap="flat" cmpd="sng" algn="ctr">
+                      <a:solidFill>
+                        <a:srgbClr val="E4DADD"/>
+                      </a:solidFill>
+                      <a:prstDash val="solid"/>
+                      <a:round/>
+                      <a:headEnd type="none" w="med" len="med"/>
+                      <a:tailEnd type="none" w="med" len="med"/>
+                    </a:lnR>
+                    <a:lnT w="6350" cap="flat" cmpd="sng" algn="ctr">
+                      <a:solidFill>
+                        <a:srgbClr val="E4DADD"/>
+                      </a:solidFill>
+                      <a:prstDash val="solid"/>
+                      <a:round/>
+                      <a:headEnd type="none" w="med" len="med"/>
+                      <a:tailEnd type="none" w="med" len="med"/>
+                    </a:lnT>
+                    <a:lnB w="6350" cap="flat" cmpd="sng" algn="ctr">
+                      <a:solidFill>
+                        <a:srgbClr val="E4DADD"/>
+                      </a:solidFill>
+                      <a:prstDash val="solid"/>
+                      <a:round/>
+                      <a:headEnd type="none" w="med" len="med"/>
+                      <a:tailEnd type="none" w="med" len="med"/>
+                    </a:lnB>
+                  </a:tcPr>
+                </a:tc>
+              </a:tr>
+            </a:tbl>
+          </a:graphicData>
+        </a:graphic>
+      </p:graphicFrame>
+      <p:sp>
+        <p:nvSpPr>
+          <p:cNvPr id="6" name="Shape 3"/>
+          <p:cNvSpPr/>
+          <p:nvPr/>
+        </p:nvSpPr>
+        <p:spPr>
+          <a:xfrm>
+            <a:off x="566928" y="4041648"/>
+            <a:ext cx="5440680" cy="1481328"/>
+          </a:xfrm>
+          <a:prstGeom prst="roundRect">
+            <a:avLst>
+              <a:gd name="adj" fmla="val 3086"/>
+            </a:avLst>
+          </a:prstGeom>
+          <a:solidFill>
+            <a:srgbClr val="F7F3F4"/>
+          </a:solidFill>
+          <a:ln w="9525">
+            <a:solidFill>
+              <a:srgbClr val="E4DADD"/>
+            </a:solidFill>
+            <a:prstDash val="solid"/>
+          </a:ln>
+        </p:spPr>
+      </p:sp>
+      <p:sp>
+        <p:nvSpPr>
+          <p:cNvPr id="7" name="Text 4"/>
+          <p:cNvSpPr txBox="1"/>
+          <p:nvPr/>
+        </p:nvSpPr>
+        <p:spPr>
+          <a:xfrm>
+            <a:off x="786384" y="4151376"/>
+            <a:ext cx="2743200" cy="219456"/>
+          </a:xfrm>
+          <a:prstGeom prst="rect">
+            <a:avLst/>
+          </a:prstGeom>
+          <a:noFill/>
+          <a:ln/>
+        </p:spPr>
+        <p:txBody>
+          <a:bodyPr wrap="square" lIns="0" tIns="0" rIns="0" bIns="0" rtlCol="0" anchor="ctr"/>
+          <a:lstStyle/>
+          <a:p>
+            <a:pPr indent="0" marL="0">
+              <a:buNone/>
+            </a:pPr>
+            <a:r>
+              <a:rPr lang="en-US" sz="950" b="1" dirty="0">
+                <a:solidFill>
+                  <a:srgbClr val="B58B2A"/>
+                </a:solidFill>
+                <a:latin typeface="Calibri" pitchFamily="34" charset="0"/>
+                <a:ea typeface="Calibri" pitchFamily="34" charset="-122"/>
+                <a:cs typeface="Calibri" pitchFamily="34" charset="-120"/>
+              </a:rPr>
+              <a:t>ネットレバレッジ</a:t>
+            </a:r>
+            <a:endParaRPr lang="en-US" sz="950" dirty="0"/>
+          </a:p>
+        </p:txBody>
+      </p:sp>
+      <p:sp>
+        <p:nvSpPr>
+          <p:cNvPr id="8" name="Text 5"/>
+          <p:cNvSpPr txBox="1"/>
+          <p:nvPr/>
+        </p:nvSpPr>
+        <p:spPr>
+          <a:xfrm>
+            <a:off x="786384" y="4389120"/>
+            <a:ext cx="3017520" cy="237744"/>
+          </a:xfrm>
+          <a:prstGeom prst="rect">
+            <a:avLst/>
+          </a:prstGeom>
+          <a:noFill/>
+          <a:ln/>
+        </p:spPr>
+        <p:txBody>
+          <a:bodyPr wrap="square" lIns="0" tIns="0" rIns="0" bIns="0" rtlCol="0" anchor="ctr"/>
+          <a:lstStyle/>
+          <a:p>
+            <a:pPr indent="0" marL="0">
+              <a:buNone/>
+            </a:pPr>
+            <a:r>
+              <a:rPr lang="en-US" sz="1000" dirty="0">
+                <a:solidFill>
+                  <a:srgbClr val="1F1A1C"/>
+                </a:solidFill>
+                <a:latin typeface="Calibri" pitchFamily="34" charset="0"/>
+                <a:ea typeface="Calibri" pitchFamily="34" charset="-122"/>
+                <a:cs typeface="Calibri" pitchFamily="34" charset="-120"/>
+              </a:rPr>
+              <a:t>LBOローン</a:t>
+            </a:r>
+            <a:endParaRPr lang="en-US" sz="1000" dirty="0"/>
+          </a:p>
+        </p:txBody>
+      </p:sp>
+      <p:sp>
+        <p:nvSpPr>
+          <p:cNvPr id="9" name="Text 6"/>
+          <p:cNvSpPr txBox="1"/>
+          <p:nvPr/>
+        </p:nvSpPr>
+        <p:spPr>
+          <a:xfrm>
+            <a:off x="3813048" y="4389120"/>
+            <a:ext cx="2011680" cy="237744"/>
+          </a:xfrm>
+          <a:prstGeom prst="rect">
+            <a:avLst/>
+          </a:prstGeom>
+          <a:noFill/>
+          <a:ln/>
+        </p:spPr>
+        <p:txBody>
+          <a:bodyPr wrap="square" lIns="0" tIns="0" rIns="0" bIns="0" rtlCol="0" anchor="ctr"/>
+          <a:lstStyle/>
+          <a:p>
+            <a:pPr algn="r" indent="0" marL="0">
+              <a:buNone/>
+            </a:pPr>
+            <a:r>
+              <a:rPr lang="en-US" sz="1000" dirty="0">
+                <a:solidFill>
+                  <a:srgbClr val="1F1A1C"/>
+                </a:solidFill>
+                <a:latin typeface="Calibri" pitchFamily="34" charset="0"/>
+                <a:ea typeface="Calibri" pitchFamily="34" charset="-122"/>
+                <a:cs typeface="Calibri" pitchFamily="34" charset="-120"/>
+              </a:rPr>
+              <a:t>20.00億円</a:t>
+            </a:r>
+            <a:endParaRPr lang="en-US" sz="1000" dirty="0"/>
+          </a:p>
+        </p:txBody>
+      </p:sp>
+      <p:sp>
+        <p:nvSpPr>
+          <p:cNvPr id="10" name="Text 7"/>
+          <p:cNvSpPr txBox="1"/>
+          <p:nvPr/>
+        </p:nvSpPr>
+        <p:spPr>
+          <a:xfrm>
+            <a:off x="786384" y="4663440"/>
+            <a:ext cx="3017520" cy="237744"/>
+          </a:xfrm>
+          <a:prstGeom prst="rect">
+            <a:avLst/>
+          </a:prstGeom>
+          <a:noFill/>
+          <a:ln/>
+        </p:spPr>
+        <p:txBody>
+          <a:bodyPr wrap="square" lIns="0" tIns="0" rIns="0" bIns="0" rtlCol="0" anchor="ctr"/>
+          <a:lstStyle/>
+          <a:p>
+            <a:pPr indent="0" marL="0">
+              <a:buNone/>
+            </a:pPr>
+            <a:r>
+              <a:rPr lang="en-US" sz="1000" dirty="0">
+                <a:solidFill>
+                  <a:srgbClr val="1F1A1C"/>
+                </a:solidFill>
+                <a:latin typeface="Calibri" pitchFamily="34" charset="0"/>
+                <a:ea typeface="Calibri" pitchFamily="34" charset="-122"/>
+                <a:cs typeface="Calibri" pitchFamily="34" charset="-120"/>
+              </a:rPr>
+              <a:t>− 対象会社に留保する現預金</a:t>
+            </a:r>
+            <a:endParaRPr lang="en-US" sz="1000" dirty="0"/>
+          </a:p>
+        </p:txBody>
+      </p:sp>
+      <p:sp>
+        <p:nvSpPr>
+          <p:cNvPr id="11" name="Text 8"/>
+          <p:cNvSpPr txBox="1"/>
+          <p:nvPr/>
+        </p:nvSpPr>
+        <p:spPr>
+          <a:xfrm>
+            <a:off x="3813048" y="4663440"/>
+            <a:ext cx="2011680" cy="237744"/>
+          </a:xfrm>
+          <a:prstGeom prst="rect">
+            <a:avLst/>
+          </a:prstGeom>
+          <a:noFill/>
+          <a:ln/>
+        </p:spPr>
+        <p:txBody>
+          <a:bodyPr wrap="square" lIns="0" tIns="0" rIns="0" bIns="0" rtlCol="0" anchor="ctr"/>
+          <a:lstStyle/>
+          <a:p>
+            <a:pPr algn="r" indent="0" marL="0">
+              <a:buNone/>
+            </a:pPr>
+            <a:r>
+              <a:rPr lang="en-US" sz="1000" dirty="0">
+                <a:solidFill>
+                  <a:srgbClr val="1F1A1C"/>
+                </a:solidFill>
+                <a:latin typeface="Calibri" pitchFamily="34" charset="0"/>
+                <a:ea typeface="Calibri" pitchFamily="34" charset="-122"/>
+                <a:cs typeface="Calibri" pitchFamily="34" charset="-120"/>
+              </a:rPr>
+              <a:t>6.00億円</a:t>
+            </a:r>
+            <a:endParaRPr lang="en-US" sz="1000" dirty="0"/>
+          </a:p>
+        </p:txBody>
+      </p:sp>
+      <p:sp>
+        <p:nvSpPr>
+          <p:cNvPr id="12" name="Text 9"/>
+          <p:cNvSpPr txBox="1"/>
+          <p:nvPr/>
+        </p:nvSpPr>
+        <p:spPr>
+          <a:xfrm>
+            <a:off x="786384" y="4937760"/>
+            <a:ext cx="3017520" cy="237744"/>
+          </a:xfrm>
+          <a:prstGeom prst="rect">
+            <a:avLst/>
+          </a:prstGeom>
+          <a:noFill/>
+          <a:ln/>
+        </p:spPr>
+        <p:txBody>
+          <a:bodyPr wrap="square" lIns="0" tIns="0" rIns="0" bIns="0" rtlCol="0" anchor="ctr"/>
+          <a:lstStyle/>
+          <a:p>
+            <a:pPr indent="0" marL="0">
+              <a:buNone/>
+            </a:pPr>
+            <a:r>
+              <a:rPr lang="en-US" sz="1100" b="1" dirty="0">
+                <a:solidFill>
+                  <a:srgbClr val="6D2E46"/>
+                </a:solidFill>
+                <a:latin typeface="Calibri" pitchFamily="34" charset="0"/>
+                <a:ea typeface="Calibri" pitchFamily="34" charset="-122"/>
+                <a:cs typeface="Calibri" pitchFamily="34" charset="-120"/>
+              </a:rPr>
+              <a:t>＝ 連結ネットデット</a:t>
+            </a:r>
+            <a:endParaRPr lang="en-US" sz="1100" dirty="0"/>
+          </a:p>
+        </p:txBody>
+      </p:sp>
+      <p:sp>
+        <p:nvSpPr>
+          <p:cNvPr id="13" name="Text 10"/>
+          <p:cNvSpPr txBox="1"/>
+          <p:nvPr/>
+        </p:nvSpPr>
+        <p:spPr>
+          <a:xfrm>
+            <a:off x="3813048" y="4937760"/>
+            <a:ext cx="2011680" cy="237744"/>
+          </a:xfrm>
+          <a:prstGeom prst="rect">
+            <a:avLst/>
+          </a:prstGeom>
+          <a:noFill/>
+          <a:ln/>
+        </p:spPr>
+        <p:txBody>
+          <a:bodyPr wrap="square" lIns="0" tIns="0" rIns="0" bIns="0" rtlCol="0" anchor="ctr"/>
+          <a:lstStyle/>
+          <a:p>
+            <a:pPr algn="r" indent="0" marL="0">
+              <a:buNone/>
+            </a:pPr>
+            <a:r>
+              <a:rPr lang="en-US" sz="1100" b="1" dirty="0">
+                <a:solidFill>
+                  <a:srgbClr val="6D2E46"/>
+                </a:solidFill>
+                <a:latin typeface="Calibri" pitchFamily="34" charset="0"/>
+                <a:ea typeface="Calibri" pitchFamily="34" charset="-122"/>
+                <a:cs typeface="Calibri" pitchFamily="34" charset="-120"/>
+              </a:rPr>
+              <a:t>14.00億円（2.6倍）</a:t>
+            </a:r>
+            <a:endParaRPr lang="en-US" sz="1100" dirty="0"/>
+          </a:p>
+        </p:txBody>
+      </p:sp>
+      <p:sp>
+        <p:nvSpPr>
+          <p:cNvPr id="14" name="Text 11"/>
+          <p:cNvSpPr txBox="1"/>
+          <p:nvPr/>
+        </p:nvSpPr>
+        <p:spPr>
+          <a:xfrm>
+            <a:off x="786384" y="5230368"/>
+            <a:ext cx="4983480" cy="256032"/>
+          </a:xfrm>
+          <a:prstGeom prst="rect">
+            <a:avLst/>
+          </a:prstGeom>
+          <a:noFill/>
+          <a:ln/>
+        </p:spPr>
+        <p:txBody>
+          <a:bodyPr wrap="square" lIns="0" tIns="0" rIns="0" bIns="0" rtlCol="0" anchor="ctr"/>
+          <a:lstStyle/>
+          <a:p>
+            <a:pPr indent="0" marL="0">
+              <a:buNone/>
+            </a:pPr>
+            <a:r>
+              <a:rPr lang="en-US" sz="950" dirty="0">
+                <a:solidFill>
+                  <a:srgbClr val="6E6368"/>
+                </a:solidFill>
+                <a:latin typeface="Calibri" pitchFamily="34" charset="0"/>
+                <a:ea typeface="Calibri" pitchFamily="34" charset="-122"/>
+                <a:cs typeface="Calibri" pitchFamily="34" charset="-120"/>
+              </a:rPr>
+              <a:t>対象会社は無借金で現預金17.43億円を持つため、グロス3.8倍に対しネットは2.6倍にとどまる。</a:t>
+            </a:r>
+            <a:endParaRPr lang="en-US" sz="950" dirty="0"/>
+          </a:p>
+        </p:txBody>
+      </p:sp>
+      <p:sp>
+        <p:nvSpPr>
+          <p:cNvPr id="15" name="Shape 12"/>
+          <p:cNvSpPr/>
+          <p:nvPr/>
+        </p:nvSpPr>
+        <p:spPr>
+          <a:xfrm>
+            <a:off x="6199632" y="4041648"/>
+            <a:ext cx="5422392" cy="1481328"/>
+          </a:xfrm>
+          <a:prstGeom prst="roundRect">
+            <a:avLst>
+              <a:gd name="adj" fmla="val 3086"/>
+            </a:avLst>
+          </a:prstGeom>
+          <a:solidFill>
+            <a:srgbClr val="FFFFFF"/>
+          </a:solidFill>
+          <a:ln w="9525">
+            <a:solidFill>
+              <a:srgbClr val="E4DADD"/>
+            </a:solidFill>
+            <a:prstDash val="solid"/>
+          </a:ln>
+        </p:spPr>
+      </p:sp>
+      <p:sp>
+        <p:nvSpPr>
+          <p:cNvPr id="16" name="Text 13"/>
+          <p:cNvSpPr txBox="1"/>
+          <p:nvPr/>
+        </p:nvSpPr>
+        <p:spPr>
+          <a:xfrm>
+            <a:off x="6419088" y="4151376"/>
+            <a:ext cx="3657600" cy="219456"/>
+          </a:xfrm>
+          <a:prstGeom prst="rect">
+            <a:avLst/>
+          </a:prstGeom>
+          <a:noFill/>
+          <a:ln/>
+        </p:spPr>
+        <p:txBody>
+          <a:bodyPr wrap="square" lIns="0" tIns="0" rIns="0" bIns="0" rtlCol="0" anchor="ctr"/>
+          <a:lstStyle/>
+          <a:p>
+            <a:pPr indent="0" marL="0">
+              <a:buNone/>
+            </a:pPr>
+            <a:r>
+              <a:rPr lang="en-US" sz="950" b="1" dirty="0">
+                <a:solidFill>
+                  <a:srgbClr val="B58B2A"/>
+                </a:solidFill>
+                <a:latin typeface="Calibri" pitchFamily="34" charset="0"/>
+                <a:ea typeface="Calibri" pitchFamily="34" charset="-122"/>
+                <a:cs typeface="Calibri" pitchFamily="34" charset="-120"/>
+              </a:rPr>
+              <a:t>保全・コベナンツ案（ご提案）</a:t>
+            </a:r>
+            <a:endParaRPr lang="en-US" sz="950" dirty="0"/>
+          </a:p>
+        </p:txBody>
+      </p:sp>
+      <p:sp>
+        <p:nvSpPr>
+          <p:cNvPr id="17" name="Text 14"/>
+          <p:cNvSpPr txBox="1"/>
+          <p:nvPr/>
+        </p:nvSpPr>
+        <p:spPr>
+          <a:xfrm>
+            <a:off x="6419088" y="4389120"/>
+            <a:ext cx="4983480" cy="1097280"/>
+          </a:xfrm>
+          <a:prstGeom prst="rect">
+            <a:avLst/>
+          </a:prstGeom>
+          <a:noFill/>
+          <a:ln/>
+        </p:spPr>
+        <p:txBody>
+          <a:bodyPr wrap="square" lIns="0" tIns="0" rIns="0" bIns="0" rtlCol="0" anchor="ctr"/>
+          <a:lstStyle/>
+          <a:p>
+            <a:pPr indent="0" marL="0">
+              <a:lnSpc>
+                <a:spcPts val="1350"/>
+              </a:lnSpc>
+              <a:buNone/>
+            </a:pPr>
+            <a:r>
+              <a:rPr lang="en-US" sz="950" dirty="0">
+                <a:solidFill>
+                  <a:srgbClr val="1F1A1C"/>
+                </a:solidFill>
+                <a:latin typeface="Calibri" pitchFamily="34" charset="0"/>
+                <a:ea typeface="Calibri" pitchFamily="34" charset="-122"/>
+                <a:cs typeface="Calibri" pitchFamily="34" charset="-120"/>
+              </a:rPr>
+              <a:t>① 対象会社株式100%への質権設定　② ワイン在庫（簿価1.19億円）への担保設定　③ DSCR 1.1倍以上の維持　④ 対象会社に現預金6.00億円以上を留保　⑤ TLB完済までの配当・自己株取得の制限　⑥ 超過キャッシュフローの50%をTLBへ充当（キャッシュスイープ）　⑦ 岸田氏の退任・料理長交代・ミシュラン評価変動の報告義務　⑧ サントリー・ファインズとの取引条件変更時の報告義務</a:t>
+            </a:r>
+            <a:endParaRPr lang="en-US" sz="950" dirty="0"/>
+          </a:p>
+        </p:txBody>
+      </p:sp>
+      <p:sp>
+        <p:nvSpPr>
+          <p:cNvPr id="18" name="Shape 15"/>
+          <p:cNvSpPr/>
+          <p:nvPr/>
+        </p:nvSpPr>
+        <p:spPr>
+          <a:xfrm>
+            <a:off x="566928" y="5650992"/>
+            <a:ext cx="11055096" cy="603504"/>
+          </a:xfrm>
+          <a:prstGeom prst="roundRect">
+            <a:avLst>
+              <a:gd name="adj" fmla="val 6061"/>
+            </a:avLst>
+          </a:prstGeom>
+          <a:solidFill>
+            <a:srgbClr val="6D2E46"/>
+          </a:solidFill>
+          <a:ln/>
+        </p:spPr>
+      </p:sp>
+      <p:sp>
+        <p:nvSpPr>
+          <p:cNvPr id="19" name="Text 16"/>
+          <p:cNvSpPr txBox="1"/>
+          <p:nvPr/>
+        </p:nvSpPr>
+        <p:spPr>
+          <a:xfrm>
+            <a:off x="822960" y="5724144"/>
+            <a:ext cx="10543032" cy="457200"/>
+          </a:xfrm>
+          <a:prstGeom prst="rect">
+            <a:avLst/>
+          </a:prstGeom>
+          <a:noFill/>
+          <a:ln/>
+        </p:spPr>
+        <p:txBody>
+          <a:bodyPr wrap="square" lIns="0" tIns="0" rIns="0" bIns="0" rtlCol="0" anchor="ctr"/>
+          <a:lstStyle/>
+          <a:p>
+            <a:pPr indent="0" marL="0">
+              <a:lnSpc>
+                <a:spcPts val="1500"/>
+              </a:lnSpc>
+              <a:buNone/>
+            </a:pPr>
+            <a:r>
+              <a:rPr lang="en-US" sz="1150" b="1" dirty="0">
+                <a:solidFill>
+                  <a:srgbClr val="FFFFFF"/>
+                </a:solidFill>
+              </a:rPr>
+              <a:t>実質的な論点は金額ではなく期間　</a:t>
+            </a:r>
+            <a:pPr indent="0" marL="0">
+              <a:lnSpc>
+                <a:spcPts val="1500"/>
+              </a:lnSpc>
+              <a:buNone/>
+            </a:pPr>
+            <a:r>
+              <a:rPr lang="en-US" sz="1000" dirty="0">
+                <a:solidFill>
+                  <a:srgbClr val="EBDCE1"/>
+                </a:solidFill>
+              </a:rPr>
+              <a:t>貴行のスタートアップM&amp;A融資が5年目線の場合、TLA 11億円＋TLB 9億円で初年度DSCR 1.25を確保できるものの、5年後にTLB 9.00億円のリファイナンスが必要になる。7年を許容いただけるかが、20億円を自力返済で完結させられるかの分岐点となる。</a:t>
+            </a:r>
+            <a:endParaRPr lang="en-US" sz="1150" dirty="0"/>
+          </a:p>
+        </p:txBody>
+      </p:sp>
+      <p:sp>
+        <p:nvSpPr>
+          <p:cNvPr id="20" name="Text 17"/>
+          <p:cNvSpPr txBox="1"/>
+          <p:nvPr/>
+        </p:nvSpPr>
+        <p:spPr>
+          <a:xfrm>
+            <a:off x="566928" y="6419088"/>
+            <a:ext cx="8686800" cy="228600"/>
+          </a:xfrm>
+          <a:prstGeom prst="rect">
+            <a:avLst/>
+          </a:prstGeom>
+          <a:noFill/>
+          <a:ln/>
+        </p:spPr>
+        <p:txBody>
+          <a:bodyPr wrap="square" lIns="0" tIns="0" rIns="0" bIns="0" rtlCol="0" anchor="ctr"/>
+          <a:lstStyle/>
+          <a:p>
+            <a:pPr indent="0" marL="0">
+              <a:buNone/>
+            </a:pPr>
+            <a:r>
+              <a:rPr lang="en-US" sz="800" dirty="0">
+                <a:solidFill>
+                  <a:srgbClr val="6E6368"/>
+                </a:solidFill>
+                <a:latin typeface="Calibri" pitchFamily="34" charset="0"/>
+                <a:ea typeface="Calibri" pitchFamily="34" charset="-122"/>
+                <a:cs typeface="Calibri" pitchFamily="34" charset="-120"/>
+              </a:rPr>
+              <a:t>カンテサンス（株式会社プティ・ボノム）株式譲渡価格50億円の妥当性検証 ／ 銀行ご提出用</a:t>
+            </a:r>
+            <a:endParaRPr lang="en-US" sz="800" dirty="0"/>
+          </a:p>
+        </p:txBody>
+      </p:sp>
+      <p:sp>
+        <p:nvSpPr>
+          <p:cNvPr id="21" name="Text 18"/>
+          <p:cNvSpPr txBox="1"/>
+          <p:nvPr/>
+        </p:nvSpPr>
+        <p:spPr>
+          <a:xfrm>
+            <a:off x="10799064" y="6419088"/>
+            <a:ext cx="822960" cy="228600"/>
+          </a:xfrm>
+          <a:prstGeom prst="rect">
+            <a:avLst/>
+          </a:prstGeom>
+          <a:noFill/>
+          <a:ln/>
+        </p:spPr>
+        <p:txBody>
+          <a:bodyPr wrap="square" lIns="0" tIns="0" rIns="0" bIns="0" rtlCol="0" anchor="ctr"/>
+          <a:lstStyle/>
+          <a:p>
+            <a:pPr algn="r" indent="0" marL="0">
+              <a:buNone/>
+            </a:pPr>
+            <a:r>
+              <a:rPr lang="en-US" sz="900" dirty="0">
+                <a:solidFill>
+                  <a:srgbClr val="6E6368"/>
+                </a:solidFill>
+                <a:latin typeface="Calibri" pitchFamily="34" charset="0"/>
+                <a:ea typeface="Calibri" pitchFamily="34" charset="-122"/>
+                <a:cs typeface="Calibri" pitchFamily="34" charset="-120"/>
+              </a:rPr>
+              <a:t>16</a:t>
+            </a:r>
+            <a:endParaRPr lang="en-US" sz="900" dirty="0"/>
+          </a:p>
+        </p:txBody>
+      </p:sp>
+    </p:spTree>
+  </p:cSld>
+  <p:clrMapOvr>
+    <a:masterClrMapping/>
+  </p:clrMapOvr>
+</p:sld>
+</file>
+
+<file path=ppt/slides/slide17.xml><?xml version="1.0" encoding="utf-8"?>
+<p:sld xmlns:a="http://schemas.openxmlformats.org/drawingml/2006/main" xmlns:r="http://schemas.openxmlformats.org/officeDocument/2006/relationships" xmlns:p="http://schemas.openxmlformats.org/presentationml/2006/main">
+  <p:cSld name="Slide 17">
+    <p:spTree>
+      <p:nvGrpSpPr>
+        <p:cNvPr id="1" name=""/>
+        <p:cNvGrpSpPr/>
+        <p:nvPr/>
+      </p:nvGrpSpPr>
+      <p:grpSpPr>
+        <a:xfrm>
+          <a:off x="0" y="0"/>
+          <a:ext cx="0" cy="0"/>
+          <a:chOff x="0" y="0"/>
+          <a:chExt cx="0" cy="0"/>
+        </a:xfrm>
+      </p:grpSpPr>
+      <p:sp>
+        <p:nvSpPr>
+          <p:cNvPr id="2" name="Text 0"/>
+          <p:cNvSpPr txBox="1"/>
+          <p:nvPr/>
+        </p:nvSpPr>
+        <p:spPr>
+          <a:xfrm>
+            <a:off x="566928" y="310896"/>
+            <a:ext cx="9144000" cy="237744"/>
+          </a:xfrm>
+          <a:prstGeom prst="rect">
+            <a:avLst/>
+          </a:prstGeom>
+          <a:noFill/>
+          <a:ln/>
+        </p:spPr>
+        <p:txBody>
+          <a:bodyPr wrap="square" lIns="0" tIns="0" rIns="0" bIns="0" rtlCol="0" anchor="ctr"/>
+          <a:lstStyle/>
+          <a:p>
+            <a:pPr indent="0" marL="0">
+              <a:buNone/>
+            </a:pPr>
+            <a:r>
+              <a:rPr lang="en-US" sz="1100" b="1" spc="140" kern="0" dirty="0">
+                <a:solidFill>
+                  <a:srgbClr val="B58B2A"/>
+                </a:solidFill>
+                <a:latin typeface="Calibri" pitchFamily="34" charset="0"/>
+                <a:ea typeface="Calibri" pitchFamily="34" charset="-122"/>
+                <a:cs typeface="Calibri" pitchFamily="34" charset="-120"/>
+              </a:rPr>
               <a:t>RISK</a:t>
             </a:r>
             <a:endParaRPr lang="en-US" sz="1100" dirty="0"/>
@@ -17554,7 +23281,7 @@
       </p:sp>
       <p:graphicFrame>
         <p:nvGraphicFramePr>
-          <p:cNvPr id="17" name="Table 0"/>
+          <p:cNvPr id="18" name="Table 0"/>
           <p:cNvGraphicFramePr>
             <a:graphicFrameLocks noGrp="1"/>
           </p:cNvGraphicFramePr>
@@ -19479,7 +25206,7 @@
                 <a:ea typeface="Calibri" pitchFamily="34" charset="-122"/>
                 <a:cs typeface="Calibri" pitchFamily="34" charset="-120"/>
               </a:rPr>
-              <a:t>16</a:t>
+              <a:t>17</a:t>
             </a:r>
             <a:endParaRPr lang="en-US" sz="900" dirty="0"/>
           </a:p>
@@ -19493,9 +25220,9 @@
 </p:sld>
 </file>
 
-<file path=ppt/slides/slide17.xml><?xml version="1.0" encoding="utf-8"?>
+<file path=ppt/slides/slide18.xml><?xml version="1.0" encoding="utf-8"?>
 <p:sld xmlns:a="http://schemas.openxmlformats.org/drawingml/2006/main" xmlns:r="http://schemas.openxmlformats.org/officeDocument/2006/relationships" xmlns:p="http://schemas.openxmlformats.org/presentationml/2006/main">
-  <p:cSld name="Slide 17">
+  <p:cSld name="Slide 18">
     <p:bg>
       <p:bgPr>
         <a:solidFill>
@@ -20305,7 +26032,25 @@
                 <a:ea typeface="Calibri" pitchFamily="34" charset="-122"/>
                 <a:cs typeface="Calibri" pitchFamily="34" charset="-120"/>
               </a:rPr>
-              <a:t>・本資料は取得主体を特定せず、対象会社の事業価値および提示価格の妥当性のみを検証したもの。取得ストラクチャー・資金調達計画は別途。</a:t>
+              <a:t>・LBOローンの返済試算は借入20.00億円・7年・金利3%、タームローンA 14.00億円（元金均等）＋タームローンB 6.00億円（期限一括）を前提。
+</a:t>
+            </a:r>
+            <a:pPr indent="0" marL="0">
+              <a:lnSpc>
+                <a:spcPts val="1250"/>
+              </a:lnSpc>
+              <a:buNone/>
+            </a:pPr>
+            <a:r>
+              <a:rPr lang="en-US" sz="860" dirty="0">
+                <a:solidFill>
+                  <a:srgbClr val="B4A0A6"/>
+                </a:solidFill>
+                <a:latin typeface="Calibri" pitchFamily="34" charset="0"/>
+                <a:ea typeface="Calibri" pitchFamily="34" charset="-122"/>
+                <a:cs typeface="Calibri" pitchFamily="34" charset="-120"/>
+              </a:rPr>
+              <a:t>・本資料は取得主体を特定せず、対象会社の事業価値および提示価格の妥当性を検証したもの。買収ストラクチャーおよびエクイティの調達計画は別途。</a:t>
             </a:r>
             <a:endParaRPr lang="en-US" sz="860" dirty="0"/>
           </a:p>
@@ -20383,7 +26128,7 @@
                 <a:ea typeface="Calibri" pitchFamily="34" charset="-122"/>
                 <a:cs typeface="Calibri" pitchFamily="34" charset="-120"/>
               </a:rPr>
-              <a:t>17</a:t>
+              <a:t>18</a:t>
             </a:r>
             <a:endParaRPr lang="en-US" sz="900" dirty="0"/>
           </a:p>
@@ -21071,7 +26816,7 @@
                 <a:ea typeface="Calibri" pitchFamily="34" charset="-122"/>
                 <a:cs typeface="Calibri" pitchFamily="34" charset="-120"/>
               </a:rPr>
-              <a:t>純資産23.15億＋営業利益5.09年分。実務慣行の「純資産＋営業利益3〜5年」のレンジ上限に位置する。単独では「やや高い」。</a:t>
+              <a:t>純資産23.15億＋営業利益5.09年分。実務慣行の「純資産＋営業利益3〜6年」のレンジに位置する。</a:t>
             </a:r>
             <a:endParaRPr lang="en-US" sz="1100" dirty="0"/>
           </a:p>
@@ -21272,32 +27017,15 @@
               <a:buNone/>
             </a:pPr>
             <a:r>
-              <a:rPr lang="en-US" sz="1050" dirty="0">
+              <a:rPr lang="en-US" sz="1050" b="1" dirty="0">
                 <a:solidFill>
-                  <a:srgbClr val="6E6368"/>
+                  <a:srgbClr val="1F1A1C"/>
                 </a:solidFill>
                 <a:latin typeface="Calibri" pitchFamily="34" charset="0"/>
                 <a:ea typeface="Calibri" pitchFamily="34" charset="-122"/>
                 <a:cs typeface="Calibri" pitchFamily="34" charset="-120"/>
               </a:rPr>
-              <a:t>ただし ②③④ はいずれも、</a:t>
-            </a:r>
-            <a:pPr indent="0" marL="0">
-              <a:lnSpc>
-                <a:spcPts val="1600"/>
-              </a:lnSpc>
-              <a:buNone/>
-            </a:pPr>
-            <a:r>
-              <a:rPr lang="en-US" sz="1050" b="1" dirty="0">
-                <a:solidFill>
-                  <a:srgbClr val="6E6368"/>
-                </a:solidFill>
-                <a:latin typeface="Calibri" pitchFamily="34" charset="0"/>
-                <a:ea typeface="Calibri" pitchFamily="34" charset="-122"/>
-                <a:cs typeface="Calibri" pitchFamily="34" charset="-120"/>
-              </a:rPr>
-              <a:t>(a) 岸田氏の3年ロックアップの契約担保</a:t>
+              <a:t>資金調達：</a:t>
             </a:r>
             <a:pPr indent="0" marL="0">
               <a:lnSpc>
@@ -21314,41 +27042,7 @@
                 <a:ea typeface="Calibri" pitchFamily="34" charset="-122"/>
                 <a:cs typeface="Calibri" pitchFamily="34" charset="-120"/>
               </a:rPr>
-              <a:t> と </a:t>
-            </a:r>
-            <a:pPr indent="0" marL="0">
-              <a:lnSpc>
-                <a:spcPts val="1600"/>
-              </a:lnSpc>
-              <a:buNone/>
-            </a:pPr>
-            <a:r>
-              <a:rPr lang="en-US" sz="1050" b="1" dirty="0">
-                <a:solidFill>
-                  <a:srgbClr val="6E6368"/>
-                </a:solidFill>
-                <a:latin typeface="Calibri" pitchFamily="34" charset="0"/>
-                <a:ea typeface="Calibri" pitchFamily="34" charset="-122"/>
-                <a:cs typeface="Calibri" pitchFamily="34" charset="-120"/>
-              </a:rPr>
-              <a:t>(b) 役員貸付金5.0億円のクロージング時現金精算</a:t>
-            </a:r>
-            <a:pPr indent="0" marL="0">
-              <a:lnSpc>
-                <a:spcPts val="1600"/>
-              </a:lnSpc>
-              <a:buNone/>
-            </a:pPr>
-            <a:r>
-              <a:rPr lang="en-US" sz="1050" dirty="0">
-                <a:solidFill>
-                  <a:srgbClr val="6E6368"/>
-                </a:solidFill>
-                <a:latin typeface="Calibri" pitchFamily="34" charset="0"/>
-                <a:ea typeface="Calibri" pitchFamily="34" charset="-122"/>
-                <a:cs typeface="Calibri" pitchFamily="34" charset="-120"/>
-              </a:rPr>
-              <a:t> が前提。(b) が崩れると実質EVは32.6億円（6.2倍）となり、妥当性の説明は一段厳しくなる（p.8・p.16）。</a:t>
+              <a:t>LBOローン20億円は、タームローンA 14億円（元金均等）＋タームローンB 6億円（期限一括）の設計で初年度DSCR 1.35を確保できる。7年間の累積余剰キャッシュフロー7.56億円が期限一括分6.00億円を上回るため、リファイナンスなしで完済が可能（p.15・p.16）。</a:t>
             </a:r>
             <a:endParaRPr lang="en-US" sz="1050" dirty="0"/>
           </a:p>
@@ -22606,7 +28300,7 @@
                 <a:ea typeface="Cambria" pitchFamily="34" charset="-122"/>
                 <a:cs typeface="Cambria" pitchFamily="34" charset="-120"/>
               </a:rPr>
-              <a:t>債務許容量（DSCR）</a:t>
+              <a:t>20億円LBOの返済可能性</a:t>
             </a:r>
             <a:endParaRPr lang="en-US" sz="1600" dirty="0"/>
           </a:p>
@@ -22648,7 +28342,7 @@
                 <a:ea typeface="Calibri" pitchFamily="34" charset="-122"/>
                 <a:cs typeface="Calibri" pitchFamily="34" charset="-120"/>
               </a:rPr>
-              <a:t>対象会社のCFが支えられる有利子負債の上限</a:t>
+              <a:t>返済プロファイル・ストレス耐性・保全</a:t>
             </a:r>
             <a:endParaRPr lang="en-US" sz="1050" dirty="0"/>
           </a:p>
@@ -22687,7 +28381,7 @@
                 <a:ea typeface="Calibri" pitchFamily="34" charset="-122"/>
                 <a:cs typeface="Calibri" pitchFamily="34" charset="-120"/>
               </a:rPr>
-              <a:t>p.15</a:t>
+              <a:t>p.15-16</a:t>
             </a:r>
             <a:endParaRPr lang="en-US" sz="900" dirty="0"/>
           </a:p>
@@ -32774,7 +38468,7 @@
                 <a:ea typeface="Calibri" pitchFamily="34" charset="-122"/>
                 <a:cs typeface="Calibri" pitchFamily="34" charset="-120"/>
               </a:rPr>
-              <a:t>仲介の「ネットキャッシュ約20億円」のうち5.00億円は岸田氏に対する長期貸付金であり、同氏が返済して初めて現金になる。クロージング時の現金精算を条件化しない限り、買主は譲渡後に5億円の債権回収を追うことになる（p.16 論点1）。</a:t>
+              <a:t>仲介の「ネットキャッシュ約20億円」のうち5.00億円は岸田氏に対する長期貸付金であり、同氏が返済して初めて現金になる。クロージング時の現金精算を条件化しない限り、買主は譲渡後に5億円の債権回収を追うことになる（p.17 論点1）。</a:t>
             </a:r>
             <a:endParaRPr lang="en-US" sz="1050" dirty="0"/>
           </a:p>

--- a/M&A/カンテサンス/カンテサンス_株式譲渡価格50億円_妥当性検証.pptx
+++ b/M&A/カンテサンス/カンテサンス_株式譲渡価格50億円_妥当性検証.pptx
@@ -23,9 +23,10 @@
     <p:sldId id="271" r:id="rId17"/>
     <p:sldId id="272" r:id="rId18"/>
     <p:sldId id="273" r:id="rId19"/>
+    <p:sldId id="274" r:id="rId20"/>
   </p:sldIdLst>
   <p:notesMasterIdLst>
-    <p:notesMasterId r:id="rId20"/>
+    <p:notesMasterId r:id="rId21"/>
   </p:notesMasterIdLst>
   <p:sldSz cx="12192000" cy="6858000"/>
   <p:notesSz cx="6858000" cy="12192000"/>
@@ -2214,6 +2215,94 @@
 </p:notes>
 </file>
 
+<file path=ppt/notesSlides/notesSlide19.xml><?xml version="1.0" encoding="utf-8"?>
+<p:notes xmlns:a="http://schemas.openxmlformats.org/drawingml/2006/main" xmlns:r="http://schemas.openxmlformats.org/officeDocument/2006/relationships" xmlns:p="http://schemas.openxmlformats.org/presentationml/2006/main">
+  <p:cSld>
+    <p:spTree>
+      <p:nvGrpSpPr>
+        <p:cNvPr id="1" name=""/>
+        <p:cNvGrpSpPr/>
+        <p:nvPr/>
+      </p:nvGrpSpPr>
+      <p:grpSpPr>
+        <a:xfrm>
+          <a:off x="0" y="0"/>
+          <a:ext cx="0" cy="0"/>
+          <a:chOff x="0" y="0"/>
+          <a:chExt cx="0" cy="0"/>
+        </a:xfrm>
+      </p:grpSpPr>
+      <p:sp>
+        <p:nvSpPr>
+          <p:cNvPr id="2" name="Slide Image Placeholder 1"/>
+          <p:cNvSpPr>
+            <a:spLocks noGrp="1" noRot="1" noChangeAspect="1"/>
+          </p:cNvSpPr>
+          <p:nvPr>
+            <p:ph type="sldImg"/>
+          </p:nvPr>
+        </p:nvSpPr>
+        <p:spPr/>
+      </p:sp>
+      <p:sp>
+        <p:nvSpPr>
+          <p:cNvPr id="3" name="Notes Placeholder 2"/>
+          <p:cNvSpPr>
+            <a:spLocks noGrp="1"/>
+          </p:cNvSpPr>
+          <p:nvPr>
+            <p:ph type="body" idx="1"/>
+          </p:nvPr>
+        </p:nvSpPr>
+        <p:spPr/>
+        <p:txBody>
+          <a:bodyPr/>
+          <a:lstStyle/>
+          <a:p>
+            <a:r>
+              <a:rPr lang="en-US" dirty="0"/>
+              <a:t/>
+            </a:r>
+            <a:endParaRPr lang="en-US" dirty="0"/>
+          </a:p>
+        </p:txBody>
+      </p:sp>
+      <p:sp>
+        <p:nvSpPr>
+          <p:cNvPr id="4" name="Slide Number Placeholder 3"/>
+          <p:cNvSpPr>
+            <a:spLocks noGrp="1"/>
+          </p:cNvSpPr>
+          <p:nvPr>
+            <p:ph type="sldNum" sz="quarter" idx="10"/>
+          </p:nvPr>
+        </p:nvSpPr>
+        <p:spPr/>
+        <p:txBody>
+          <a:bodyPr/>
+          <a:lstStyle/>
+          <a:p>
+            <a:fld id="{F7021451-1387-4CA6-816F-3879F97B5CBC}" type="slidenum">
+              <a:rPr lang="en-US"/>
+              <a:t>19</a:t>
+            </a:fld>
+            <a:endParaRPr lang="en-US"/>
+          </a:p>
+        </p:txBody>
+      </p:sp>
+    </p:spTree>
+    <p:extLst>
+      <p:ext uri="{BB962C8B-B14F-4D97-AF65-F5344CB8AC3E}">
+        <p14:creationId xmlns:p14="http://schemas.microsoft.com/office/powerpoint/2010/main" val="1024086991"/>
+      </p:ext>
+    </p:extLst>
+  </p:cSld>
+  <p:clrMapOvr>
+    <a:masterClrMapping/>
+  </p:clrMapOvr>
+</p:notes>
+</file>
+
 <file path=ppt/notesSlides/notesSlide2.xml><?xml version="1.0" encoding="utf-8"?>
 <p:notes xmlns:a="http://schemas.openxmlformats.org/drawingml/2006/main" xmlns:r="http://schemas.openxmlformats.org/officeDocument/2006/relationships" xmlns:p="http://schemas.openxmlformats.org/presentationml/2006/main">
   <p:cSld>
@@ -3900,7 +3989,7 @@
                 <a:ea typeface="Calibri" pitchFamily="34" charset="-122"/>
                 <a:cs typeface="Calibri" pitchFamily="34" charset="-120"/>
               </a:rPr>
-              <a:t>本資料は取得主体を特定せず、対象会社の事業価値と提示価格の妥当性のみを検証したものです。</a:t>
+              <a:t>本資料は、対象会社の事業価値と提示価格の妥当性を検証したものです。p.18には、当社によるグランメゾン承継の実績を参考として掲載しています。</a:t>
             </a:r>
             <a:endParaRPr lang="en-US" sz="1000" dirty="0"/>
           </a:p>
@@ -25223,6 +25312,2416 @@
 <file path=ppt/slides/slide18.xml><?xml version="1.0" encoding="utf-8"?>
 <p:sld xmlns:a="http://schemas.openxmlformats.org/drawingml/2006/main" xmlns:r="http://schemas.openxmlformats.org/officeDocument/2006/relationships" xmlns:p="http://schemas.openxmlformats.org/presentationml/2006/main">
   <p:cSld name="Slide 18">
+    <p:spTree>
+      <p:nvGrpSpPr>
+        <p:cNvPr id="1" name=""/>
+        <p:cNvGrpSpPr/>
+        <p:nvPr/>
+      </p:nvGrpSpPr>
+      <p:grpSpPr>
+        <a:xfrm>
+          <a:off x="0" y="0"/>
+          <a:ext cx="0" cy="0"/>
+          <a:chOff x="0" y="0"/>
+          <a:chExt cx="0" cy="0"/>
+        </a:xfrm>
+      </p:grpSpPr>
+      <p:sp>
+        <p:nvSpPr>
+          <p:cNvPr id="2" name="Text 0"/>
+          <p:cNvSpPr txBox="1"/>
+          <p:nvPr/>
+        </p:nvSpPr>
+        <p:spPr>
+          <a:xfrm>
+            <a:off x="566928" y="310896"/>
+            <a:ext cx="9144000" cy="237744"/>
+          </a:xfrm>
+          <a:prstGeom prst="rect">
+            <a:avLst/>
+          </a:prstGeom>
+          <a:noFill/>
+          <a:ln/>
+        </p:spPr>
+        <p:txBody>
+          <a:bodyPr wrap="square" lIns="0" tIns="0" rIns="0" bIns="0" rtlCol="0" anchor="ctr"/>
+          <a:lstStyle/>
+          <a:p>
+            <a:pPr indent="0" marL="0">
+              <a:buNone/>
+            </a:pPr>
+            <a:r>
+              <a:rPr lang="en-US" sz="1100" b="1" spc="140" kern="0" dirty="0">
+                <a:solidFill>
+                  <a:srgbClr val="B58B2A"/>
+                </a:solidFill>
+                <a:latin typeface="Calibri" pitchFamily="34" charset="0"/>
+                <a:ea typeface="Calibri" pitchFamily="34" charset="-122"/>
+                <a:cs typeface="Calibri" pitchFamily="34" charset="-120"/>
+              </a:rPr>
+              <a:t>REFERENCE　／　株式会社アピシウス（東京・銀座）</a:t>
+            </a:r>
+            <a:endParaRPr lang="en-US" sz="1100" dirty="0"/>
+          </a:p>
+        </p:txBody>
+      </p:sp>
+      <p:sp>
+        <p:nvSpPr>
+          <p:cNvPr id="3" name="Text 1"/>
+          <p:cNvSpPr txBox="1"/>
+          <p:nvPr/>
+        </p:nvSpPr>
+        <p:spPr>
+          <a:xfrm>
+            <a:off x="566928" y="566928"/>
+            <a:ext cx="11055096" cy="475488"/>
+          </a:xfrm>
+          <a:prstGeom prst="rect">
+            <a:avLst/>
+          </a:prstGeom>
+          <a:noFill/>
+          <a:ln/>
+        </p:spPr>
+        <p:txBody>
+          <a:bodyPr wrap="square" lIns="0" tIns="0" rIns="0" bIns="0" rtlCol="0" anchor="ctr"/>
+          <a:lstStyle/>
+          <a:p>
+            <a:pPr indent="0" marL="0">
+              <a:buNone/>
+            </a:pPr>
+            <a:r>
+              <a:rPr lang="en-US" sz="2900" b="1" dirty="0">
+                <a:solidFill>
+                  <a:srgbClr val="1F1A1C"/>
+                </a:solidFill>
+                <a:latin typeface="Cambria" pitchFamily="34" charset="0"/>
+                <a:ea typeface="Cambria" pitchFamily="34" charset="-122"/>
+                <a:cs typeface="Cambria" pitchFamily="34" charset="-120"/>
+              </a:rPr>
+              <a:t>参考：グランメゾンのM&amp;A後バリューアップ実績</a:t>
+            </a:r>
+            <a:endParaRPr lang="en-US" sz="2900" dirty="0"/>
+          </a:p>
+        </p:txBody>
+      </p:sp>
+      <p:sp>
+        <p:nvSpPr>
+          <p:cNvPr id="4" name="Text 2"/>
+          <p:cNvSpPr txBox="1"/>
+          <p:nvPr/>
+        </p:nvSpPr>
+        <p:spPr>
+          <a:xfrm>
+            <a:off x="566928" y="1088136"/>
+            <a:ext cx="11055096" cy="329184"/>
+          </a:xfrm>
+          <a:prstGeom prst="rect">
+            <a:avLst/>
+          </a:prstGeom>
+          <a:noFill/>
+          <a:ln/>
+        </p:spPr>
+        <p:txBody>
+          <a:bodyPr wrap="square" lIns="0" tIns="0" rIns="0" bIns="0" rtlCol="0" anchor="ctr"/>
+          <a:lstStyle/>
+          <a:p>
+            <a:pPr indent="0" marL="0">
+              <a:lnSpc>
+                <a:spcPts val="1700"/>
+              </a:lnSpc>
+              <a:buNone/>
+            </a:pPr>
+            <a:r>
+              <a:rPr lang="en-US" sz="1250" dirty="0">
+                <a:solidFill>
+                  <a:srgbClr val="6E6368"/>
+                </a:solidFill>
+                <a:latin typeface="Calibri" pitchFamily="34" charset="0"/>
+                <a:ea typeface="Calibri" pitchFamily="34" charset="-122"/>
+                <a:cs typeface="Calibri" pitchFamily="34" charset="-120"/>
+              </a:rPr>
+              <a:t>当社は2024年6月、創業40年を超えるグランメゾンを取得した。39年間にわたり赤字が続き、40年目にようやく黒字化した店を引き継ぎ、2年間で売上30%増・営業利益250%超の増加を実現している。</a:t>
+            </a:r>
+            <a:endParaRPr lang="en-US" sz="1250" dirty="0"/>
+          </a:p>
+        </p:txBody>
+      </p:sp>
+      <p:sp>
+        <p:nvSpPr>
+          <p:cNvPr id="5" name="Shape 3"/>
+          <p:cNvSpPr/>
+          <p:nvPr/>
+        </p:nvSpPr>
+        <p:spPr>
+          <a:xfrm>
+            <a:off x="566928" y="1755648"/>
+            <a:ext cx="3520440" cy="1078992"/>
+          </a:xfrm>
+          <a:prstGeom prst="roundRect">
+            <a:avLst>
+              <a:gd name="adj" fmla="val 4237"/>
+            </a:avLst>
+          </a:prstGeom>
+          <a:solidFill>
+            <a:srgbClr val="F7F3F4"/>
+          </a:solidFill>
+          <a:ln w="9525">
+            <a:solidFill>
+              <a:srgbClr val="E4DADD"/>
+            </a:solidFill>
+            <a:prstDash val="solid"/>
+          </a:ln>
+        </p:spPr>
+      </p:sp>
+      <p:sp>
+        <p:nvSpPr>
+          <p:cNvPr id="6" name="Text 4"/>
+          <p:cNvSpPr txBox="1"/>
+          <p:nvPr/>
+        </p:nvSpPr>
+        <p:spPr>
+          <a:xfrm>
+            <a:off x="786384" y="1865376"/>
+            <a:ext cx="3108960" cy="237744"/>
+          </a:xfrm>
+          <a:prstGeom prst="rect">
+            <a:avLst/>
+          </a:prstGeom>
+          <a:noFill/>
+          <a:ln/>
+        </p:spPr>
+        <p:txBody>
+          <a:bodyPr wrap="square" lIns="0" tIns="0" rIns="0" bIns="0" rtlCol="0" anchor="ctr"/>
+          <a:lstStyle/>
+          <a:p>
+            <a:pPr indent="0" marL="0">
+              <a:buNone/>
+            </a:pPr>
+            <a:r>
+              <a:rPr lang="en-US" sz="1000" b="1" dirty="0">
+                <a:solidFill>
+                  <a:srgbClr val="B58B2A"/>
+                </a:solidFill>
+                <a:latin typeface="Calibri" pitchFamily="34" charset="0"/>
+                <a:ea typeface="Calibri" pitchFamily="34" charset="-122"/>
+                <a:cs typeface="Calibri" pitchFamily="34" charset="-120"/>
+              </a:rPr>
+              <a:t>売上高</a:t>
+            </a:r>
+            <a:endParaRPr lang="en-US" sz="1000" dirty="0"/>
+          </a:p>
+        </p:txBody>
+      </p:sp>
+      <p:sp>
+        <p:nvSpPr>
+          <p:cNvPr id="7" name="Text 5"/>
+          <p:cNvSpPr txBox="1"/>
+          <p:nvPr/>
+        </p:nvSpPr>
+        <p:spPr>
+          <a:xfrm>
+            <a:off x="786384" y="2103120"/>
+            <a:ext cx="3108960" cy="457200"/>
+          </a:xfrm>
+          <a:prstGeom prst="rect">
+            <a:avLst/>
+          </a:prstGeom>
+          <a:noFill/>
+          <a:ln/>
+        </p:spPr>
+        <p:txBody>
+          <a:bodyPr wrap="square" lIns="0" tIns="0" rIns="0" bIns="0" rtlCol="0" anchor="ctr"/>
+          <a:lstStyle/>
+          <a:p>
+            <a:pPr indent="0" marL="0">
+              <a:buNone/>
+            </a:pPr>
+            <a:r>
+              <a:rPr lang="en-US" sz="2900" b="1" dirty="0">
+                <a:solidFill>
+                  <a:srgbClr val="6D2E46"/>
+                </a:solidFill>
+                <a:latin typeface="Cambria" pitchFamily="34" charset="0"/>
+                <a:ea typeface="Cambria" pitchFamily="34" charset="-122"/>
+                <a:cs typeface="Cambria" pitchFamily="34" charset="-120"/>
+              </a:rPr>
+              <a:t>＋30%</a:t>
+            </a:r>
+            <a:endParaRPr lang="en-US" sz="2900" dirty="0"/>
+          </a:p>
+        </p:txBody>
+      </p:sp>
+      <p:sp>
+        <p:nvSpPr>
+          <p:cNvPr id="8" name="Text 6"/>
+          <p:cNvSpPr txBox="1"/>
+          <p:nvPr/>
+        </p:nvSpPr>
+        <p:spPr>
+          <a:xfrm>
+            <a:off x="786384" y="2560320"/>
+            <a:ext cx="3108960" cy="219456"/>
+          </a:xfrm>
+          <a:prstGeom prst="rect">
+            <a:avLst/>
+          </a:prstGeom>
+          <a:noFill/>
+          <a:ln/>
+        </p:spPr>
+        <p:txBody>
+          <a:bodyPr wrap="square" lIns="0" tIns="0" rIns="0" bIns="0" rtlCol="0" anchor="ctr"/>
+          <a:lstStyle/>
+          <a:p>
+            <a:pPr indent="0" marL="0">
+              <a:buNone/>
+            </a:pPr>
+            <a:r>
+              <a:rPr lang="en-US" sz="900" dirty="0">
+                <a:solidFill>
+                  <a:srgbClr val="6E6368"/>
+                </a:solidFill>
+                <a:latin typeface="Calibri" pitchFamily="34" charset="0"/>
+                <a:ea typeface="Calibri" pitchFamily="34" charset="-122"/>
+                <a:cs typeface="Calibri" pitchFamily="34" charset="-120"/>
+              </a:rPr>
+              <a:t>取得前比（2年間）</a:t>
+            </a:r>
+            <a:endParaRPr lang="en-US" sz="900" dirty="0"/>
+          </a:p>
+        </p:txBody>
+      </p:sp>
+      <p:sp>
+        <p:nvSpPr>
+          <p:cNvPr id="9" name="Shape 7"/>
+          <p:cNvSpPr/>
+          <p:nvPr/>
+        </p:nvSpPr>
+        <p:spPr>
+          <a:xfrm>
+            <a:off x="4297680" y="1755648"/>
+            <a:ext cx="3520440" cy="1078992"/>
+          </a:xfrm>
+          <a:prstGeom prst="roundRect">
+            <a:avLst>
+              <a:gd name="adj" fmla="val 4237"/>
+            </a:avLst>
+          </a:prstGeom>
+          <a:solidFill>
+            <a:srgbClr val="F7F3F4"/>
+          </a:solidFill>
+          <a:ln w="9525">
+            <a:solidFill>
+              <a:srgbClr val="E4DADD"/>
+            </a:solidFill>
+            <a:prstDash val="solid"/>
+          </a:ln>
+        </p:spPr>
+      </p:sp>
+      <p:sp>
+        <p:nvSpPr>
+          <p:cNvPr id="10" name="Text 8"/>
+          <p:cNvSpPr txBox="1"/>
+          <p:nvPr/>
+        </p:nvSpPr>
+        <p:spPr>
+          <a:xfrm>
+            <a:off x="4517136" y="1865376"/>
+            <a:ext cx="3108960" cy="237744"/>
+          </a:xfrm>
+          <a:prstGeom prst="rect">
+            <a:avLst/>
+          </a:prstGeom>
+          <a:noFill/>
+          <a:ln/>
+        </p:spPr>
+        <p:txBody>
+          <a:bodyPr wrap="square" lIns="0" tIns="0" rIns="0" bIns="0" rtlCol="0" anchor="ctr"/>
+          <a:lstStyle/>
+          <a:p>
+            <a:pPr indent="0" marL="0">
+              <a:buNone/>
+            </a:pPr>
+            <a:r>
+              <a:rPr lang="en-US" sz="1000" b="1" dirty="0">
+                <a:solidFill>
+                  <a:srgbClr val="B58B2A"/>
+                </a:solidFill>
+                <a:latin typeface="Calibri" pitchFamily="34" charset="0"/>
+                <a:ea typeface="Calibri" pitchFamily="34" charset="-122"/>
+                <a:cs typeface="Calibri" pitchFamily="34" charset="-120"/>
+              </a:rPr>
+              <a:t>営業利益</a:t>
+            </a:r>
+            <a:endParaRPr lang="en-US" sz="1000" dirty="0"/>
+          </a:p>
+        </p:txBody>
+      </p:sp>
+      <p:sp>
+        <p:nvSpPr>
+          <p:cNvPr id="11" name="Text 9"/>
+          <p:cNvSpPr txBox="1"/>
+          <p:nvPr/>
+        </p:nvSpPr>
+        <p:spPr>
+          <a:xfrm>
+            <a:off x="4517136" y="2103120"/>
+            <a:ext cx="3108960" cy="457200"/>
+          </a:xfrm>
+          <a:prstGeom prst="rect">
+            <a:avLst/>
+          </a:prstGeom>
+          <a:noFill/>
+          <a:ln/>
+        </p:spPr>
+        <p:txBody>
+          <a:bodyPr wrap="square" lIns="0" tIns="0" rIns="0" bIns="0" rtlCol="0" anchor="ctr"/>
+          <a:lstStyle/>
+          <a:p>
+            <a:pPr indent="0" marL="0">
+              <a:buNone/>
+            </a:pPr>
+            <a:r>
+              <a:rPr lang="en-US" sz="2900" b="1" dirty="0">
+                <a:solidFill>
+                  <a:srgbClr val="6D2E46"/>
+                </a:solidFill>
+                <a:latin typeface="Cambria" pitchFamily="34" charset="0"/>
+                <a:ea typeface="Cambria" pitchFamily="34" charset="-122"/>
+                <a:cs typeface="Cambria" pitchFamily="34" charset="-120"/>
+              </a:rPr>
+              <a:t>＋250%超</a:t>
+            </a:r>
+            <a:endParaRPr lang="en-US" sz="2900" dirty="0"/>
+          </a:p>
+        </p:txBody>
+      </p:sp>
+      <p:sp>
+        <p:nvSpPr>
+          <p:cNvPr id="12" name="Text 10"/>
+          <p:cNvSpPr txBox="1"/>
+          <p:nvPr/>
+        </p:nvSpPr>
+        <p:spPr>
+          <a:xfrm>
+            <a:off x="4517136" y="2560320"/>
+            <a:ext cx="3108960" cy="219456"/>
+          </a:xfrm>
+          <a:prstGeom prst="rect">
+            <a:avLst/>
+          </a:prstGeom>
+          <a:noFill/>
+          <a:ln/>
+        </p:spPr>
+        <p:txBody>
+          <a:bodyPr wrap="square" lIns="0" tIns="0" rIns="0" bIns="0" rtlCol="0" anchor="ctr"/>
+          <a:lstStyle/>
+          <a:p>
+            <a:pPr indent="0" marL="0">
+              <a:buNone/>
+            </a:pPr>
+            <a:r>
+              <a:rPr lang="en-US" sz="900" dirty="0">
+                <a:solidFill>
+                  <a:srgbClr val="6E6368"/>
+                </a:solidFill>
+                <a:latin typeface="Calibri" pitchFamily="34" charset="0"/>
+                <a:ea typeface="Calibri" pitchFamily="34" charset="-122"/>
+                <a:cs typeface="Calibri" pitchFamily="34" charset="-120"/>
+              </a:rPr>
+              <a:t>取得前比（2年間）</a:t>
+            </a:r>
+            <a:endParaRPr lang="en-US" sz="900" dirty="0"/>
+          </a:p>
+        </p:txBody>
+      </p:sp>
+      <p:sp>
+        <p:nvSpPr>
+          <p:cNvPr id="13" name="Shape 11"/>
+          <p:cNvSpPr/>
+          <p:nvPr/>
+        </p:nvSpPr>
+        <p:spPr>
+          <a:xfrm>
+            <a:off x="8028432" y="1755648"/>
+            <a:ext cx="3520440" cy="1078992"/>
+          </a:xfrm>
+          <a:prstGeom prst="roundRect">
+            <a:avLst>
+              <a:gd name="adj" fmla="val 4237"/>
+            </a:avLst>
+          </a:prstGeom>
+          <a:solidFill>
+            <a:srgbClr val="6D2E46"/>
+          </a:solidFill>
+          <a:ln w="9525">
+            <a:solidFill>
+              <a:srgbClr val="6D2E46"/>
+            </a:solidFill>
+            <a:prstDash val="solid"/>
+          </a:ln>
+        </p:spPr>
+      </p:sp>
+      <p:sp>
+        <p:nvSpPr>
+          <p:cNvPr id="14" name="Text 12"/>
+          <p:cNvSpPr txBox="1"/>
+          <p:nvPr/>
+        </p:nvSpPr>
+        <p:spPr>
+          <a:xfrm>
+            <a:off x="8247888" y="1865376"/>
+            <a:ext cx="3108960" cy="237744"/>
+          </a:xfrm>
+          <a:prstGeom prst="rect">
+            <a:avLst/>
+          </a:prstGeom>
+          <a:noFill/>
+          <a:ln/>
+        </p:spPr>
+        <p:txBody>
+          <a:bodyPr wrap="square" lIns="0" tIns="0" rIns="0" bIns="0" rtlCol="0" anchor="ctr"/>
+          <a:lstStyle/>
+          <a:p>
+            <a:pPr indent="0" marL="0">
+              <a:buNone/>
+            </a:pPr>
+            <a:r>
+              <a:rPr lang="en-US" sz="1000" b="1" dirty="0">
+                <a:solidFill>
+                  <a:srgbClr val="E8D6DB"/>
+                </a:solidFill>
+                <a:latin typeface="Calibri" pitchFamily="34" charset="0"/>
+                <a:ea typeface="Calibri" pitchFamily="34" charset="-122"/>
+                <a:cs typeface="Calibri" pitchFamily="34" charset="-120"/>
+              </a:rPr>
+              <a:t>幹部メンバー継続率</a:t>
+            </a:r>
+            <a:endParaRPr lang="en-US" sz="1000" dirty="0"/>
+          </a:p>
+        </p:txBody>
+      </p:sp>
+      <p:sp>
+        <p:nvSpPr>
+          <p:cNvPr id="15" name="Text 13"/>
+          <p:cNvSpPr txBox="1"/>
+          <p:nvPr/>
+        </p:nvSpPr>
+        <p:spPr>
+          <a:xfrm>
+            <a:off x="8247888" y="2103120"/>
+            <a:ext cx="3108960" cy="457200"/>
+          </a:xfrm>
+          <a:prstGeom prst="rect">
+            <a:avLst/>
+          </a:prstGeom>
+          <a:noFill/>
+          <a:ln/>
+        </p:spPr>
+        <p:txBody>
+          <a:bodyPr wrap="square" lIns="0" tIns="0" rIns="0" bIns="0" rtlCol="0" anchor="ctr"/>
+          <a:lstStyle/>
+          <a:p>
+            <a:pPr indent="0" marL="0">
+              <a:buNone/>
+            </a:pPr>
+            <a:r>
+              <a:rPr lang="en-US" sz="2900" b="1" dirty="0">
+                <a:solidFill>
+                  <a:srgbClr val="FFFFFF"/>
+                </a:solidFill>
+                <a:latin typeface="Cambria" pitchFamily="34" charset="0"/>
+                <a:ea typeface="Cambria" pitchFamily="34" charset="-122"/>
+                <a:cs typeface="Cambria" pitchFamily="34" charset="-120"/>
+              </a:rPr>
+              <a:t>100%</a:t>
+            </a:r>
+            <a:endParaRPr lang="en-US" sz="2900" dirty="0"/>
+          </a:p>
+        </p:txBody>
+      </p:sp>
+      <p:sp>
+        <p:nvSpPr>
+          <p:cNvPr id="16" name="Text 14"/>
+          <p:cNvSpPr txBox="1"/>
+          <p:nvPr/>
+        </p:nvSpPr>
+        <p:spPr>
+          <a:xfrm>
+            <a:off x="8247888" y="2560320"/>
+            <a:ext cx="3108960" cy="219456"/>
+          </a:xfrm>
+          <a:prstGeom prst="rect">
+            <a:avLst/>
+          </a:prstGeom>
+          <a:noFill/>
+          <a:ln/>
+        </p:spPr>
+        <p:txBody>
+          <a:bodyPr wrap="square" lIns="0" tIns="0" rIns="0" bIns="0" rtlCol="0" anchor="ctr"/>
+          <a:lstStyle/>
+          <a:p>
+            <a:pPr indent="0" marL="0">
+              <a:buNone/>
+            </a:pPr>
+            <a:r>
+              <a:rPr lang="en-US" sz="900" dirty="0">
+                <a:solidFill>
+                  <a:srgbClr val="C9AEB6"/>
+                </a:solidFill>
+                <a:latin typeface="Calibri" pitchFamily="34" charset="0"/>
+                <a:ea typeface="Calibri" pitchFamily="34" charset="-122"/>
+                <a:cs typeface="Calibri" pitchFamily="34" charset="-120"/>
+              </a:rPr>
+              <a:t>一人も欠けていない</a:t>
+            </a:r>
+            <a:endParaRPr lang="en-US" sz="900" dirty="0"/>
+          </a:p>
+        </p:txBody>
+      </p:sp>
+      <p:sp>
+        <p:nvSpPr>
+          <p:cNvPr id="17" name="Text 15"/>
+          <p:cNvSpPr txBox="1"/>
+          <p:nvPr/>
+        </p:nvSpPr>
+        <p:spPr>
+          <a:xfrm>
+            <a:off x="566928" y="2999232"/>
+            <a:ext cx="4572000" cy="256032"/>
+          </a:xfrm>
+          <a:prstGeom prst="rect">
+            <a:avLst/>
+          </a:prstGeom>
+          <a:noFill/>
+          <a:ln/>
+        </p:spPr>
+        <p:txBody>
+          <a:bodyPr wrap="square" lIns="0" tIns="0" rIns="0" bIns="0" rtlCol="0" anchor="ctr"/>
+          <a:lstStyle/>
+          <a:p>
+            <a:pPr indent="0" marL="0">
+              <a:buNone/>
+            </a:pPr>
+            <a:r>
+              <a:rPr lang="en-US" sz="1350" b="1" dirty="0">
+                <a:solidFill>
+                  <a:srgbClr val="1F1A1C"/>
+                </a:solidFill>
+                <a:latin typeface="Cambria" pitchFamily="34" charset="0"/>
+                <a:ea typeface="Cambria" pitchFamily="34" charset="-122"/>
+                <a:cs typeface="Cambria" pitchFamily="34" charset="-120"/>
+              </a:rPr>
+              <a:t>取得前と、取得から2年後</a:t>
+            </a:r>
+            <a:endParaRPr lang="en-US" sz="1350" dirty="0"/>
+          </a:p>
+        </p:txBody>
+      </p:sp>
+      <p:graphicFrame>
+        <p:nvGraphicFramePr>
+          <p:cNvPr id="19" name="Table 0"/>
+          <p:cNvGraphicFramePr>
+            <a:graphicFrameLocks noGrp="1"/>
+          </p:cNvGraphicFramePr>
+          <p:nvPr>
+            <p:extLst>
+              <p:ext uri="{D42A27DB-BD31-4B8C-83A1-F6EECF244321}">
+                <p14:modId xmlns:p14="http://schemas.microsoft.com/office/powerpoint/2010/main" val="1579011935"/>
+              </p:ext>
+            </p:extLst>
+          </p:nvPr>
+        </p:nvGraphicFramePr>
+        <p:xfrm>
+          <a:off x="566928" y="3310128"/>
+          <a:ext cx="6583680" cy="914400"/>
+        </p:xfrm>
+        <a:graphic>
+          <a:graphicData uri="http://schemas.openxmlformats.org/drawingml/2006/table">
+            <a:tbl>
+              <a:tblPr/>
+              <a:tblGrid>
+                <a:gridCol w="868680"/>
+                <a:gridCol w="2331720"/>
+                <a:gridCol w="3383280"/>
+              </a:tblGrid>
+              <a:tr h="420624">
+                <a:tc>
+                  <a:txBody>
+                    <a:bodyPr/>
+                    <a:lstStyle/>
+                    <a:p>
+                      <a:pPr indent="0" marL="0">
+                        <a:buNone/>
+                      </a:pPr>
+                      <a:endParaRPr lang="en-US" sz="1050" dirty="0">
+                        <a:latin typeface="Calibri" charset="0"/>
+                        <a:ea typeface="Calibri" charset="0"/>
+                        <a:cs typeface="Calibri" charset="0"/>
+                      </a:endParaRPr>
+                    </a:p>
+                  </a:txBody>
+                  <a:tcPr marL="91440" marR="91440" marT="45720" marB="45720" anchor="ctr">
+                    <a:lnL w="6350" cap="flat" cmpd="sng" algn="ctr">
+                      <a:solidFill>
+                        <a:srgbClr val="E4DADD"/>
+                      </a:solidFill>
+                      <a:prstDash val="solid"/>
+                      <a:round/>
+                      <a:headEnd type="none" w="med" len="med"/>
+                      <a:tailEnd type="none" w="med" len="med"/>
+                    </a:lnL>
+                    <a:lnR w="6350" cap="flat" cmpd="sng" algn="ctr">
+                      <a:solidFill>
+                        <a:srgbClr val="E4DADD"/>
+                      </a:solidFill>
+                      <a:prstDash val="solid"/>
+                      <a:round/>
+                      <a:headEnd type="none" w="med" len="med"/>
+                      <a:tailEnd type="none" w="med" len="med"/>
+                    </a:lnR>
+                    <a:lnT w="6350" cap="flat" cmpd="sng" algn="ctr">
+                      <a:solidFill>
+                        <a:srgbClr val="E4DADD"/>
+                      </a:solidFill>
+                      <a:prstDash val="solid"/>
+                      <a:round/>
+                      <a:headEnd type="none" w="med" len="med"/>
+                      <a:tailEnd type="none" w="med" len="med"/>
+                    </a:lnT>
+                    <a:lnB w="6350" cap="flat" cmpd="sng" algn="ctr">
+                      <a:solidFill>
+                        <a:srgbClr val="E4DADD"/>
+                      </a:solidFill>
+                      <a:prstDash val="solid"/>
+                      <a:round/>
+                      <a:headEnd type="none" w="med" len="med"/>
+                      <a:tailEnd type="none" w="med" len="med"/>
+                    </a:lnB>
+                    <a:solidFill>
+                      <a:srgbClr val="6D2E46"/>
+                    </a:solidFill>
+                  </a:tcPr>
+                </a:tc>
+                <a:tc>
+                  <a:txBody>
+                    <a:bodyPr/>
+                    <a:lstStyle/>
+                    <a:p>
+                      <a:pPr indent="0" marL="0">
+                        <a:buNone/>
+                      </a:pPr>
+                      <a:r>
+                        <a:rPr lang="en-US" sz="1050" b="1" dirty="0">
+                          <a:solidFill>
+                            <a:srgbClr val="FFFFFF"/>
+                          </a:solidFill>
+                          <a:latin typeface="Calibri" pitchFamily="34" charset="0"/>
+                          <a:ea typeface="Calibri" pitchFamily="34" charset="-122"/>
+                          <a:cs typeface="Calibri" pitchFamily="34" charset="-120"/>
+                        </a:rPr>
+                        <a:t>取得前（〜2024年5月）</a:t>
+                      </a:r>
+                      <a:endParaRPr lang="en-US" sz="1050" dirty="0">
+                        <a:latin typeface="Calibri" charset="0"/>
+                        <a:ea typeface="Calibri" charset="0"/>
+                        <a:cs typeface="Calibri" charset="0"/>
+                      </a:endParaRPr>
+                    </a:p>
+                  </a:txBody>
+                  <a:tcPr marL="91440" marR="91440" marT="45720" marB="45720" anchor="ctr">
+                    <a:lnL w="6350" cap="flat" cmpd="sng" algn="ctr">
+                      <a:solidFill>
+                        <a:srgbClr val="E4DADD"/>
+                      </a:solidFill>
+                      <a:prstDash val="solid"/>
+                      <a:round/>
+                      <a:headEnd type="none" w="med" len="med"/>
+                      <a:tailEnd type="none" w="med" len="med"/>
+                    </a:lnL>
+                    <a:lnR w="6350" cap="flat" cmpd="sng" algn="ctr">
+                      <a:solidFill>
+                        <a:srgbClr val="E4DADD"/>
+                      </a:solidFill>
+                      <a:prstDash val="solid"/>
+                      <a:round/>
+                      <a:headEnd type="none" w="med" len="med"/>
+                      <a:tailEnd type="none" w="med" len="med"/>
+                    </a:lnR>
+                    <a:lnT w="6350" cap="flat" cmpd="sng" algn="ctr">
+                      <a:solidFill>
+                        <a:srgbClr val="E4DADD"/>
+                      </a:solidFill>
+                      <a:prstDash val="solid"/>
+                      <a:round/>
+                      <a:headEnd type="none" w="med" len="med"/>
+                      <a:tailEnd type="none" w="med" len="med"/>
+                    </a:lnT>
+                    <a:lnB w="6350" cap="flat" cmpd="sng" algn="ctr">
+                      <a:solidFill>
+                        <a:srgbClr val="E4DADD"/>
+                      </a:solidFill>
+                      <a:prstDash val="solid"/>
+                      <a:round/>
+                      <a:headEnd type="none" w="med" len="med"/>
+                      <a:tailEnd type="none" w="med" len="med"/>
+                    </a:lnB>
+                    <a:solidFill>
+                      <a:srgbClr val="6D2E46"/>
+                    </a:solidFill>
+                  </a:tcPr>
+                </a:tc>
+                <a:tc>
+                  <a:txBody>
+                    <a:bodyPr/>
+                    <a:lstStyle/>
+                    <a:p>
+                      <a:pPr indent="0" marL="0">
+                        <a:buNone/>
+                      </a:pPr>
+                      <a:r>
+                        <a:rPr lang="en-US" sz="1050" b="1" dirty="0">
+                          <a:solidFill>
+                            <a:srgbClr val="FFFFFF"/>
+                          </a:solidFill>
+                          <a:latin typeface="Calibri" pitchFamily="34" charset="0"/>
+                          <a:ea typeface="Calibri" pitchFamily="34" charset="-122"/>
+                          <a:cs typeface="Calibri" pitchFamily="34" charset="-120"/>
+                        </a:rPr>
+                        <a:t>取得後2年（2026年）</a:t>
+                      </a:r>
+                      <a:endParaRPr lang="en-US" sz="1050" dirty="0">
+                        <a:latin typeface="Calibri" charset="0"/>
+                        <a:ea typeface="Calibri" charset="0"/>
+                        <a:cs typeface="Calibri" charset="0"/>
+                      </a:endParaRPr>
+                    </a:p>
+                  </a:txBody>
+                  <a:tcPr marL="91440" marR="91440" marT="45720" marB="45720" anchor="ctr">
+                    <a:lnL w="6350" cap="flat" cmpd="sng" algn="ctr">
+                      <a:solidFill>
+                        <a:srgbClr val="E4DADD"/>
+                      </a:solidFill>
+                      <a:prstDash val="solid"/>
+                      <a:round/>
+                      <a:headEnd type="none" w="med" len="med"/>
+                      <a:tailEnd type="none" w="med" len="med"/>
+                    </a:lnL>
+                    <a:lnR w="6350" cap="flat" cmpd="sng" algn="ctr">
+                      <a:solidFill>
+                        <a:srgbClr val="E4DADD"/>
+                      </a:solidFill>
+                      <a:prstDash val="solid"/>
+                      <a:round/>
+                      <a:headEnd type="none" w="med" len="med"/>
+                      <a:tailEnd type="none" w="med" len="med"/>
+                    </a:lnR>
+                    <a:lnT w="6350" cap="flat" cmpd="sng" algn="ctr">
+                      <a:solidFill>
+                        <a:srgbClr val="E4DADD"/>
+                      </a:solidFill>
+                      <a:prstDash val="solid"/>
+                      <a:round/>
+                      <a:headEnd type="none" w="med" len="med"/>
+                      <a:tailEnd type="none" w="med" len="med"/>
+                    </a:lnT>
+                    <a:lnB w="6350" cap="flat" cmpd="sng" algn="ctr">
+                      <a:solidFill>
+                        <a:srgbClr val="E4DADD"/>
+                      </a:solidFill>
+                      <a:prstDash val="solid"/>
+                      <a:round/>
+                      <a:headEnd type="none" w="med" len="med"/>
+                      <a:tailEnd type="none" w="med" len="med"/>
+                    </a:lnB>
+                    <a:solidFill>
+                      <a:srgbClr val="6D2E46"/>
+                    </a:solidFill>
+                  </a:tcPr>
+                </a:tc>
+              </a:tr>
+              <a:tr h="420624">
+                <a:tc>
+                  <a:txBody>
+                    <a:bodyPr/>
+                    <a:lstStyle/>
+                    <a:p>
+                      <a:pPr indent="0" marL="0">
+                        <a:buNone/>
+                      </a:pPr>
+                      <a:r>
+                        <a:rPr lang="en-US" sz="1000" b="1" dirty="0">
+                          <a:solidFill>
+                            <a:srgbClr val="1F1A1C"/>
+                          </a:solidFill>
+                          <a:latin typeface="Calibri" pitchFamily="34" charset="0"/>
+                          <a:ea typeface="Calibri" pitchFamily="34" charset="-122"/>
+                          <a:cs typeface="Calibri" pitchFamily="34" charset="-120"/>
+                        </a:rPr>
+                        <a:t>業績</a:t>
+                      </a:r>
+                      <a:endParaRPr lang="en-US" sz="1000" dirty="0">
+                        <a:latin typeface="Calibri" charset="0"/>
+                        <a:ea typeface="Calibri" charset="0"/>
+                        <a:cs typeface="Calibri" charset="0"/>
+                      </a:endParaRPr>
+                    </a:p>
+                  </a:txBody>
+                  <a:tcPr marL="91440" marR="91440" marT="45720" marB="45720" anchor="ctr">
+                    <a:lnL w="6350" cap="flat" cmpd="sng" algn="ctr">
+                      <a:solidFill>
+                        <a:srgbClr val="E4DADD"/>
+                      </a:solidFill>
+                      <a:prstDash val="solid"/>
+                      <a:round/>
+                      <a:headEnd type="none" w="med" len="med"/>
+                      <a:tailEnd type="none" w="med" len="med"/>
+                    </a:lnL>
+                    <a:lnR w="6350" cap="flat" cmpd="sng" algn="ctr">
+                      <a:solidFill>
+                        <a:srgbClr val="E4DADD"/>
+                      </a:solidFill>
+                      <a:prstDash val="solid"/>
+                      <a:round/>
+                      <a:headEnd type="none" w="med" len="med"/>
+                      <a:tailEnd type="none" w="med" len="med"/>
+                    </a:lnR>
+                    <a:lnT w="6350" cap="flat" cmpd="sng" algn="ctr">
+                      <a:solidFill>
+                        <a:srgbClr val="E4DADD"/>
+                      </a:solidFill>
+                      <a:prstDash val="solid"/>
+                      <a:round/>
+                      <a:headEnd type="none" w="med" len="med"/>
+                      <a:tailEnd type="none" w="med" len="med"/>
+                    </a:lnT>
+                    <a:lnB w="6350" cap="flat" cmpd="sng" algn="ctr">
+                      <a:solidFill>
+                        <a:srgbClr val="E4DADD"/>
+                      </a:solidFill>
+                      <a:prstDash val="solid"/>
+                      <a:round/>
+                      <a:headEnd type="none" w="med" len="med"/>
+                      <a:tailEnd type="none" w="med" len="med"/>
+                    </a:lnB>
+                  </a:tcPr>
+                </a:tc>
+                <a:tc>
+                  <a:txBody>
+                    <a:bodyPr/>
+                    <a:lstStyle/>
+                    <a:p>
+                      <a:pPr indent="0" marL="0">
+                        <a:buNone/>
+                      </a:pPr>
+                      <a:r>
+                        <a:rPr lang="en-US" sz="1000" dirty="0">
+                          <a:solidFill>
+                            <a:srgbClr val="1F1A1C"/>
+                          </a:solidFill>
+                          <a:latin typeface="Calibri" pitchFamily="34" charset="0"/>
+                          <a:ea typeface="Calibri" pitchFamily="34" charset="-122"/>
+                          <a:cs typeface="Calibri" pitchFamily="34" charset="-120"/>
+                        </a:rPr>
+                        <a:t>39年間にわたり赤字。40年目にようやく黒字化</a:t>
+                      </a:r>
+                      <a:endParaRPr lang="en-US" sz="1000" dirty="0">
+                        <a:latin typeface="Calibri" charset="0"/>
+                        <a:ea typeface="Calibri" charset="0"/>
+                        <a:cs typeface="Calibri" charset="0"/>
+                      </a:endParaRPr>
+                    </a:p>
+                  </a:txBody>
+                  <a:tcPr marL="91440" marR="91440" marT="45720" marB="45720" anchor="ctr">
+                    <a:lnL w="6350" cap="flat" cmpd="sng" algn="ctr">
+                      <a:solidFill>
+                        <a:srgbClr val="E4DADD"/>
+                      </a:solidFill>
+                      <a:prstDash val="solid"/>
+                      <a:round/>
+                      <a:headEnd type="none" w="med" len="med"/>
+                      <a:tailEnd type="none" w="med" len="med"/>
+                    </a:lnL>
+                    <a:lnR w="6350" cap="flat" cmpd="sng" algn="ctr">
+                      <a:solidFill>
+                        <a:srgbClr val="E4DADD"/>
+                      </a:solidFill>
+                      <a:prstDash val="solid"/>
+                      <a:round/>
+                      <a:headEnd type="none" w="med" len="med"/>
+                      <a:tailEnd type="none" w="med" len="med"/>
+                    </a:lnR>
+                    <a:lnT w="6350" cap="flat" cmpd="sng" algn="ctr">
+                      <a:solidFill>
+                        <a:srgbClr val="E4DADD"/>
+                      </a:solidFill>
+                      <a:prstDash val="solid"/>
+                      <a:round/>
+                      <a:headEnd type="none" w="med" len="med"/>
+                      <a:tailEnd type="none" w="med" len="med"/>
+                    </a:lnT>
+                    <a:lnB w="6350" cap="flat" cmpd="sng" algn="ctr">
+                      <a:solidFill>
+                        <a:srgbClr val="E4DADD"/>
+                      </a:solidFill>
+                      <a:prstDash val="solid"/>
+                      <a:round/>
+                      <a:headEnd type="none" w="med" len="med"/>
+                      <a:tailEnd type="none" w="med" len="med"/>
+                    </a:lnB>
+                  </a:tcPr>
+                </a:tc>
+                <a:tc>
+                  <a:txBody>
+                    <a:bodyPr/>
+                    <a:lstStyle/>
+                    <a:p>
+                      <a:pPr indent="0" marL="0">
+                        <a:buNone/>
+                      </a:pPr>
+                      <a:r>
+                        <a:rPr lang="en-US" sz="1000" b="1" dirty="0">
+                          <a:solidFill>
+                            <a:srgbClr val="2E6F4E"/>
+                          </a:solidFill>
+                          <a:latin typeface="Calibri" pitchFamily="34" charset="0"/>
+                          <a:ea typeface="Calibri" pitchFamily="34" charset="-122"/>
+                          <a:cs typeface="Calibri" pitchFamily="34" charset="-120"/>
+                        </a:rPr>
+                        <a:t>売上 ＋30%／営業利益 ＋250%超</a:t>
+                      </a:r>
+                      <a:endParaRPr lang="en-US" sz="1000" dirty="0">
+                        <a:latin typeface="Calibri" charset="0"/>
+                        <a:ea typeface="Calibri" charset="0"/>
+                        <a:cs typeface="Calibri" charset="0"/>
+                      </a:endParaRPr>
+                    </a:p>
+                  </a:txBody>
+                  <a:tcPr marL="91440" marR="91440" marT="45720" marB="45720" anchor="ctr">
+                    <a:lnL w="6350" cap="flat" cmpd="sng" algn="ctr">
+                      <a:solidFill>
+                        <a:srgbClr val="E4DADD"/>
+                      </a:solidFill>
+                      <a:prstDash val="solid"/>
+                      <a:round/>
+                      <a:headEnd type="none" w="med" len="med"/>
+                      <a:tailEnd type="none" w="med" len="med"/>
+                    </a:lnL>
+                    <a:lnR w="6350" cap="flat" cmpd="sng" algn="ctr">
+                      <a:solidFill>
+                        <a:srgbClr val="E4DADD"/>
+                      </a:solidFill>
+                      <a:prstDash val="solid"/>
+                      <a:round/>
+                      <a:headEnd type="none" w="med" len="med"/>
+                      <a:tailEnd type="none" w="med" len="med"/>
+                    </a:lnR>
+                    <a:lnT w="6350" cap="flat" cmpd="sng" algn="ctr">
+                      <a:solidFill>
+                        <a:srgbClr val="E4DADD"/>
+                      </a:solidFill>
+                      <a:prstDash val="solid"/>
+                      <a:round/>
+                      <a:headEnd type="none" w="med" len="med"/>
+                      <a:tailEnd type="none" w="med" len="med"/>
+                    </a:lnT>
+                    <a:lnB w="6350" cap="flat" cmpd="sng" algn="ctr">
+                      <a:solidFill>
+                        <a:srgbClr val="E4DADD"/>
+                      </a:solidFill>
+                      <a:prstDash val="solid"/>
+                      <a:round/>
+                      <a:headEnd type="none" w="med" len="med"/>
+                      <a:tailEnd type="none" w="med" len="med"/>
+                    </a:lnB>
+                  </a:tcPr>
+                </a:tc>
+              </a:tr>
+              <a:tr h="420624">
+                <a:tc>
+                  <a:txBody>
+                    <a:bodyPr/>
+                    <a:lstStyle/>
+                    <a:p>
+                      <a:pPr indent="0" marL="0">
+                        <a:buNone/>
+                      </a:pPr>
+                      <a:r>
+                        <a:rPr lang="en-US" sz="1000" b="1" dirty="0">
+                          <a:solidFill>
+                            <a:srgbClr val="1F1A1C"/>
+                          </a:solidFill>
+                          <a:latin typeface="Calibri" pitchFamily="34" charset="0"/>
+                          <a:ea typeface="Calibri" pitchFamily="34" charset="-122"/>
+                          <a:cs typeface="Calibri" pitchFamily="34" charset="-120"/>
+                        </a:rPr>
+                        <a:t>人員</a:t>
+                      </a:r>
+                      <a:endParaRPr lang="en-US" sz="1000" dirty="0">
+                        <a:latin typeface="Calibri" charset="0"/>
+                        <a:ea typeface="Calibri" charset="0"/>
+                        <a:cs typeface="Calibri" charset="0"/>
+                      </a:endParaRPr>
+                    </a:p>
+                  </a:txBody>
+                  <a:tcPr marL="91440" marR="91440" marT="45720" marB="45720" anchor="ctr">
+                    <a:lnL w="6350" cap="flat" cmpd="sng" algn="ctr">
+                      <a:solidFill>
+                        <a:srgbClr val="E4DADD"/>
+                      </a:solidFill>
+                      <a:prstDash val="solid"/>
+                      <a:round/>
+                      <a:headEnd type="none" w="med" len="med"/>
+                      <a:tailEnd type="none" w="med" len="med"/>
+                    </a:lnL>
+                    <a:lnR w="6350" cap="flat" cmpd="sng" algn="ctr">
+                      <a:solidFill>
+                        <a:srgbClr val="E4DADD"/>
+                      </a:solidFill>
+                      <a:prstDash val="solid"/>
+                      <a:round/>
+                      <a:headEnd type="none" w="med" len="med"/>
+                      <a:tailEnd type="none" w="med" len="med"/>
+                    </a:lnR>
+                    <a:lnT w="6350" cap="flat" cmpd="sng" algn="ctr">
+                      <a:solidFill>
+                        <a:srgbClr val="E4DADD"/>
+                      </a:solidFill>
+                      <a:prstDash val="solid"/>
+                      <a:round/>
+                      <a:headEnd type="none" w="med" len="med"/>
+                      <a:tailEnd type="none" w="med" len="med"/>
+                    </a:lnT>
+                    <a:lnB w="6350" cap="flat" cmpd="sng" algn="ctr">
+                      <a:solidFill>
+                        <a:srgbClr val="E4DADD"/>
+                      </a:solidFill>
+                      <a:prstDash val="solid"/>
+                      <a:round/>
+                      <a:headEnd type="none" w="med" len="med"/>
+                      <a:tailEnd type="none" w="med" len="med"/>
+                    </a:lnB>
+                  </a:tcPr>
+                </a:tc>
+                <a:tc>
+                  <a:txBody>
+                    <a:bodyPr/>
+                    <a:lstStyle/>
+                    <a:p>
+                      <a:pPr indent="0" marL="0">
+                        <a:buNone/>
+                      </a:pPr>
+                      <a:r>
+                        <a:rPr lang="en-US" sz="1000" dirty="0">
+                          <a:solidFill>
+                            <a:srgbClr val="6E6368"/>
+                          </a:solidFill>
+                          <a:latin typeface="Calibri" pitchFamily="34" charset="0"/>
+                          <a:ea typeface="Calibri" pitchFamily="34" charset="-122"/>
+                          <a:cs typeface="Calibri" pitchFamily="34" charset="-120"/>
+                        </a:rPr>
+                        <a:t>―</a:t>
+                      </a:r>
+                      <a:endParaRPr lang="en-US" sz="1000" dirty="0">
+                        <a:latin typeface="Calibri" charset="0"/>
+                        <a:ea typeface="Calibri" charset="0"/>
+                        <a:cs typeface="Calibri" charset="0"/>
+                      </a:endParaRPr>
+                    </a:p>
+                  </a:txBody>
+                  <a:tcPr marL="91440" marR="91440" marT="45720" marB="45720" anchor="ctr">
+                    <a:lnL w="6350" cap="flat" cmpd="sng" algn="ctr">
+                      <a:solidFill>
+                        <a:srgbClr val="E4DADD"/>
+                      </a:solidFill>
+                      <a:prstDash val="solid"/>
+                      <a:round/>
+                      <a:headEnd type="none" w="med" len="med"/>
+                      <a:tailEnd type="none" w="med" len="med"/>
+                    </a:lnL>
+                    <a:lnR w="6350" cap="flat" cmpd="sng" algn="ctr">
+                      <a:solidFill>
+                        <a:srgbClr val="E4DADD"/>
+                      </a:solidFill>
+                      <a:prstDash val="solid"/>
+                      <a:round/>
+                      <a:headEnd type="none" w="med" len="med"/>
+                      <a:tailEnd type="none" w="med" len="med"/>
+                    </a:lnR>
+                    <a:lnT w="6350" cap="flat" cmpd="sng" algn="ctr">
+                      <a:solidFill>
+                        <a:srgbClr val="E4DADD"/>
+                      </a:solidFill>
+                      <a:prstDash val="solid"/>
+                      <a:round/>
+                      <a:headEnd type="none" w="med" len="med"/>
+                      <a:tailEnd type="none" w="med" len="med"/>
+                    </a:lnT>
+                    <a:lnB w="6350" cap="flat" cmpd="sng" algn="ctr">
+                      <a:solidFill>
+                        <a:srgbClr val="E4DADD"/>
+                      </a:solidFill>
+                      <a:prstDash val="solid"/>
+                      <a:round/>
+                      <a:headEnd type="none" w="med" len="med"/>
+                      <a:tailEnd type="none" w="med" len="med"/>
+                    </a:lnB>
+                  </a:tcPr>
+                </a:tc>
+                <a:tc>
+                  <a:txBody>
+                    <a:bodyPr/>
+                    <a:lstStyle/>
+                    <a:p>
+                      <a:pPr indent="0" marL="0">
+                        <a:buNone/>
+                      </a:pPr>
+                      <a:r>
+                        <a:rPr lang="en-US" sz="1000" dirty="0">
+                          <a:solidFill>
+                            <a:srgbClr val="1F1A1C"/>
+                          </a:solidFill>
+                          <a:latin typeface="Calibri" pitchFamily="34" charset="0"/>
+                          <a:ea typeface="Calibri" pitchFamily="34" charset="-122"/>
+                          <a:cs typeface="Calibri" pitchFamily="34" charset="-120"/>
+                        </a:rPr>
+                        <a:t>幹部メンバーは全員が継続。経営陣の入替えなし</a:t>
+                      </a:r>
+                      <a:endParaRPr lang="en-US" sz="1000" dirty="0">
+                        <a:latin typeface="Calibri" charset="0"/>
+                        <a:ea typeface="Calibri" charset="0"/>
+                        <a:cs typeface="Calibri" charset="0"/>
+                      </a:endParaRPr>
+                    </a:p>
+                  </a:txBody>
+                  <a:tcPr marL="91440" marR="91440" marT="45720" marB="45720" anchor="ctr">
+                    <a:lnL w="6350" cap="flat" cmpd="sng" algn="ctr">
+                      <a:solidFill>
+                        <a:srgbClr val="E4DADD"/>
+                      </a:solidFill>
+                      <a:prstDash val="solid"/>
+                      <a:round/>
+                      <a:headEnd type="none" w="med" len="med"/>
+                      <a:tailEnd type="none" w="med" len="med"/>
+                    </a:lnL>
+                    <a:lnR w="6350" cap="flat" cmpd="sng" algn="ctr">
+                      <a:solidFill>
+                        <a:srgbClr val="E4DADD"/>
+                      </a:solidFill>
+                      <a:prstDash val="solid"/>
+                      <a:round/>
+                      <a:headEnd type="none" w="med" len="med"/>
+                      <a:tailEnd type="none" w="med" len="med"/>
+                    </a:lnR>
+                    <a:lnT w="6350" cap="flat" cmpd="sng" algn="ctr">
+                      <a:solidFill>
+                        <a:srgbClr val="E4DADD"/>
+                      </a:solidFill>
+                      <a:prstDash val="solid"/>
+                      <a:round/>
+                      <a:headEnd type="none" w="med" len="med"/>
+                      <a:tailEnd type="none" w="med" len="med"/>
+                    </a:lnT>
+                    <a:lnB w="6350" cap="flat" cmpd="sng" algn="ctr">
+                      <a:solidFill>
+                        <a:srgbClr val="E4DADD"/>
+                      </a:solidFill>
+                      <a:prstDash val="solid"/>
+                      <a:round/>
+                      <a:headEnd type="none" w="med" len="med"/>
+                      <a:tailEnd type="none" w="med" len="med"/>
+                    </a:lnB>
+                  </a:tcPr>
+                </a:tc>
+              </a:tr>
+              <a:tr h="420624">
+                <a:tc>
+                  <a:txBody>
+                    <a:bodyPr/>
+                    <a:lstStyle/>
+                    <a:p>
+                      <a:pPr indent="0" marL="0">
+                        <a:buNone/>
+                      </a:pPr>
+                      <a:r>
+                        <a:rPr lang="en-US" sz="1000" b="1" dirty="0">
+                          <a:solidFill>
+                            <a:srgbClr val="1F1A1C"/>
+                          </a:solidFill>
+                          <a:latin typeface="Calibri" pitchFamily="34" charset="0"/>
+                          <a:ea typeface="Calibri" pitchFamily="34" charset="-122"/>
+                          <a:cs typeface="Calibri" pitchFamily="34" charset="-120"/>
+                        </a:rPr>
+                        <a:t>労働環境</a:t>
+                      </a:r>
+                      <a:endParaRPr lang="en-US" sz="1000" dirty="0">
+                        <a:latin typeface="Calibri" charset="0"/>
+                        <a:ea typeface="Calibri" charset="0"/>
+                        <a:cs typeface="Calibri" charset="0"/>
+                      </a:endParaRPr>
+                    </a:p>
+                  </a:txBody>
+                  <a:tcPr marL="91440" marR="91440" marT="45720" marB="45720" anchor="ctr">
+                    <a:lnL w="6350" cap="flat" cmpd="sng" algn="ctr">
+                      <a:solidFill>
+                        <a:srgbClr val="E4DADD"/>
+                      </a:solidFill>
+                      <a:prstDash val="solid"/>
+                      <a:round/>
+                      <a:headEnd type="none" w="med" len="med"/>
+                      <a:tailEnd type="none" w="med" len="med"/>
+                    </a:lnL>
+                    <a:lnR w="6350" cap="flat" cmpd="sng" algn="ctr">
+                      <a:solidFill>
+                        <a:srgbClr val="E4DADD"/>
+                      </a:solidFill>
+                      <a:prstDash val="solid"/>
+                      <a:round/>
+                      <a:headEnd type="none" w="med" len="med"/>
+                      <a:tailEnd type="none" w="med" len="med"/>
+                    </a:lnR>
+                    <a:lnT w="6350" cap="flat" cmpd="sng" algn="ctr">
+                      <a:solidFill>
+                        <a:srgbClr val="E4DADD"/>
+                      </a:solidFill>
+                      <a:prstDash val="solid"/>
+                      <a:round/>
+                      <a:headEnd type="none" w="med" len="med"/>
+                      <a:tailEnd type="none" w="med" len="med"/>
+                    </a:lnT>
+                    <a:lnB w="6350" cap="flat" cmpd="sng" algn="ctr">
+                      <a:solidFill>
+                        <a:srgbClr val="E4DADD"/>
+                      </a:solidFill>
+                      <a:prstDash val="solid"/>
+                      <a:round/>
+                      <a:headEnd type="none" w="med" len="med"/>
+                      <a:tailEnd type="none" w="med" len="med"/>
+                    </a:lnB>
+                  </a:tcPr>
+                </a:tc>
+                <a:tc>
+                  <a:txBody>
+                    <a:bodyPr/>
+                    <a:lstStyle/>
+                    <a:p>
+                      <a:pPr indent="0" marL="0">
+                        <a:buNone/>
+                      </a:pPr>
+                      <a:r>
+                        <a:rPr lang="en-US" sz="1000" dirty="0">
+                          <a:solidFill>
+                            <a:srgbClr val="1F1A1C"/>
+                          </a:solidFill>
+                          <a:latin typeface="Calibri" pitchFamily="34" charset="0"/>
+                          <a:ea typeface="Calibri" pitchFamily="34" charset="-122"/>
+                          <a:cs typeface="Calibri" pitchFamily="34" charset="-120"/>
+                        </a:rPr>
+                        <a:t>サービス残業が常態化</a:t>
+                      </a:r>
+                      <a:endParaRPr lang="en-US" sz="1000" dirty="0">
+                        <a:latin typeface="Calibri" charset="0"/>
+                        <a:ea typeface="Calibri" charset="0"/>
+                        <a:cs typeface="Calibri" charset="0"/>
+                      </a:endParaRPr>
+                    </a:p>
+                  </a:txBody>
+                  <a:tcPr marL="91440" marR="91440" marT="45720" marB="45720" anchor="ctr">
+                    <a:lnL w="6350" cap="flat" cmpd="sng" algn="ctr">
+                      <a:solidFill>
+                        <a:srgbClr val="E4DADD"/>
+                      </a:solidFill>
+                      <a:prstDash val="solid"/>
+                      <a:round/>
+                      <a:headEnd type="none" w="med" len="med"/>
+                      <a:tailEnd type="none" w="med" len="med"/>
+                    </a:lnL>
+                    <a:lnR w="6350" cap="flat" cmpd="sng" algn="ctr">
+                      <a:solidFill>
+                        <a:srgbClr val="E4DADD"/>
+                      </a:solidFill>
+                      <a:prstDash val="solid"/>
+                      <a:round/>
+                      <a:headEnd type="none" w="med" len="med"/>
+                      <a:tailEnd type="none" w="med" len="med"/>
+                    </a:lnR>
+                    <a:lnT w="6350" cap="flat" cmpd="sng" algn="ctr">
+                      <a:solidFill>
+                        <a:srgbClr val="E4DADD"/>
+                      </a:solidFill>
+                      <a:prstDash val="solid"/>
+                      <a:round/>
+                      <a:headEnd type="none" w="med" len="med"/>
+                      <a:tailEnd type="none" w="med" len="med"/>
+                    </a:lnT>
+                    <a:lnB w="6350" cap="flat" cmpd="sng" algn="ctr">
+                      <a:solidFill>
+                        <a:srgbClr val="E4DADD"/>
+                      </a:solidFill>
+                      <a:prstDash val="solid"/>
+                      <a:round/>
+                      <a:headEnd type="none" w="med" len="med"/>
+                      <a:tailEnd type="none" w="med" len="med"/>
+                    </a:lnB>
+                  </a:tcPr>
+                </a:tc>
+                <a:tc>
+                  <a:txBody>
+                    <a:bodyPr/>
+                    <a:lstStyle/>
+                    <a:p>
+                      <a:pPr indent="0" marL="0">
+                        <a:buNone/>
+                      </a:pPr>
+                      <a:r>
+                        <a:rPr lang="en-US" sz="1000" b="1" dirty="0">
+                          <a:solidFill>
+                            <a:srgbClr val="2E6F4E"/>
+                          </a:solidFill>
+                          <a:latin typeface="Calibri" pitchFamily="34" charset="0"/>
+                          <a:ea typeface="Calibri" pitchFamily="34" charset="-122"/>
+                          <a:cs typeface="Calibri" pitchFamily="34" charset="-120"/>
+                        </a:rPr>
+                        <a:t>サービス残業を撤廃。12月を除き残業自体が発生しない体制へ</a:t>
+                      </a:r>
+                      <a:endParaRPr lang="en-US" sz="1000" dirty="0">
+                        <a:latin typeface="Calibri" charset="0"/>
+                        <a:ea typeface="Calibri" charset="0"/>
+                        <a:cs typeface="Calibri" charset="0"/>
+                      </a:endParaRPr>
+                    </a:p>
+                  </a:txBody>
+                  <a:tcPr marL="91440" marR="91440" marT="45720" marB="45720" anchor="ctr">
+                    <a:lnL w="6350" cap="flat" cmpd="sng" algn="ctr">
+                      <a:solidFill>
+                        <a:srgbClr val="E4DADD"/>
+                      </a:solidFill>
+                      <a:prstDash val="solid"/>
+                      <a:round/>
+                      <a:headEnd type="none" w="med" len="med"/>
+                      <a:tailEnd type="none" w="med" len="med"/>
+                    </a:lnL>
+                    <a:lnR w="6350" cap="flat" cmpd="sng" algn="ctr">
+                      <a:solidFill>
+                        <a:srgbClr val="E4DADD"/>
+                      </a:solidFill>
+                      <a:prstDash val="solid"/>
+                      <a:round/>
+                      <a:headEnd type="none" w="med" len="med"/>
+                      <a:tailEnd type="none" w="med" len="med"/>
+                    </a:lnR>
+                    <a:lnT w="6350" cap="flat" cmpd="sng" algn="ctr">
+                      <a:solidFill>
+                        <a:srgbClr val="E4DADD"/>
+                      </a:solidFill>
+                      <a:prstDash val="solid"/>
+                      <a:round/>
+                      <a:headEnd type="none" w="med" len="med"/>
+                      <a:tailEnd type="none" w="med" len="med"/>
+                    </a:lnT>
+                    <a:lnB w="6350" cap="flat" cmpd="sng" algn="ctr">
+                      <a:solidFill>
+                        <a:srgbClr val="E4DADD"/>
+                      </a:solidFill>
+                      <a:prstDash val="solid"/>
+                      <a:round/>
+                      <a:headEnd type="none" w="med" len="med"/>
+                      <a:tailEnd type="none" w="med" len="med"/>
+                    </a:lnB>
+                  </a:tcPr>
+                </a:tc>
+              </a:tr>
+              <a:tr h="420624">
+                <a:tc>
+                  <a:txBody>
+                    <a:bodyPr/>
+                    <a:lstStyle/>
+                    <a:p>
+                      <a:pPr indent="0" marL="0">
+                        <a:buNone/>
+                      </a:pPr>
+                      <a:r>
+                        <a:rPr lang="en-US" sz="1000" b="1" dirty="0">
+                          <a:solidFill>
+                            <a:srgbClr val="1F1A1C"/>
+                          </a:solidFill>
+                          <a:latin typeface="Calibri" pitchFamily="34" charset="0"/>
+                          <a:ea typeface="Calibri" pitchFamily="34" charset="-122"/>
+                          <a:cs typeface="Calibri" pitchFamily="34" charset="-120"/>
+                        </a:rPr>
+                        <a:t>店舗</a:t>
+                      </a:r>
+                      <a:endParaRPr lang="en-US" sz="1000" dirty="0">
+                        <a:latin typeface="Calibri" charset="0"/>
+                        <a:ea typeface="Calibri" charset="0"/>
+                        <a:cs typeface="Calibri" charset="0"/>
+                      </a:endParaRPr>
+                    </a:p>
+                  </a:txBody>
+                  <a:tcPr marL="91440" marR="91440" marT="45720" marB="45720" anchor="ctr">
+                    <a:lnL w="6350" cap="flat" cmpd="sng" algn="ctr">
+                      <a:solidFill>
+                        <a:srgbClr val="E4DADD"/>
+                      </a:solidFill>
+                      <a:prstDash val="solid"/>
+                      <a:round/>
+                      <a:headEnd type="none" w="med" len="med"/>
+                      <a:tailEnd type="none" w="med" len="med"/>
+                    </a:lnL>
+                    <a:lnR w="6350" cap="flat" cmpd="sng" algn="ctr">
+                      <a:solidFill>
+                        <a:srgbClr val="E4DADD"/>
+                      </a:solidFill>
+                      <a:prstDash val="solid"/>
+                      <a:round/>
+                      <a:headEnd type="none" w="med" len="med"/>
+                      <a:tailEnd type="none" w="med" len="med"/>
+                    </a:lnR>
+                    <a:lnT w="6350" cap="flat" cmpd="sng" algn="ctr">
+                      <a:solidFill>
+                        <a:srgbClr val="E4DADD"/>
+                      </a:solidFill>
+                      <a:prstDash val="solid"/>
+                      <a:round/>
+                      <a:headEnd type="none" w="med" len="med"/>
+                      <a:tailEnd type="none" w="med" len="med"/>
+                    </a:lnT>
+                    <a:lnB w="6350" cap="flat" cmpd="sng" algn="ctr">
+                      <a:solidFill>
+                        <a:srgbClr val="E4DADD"/>
+                      </a:solidFill>
+                      <a:prstDash val="solid"/>
+                      <a:round/>
+                      <a:headEnd type="none" w="med" len="med"/>
+                      <a:tailEnd type="none" w="med" len="med"/>
+                    </a:lnB>
+                  </a:tcPr>
+                </a:tc>
+                <a:tc>
+                  <a:txBody>
+                    <a:bodyPr/>
+                    <a:lstStyle/>
+                    <a:p>
+                      <a:pPr indent="0" marL="0">
+                        <a:buNone/>
+                      </a:pPr>
+                      <a:r>
+                        <a:rPr lang="en-US" sz="1000" dirty="0">
+                          <a:solidFill>
+                            <a:srgbClr val="6E6368"/>
+                          </a:solidFill>
+                          <a:latin typeface="Calibri" pitchFamily="34" charset="0"/>
+                          <a:ea typeface="Calibri" pitchFamily="34" charset="-122"/>
+                          <a:cs typeface="Calibri" pitchFamily="34" charset="-120"/>
+                        </a:rPr>
+                        <a:t>―</a:t>
+                      </a:r>
+                      <a:endParaRPr lang="en-US" sz="1000" dirty="0">
+                        <a:latin typeface="Calibri" charset="0"/>
+                        <a:ea typeface="Calibri" charset="0"/>
+                        <a:cs typeface="Calibri" charset="0"/>
+                      </a:endParaRPr>
+                    </a:p>
+                  </a:txBody>
+                  <a:tcPr marL="91440" marR="91440" marT="45720" marB="45720" anchor="ctr">
+                    <a:lnL w="6350" cap="flat" cmpd="sng" algn="ctr">
+                      <a:solidFill>
+                        <a:srgbClr val="E4DADD"/>
+                      </a:solidFill>
+                      <a:prstDash val="solid"/>
+                      <a:round/>
+                      <a:headEnd type="none" w="med" len="med"/>
+                      <a:tailEnd type="none" w="med" len="med"/>
+                    </a:lnL>
+                    <a:lnR w="6350" cap="flat" cmpd="sng" algn="ctr">
+                      <a:solidFill>
+                        <a:srgbClr val="E4DADD"/>
+                      </a:solidFill>
+                      <a:prstDash val="solid"/>
+                      <a:round/>
+                      <a:headEnd type="none" w="med" len="med"/>
+                      <a:tailEnd type="none" w="med" len="med"/>
+                    </a:lnR>
+                    <a:lnT w="6350" cap="flat" cmpd="sng" algn="ctr">
+                      <a:solidFill>
+                        <a:srgbClr val="E4DADD"/>
+                      </a:solidFill>
+                      <a:prstDash val="solid"/>
+                      <a:round/>
+                      <a:headEnd type="none" w="med" len="med"/>
+                      <a:tailEnd type="none" w="med" len="med"/>
+                    </a:lnT>
+                    <a:lnB w="6350" cap="flat" cmpd="sng" algn="ctr">
+                      <a:solidFill>
+                        <a:srgbClr val="E4DADD"/>
+                      </a:solidFill>
+                      <a:prstDash val="solid"/>
+                      <a:round/>
+                      <a:headEnd type="none" w="med" len="med"/>
+                      <a:tailEnd type="none" w="med" len="med"/>
+                    </a:lnB>
+                  </a:tcPr>
+                </a:tc>
+                <a:tc>
+                  <a:txBody>
+                    <a:bodyPr/>
+                    <a:lstStyle/>
+                    <a:p>
+                      <a:pPr indent="0" marL="0">
+                        <a:buNone/>
+                      </a:pPr>
+                      <a:r>
+                        <a:rPr lang="en-US" sz="1000" dirty="0">
+                          <a:solidFill>
+                            <a:srgbClr val="1F1A1C"/>
+                          </a:solidFill>
+                          <a:latin typeface="Calibri" pitchFamily="34" charset="0"/>
+                          <a:ea typeface="Calibri" pitchFamily="34" charset="-122"/>
+                          <a:cs typeface="Calibri" pitchFamily="34" charset="-120"/>
+                        </a:rPr>
+                        <a:t>店内の一部改装・修繕を実施。業態・客層は変更せず</a:t>
+                      </a:r>
+                      <a:endParaRPr lang="en-US" sz="1000" dirty="0">
+                        <a:latin typeface="Calibri" charset="0"/>
+                        <a:ea typeface="Calibri" charset="0"/>
+                        <a:cs typeface="Calibri" charset="0"/>
+                      </a:endParaRPr>
+                    </a:p>
+                  </a:txBody>
+                  <a:tcPr marL="91440" marR="91440" marT="45720" marB="45720" anchor="ctr">
+                    <a:lnL w="6350" cap="flat" cmpd="sng" algn="ctr">
+                      <a:solidFill>
+                        <a:srgbClr val="E4DADD"/>
+                      </a:solidFill>
+                      <a:prstDash val="solid"/>
+                      <a:round/>
+                      <a:headEnd type="none" w="med" len="med"/>
+                      <a:tailEnd type="none" w="med" len="med"/>
+                    </a:lnL>
+                    <a:lnR w="6350" cap="flat" cmpd="sng" algn="ctr">
+                      <a:solidFill>
+                        <a:srgbClr val="E4DADD"/>
+                      </a:solidFill>
+                      <a:prstDash val="solid"/>
+                      <a:round/>
+                      <a:headEnd type="none" w="med" len="med"/>
+                      <a:tailEnd type="none" w="med" len="med"/>
+                    </a:lnR>
+                    <a:lnT w="6350" cap="flat" cmpd="sng" algn="ctr">
+                      <a:solidFill>
+                        <a:srgbClr val="E4DADD"/>
+                      </a:solidFill>
+                      <a:prstDash val="solid"/>
+                      <a:round/>
+                      <a:headEnd type="none" w="med" len="med"/>
+                      <a:tailEnd type="none" w="med" len="med"/>
+                    </a:lnT>
+                    <a:lnB w="6350" cap="flat" cmpd="sng" algn="ctr">
+                      <a:solidFill>
+                        <a:srgbClr val="E4DADD"/>
+                      </a:solidFill>
+                      <a:prstDash val="solid"/>
+                      <a:round/>
+                      <a:headEnd type="none" w="med" len="med"/>
+                      <a:tailEnd type="none" w="med" len="med"/>
+                    </a:lnB>
+                  </a:tcPr>
+                </a:tc>
+              </a:tr>
+            </a:tbl>
+          </a:graphicData>
+        </a:graphic>
+      </p:graphicFrame>
+      <p:sp>
+        <p:nvSpPr>
+          <p:cNvPr id="19" name="Shape 16"/>
+          <p:cNvSpPr/>
+          <p:nvPr/>
+        </p:nvSpPr>
+        <p:spPr>
+          <a:xfrm>
+            <a:off x="7333488" y="2999232"/>
+            <a:ext cx="4288536" cy="2395728"/>
+          </a:xfrm>
+          <a:prstGeom prst="roundRect">
+            <a:avLst>
+              <a:gd name="adj" fmla="val 1908"/>
+            </a:avLst>
+          </a:prstGeom>
+          <a:solidFill>
+            <a:srgbClr val="FFFFFF"/>
+          </a:solidFill>
+          <a:ln w="9525">
+            <a:solidFill>
+              <a:srgbClr val="E4DADD"/>
+            </a:solidFill>
+            <a:prstDash val="solid"/>
+          </a:ln>
+        </p:spPr>
+      </p:sp>
+      <p:sp>
+        <p:nvSpPr>
+          <p:cNvPr id="20" name="Text 17"/>
+          <p:cNvSpPr txBox="1"/>
+          <p:nvPr/>
+        </p:nvSpPr>
+        <p:spPr>
+          <a:xfrm>
+            <a:off x="7552944" y="3108960"/>
+            <a:ext cx="3840480" cy="237744"/>
+          </a:xfrm>
+          <a:prstGeom prst="rect">
+            <a:avLst/>
+          </a:prstGeom>
+          <a:noFill/>
+          <a:ln/>
+        </p:spPr>
+        <p:txBody>
+          <a:bodyPr wrap="square" lIns="0" tIns="0" rIns="0" bIns="0" rtlCol="0" anchor="ctr"/>
+          <a:lstStyle/>
+          <a:p>
+            <a:pPr indent="0" marL="0">
+              <a:buNone/>
+            </a:pPr>
+            <a:r>
+              <a:rPr lang="en-US" sz="1000" b="1" dirty="0">
+                <a:solidFill>
+                  <a:srgbClr val="B58B2A"/>
+                </a:solidFill>
+                <a:latin typeface="Calibri" pitchFamily="34" charset="0"/>
+                <a:ea typeface="Calibri" pitchFamily="34" charset="-122"/>
+                <a:cs typeface="Calibri" pitchFamily="34" charset="-120"/>
+              </a:rPr>
+              <a:t>本件において踏襲する運営方針</a:t>
+            </a:r>
+            <a:endParaRPr lang="en-US" sz="1000" dirty="0"/>
+          </a:p>
+        </p:txBody>
+      </p:sp>
+      <p:sp>
+        <p:nvSpPr>
+          <p:cNvPr id="21" name="Shape 18"/>
+          <p:cNvSpPr/>
+          <p:nvPr/>
+        </p:nvSpPr>
+        <p:spPr>
+          <a:xfrm>
+            <a:off x="7552944" y="3429000"/>
+            <a:ext cx="274320" cy="274320"/>
+          </a:xfrm>
+          <a:prstGeom prst="ellipse">
+            <a:avLst/>
+          </a:prstGeom>
+          <a:solidFill>
+            <a:srgbClr val="A26769"/>
+          </a:solidFill>
+          <a:ln/>
+        </p:spPr>
+      </p:sp>
+      <p:sp>
+        <p:nvSpPr>
+          <p:cNvPr id="22" name="Text 19"/>
+          <p:cNvSpPr txBox="1"/>
+          <p:nvPr/>
+        </p:nvSpPr>
+        <p:spPr>
+          <a:xfrm>
+            <a:off x="7552944" y="3429000"/>
+            <a:ext cx="274320" cy="274320"/>
+          </a:xfrm>
+          <a:prstGeom prst="rect">
+            <a:avLst/>
+          </a:prstGeom>
+          <a:noFill/>
+          <a:ln/>
+        </p:spPr>
+        <p:txBody>
+          <a:bodyPr wrap="square" lIns="0" tIns="0" rIns="0" bIns="0" rtlCol="0" anchor="ctr"/>
+          <a:lstStyle/>
+          <a:p>
+            <a:pPr algn="ctr" indent="0" marL="0">
+              <a:buNone/>
+            </a:pPr>
+            <a:r>
+              <a:rPr lang="en-US" sz="1150" b="1" dirty="0">
+                <a:solidFill>
+                  <a:srgbClr val="FFFFFF"/>
+                </a:solidFill>
+                <a:latin typeface="Calibri" pitchFamily="34" charset="0"/>
+                <a:ea typeface="Calibri" pitchFamily="34" charset="-122"/>
+                <a:cs typeface="Calibri" pitchFamily="34" charset="-120"/>
+              </a:rPr>
+              <a:t>1</a:t>
+            </a:r>
+            <a:endParaRPr lang="en-US" sz="1150" dirty="0"/>
+          </a:p>
+        </p:txBody>
+      </p:sp>
+      <p:sp>
+        <p:nvSpPr>
+          <p:cNvPr id="23" name="Text 20"/>
+          <p:cNvSpPr txBox="1"/>
+          <p:nvPr/>
+        </p:nvSpPr>
+        <p:spPr>
+          <a:xfrm>
+            <a:off x="7882128" y="3401568"/>
+            <a:ext cx="3566160" cy="219456"/>
+          </a:xfrm>
+          <a:prstGeom prst="rect">
+            <a:avLst/>
+          </a:prstGeom>
+          <a:noFill/>
+          <a:ln/>
+        </p:spPr>
+        <p:txBody>
+          <a:bodyPr wrap="square" lIns="0" tIns="0" rIns="0" bIns="0" rtlCol="0" anchor="ctr"/>
+          <a:lstStyle/>
+          <a:p>
+            <a:pPr indent="0" marL="0">
+              <a:buNone/>
+            </a:pPr>
+            <a:r>
+              <a:rPr lang="en-US" sz="1050" b="1" dirty="0">
+                <a:solidFill>
+                  <a:srgbClr val="6D2E46"/>
+                </a:solidFill>
+                <a:latin typeface="Calibri" pitchFamily="34" charset="0"/>
+                <a:ea typeface="Calibri" pitchFamily="34" charset="-122"/>
+                <a:cs typeface="Calibri" pitchFamily="34" charset="-120"/>
+              </a:rPr>
+              <a:t>人を入れ替えない</a:t>
+            </a:r>
+            <a:endParaRPr lang="en-US" sz="1050" dirty="0"/>
+          </a:p>
+        </p:txBody>
+      </p:sp>
+      <p:sp>
+        <p:nvSpPr>
+          <p:cNvPr id="24" name="Text 21"/>
+          <p:cNvSpPr txBox="1"/>
+          <p:nvPr/>
+        </p:nvSpPr>
+        <p:spPr>
+          <a:xfrm>
+            <a:off x="7882128" y="3611880"/>
+            <a:ext cx="3566160" cy="274320"/>
+          </a:xfrm>
+          <a:prstGeom prst="rect">
+            <a:avLst/>
+          </a:prstGeom>
+          <a:noFill/>
+          <a:ln/>
+        </p:spPr>
+        <p:txBody>
+          <a:bodyPr wrap="square" lIns="0" tIns="0" rIns="0" bIns="0" rtlCol="0" anchor="ctr"/>
+          <a:lstStyle/>
+          <a:p>
+            <a:pPr indent="0" marL="0">
+              <a:lnSpc>
+                <a:spcPts val="1200"/>
+              </a:lnSpc>
+              <a:buNone/>
+            </a:pPr>
+            <a:r>
+              <a:rPr lang="en-US" sz="900" dirty="0">
+                <a:solidFill>
+                  <a:srgbClr val="6E6368"/>
+                </a:solidFill>
+                <a:latin typeface="Calibri" pitchFamily="34" charset="0"/>
+                <a:ea typeface="Calibri" pitchFamily="34" charset="-122"/>
+                <a:cs typeface="Calibri" pitchFamily="34" charset="-120"/>
+              </a:rPr>
+              <a:t>幹部・従業員の雇用と処遇をそのまま承継する</a:t>
+            </a:r>
+            <a:endParaRPr lang="en-US" sz="900" dirty="0"/>
+          </a:p>
+        </p:txBody>
+      </p:sp>
+      <p:sp>
+        <p:nvSpPr>
+          <p:cNvPr id="25" name="Shape 22"/>
+          <p:cNvSpPr/>
+          <p:nvPr/>
+        </p:nvSpPr>
+        <p:spPr>
+          <a:xfrm>
+            <a:off x="7552944" y="3922776"/>
+            <a:ext cx="274320" cy="274320"/>
+          </a:xfrm>
+          <a:prstGeom prst="ellipse">
+            <a:avLst/>
+          </a:prstGeom>
+          <a:solidFill>
+            <a:srgbClr val="A26769"/>
+          </a:solidFill>
+          <a:ln/>
+        </p:spPr>
+      </p:sp>
+      <p:sp>
+        <p:nvSpPr>
+          <p:cNvPr id="26" name="Text 23"/>
+          <p:cNvSpPr txBox="1"/>
+          <p:nvPr/>
+        </p:nvSpPr>
+        <p:spPr>
+          <a:xfrm>
+            <a:off x="7552944" y="3922776"/>
+            <a:ext cx="274320" cy="274320"/>
+          </a:xfrm>
+          <a:prstGeom prst="rect">
+            <a:avLst/>
+          </a:prstGeom>
+          <a:noFill/>
+          <a:ln/>
+        </p:spPr>
+        <p:txBody>
+          <a:bodyPr wrap="square" lIns="0" tIns="0" rIns="0" bIns="0" rtlCol="0" anchor="ctr"/>
+          <a:lstStyle/>
+          <a:p>
+            <a:pPr algn="ctr" indent="0" marL="0">
+              <a:buNone/>
+            </a:pPr>
+            <a:r>
+              <a:rPr lang="en-US" sz="1150" b="1" dirty="0">
+                <a:solidFill>
+                  <a:srgbClr val="FFFFFF"/>
+                </a:solidFill>
+                <a:latin typeface="Calibri" pitchFamily="34" charset="0"/>
+                <a:ea typeface="Calibri" pitchFamily="34" charset="-122"/>
+                <a:cs typeface="Calibri" pitchFamily="34" charset="-120"/>
+              </a:rPr>
+              <a:t>2</a:t>
+            </a:r>
+            <a:endParaRPr lang="en-US" sz="1150" dirty="0"/>
+          </a:p>
+        </p:txBody>
+      </p:sp>
+      <p:sp>
+        <p:nvSpPr>
+          <p:cNvPr id="27" name="Text 24"/>
+          <p:cNvSpPr txBox="1"/>
+          <p:nvPr/>
+        </p:nvSpPr>
+        <p:spPr>
+          <a:xfrm>
+            <a:off x="7882128" y="3895344"/>
+            <a:ext cx="3566160" cy="219456"/>
+          </a:xfrm>
+          <a:prstGeom prst="rect">
+            <a:avLst/>
+          </a:prstGeom>
+          <a:noFill/>
+          <a:ln/>
+        </p:spPr>
+        <p:txBody>
+          <a:bodyPr wrap="square" lIns="0" tIns="0" rIns="0" bIns="0" rtlCol="0" anchor="ctr"/>
+          <a:lstStyle/>
+          <a:p>
+            <a:pPr indent="0" marL="0">
+              <a:buNone/>
+            </a:pPr>
+            <a:r>
+              <a:rPr lang="en-US" sz="1050" b="1" dirty="0">
+                <a:solidFill>
+                  <a:srgbClr val="6D2E46"/>
+                </a:solidFill>
+                <a:latin typeface="Calibri" pitchFamily="34" charset="0"/>
+                <a:ea typeface="Calibri" pitchFamily="34" charset="-122"/>
+                <a:cs typeface="Calibri" pitchFamily="34" charset="-120"/>
+              </a:rPr>
+              <a:t>労働環境を先に整える</a:t>
+            </a:r>
+            <a:endParaRPr lang="en-US" sz="1050" dirty="0"/>
+          </a:p>
+        </p:txBody>
+      </p:sp>
+      <p:sp>
+        <p:nvSpPr>
+          <p:cNvPr id="28" name="Text 25"/>
+          <p:cNvSpPr txBox="1"/>
+          <p:nvPr/>
+        </p:nvSpPr>
+        <p:spPr>
+          <a:xfrm>
+            <a:off x="7882128" y="4105656"/>
+            <a:ext cx="3566160" cy="274320"/>
+          </a:xfrm>
+          <a:prstGeom prst="rect">
+            <a:avLst/>
+          </a:prstGeom>
+          <a:noFill/>
+          <a:ln/>
+        </p:spPr>
+        <p:txBody>
+          <a:bodyPr wrap="square" lIns="0" tIns="0" rIns="0" bIns="0" rtlCol="0" anchor="ctr"/>
+          <a:lstStyle/>
+          <a:p>
+            <a:pPr indent="0" marL="0">
+              <a:lnSpc>
+                <a:spcPts val="1200"/>
+              </a:lnSpc>
+              <a:buNone/>
+            </a:pPr>
+            <a:r>
+              <a:rPr lang="en-US" sz="900" dirty="0">
+                <a:solidFill>
+                  <a:srgbClr val="6E6368"/>
+                </a:solidFill>
+                <a:latin typeface="Calibri" pitchFamily="34" charset="0"/>
+                <a:ea typeface="Calibri" pitchFamily="34" charset="-122"/>
+                <a:cs typeface="Calibri" pitchFamily="34" charset="-120"/>
+              </a:rPr>
+              <a:t>サービス残業の撤廃と、残業が発生しない体制の構築</a:t>
+            </a:r>
+            <a:endParaRPr lang="en-US" sz="900" dirty="0"/>
+          </a:p>
+        </p:txBody>
+      </p:sp>
+      <p:sp>
+        <p:nvSpPr>
+          <p:cNvPr id="29" name="Shape 26"/>
+          <p:cNvSpPr/>
+          <p:nvPr/>
+        </p:nvSpPr>
+        <p:spPr>
+          <a:xfrm>
+            <a:off x="7552944" y="4416552"/>
+            <a:ext cx="274320" cy="274320"/>
+          </a:xfrm>
+          <a:prstGeom prst="ellipse">
+            <a:avLst/>
+          </a:prstGeom>
+          <a:solidFill>
+            <a:srgbClr val="A26769"/>
+          </a:solidFill>
+          <a:ln/>
+        </p:spPr>
+      </p:sp>
+      <p:sp>
+        <p:nvSpPr>
+          <p:cNvPr id="30" name="Text 27"/>
+          <p:cNvSpPr txBox="1"/>
+          <p:nvPr/>
+        </p:nvSpPr>
+        <p:spPr>
+          <a:xfrm>
+            <a:off x="7552944" y="4416552"/>
+            <a:ext cx="274320" cy="274320"/>
+          </a:xfrm>
+          <a:prstGeom prst="rect">
+            <a:avLst/>
+          </a:prstGeom>
+          <a:noFill/>
+          <a:ln/>
+        </p:spPr>
+        <p:txBody>
+          <a:bodyPr wrap="square" lIns="0" tIns="0" rIns="0" bIns="0" rtlCol="0" anchor="ctr"/>
+          <a:lstStyle/>
+          <a:p>
+            <a:pPr algn="ctr" indent="0" marL="0">
+              <a:buNone/>
+            </a:pPr>
+            <a:r>
+              <a:rPr lang="en-US" sz="1150" b="1" dirty="0">
+                <a:solidFill>
+                  <a:srgbClr val="FFFFFF"/>
+                </a:solidFill>
+                <a:latin typeface="Calibri" pitchFamily="34" charset="0"/>
+                <a:ea typeface="Calibri" pitchFamily="34" charset="-122"/>
+                <a:cs typeface="Calibri" pitchFamily="34" charset="-120"/>
+              </a:rPr>
+              <a:t>3</a:t>
+            </a:r>
+            <a:endParaRPr lang="en-US" sz="1150" dirty="0"/>
+          </a:p>
+        </p:txBody>
+      </p:sp>
+      <p:sp>
+        <p:nvSpPr>
+          <p:cNvPr id="31" name="Text 28"/>
+          <p:cNvSpPr txBox="1"/>
+          <p:nvPr/>
+        </p:nvSpPr>
+        <p:spPr>
+          <a:xfrm>
+            <a:off x="7882128" y="4389120"/>
+            <a:ext cx="3566160" cy="219456"/>
+          </a:xfrm>
+          <a:prstGeom prst="rect">
+            <a:avLst/>
+          </a:prstGeom>
+          <a:noFill/>
+          <a:ln/>
+        </p:spPr>
+        <p:txBody>
+          <a:bodyPr wrap="square" lIns="0" tIns="0" rIns="0" bIns="0" rtlCol="0" anchor="ctr"/>
+          <a:lstStyle/>
+          <a:p>
+            <a:pPr indent="0" marL="0">
+              <a:buNone/>
+            </a:pPr>
+            <a:r>
+              <a:rPr lang="en-US" sz="1050" b="1" dirty="0">
+                <a:solidFill>
+                  <a:srgbClr val="6D2E46"/>
+                </a:solidFill>
+                <a:latin typeface="Calibri" pitchFamily="34" charset="0"/>
+                <a:ea typeface="Calibri" pitchFamily="34" charset="-122"/>
+                <a:cs typeface="Calibri" pitchFamily="34" charset="-120"/>
+              </a:rPr>
+              <a:t>手を入れるのは最小限</a:t>
+            </a:r>
+            <a:endParaRPr lang="en-US" sz="1050" dirty="0"/>
+          </a:p>
+        </p:txBody>
+      </p:sp>
+      <p:sp>
+        <p:nvSpPr>
+          <p:cNvPr id="32" name="Text 29"/>
+          <p:cNvSpPr txBox="1"/>
+          <p:nvPr/>
+        </p:nvSpPr>
+        <p:spPr>
+          <a:xfrm>
+            <a:off x="7882128" y="4599432"/>
+            <a:ext cx="3566160" cy="274320"/>
+          </a:xfrm>
+          <a:prstGeom prst="rect">
+            <a:avLst/>
+          </a:prstGeom>
+          <a:noFill/>
+          <a:ln/>
+        </p:spPr>
+        <p:txBody>
+          <a:bodyPr wrap="square" lIns="0" tIns="0" rIns="0" bIns="0" rtlCol="0" anchor="ctr"/>
+          <a:lstStyle/>
+          <a:p>
+            <a:pPr indent="0" marL="0">
+              <a:lnSpc>
+                <a:spcPts val="1200"/>
+              </a:lnSpc>
+              <a:buNone/>
+            </a:pPr>
+            <a:r>
+              <a:rPr lang="en-US" sz="900" dirty="0">
+                <a:solidFill>
+                  <a:srgbClr val="6E6368"/>
+                </a:solidFill>
+                <a:latin typeface="Calibri" pitchFamily="34" charset="0"/>
+                <a:ea typeface="Calibri" pitchFamily="34" charset="-122"/>
+                <a:cs typeface="Calibri" pitchFamily="34" charset="-120"/>
+              </a:rPr>
+              <a:t>改装・修繕は必要な範囲にとどめ、業態と客層は変えない</a:t>
+            </a:r>
+            <a:endParaRPr lang="en-US" sz="900" dirty="0"/>
+          </a:p>
+        </p:txBody>
+      </p:sp>
+      <p:sp>
+        <p:nvSpPr>
+          <p:cNvPr id="33" name="Shape 30"/>
+          <p:cNvSpPr/>
+          <p:nvPr/>
+        </p:nvSpPr>
+        <p:spPr>
+          <a:xfrm>
+            <a:off x="7552944" y="4910328"/>
+            <a:ext cx="274320" cy="274320"/>
+          </a:xfrm>
+          <a:prstGeom prst="ellipse">
+            <a:avLst/>
+          </a:prstGeom>
+          <a:solidFill>
+            <a:srgbClr val="A26769"/>
+          </a:solidFill>
+          <a:ln/>
+        </p:spPr>
+      </p:sp>
+      <p:sp>
+        <p:nvSpPr>
+          <p:cNvPr id="34" name="Text 31"/>
+          <p:cNvSpPr txBox="1"/>
+          <p:nvPr/>
+        </p:nvSpPr>
+        <p:spPr>
+          <a:xfrm>
+            <a:off x="7552944" y="4910328"/>
+            <a:ext cx="274320" cy="274320"/>
+          </a:xfrm>
+          <a:prstGeom prst="rect">
+            <a:avLst/>
+          </a:prstGeom>
+          <a:noFill/>
+          <a:ln/>
+        </p:spPr>
+        <p:txBody>
+          <a:bodyPr wrap="square" lIns="0" tIns="0" rIns="0" bIns="0" rtlCol="0" anchor="ctr"/>
+          <a:lstStyle/>
+          <a:p>
+            <a:pPr algn="ctr" indent="0" marL="0">
+              <a:buNone/>
+            </a:pPr>
+            <a:r>
+              <a:rPr lang="en-US" sz="1150" b="1" dirty="0">
+                <a:solidFill>
+                  <a:srgbClr val="FFFFFF"/>
+                </a:solidFill>
+                <a:latin typeface="Calibri" pitchFamily="34" charset="0"/>
+                <a:ea typeface="Calibri" pitchFamily="34" charset="-122"/>
+                <a:cs typeface="Calibri" pitchFamily="34" charset="-120"/>
+              </a:rPr>
+              <a:t>4</a:t>
+            </a:r>
+            <a:endParaRPr lang="en-US" sz="1150" dirty="0"/>
+          </a:p>
+        </p:txBody>
+      </p:sp>
+      <p:sp>
+        <p:nvSpPr>
+          <p:cNvPr id="35" name="Text 32"/>
+          <p:cNvSpPr txBox="1"/>
+          <p:nvPr/>
+        </p:nvSpPr>
+        <p:spPr>
+          <a:xfrm>
+            <a:off x="7882128" y="4882896"/>
+            <a:ext cx="3566160" cy="219456"/>
+          </a:xfrm>
+          <a:prstGeom prst="rect">
+            <a:avLst/>
+          </a:prstGeom>
+          <a:noFill/>
+          <a:ln/>
+        </p:spPr>
+        <p:txBody>
+          <a:bodyPr wrap="square" lIns="0" tIns="0" rIns="0" bIns="0" rtlCol="0" anchor="ctr"/>
+          <a:lstStyle/>
+          <a:p>
+            <a:pPr indent="0" marL="0">
+              <a:buNone/>
+            </a:pPr>
+            <a:r>
+              <a:rPr lang="en-US" sz="1050" b="1" dirty="0">
+                <a:solidFill>
+                  <a:srgbClr val="6D2E46"/>
+                </a:solidFill>
+                <a:latin typeface="Calibri" pitchFamily="34" charset="0"/>
+                <a:ea typeface="Calibri" pitchFamily="34" charset="-122"/>
+                <a:cs typeface="Calibri" pitchFamily="34" charset="-120"/>
+              </a:rPr>
+              <a:t>収益はコスト削減で作らない</a:t>
+            </a:r>
+            <a:endParaRPr lang="en-US" sz="1050" dirty="0"/>
+          </a:p>
+        </p:txBody>
+      </p:sp>
+      <p:sp>
+        <p:nvSpPr>
+          <p:cNvPr id="36" name="Text 33"/>
+          <p:cNvSpPr txBox="1"/>
+          <p:nvPr/>
+        </p:nvSpPr>
+        <p:spPr>
+          <a:xfrm>
+            <a:off x="7882128" y="5093208"/>
+            <a:ext cx="3566160" cy="274320"/>
+          </a:xfrm>
+          <a:prstGeom prst="rect">
+            <a:avLst/>
+          </a:prstGeom>
+          <a:noFill/>
+          <a:ln/>
+        </p:spPr>
+        <p:txBody>
+          <a:bodyPr wrap="square" lIns="0" tIns="0" rIns="0" bIns="0" rtlCol="0" anchor="ctr"/>
+          <a:lstStyle/>
+          <a:p>
+            <a:pPr indent="0" marL="0">
+              <a:lnSpc>
+                <a:spcPts val="1200"/>
+              </a:lnSpc>
+              <a:buNone/>
+            </a:pPr>
+            <a:r>
+              <a:rPr lang="en-US" sz="900" dirty="0">
+                <a:solidFill>
+                  <a:srgbClr val="6E6368"/>
+                </a:solidFill>
+                <a:latin typeface="Calibri" pitchFamily="34" charset="0"/>
+                <a:ea typeface="Calibri" pitchFamily="34" charset="-122"/>
+                <a:cs typeface="Calibri" pitchFamily="34" charset="-120"/>
+              </a:rPr>
+              <a:t>原価・人件費の圧縮ではなく、店の価値を高めて伸ばす</a:t>
+            </a:r>
+            <a:endParaRPr lang="en-US" sz="900" dirty="0"/>
+          </a:p>
+        </p:txBody>
+      </p:sp>
+      <p:sp>
+        <p:nvSpPr>
+          <p:cNvPr id="37" name="Shape 34"/>
+          <p:cNvSpPr/>
+          <p:nvPr/>
+        </p:nvSpPr>
+        <p:spPr>
+          <a:xfrm>
+            <a:off x="566928" y="5577840"/>
+            <a:ext cx="11055096" cy="731520"/>
+          </a:xfrm>
+          <a:prstGeom prst="roundRect">
+            <a:avLst>
+              <a:gd name="adj" fmla="val 5000"/>
+            </a:avLst>
+          </a:prstGeom>
+          <a:solidFill>
+            <a:srgbClr val="6D2E46"/>
+          </a:solidFill>
+          <a:ln/>
+        </p:spPr>
+      </p:sp>
+      <p:sp>
+        <p:nvSpPr>
+          <p:cNvPr id="38" name="Text 35"/>
+          <p:cNvSpPr txBox="1"/>
+          <p:nvPr/>
+        </p:nvSpPr>
+        <p:spPr>
+          <a:xfrm>
+            <a:off x="822960" y="5650992"/>
+            <a:ext cx="10543032" cy="585216"/>
+          </a:xfrm>
+          <a:prstGeom prst="rect">
+            <a:avLst/>
+          </a:prstGeom>
+          <a:noFill/>
+          <a:ln/>
+        </p:spPr>
+        <p:txBody>
+          <a:bodyPr wrap="square" lIns="0" tIns="0" rIns="0" bIns="0" rtlCol="0" anchor="ctr"/>
+          <a:lstStyle/>
+          <a:p>
+            <a:pPr indent="0" marL="0">
+              <a:lnSpc>
+                <a:spcPts val="1700"/>
+              </a:lnSpc>
+              <a:buNone/>
+            </a:pPr>
+            <a:r>
+              <a:rPr lang="en-US" sz="1250" b="1" dirty="0">
+                <a:solidFill>
+                  <a:srgbClr val="FFFFFF"/>
+                </a:solidFill>
+              </a:rPr>
+              <a:t>買収後の実行力は、実績で裏付けられています。
+</a:t>
+            </a:r>
+            <a:pPr indent="0" marL="0">
+              <a:lnSpc>
+                <a:spcPts val="1700"/>
+              </a:lnSpc>
+              <a:buNone/>
+            </a:pPr>
+            <a:r>
+              <a:rPr lang="en-US" sz="1050" dirty="0">
+                <a:solidFill>
+                  <a:srgbClr val="EBDCE1"/>
+                </a:solidFill>
+              </a:rPr>
+              <a:t>39年間赤字が続いたグランメゾンを取得し、幹部を一人も欠くことなく、2年間で営業利益を250%超伸ばしました。対象会社は既に高収益であり、必要なのは再建ではなく承継ですが、買収後の運営を担う体制は既に実証されています。</a:t>
+            </a:r>
+            <a:endParaRPr lang="en-US" sz="1250" dirty="0"/>
+          </a:p>
+        </p:txBody>
+      </p:sp>
+      <p:sp>
+        <p:nvSpPr>
+          <p:cNvPr id="39" name="Text 36"/>
+          <p:cNvSpPr txBox="1"/>
+          <p:nvPr/>
+        </p:nvSpPr>
+        <p:spPr>
+          <a:xfrm>
+            <a:off x="566928" y="6419088"/>
+            <a:ext cx="8686800" cy="228600"/>
+          </a:xfrm>
+          <a:prstGeom prst="rect">
+            <a:avLst/>
+          </a:prstGeom>
+          <a:noFill/>
+          <a:ln/>
+        </p:spPr>
+        <p:txBody>
+          <a:bodyPr wrap="square" lIns="0" tIns="0" rIns="0" bIns="0" rtlCol="0" anchor="ctr"/>
+          <a:lstStyle/>
+          <a:p>
+            <a:pPr indent="0" marL="0">
+              <a:buNone/>
+            </a:pPr>
+            <a:r>
+              <a:rPr lang="en-US" sz="800" dirty="0">
+                <a:solidFill>
+                  <a:srgbClr val="6E6368"/>
+                </a:solidFill>
+                <a:latin typeface="Calibri" pitchFamily="34" charset="0"/>
+                <a:ea typeface="Calibri" pitchFamily="34" charset="-122"/>
+                <a:cs typeface="Calibri" pitchFamily="34" charset="-120"/>
+              </a:rPr>
+              <a:t>カンテサンス（株式会社プティ・ボノム）株式譲渡価格50億円の妥当性検証 ／ 銀行ご提出用</a:t>
+            </a:r>
+            <a:endParaRPr lang="en-US" sz="800" dirty="0"/>
+          </a:p>
+        </p:txBody>
+      </p:sp>
+      <p:sp>
+        <p:nvSpPr>
+          <p:cNvPr id="40" name="Text 37"/>
+          <p:cNvSpPr txBox="1"/>
+          <p:nvPr/>
+        </p:nvSpPr>
+        <p:spPr>
+          <a:xfrm>
+            <a:off x="10799064" y="6419088"/>
+            <a:ext cx="822960" cy="228600"/>
+          </a:xfrm>
+          <a:prstGeom prst="rect">
+            <a:avLst/>
+          </a:prstGeom>
+          <a:noFill/>
+          <a:ln/>
+        </p:spPr>
+        <p:txBody>
+          <a:bodyPr wrap="square" lIns="0" tIns="0" rIns="0" bIns="0" rtlCol="0" anchor="ctr"/>
+          <a:lstStyle/>
+          <a:p>
+            <a:pPr algn="r" indent="0" marL="0">
+              <a:buNone/>
+            </a:pPr>
+            <a:r>
+              <a:rPr lang="en-US" sz="900" dirty="0">
+                <a:solidFill>
+                  <a:srgbClr val="6E6368"/>
+                </a:solidFill>
+                <a:latin typeface="Calibri" pitchFamily="34" charset="0"/>
+                <a:ea typeface="Calibri" pitchFamily="34" charset="-122"/>
+                <a:cs typeface="Calibri" pitchFamily="34" charset="-120"/>
+              </a:rPr>
+              <a:t>18</a:t>
+            </a:r>
+            <a:endParaRPr lang="en-US" sz="900" dirty="0"/>
+          </a:p>
+        </p:txBody>
+      </p:sp>
+    </p:spTree>
+  </p:cSld>
+  <p:clrMapOvr>
+    <a:masterClrMapping/>
+  </p:clrMapOvr>
+</p:sld>
+</file>
+
+<file path=ppt/slides/slide19.xml><?xml version="1.0" encoding="utf-8"?>
+<p:sld xmlns:a="http://schemas.openxmlformats.org/drawingml/2006/main" xmlns:r="http://schemas.openxmlformats.org/officeDocument/2006/relationships" xmlns:p="http://schemas.openxmlformats.org/presentationml/2006/main">
+  <p:cSld name="Slide 19">
     <p:bg>
       <p:bgPr>
         <a:solidFill>
@@ -26050,7 +28549,25 @@
                 <a:ea typeface="Calibri" pitchFamily="34" charset="-122"/>
                 <a:cs typeface="Calibri" pitchFamily="34" charset="-120"/>
               </a:rPr>
-              <a:t>・本資料は取得主体を特定せず、対象会社の事業価値および提示価格の妥当性を検証したもの。買収ストラクチャーおよびエクイティの調達計画は別途。</a:t>
+              <a:t>・本資料は対象会社の事業価値および提示価格の妥当性を検証したもの。買収ストラクチャーおよびエクイティの調達計画は別途。
+</a:t>
+            </a:r>
+            <a:pPr indent="0" marL="0">
+              <a:lnSpc>
+                <a:spcPts val="1250"/>
+              </a:lnSpc>
+              <a:buNone/>
+            </a:pPr>
+            <a:r>
+              <a:rPr lang="en-US" sz="860" dirty="0">
+                <a:solidFill>
+                  <a:srgbClr val="B4A0A6"/>
+                </a:solidFill>
+                <a:latin typeface="Calibri" pitchFamily="34" charset="0"/>
+                <a:ea typeface="Calibri" pitchFamily="34" charset="-122"/>
+                <a:cs typeface="Calibri" pitchFamily="34" charset="-120"/>
+              </a:rPr>
+              <a:t>・p.18の株式会社アピシウスに関する計数は、同社の取得時（2024年6月）と2026年時点との比較。売上高・営業利益はいずれも取得前比。</a:t>
             </a:r>
             <a:endParaRPr lang="en-US" sz="860" dirty="0"/>
           </a:p>
@@ -26128,7 +28645,7 @@
                 <a:ea typeface="Calibri" pitchFamily="34" charset="-122"/>
                 <a:cs typeface="Calibri" pitchFamily="34" charset="-120"/>
               </a:rPr>
-              <a:t>18</a:t>
+              <a:t>19</a:t>
             </a:r>
             <a:endParaRPr lang="en-US" sz="900" dirty="0"/>
           </a:p>
@@ -28395,8 +30912,8 @@
         </p:nvSpPr>
         <p:spPr>
           <a:xfrm>
-            <a:off x="566928" y="5806440"/>
-            <a:ext cx="11055096" cy="274320"/>
+            <a:off x="566928" y="5760720"/>
+            <a:ext cx="11055096" cy="457200"/>
           </a:xfrm>
           <a:prstGeom prst="rect">
             <a:avLst/>
@@ -28409,6 +30926,9 @@
           <a:lstStyle/>
           <a:p>
             <a:pPr indent="0" marL="0">
+              <a:lnSpc>
+                <a:spcPts val="1500"/>
+              </a:lnSpc>
               <a:buNone/>
             </a:pPr>
             <a:r>
@@ -28421,6 +30941,26 @@
                 <a:cs typeface="Calibri" pitchFamily="34" charset="-120"/>
               </a:rPr>
               <a:t>すべての検証は 2026年12月期（IM記載の会社計画）ベース。2025年12月期実績ベースの数値とは異なる。</a:t>
+            </a:r>
+            <a:endParaRPr lang="en-US" sz="1000" dirty="0"/>
+          </a:p>
+          <a:p>
+            <a:pPr indent="0" marL="0">
+              <a:lnSpc>
+                <a:spcPts val="1500"/>
+              </a:lnSpc>
+              <a:buNone/>
+            </a:pPr>
+            <a:r>
+              <a:rPr lang="en-US" sz="1000" dirty="0">
+                <a:solidFill>
+                  <a:srgbClr val="6E6368"/>
+                </a:solidFill>
+                <a:latin typeface="Calibri" pitchFamily="34" charset="0"/>
+                <a:ea typeface="Calibri" pitchFamily="34" charset="-122"/>
+                <a:cs typeface="Calibri" pitchFamily="34" charset="-120"/>
+              </a:rPr>
+              <a:t>参考　p.18　グランメゾンのM&amp;A後バリューアップ実績（株式会社アピシウス／2024年6月取得）</a:t>
             </a:r>
             <a:endParaRPr lang="en-US" sz="1000" dirty="0"/>
           </a:p>
